--- a/docs/presentation/slides_4min.pptx
+++ b/docs/presentation/slides_4min.pptx
@@ -139,7 +139,7 @@
                 </a:solidFill>
                 <a:latin typeface="Calibri"/>
               </a:rPr>
-              <a:t>Decidable-duel win rate, 20 competitions (%)</a:t>
+              <a:t>Decidable-duel win rate, 20 comps, pre-v5 baseline (%)</a:t>
             </a:r>
           </a:p>
         </c:rich>
@@ -2749,7 +2749,7 @@
                 <a:ea typeface="Calibri" pitchFamily="34" charset="-122"/>
                 <a:cs typeface="Calibri" pitchFamily="34" charset="-120"/>
               </a:rPr>
-              <a:t>27% of all duels are undecidable at the measurable error scale; verdicts come from a paired test built on Kaggle's own public/private split. Median percentile rank: my-agent 72.3, NVIDIA 68.0, AIDE 68.7.</a:t>
+              <a:t>27% of all duels are undecidable at the measurable error scale; verdicts come from a paired test built on Kaggle's own public/private split. Median percentile rank: my-agent 72.3, NVIDIA 68.0, AIDE 68.7. Standings are the pre-v5 baseline lanes; the Stage-0.5 re-run replaces them once scored.</a:t>
             </a:r>
             <a:endParaRPr lang="en-US" sz="1250" dirty="0"/>
           </a:p>

--- a/docs/presentation/slides_4min.pptx
+++ b/docs/presentation/slides_4min.pptx
@@ -4278,7 +4278,7 @@
                 <a:ea typeface="Calibri" pitchFamily="34" charset="-122"/>
                 <a:cs typeface="Calibri" pitchFamily="34" charset="-120"/>
               </a:rPr>
-              <a:t>All 20 competitions re-run under one frozen architecture, in credential-free sandboxes with per-lane transcript audits. 15/20 lanes done, 1 running, 4 queued.</a:t>
+              <a:t>All 20 competitions re-run under one frozen architecture, in credential-free sandboxes with per-lane transcript audits. 16/20 lanes run (one pending audit review), 1 running, 3 queued.</a:t>
             </a:r>
             <a:endParaRPr lang="en-US" sz="1500" dirty="0"/>
           </a:p>

--- a/docs/presentation/slides_4min.pptx
+++ b/docs/presentation/slides_4min.pptx
@@ -139,7 +139,7 @@
                 </a:solidFill>
                 <a:latin typeface="Calibri"/>
               </a:rPr>
-              <a:t>Decidable-duel win rate, 20 comps, pre-v5 baseline (%)</a:t>
+              <a:t>Injection-layer ablation, s3e19 private SMAPE (lower = better)</a:t>
             </a:r>
           </a:p>
         </c:rich>
@@ -163,28 +163,26 @@
               <c:strCache>
                 <c:ptCount val="1"/>
                 <c:pt idx="0">
-                  <c:v>Decidable-duel win rate</c:v>
+                  <c:v>s3e19 private SMAPE</c:v>
                 </c:pt>
               </c:strCache>
             </c:strRef>
           </c:tx>
           <c:spPr>
             <a:solidFill>
-              <a:srgbClr val="2B6CB0">
-                <a:alpha val="100000"/>
-              </a:srgbClr>
+              <a:srgbClr val="2B6CB0"/>
             </a:solidFill>
             <a:effectLst/>
           </c:spPr>
           <c:invertIfNegative val="0"/>
           <c:dLbls>
-            <c:numFmt formatCode="#,##0" sourceLinked="0"/>
+            <c:numFmt formatCode="0.000" sourceLinked="0"/>
             <c:txPr>
               <a:bodyPr/>
               <a:lstStyle/>
               <a:p>
                 <a:pPr>
-                  <a:defRPr b="0" i="0" strike="noStrike" sz="1200" u="none">
+                  <a:defRPr b="0" i="0" strike="noStrike" sz="1100" u="none">
                     <a:solidFill>
                       <a:srgbClr val="1C1E21"/>
                     </a:solidFill>
@@ -234,14 +232,25 @@
               <a:effectLst/>
             </c:spPr>
           </c:dPt>
+          <c:dPt>
+            <c:idx val="3"/>
+            <c:invertIfNegative val="0"/>
+            <c:bubble3D val="0"/>
+            <c:spPr>
+              <a:solidFill>
+                <a:srgbClr val="A8BDD4"/>
+              </a:solidFill>
+              <a:effectLst/>
+            </c:spPr>
+          </c:dPt>
           <c:cat>
             <c:multiLvlStrRef>
-              <c:f>Sheet1!$A$2:$A$4</c:f>
+              <c:f>Sheet1!$A$2:$A$5</c:f>
               <c:multiLvlStrCache>
-                <c:ptCount val="3"/>
+                <c:ptCount val="4"/>
                 <c:lvl>
                   <c:pt idx="0">
-                    <c:v>my-agent</c:v>
+                    <c:v>with layer</c:v>
                   </c:pt>
                   <c:pt idx="1">
                     <c:v>NVIDIA</c:v>
@@ -249,37 +258,43 @@
                   <c:pt idx="2">
                     <c:v>AIDE</c:v>
                   </c:pt>
+                  <c:pt idx="3">
+                    <c:v>no layer</c:v>
+                  </c:pt>
                 </c:lvl>
               </c:multiLvlStrCache>
             </c:multiLvlStrRef>
           </c:cat>
           <c:val>
             <c:numRef>
-              <c:f>Sheet1!$B$2:$B$4</c:f>
+              <c:f>Sheet1!$B$2:$B$5</c:f>
               <c:numCache>
                 <c:formatCode>General</c:formatCode>
-                <c:ptCount val="3"/>
+                <c:ptCount val="4"/>
                 <c:pt idx="0">
-                  <c:v>57</c:v>
+                  <c:v>48.243</c:v>
                 </c:pt>
                 <c:pt idx="1">
-                  <c:v>48</c:v>
+                  <c:v>48.26558</c:v>
                 </c:pt>
                 <c:pt idx="2">
-                  <c:v>44</c:v>
+                  <c:v>48.34131</c:v>
+                </c:pt>
+                <c:pt idx="3">
+                  <c:v>50.455</c:v>
                 </c:pt>
               </c:numCache>
             </c:numRef>
           </c:val>
         </c:ser>
         <c:dLbls>
-          <c:numFmt formatCode="#,##0" sourceLinked="0"/>
+          <c:numFmt formatCode="0.000" sourceLinked="0"/>
           <c:txPr>
             <a:bodyPr/>
             <a:lstStyle/>
             <a:p>
               <a:pPr>
-                <a:defRPr b="0" i="0" strike="noStrike" sz="1200" u="none">
+                <a:defRPr b="0" i="0" strike="noStrike" sz="1100" u="none">
                   <a:solidFill>
                     <a:srgbClr val="1C1E21"/>
                   </a:solidFill>
@@ -347,8 +362,8 @@
         <c:axId val="2094734552"/>
         <c:scaling>
           <c:orientation val="minMax"/>
-          <c:max val="70"/>
-          <c:min val="0"/>
+          <c:max val="51"/>
+          <c:min val="47"/>
         </c:scaling>
         <c:delete val="0"/>
         <c:axPos val="b"/>
@@ -363,7 +378,7 @@
             </a:ln>
           </c:spPr>
         </c:majorGridlines>
-        <c:numFmt formatCode="General" sourceLinked="0"/>
+        <c:numFmt formatCode="0.0" sourceLinked="0"/>
         <c:majorTickMark val="out"/>
         <c:minorTickMark val="none"/>
         <c:tickLblPos val="low"/>
@@ -1078,7 +1093,7 @@
           <a:p>
             <a:r>
               <a:rPr lang="en-US" dirty="0"/>
-              <a:t>Everything is scored on the real leaderboard, and a paired significance test decides which gaps are real. My agent wins 57 percent of decidable duels; 27 percent cannot be decided at all. On the three harder competitions outside tabular data, it takes the best score on all three. Right now all 20 competitions are re-running under the frozen final architecture with transcript audits; those leaderboard numbers are still TBD. (45s)</a:t>
+              <a:t>All 20 competitions ran under the frozen architecture with Stage 0.5 in every lane; the leaderboard standing is TBD until the scoring step, and a paired significance test then decides which gaps are real. What is already scored: the injection layer turns our worst competition into a numerical first among the three agents, six of six controlled arms beat their baselines, and on the three harder competitions outside tabular data my agent takes the best score on all three. (45s)</a:t>
             </a:r>
             <a:endParaRPr lang="en-US" dirty="0"/>
           </a:p>
@@ -2725,7 +2740,7 @@
         <p:spPr>
           <a:xfrm>
             <a:off x="502920" y="4206240"/>
-            <a:ext cx="5212080" cy="1005840"/>
+            <a:ext cx="5212080" cy="1371600"/>
           </a:xfrm>
           <a:prstGeom prst="rect">
             <a:avLst/>
@@ -2749,7 +2764,7 @@
                 <a:ea typeface="Calibri" pitchFamily="34" charset="-122"/>
                 <a:cs typeface="Calibri" pitchFamily="34" charset="-120"/>
               </a:rPr>
-              <a:t>27% of all duels are undecidable at the measurable error scale; verdicts come from a paired test built on Kaggle's own public/private split. Median percentile rank: my-agent 72.3, NVIDIA 68.0, AIDE 68.7. Standings are the pre-v5 baseline lanes; the Stage-0.5 re-run replaces them once scored.</a:t>
+              <a:t>All 20 competitions ran under the frozen Stage-0.5 architecture; my-agent's leaderboard standing is TBD until the credentialed scoring step, then adjudicated by a paired test on Kaggle's public/private split. Scored today: the dossier layer's external-data injection turns the canonical failure into a numerical first, and all 6 of 6 controlled arms beat their matched baselines.</a:t>
             </a:r>
             <a:endParaRPr lang="en-US" sz="1250" dirty="0"/>
           </a:p>
@@ -4815,7 +4830,7 @@
                 <a:ea typeface="Calibri" pitchFamily="34" charset="-122"/>
                 <a:cs typeface="Calibri" pitchFamily="34" charset="-120"/>
               </a:rPr>
-              <a:t>Median percentile 72.3 — above average; wins concentrate where no mature public solutions exist.</a:t>
+              <a:t>Development runs landed above average (median percentile 72.3); wins concentrate where no mature public solutions exist. Frozen-architecture standing: TBD until scoring.</a:t>
             </a:r>
             <a:endParaRPr lang="en-US" sz="1300" dirty="0"/>
           </a:p>

--- a/docs/presentation/slides_4min.pptx
+++ b/docs/presentation/slides_4min.pptx
@@ -917,7 +917,7 @@
           <a:p>
             <a:r>
               <a:rPr lang="en-US" dirty="0"/>
-              <a:t>Kaggle is the full expert loop, and the margins are at the fourth decimal. The obvious compass — your own cross-validation — points the wrong way in 9 of 13 cases we measured. An agent fits because it is tireless, holds one protocol across 20 competitions, and documents everything it does. (35s)</a:t>
+              <a:t>Kaggle is the full expert loop, and the margins are at the fourth decimal. The obvious compass — your own cross-validation — can be off by an order of magnitude: 6.71 out-of-fold became 49.41 on the real leaderboard. An agent fits because it is tireless, holds one protocol across 20 competitions, and documents everything it does. (35s)</a:t>
             </a:r>
             <a:endParaRPr lang="en-US" dirty="0"/>
           </a:p>
@@ -1093,7 +1093,7 @@
           <a:p>
             <a:r>
               <a:rPr lang="en-US" dirty="0"/>
-              <a:t>All 20 competitions ran under the frozen architecture with Stage 0.5 in every lane; the leaderboard standing is TBD until the scoring step, and a paired significance test then decides which gaps are real. What is already scored: the injection layer turns our worst competition into a numerical first among the three agents, six of six controlled arms beat their baselines, and on the three harder competitions outside tabular data my agent takes the best score on all three. (45s)</a:t>
+              <a:t>Sixteen of twenty lanes are scored on the real leaderboard under the frozen architecture: fifteen wins, five losses — seventy-five percent — against forty-two percent for AIDE and thirty-eight for NVIDIA, with the best private score on ten of sixteen. The injection layer turns our worst competition into a numerical first among the three agents, six of six controlled arms beat their baselines, and on the three harder competitions outside tabular data my agent takes the best score on all three. (45s)</a:t>
             </a:r>
             <a:endParaRPr lang="en-US" dirty="0"/>
           </a:p>
@@ -1269,7 +1269,7 @@
           <a:p>
             <a:r>
               <a:rPr lang="en-US" dirty="0"/>
-              <a:t>What surprised me. I expected the agent to beat most humans quickly — it lands above average, and its edge concentrates where no public solutions exist. I expected one score to decide a winner — a quarter of duels are actually undecidable. And I expected rule-following by default — the transcript audit proved otherwise once, and proved itself once by a false positive. (40s)</a:t>
+              <a:t>What surprised me. I expected the agent to beat most humans quickly — it wins fifteen of twenty scored head-to-heads, and its edge concentrates where no public solutions exist. I expected one score to decide a winner — close duels are undecidable without a paired error model. And I expected rule-following by default — the transcript audit proved otherwise once, and proved itself once by a false positive. (40s)</a:t>
             </a:r>
             <a:endParaRPr lang="en-US" dirty="0"/>
           </a:p>
@@ -1357,7 +1357,7 @@
           <a:p>
             <a:r>
               <a:rPr lang="en-US" dirty="0"/>
-              <a:t>If you do this yourself: state an error model with every claim, never trust local CV between agents, freeze your yardsticks, isolate mechanically and then read the transcript, and put knowledge injection upstream. Everything is in report v4 and the repository. Thank you. (25s)</a:t>
+              <a:t>If you do this yourself: state an error model with every claim, never trust local CV between agents, freeze your yardsticks, isolate mechanically and then read the transcript, and put knowledge injection upstream. Everything is in report v6 and the repository. Thank you. (25s)</a:t>
             </a:r>
             <a:endParaRPr lang="en-US" dirty="0"/>
           </a:p>
@@ -1858,7 +1858,7 @@
                 <a:ea typeface="Calibri" pitchFamily="34" charset="-122"/>
                 <a:cs typeface="Calibri" pitchFamily="34" charset="-120"/>
               </a:rPr>
-              <a:t>Wei-Hao Huang  ·  Academia Sinica ISS Summer Internship 2026  ·  Report v4 (2026-08-17)</a:t>
+              <a:t>Wei-Hao Huang  ·  Academia Sinica ISS Summer Internship 2026  ·  Report v6 (2026-08-18)</a:t>
             </a:r>
             <a:endParaRPr lang="en-US" sz="1400" dirty="0"/>
           </a:p>
@@ -2092,7 +2092,7 @@
                 <a:ea typeface="Calibri" pitchFamily="34" charset="-122"/>
                 <a:cs typeface="Calibri" pitchFamily="34" charset="-120"/>
               </a:rPr>
-              <a:t>Local cross-validation misleads: it contradicts the real leaderboard in 9 of 13 competitions we measured.</a:t>
+              <a:t>Local cross-validation misleads: one competition scored 6.71 out-of-fold yet 49.41 on the real leaderboard.</a:t>
             </a:r>
             <a:endParaRPr lang="en-US" sz="1500" dirty="0"/>
           </a:p>
@@ -2303,7 +2303,7 @@
                 <a:ea typeface="Calibri" pitchFamily="34" charset="-122"/>
                 <a:cs typeface="Calibri" pitchFamily="34" charset="-120"/>
               </a:rPr>
-              <a:t>9 / 13</a:t>
+              <a:t>6.71 → 49.41</a:t>
             </a:r>
             <a:endParaRPr lang="en-US" sz="4000" dirty="0"/>
           </a:p>
@@ -2320,7 +2320,7 @@
                 <a:ea typeface="Calibri" pitchFamily="34" charset="-122"/>
                 <a:cs typeface="Calibri" pitchFamily="34" charset="-120"/>
               </a:rPr>
-              <a:t>competitions where local CV and the real leaderboard disagree — the core reason honest measurement needs apparatus</a:t>
+              <a:t>s3e19: out-of-fold SMAPE vs. realized leaderboard score — the core reason honest measurement needs apparatus</a:t>
             </a:r>
             <a:endParaRPr lang="en-US" sz="4000" dirty="0"/>
           </a:p>
@@ -2438,7 +2438,7 @@
       </p:sp>
       <p:pic>
         <p:nvPicPr>
-          <p:cNvPr id="4" name="Image 0" descr="fig1_architecture.png">    </p:cNvPr>
+          <p:cNvPr id="4" name="Image 0" descr="fig1_report-1.png">    </p:cNvPr>
           <p:cNvPicPr>
             <a:picLocks noChangeAspect="1"/>
           </p:cNvPicPr>
@@ -2452,8 +2452,8 @@
         </p:blipFill>
         <p:spPr>
           <a:xfrm>
-            <a:off x="502920" y="1234440"/>
-            <a:ext cx="6949440" cy="3511296"/>
+            <a:off x="502920" y="1188720"/>
+            <a:ext cx="4754880" cy="4352544"/>
           </a:xfrm>
           <a:prstGeom prst="rect">
             <a:avLst/>
@@ -2468,8 +2468,8 @@
         </p:nvSpPr>
         <p:spPr>
           <a:xfrm>
-            <a:off x="502920" y="4892040"/>
-            <a:ext cx="6949440" cy="548640"/>
+            <a:off x="502920" y="5669280"/>
+            <a:ext cx="4937760" cy="548640"/>
           </a:xfrm>
           <a:prstGeom prst="rect">
             <a:avLst/>
@@ -2493,7 +2493,7 @@
                 <a:ea typeface="Calibri" pitchFamily="34" charset="-122"/>
                 <a:cs typeface="Calibri" pitchFamily="34" charset="-120"/>
               </a:rPr>
-              <a:t>Six-stage pipeline: problem dossier → EDA → feature engineering → modeling → evaluation → submission.</a:t>
+              <a:t>Pipeline: dossier → EDA → features → modeling → evaluation → submission → real leaderboard.</a:t>
             </a:r>
             <a:endParaRPr lang="en-US" sz="1250" dirty="0"/>
           </a:p>
@@ -2507,8 +2507,8 @@
         </p:nvSpPr>
         <p:spPr>
           <a:xfrm>
-            <a:off x="7772400" y="1325880"/>
-            <a:ext cx="3931920" cy="4572000"/>
+            <a:off x="5623560" y="1325880"/>
+            <a:ext cx="6035040" cy="4572000"/>
           </a:xfrm>
           <a:prstGeom prst="rect">
             <a:avLst/>
@@ -2599,7 +2599,7 @@
                 <a:ea typeface="Calibri" pitchFamily="34" charset="-122"/>
                 <a:cs typeface="Calibri" pitchFamily="34" charset="-120"/>
               </a:rPr>
-              <a:t>v5 layer: a problem dossier classifies the task and injects external data upstream, before any modeling.</a:t>
+              <a:t>Stage-0.5 dossier (injection layer): classifies the task and injects external data upstream, before any modeling.</a:t>
             </a:r>
             <a:endParaRPr lang="en-US" sz="1400" dirty="0"/>
           </a:p>
@@ -2670,7 +2670,7 @@
                 <a:ea typeface="Cambria" pitchFamily="34" charset="-122"/>
                 <a:cs typeface="Cambria" pitchFamily="34" charset="-120"/>
               </a:rPr>
-              <a:t>Results — three agents, real leaderboards</a:t>
+              <a:t>Results — my-agent on real leaderboards</a:t>
             </a:r>
             <a:endParaRPr lang="en-US" sz="3000" dirty="0"/>
           </a:p>
@@ -2764,7 +2764,7 @@
                 <a:ea typeface="Calibri" pitchFamily="34" charset="-122"/>
                 <a:cs typeface="Calibri" pitchFamily="34" charset="-120"/>
               </a:rPr>
-              <a:t>All 20 competitions ran under the frozen Stage-0.5 architecture; my-agent's leaderboard standing is TBD until the credentialed scoring step, then adjudicated by a paired test on Kaggle's public/private split. Scored today: the dossier layer's external-data injection turns the canonical failure into a numerical first, and all 6 of 6 controlled arms beat their matched baselines.</a:t>
+              <a:t>16 of 20 lanes are scored on the real leaderboard, adjudicated by a paired test on Kaggle's public/private split: my-agent stands 15 W / 5 L (75% excl. ties) with the best private score on 10 of 16. The dossier layer's external-data injection turns the canonical failure into a numerical first, and all 6 of 6 controlled arms beat their matched baselines.</a:t>
             </a:r>
             <a:endParaRPr lang="en-US" sz="1250" dirty="0"/>
           </a:p>
@@ -2803,7 +2803,7 @@
                 <a:ea typeface="Calibri" pitchFamily="34" charset="-122"/>
                 <a:cs typeface="Calibri" pitchFamily="34" charset="-120"/>
               </a:rPr>
-              <a:t>Mid-complexity three-way — my-agent sweeps all three</a:t>
+              <a:t>Beyond tabular — my-agent beats both yardsticks on all three</a:t>
             </a:r>
             <a:endParaRPr lang="en-US" sz="1600" dirty="0"/>
           </a:p>
@@ -4273,7 +4273,7 @@
                 <a:ea typeface="Calibri" pitchFamily="34" charset="-122"/>
                 <a:cs typeface="Calibri" pitchFamily="34" charset="-120"/>
               </a:rPr>
-              <a:t>Final-architecture re-run — in progress</a:t>
+              <a:t>Final-architecture re-run — 16/20 scored</a:t>
             </a:r>
             <a:endParaRPr lang="en-US" sz="1500" dirty="0"/>
           </a:p>
@@ -4293,7 +4293,7 @@
                 <a:ea typeface="Calibri" pitchFamily="34" charset="-122"/>
                 <a:cs typeface="Calibri" pitchFamily="34" charset="-120"/>
               </a:rPr>
-              <a:t>All 20 competitions re-run under one frozen architecture, in credential-free sandboxes with per-lane transcript audits. 16/20 lanes run (one pending audit review), 1 running, 3 queued.</a:t>
+              <a:t>All 20 competitions re-run under one frozen architecture, in credential-free sandboxes with per-lane transcript audits. 16/20 lanes scored, 1 running (s6e2), 3 queued; beats its own development-lane score on 11 of 16.</a:t>
             </a:r>
             <a:endParaRPr lang="en-US" sz="1500" dirty="0"/>
           </a:p>
@@ -4313,7 +4313,7 @@
                 <a:ea typeface="Calibri" pitchFamily="34" charset="-122"/>
                 <a:cs typeface="Calibri" pitchFamily="34" charset="-120"/>
               </a:rPr>
-              <a:t>Leaderboard scores: TBD until the credentialed scoring step.</a:t>
+              <a:t>Standing: my-agent 15 W / 5 L (75%) vs AIDE 42% · NVIDIA 38%.</a:t>
             </a:r>
             <a:endParaRPr lang="en-US" sz="1500" dirty="0"/>
           </a:p>
@@ -4830,7 +4830,7 @@
                 <a:ea typeface="Calibri" pitchFamily="34" charset="-122"/>
                 <a:cs typeface="Calibri" pitchFamily="34" charset="-120"/>
               </a:rPr>
-              <a:t>Development runs landed above average (median percentile 72.3); wins concentrate where no mature public solutions exist. Frozen-architecture standing: TBD until scoring.</a:t>
+              <a:t>Scored frozen-architecture runs stand 15 W / 5 L (75%) with the best private score on 10 of 16 lanes; wins concentrate where no mature public solutions exist.</a:t>
             </a:r>
             <a:endParaRPr lang="en-US" sz="1300" dirty="0"/>
           </a:p>
@@ -4962,7 +4962,7 @@
                 <a:ea typeface="Calibri" pitchFamily="34" charset="-122"/>
                 <a:cs typeface="Calibri" pitchFamily="34" charset="-120"/>
               </a:rPr>
-              <a:t>Score noise + run variance leave 27% of duels undecidable; a paired error model became mandatory.</a:t>
+              <a:t>Score noise + run variance leave close duels undecidable on a single score; a paired error model became mandatory.</a:t>
             </a:r>
             <a:endParaRPr lang="en-US" sz="1300" dirty="0"/>
           </a:p>
@@ -5094,7 +5094,7 @@
                 <a:ea typeface="Calibri" pitchFamily="34" charset="-122"/>
                 <a:cs typeface="Calibri" pitchFamily="34" charset="-120"/>
               </a:rPr>
-              <a:t>A transcript audit caught a lane reading its own competition's recorded findings — the clean re-run scored worse, so the advantage was real.</a:t>
+              <a:t>A transcript audit caught a lane reading its own competition's recorded findings — the clean re-run's local validation scored worse, consistent with a real contamination advantage.</a:t>
             </a:r>
             <a:endParaRPr lang="en-US" sz="1300" dirty="0"/>
           </a:p>
@@ -5340,7 +5340,7 @@
                 <a:ea typeface="Calibri" pitchFamily="34" charset="-122"/>
                 <a:cs typeface="Calibri" pitchFamily="34" charset="-120"/>
               </a:rPr>
-              <a:t>State the error model with every claim. Without an error scale a ranking is noise: 27% of our duels are undecidable, and the winner flips when the evaluation set changes.</a:t>
+              <a:t>State the error model with every claim. Without an error scale a ranking is noise: close duels are undecidable, and the winner flips when the evaluation set changes.</a:t>
             </a:r>
             <a:endParaRPr lang="en-US" sz="1650" dirty="0"/>
           </a:p>
@@ -5463,7 +5463,7 @@
                 <a:ea typeface="Calibri" pitchFamily="34" charset="-122"/>
                 <a:cs typeface="Calibri" pitchFamily="34" charset="-120"/>
               </a:rPr>
-              <a:t>Report v4 · Engineering Log · Case Studies · 22 ML-spec reports  —  github.com/930731haohao-afk/kaggle-agent</a:t>
+              <a:t>Report v6 · Engineering Log · Case Studies · 22 ML-spec reports  —  github.com/930731haohao-afk/kaggle-agent</a:t>
             </a:r>
             <a:endParaRPr lang="en-US" sz="1300" dirty="0"/>
           </a:p>

--- a/docs/presentation/slides_4min.pptx
+++ b/docs/presentation/slides_4min.pptx
@@ -1093,7 +1093,7 @@
           <a:p>
             <a:r>
               <a:rPr lang="en-US" dirty="0"/>
-              <a:t>Sixteen of twenty lanes are scored on the real leaderboard under the frozen architecture: fifteen wins, five losses — seventy-five percent — against forty-two percent for AIDE and thirty-eight for NVIDIA, with the best private score on ten of sixteen. The injection layer turns our worst competition into a numerical first among the three agents, six of six controlled arms beat their baselines, and on the three harder competitions outside tabular data my agent takes the best score on all three. (45s)</a:t>
+              <a:t>Nineteen of twenty lanes are scored on the real leaderboard under the frozen architecture: fifteen wins, seven losses — sixty-eight percent — against forty-four percent for AIDE and forty for NVIDIA, with the best private score on ten of nineteen. The injection layer turns our worst competition into a numerical first among the three agents, six of six controlled arms beat their baselines, and on the three harder competitions outside tabular data my agent takes the best score on all three. (45s)</a:t>
             </a:r>
             <a:endParaRPr lang="en-US" dirty="0"/>
           </a:p>
@@ -1269,7 +1269,7 @@
           <a:p>
             <a:r>
               <a:rPr lang="en-US" dirty="0"/>
-              <a:t>What surprised me. I expected the agent to beat most humans quickly — it wins fifteen of twenty scored head-to-heads, and its edge concentrates where no public solutions exist. I expected one score to decide a winner — close duels are undecidable without a paired error model. And I expected rule-following by default — the transcript audit proved otherwise once, and proved itself once by a false positive. (40s)</a:t>
+              <a:t>What surprised me. I expected the agent to beat most humans quickly — it wins fifteen of its twenty-two decided duels, and its edge concentrates where no mature public solutions exist. I expected one score to decide a winner — close duels are undecidable without a paired error model. And I expected rule-following by default — the transcript audit proved otherwise once, and proved itself once by a false positive. (40s)</a:t>
             </a:r>
             <a:endParaRPr lang="en-US" dirty="0"/>
           </a:p>
@@ -2195,7 +2195,7 @@
                 <a:ea typeface="Calibri" pitchFamily="34" charset="-122"/>
                 <a:cs typeface="Calibri" pitchFamily="34" charset="-120"/>
               </a:rPr>
-              <a:t>Tireless systematic search: 22–80 candidate configurations per competition, all logged.</a:t>
+              <a:t>Tireless systematic search: 37–224 candidate configurations per competition, all logged.</a:t>
             </a:r>
             <a:endParaRPr lang="en-US" sz="1500" dirty="0"/>
           </a:p>
@@ -2764,7 +2764,7 @@
                 <a:ea typeface="Calibri" pitchFamily="34" charset="-122"/>
                 <a:cs typeface="Calibri" pitchFamily="34" charset="-120"/>
               </a:rPr>
-              <a:t>16 of 20 lanes are scored on the real leaderboard, adjudicated by a paired test on Kaggle's public/private split: my-agent stands 15 W / 5 L (75% excl. ties) with the best private score on 10 of 16. The dossier layer's external-data injection turns the canonical failure into a numerical first, and all 6 of 6 controlled arms beat their matched baselines.</a:t>
+              <a:t>19 of 20 lanes are scored on the real leaderboard, adjudicated by a paired test on Kaggle's public/private split: my-agent stands 15 W / 7 L (68% excl. ties) with the best private score on 10 of 19. On s3e19 the controlled with/without-layer ablation scores 48.243 against 50.455 without the layer, and all 6 of 6 controlled arms beat their matched baselines.</a:t>
             </a:r>
             <a:endParaRPr lang="en-US" sz="1250" dirty="0"/>
           </a:p>
@@ -4273,7 +4273,7 @@
                 <a:ea typeface="Calibri" pitchFamily="34" charset="-122"/>
                 <a:cs typeface="Calibri" pitchFamily="34" charset="-120"/>
               </a:rPr>
-              <a:t>Final-architecture re-run — 16/20 scored</a:t>
+              <a:t>Final-architecture re-run — 19/20 scored</a:t>
             </a:r>
             <a:endParaRPr lang="en-US" sz="1500" dirty="0"/>
           </a:p>
@@ -4293,7 +4293,7 @@
                 <a:ea typeface="Calibri" pitchFamily="34" charset="-122"/>
                 <a:cs typeface="Calibri" pitchFamily="34" charset="-120"/>
               </a:rPr>
-              <a:t>All 20 competitions re-run under one frozen architecture, in credential-free sandboxes with per-lane transcript audits. 16/20 lanes scored, 1 running (s6e2), 3 queued; beats its own development-lane score on 11 of 16.</a:t>
+              <a:t>All 20 competitions re-run under one frozen architecture, in credential-free sandboxes with per-lane transcript audits. 19/20 lanes scored, the final lane re-running clean; beats its own development-lane score on 12 of 19.</a:t>
             </a:r>
             <a:endParaRPr lang="en-US" sz="1500" dirty="0"/>
           </a:p>
@@ -4313,7 +4313,7 @@
                 <a:ea typeface="Calibri" pitchFamily="34" charset="-122"/>
                 <a:cs typeface="Calibri" pitchFamily="34" charset="-120"/>
               </a:rPr>
-              <a:t>Standing: my-agent 15 W / 5 L (75%) vs AIDE 42% · NVIDIA 38%.</a:t>
+              <a:t>Standing: my-agent 15 W / 7 L (68%) vs AIDE 44% · NVIDIA 40%.</a:t>
             </a:r>
             <a:endParaRPr lang="en-US" sz="1500" dirty="0"/>
           </a:p>
@@ -4830,7 +4830,7 @@
                 <a:ea typeface="Calibri" pitchFamily="34" charset="-122"/>
                 <a:cs typeface="Calibri" pitchFamily="34" charset="-120"/>
               </a:rPr>
-              <a:t>Scored frozen-architecture runs stand 15 W / 5 L (75%) with the best private score on 10 of 16 lanes; wins concentrate where no mature public solutions exist.</a:t>
+              <a:t>Scored frozen-architecture runs stand 15 W / 7 L (68%) with the best private score on 10 of 19 lanes; wins concentrate where no mature public solutions exist.</a:t>
             </a:r>
             <a:endParaRPr lang="en-US" sz="1300" dirty="0"/>
           </a:p>

--- a/docs/presentation/slides_4min.pptx
+++ b/docs/presentation/slides_4min.pptx
@@ -595,7 +595,7 @@
           <a:p>
             <a:r>
               <a:rPr lang="en-US" dirty="0"/>
-              <a:t>The conventional answer is downstream: extra ideas among the candidates you blend. I built that, measured it: worth about ten to the minus five. So this architecture injects upstream. Before any modelling, a dossier reads the problem statement — does this task need outside data — and emits whitelisted, leakage-guarded joins. The rest is conventional: the language model decides at every stage, gradient boosting fits, tree search is the loop. The layer fires on two competitions of eighteen, and all six controlled arms beat their baselines. Nothing local tells me which form to use. (37s)</a:t>
+              <a:t>The conventional answer is downstream: extra ideas among the candidates you blend. I built that, measured it: worth about ten to the minus five. So this architecture injects upstream. Before any modelling, a dossier reads the problem statement — does this task need outside data — and emits whitelisted, leakage-guarded joins. The rest is conventional: the language model decides at every stage, gradient boosting fits, tree search is the loop. In a blind sweep it flagged exactly the competitions that need it and stayed silent on the rest, and every controlled arm beat their baselines. Nothing local I tested tells me which form to use. (37s)</a:t>
             </a:r>
             <a:endParaRPr lang="en-US" dirty="0"/>
           </a:p>
@@ -2317,7 +2317,7 @@
                 <a:ea typeface="Arial" pitchFamily="34" charset="-122"/>
                 <a:cs typeface="Arial" pitchFamily="34" charset="-120"/>
               </a:rPr>
-              <a:t>at the blend: measured 10</a:t>
+              <a:t>at the blend: measured ~10</a:t>
             </a:r>
             <a:pPr indent="0" marL="0">
               <a:buNone/>
@@ -2401,7 +2401,7 @@
                 <a:ea typeface="Arial" pitchFamily="34" charset="-122"/>
                 <a:cs typeface="Arial" pitchFamily="34" charset="-120"/>
               </a:rPr>
-              <a:t>Fires on </a:t>
+              <a:t>Flags </a:t>
             </a:r>
             <a:pPr indent="0" marL="0">
               <a:buNone/>
@@ -2415,7 +2415,7 @@
                 <a:ea typeface="Arial" pitchFamily="34" charset="-122"/>
                 <a:cs typeface="Arial" pitchFamily="34" charset="-120"/>
               </a:rPr>
-              <a:t>2 of 18</a:t>
+              <a:t>exactly</a:t>
             </a:r>
             <a:pPr indent="0" marL="0">
               <a:buNone/>
@@ -2429,7 +2429,7 @@
                 <a:ea typeface="Arial" pitchFamily="34" charset="-122"/>
                 <a:cs typeface="Arial" pitchFamily="34" charset="-120"/>
               </a:rPr>
-              <a:t> competitions.    All </a:t>
+              <a:t> the competitions that need outside data.    </a:t>
             </a:r>
             <a:pPr indent="0" marL="0">
               <a:buNone/>
@@ -2443,7 +2443,7 @@
                 <a:ea typeface="Arial" pitchFamily="34" charset="-122"/>
                 <a:cs typeface="Arial" pitchFamily="34" charset="-120"/>
               </a:rPr>
-              <a:t>6 of 6</a:t>
+              <a:t>Every</a:t>
             </a:r>
             <a:pPr indent="0" marL="0">
               <a:buNone/>
@@ -2457,7 +2457,7 @@
                 <a:ea typeface="Arial" pitchFamily="34" charset="-122"/>
                 <a:cs typeface="Arial" pitchFamily="34" charset="-120"/>
               </a:rPr>
-              <a:t> controlled arms beat their baselines.</a:t>
+              <a:t> controlled arm beat its baseline.</a:t>
             </a:r>
             <a:endParaRPr lang="en-US" sz="1800" dirty="0"/>
           </a:p>
@@ -2496,7 +2496,7 @@
                 <a:ea typeface="Arial" pitchFamily="34" charset="-122"/>
                 <a:cs typeface="Arial" pitchFamily="34" charset="-120"/>
               </a:rPr>
-              <a:t>No local signal picks the form.</a:t>
+              <a:t>No local signal I tested picks the form.</a:t>
             </a:r>
             <a:endParaRPr lang="en-US" sz="1800" dirty="0"/>
           </a:p>
@@ -5076,7 +5076,7 @@
                 <a:ea typeface="Arial" pitchFamily="34" charset="-122"/>
                 <a:cs typeface="Arial" pitchFamily="34" charset="-120"/>
               </a:rPr>
-              <a:t>20 competitions   ·   one architecture, frozen before the run   ·   no lane could reach a leaderboard</a:t>
+              <a:t>20 competitions   ·   one architecture, frozen before the run   ·   no my-agent lane could reach a leaderboard</a:t>
             </a:r>
             <a:endParaRPr lang="en-US" sz="1500" dirty="0"/>
           </a:p>
@@ -6554,7 +6554,7 @@
                 <a:ea typeface="Arial" pitchFamily="34" charset="-122"/>
                 <a:cs typeface="Arial" pitchFamily="34" charset="-120"/>
               </a:rPr>
-              <a:t>one duel on</a:t>
+              <a:t>one duel on its</a:t>
             </a:r>
             <a:endParaRPr lang="en-US" sz="1300" dirty="0"/>
           </a:p>
@@ -6571,7 +6571,7 @@
                 <a:ea typeface="Arial" pitchFamily="34" charset="-122"/>
                 <a:cs typeface="Arial" pitchFamily="34" charset="-120"/>
               </a:rPr>
-              <a:t>its noise floor</a:t>
+              <a:t>variance floor</a:t>
             </a:r>
             <a:endParaRPr lang="en-US" sz="1300" dirty="0"/>
           </a:p>

--- a/docs/presentation/slides_4min.pptx
+++ b/docs/presentation/slides_4min.pptx
@@ -859,7 +859,7 @@
           <a:p>
             <a:r>
               <a:rPr lang="en-US" dirty="0"/>
-              <a:t>Three things I expected, and what actually happened. I expected the agent to beat most humans quickly: it does lead the standing, but its wins concentrate where no mature public solution exists — where one does, the reproduction agent beats it. I expected one run and one score to decide a winner: score noise leaves twenty-two of sixty duels uncallable, which is why the error model exists. And I expected a shared experience library to only ever help: one lane wrote its findings back two minutes before the next lane started, that lane read its neighbour's entries, and it had to be re-run clean. (43s)</a:t>
+              <a:t>Four things I would tell anyone doing this. Put knowledge injection upstream — at the blend stage it bought nothing. While you iterate, local cross-validation is the only feedback you get, and it can look healthy while the leaderboard says otherwise. Version the agent, not just the code: an architecture change invalidates every run before it. And isolate mechanically, then read the transcripts — including your auditor's: mine was exempting the commands every lane actually issues, so the one command it existed to catch was never examined. (43s)</a:t>
             </a:r>
             <a:endParaRPr lang="en-US" dirty="0"/>
           </a:p>
@@ -947,7 +947,7 @@
           <a:p>
             <a:r>
               <a:rPr lang="en-US" dirty="0"/>
-              <a:t>Four things I would tell anyone doing this. Put knowledge injection upstream — at the blend stage it bought nothing. While you iterate, local cross-validation is the only feedback you get, and it can look healthy while the leaderboard says otherwise. Version the agent, not just the code: an architecture change invalidates every run before it. And isolate mechanically, then read the transcripts — including your auditor's: mine was exempting the commands every lane actually issues, so the one command it existed to catch was never examined. Thank you. (30s)</a:t>
+              <a:t>Where working this way still falls short. Engineering judgment is the gap, not technique: nothing in the loop can tell at design time whether an architecture will hold, and by the time the flaws surface the debt is already there. A pipeline will happily log success for work nothing performed — ours emitted instructions the evaluator had never implemented, and the ledger recorded them as handled. Documents can agree with each other and all be wrong: one claim was consistent across all three of these, and only the source code disagreed. And AI writing habits survive review — redundant suffixes, invented terminology, and detail in place of the question you actually came for. Thank you. (37s)</a:t>
             </a:r>
             <a:endParaRPr lang="en-US" dirty="0"/>
           </a:p>
@@ -2793,426 +2793,224 @@
                 <a:ea typeface="Arial" pitchFamily="34" charset="-122"/>
                 <a:cs typeface="Arial" pitchFamily="34" charset="-120"/>
               </a:rPr>
-              <a:t>4 · Advantages &amp; Difficulties</a:t>
+              <a:t>4 · Lessons from building it</a:t>
             </a:r>
             <a:endParaRPr lang="en-US" sz="2600" dirty="0"/>
           </a:p>
         </p:txBody>
       </p:sp>
-      <p:graphicFrame>
-        <p:nvGraphicFramePr>
-          <p:cNvPr id="6" name="Table 0"/>
-          <p:cNvGraphicFramePr>
-            <a:graphicFrameLocks noGrp="1"/>
-          </p:cNvGraphicFramePr>
-          <p:nvPr>
-            <p:extLst>
-              <p:ext uri="{D42A27DB-BD31-4B8C-83A1-F6EECF244321}">
-                <p14:modId xmlns:p14="http://schemas.microsoft.com/office/powerpoint/2010/main" val="1579011935"/>
-              </p:ext>
-            </p:extLst>
-          </p:nvPr>
-        </p:nvGraphicFramePr>
-        <p:xfrm>
-          <a:off x="658368" y="1097280"/>
-          <a:ext cx="10881360" cy="914400"/>
-        </p:xfrm>
-        <a:graphic>
-          <a:graphicData uri="http://schemas.openxmlformats.org/drawingml/2006/table">
-            <a:tbl>
-              <a:tblPr/>
-              <a:tblGrid>
-                <a:gridCol w="3383280"/>
-                <a:gridCol w="7498080"/>
-              </a:tblGrid>
-              <a:tr h="411480">
-                <a:tc>
-                  <a:txBody>
-                    <a:bodyPr/>
-                    <a:lstStyle/>
-                    <a:p>
-                      <a:pPr indent="0" marL="0">
-                        <a:buNone/>
-                      </a:pPr>
-                      <a:r>
-                        <a:rPr lang="en-US" sz="1500" b="1" dirty="0">
-                          <a:solidFill>
-                            <a:srgbClr val="111111"/>
-                          </a:solidFill>
-                          <a:latin typeface="Arial" pitchFamily="34" charset="0"/>
-                          <a:ea typeface="Arial" pitchFamily="34" charset="-122"/>
-                          <a:cs typeface="Arial" pitchFamily="34" charset="-120"/>
-                        </a:rPr>
-                        <a:t>Expected</a:t>
-                      </a:r>
-                      <a:endParaRPr lang="en-US" sz="1500" dirty="0">
-                        <a:latin typeface="Arial" charset="0"/>
-                        <a:ea typeface="Arial" charset="0"/>
-                        <a:cs typeface="Arial" charset="0"/>
-                      </a:endParaRPr>
-                    </a:p>
-                  </a:txBody>
-                  <a:tcPr marL="76200" marR="76200" marT="76200" marB="76200" anchor="t">
-                    <a:lnL w="0" cap="flat" cmpd="sng" algn="ctr">
-                      <a:noFill/>
-                    </a:lnL>
-                    <a:lnR w="0" cap="flat" cmpd="sng" algn="ctr">
-                      <a:noFill/>
-                    </a:lnR>
-                    <a:lnT w="0" cap="flat" cmpd="sng" algn="ctr">
-                      <a:noFill/>
-                    </a:lnT>
-                    <a:lnB w="12700" cap="flat" cmpd="sng" algn="ctr">
-                      <a:solidFill>
-                        <a:srgbClr val="DDE1E6"/>
-                      </a:solidFill>
-                      <a:prstDash val="solid"/>
-                      <a:round/>
-                      <a:headEnd type="none" w="med" len="med"/>
-                      <a:tailEnd type="none" w="med" len="med"/>
-                    </a:lnB>
-                  </a:tcPr>
-                </a:tc>
-                <a:tc>
-                  <a:txBody>
-                    <a:bodyPr/>
-                    <a:lstStyle/>
-                    <a:p>
-                      <a:pPr indent="0" marL="0">
-                        <a:buNone/>
-                      </a:pPr>
-                      <a:r>
-                        <a:rPr lang="en-US" sz="1500" b="1" dirty="0">
-                          <a:solidFill>
-                            <a:srgbClr val="111111"/>
-                          </a:solidFill>
-                          <a:latin typeface="Arial" pitchFamily="34" charset="0"/>
-                          <a:ea typeface="Arial" pitchFamily="34" charset="-122"/>
-                          <a:cs typeface="Arial" pitchFamily="34" charset="-120"/>
-                        </a:rPr>
-                        <a:t>Experienced</a:t>
-                      </a:r>
-                      <a:endParaRPr lang="en-US" sz="1500" dirty="0">
-                        <a:latin typeface="Arial" charset="0"/>
-                        <a:ea typeface="Arial" charset="0"/>
-                        <a:cs typeface="Arial" charset="0"/>
-                      </a:endParaRPr>
-                    </a:p>
-                  </a:txBody>
-                  <a:tcPr marL="76200" marR="76200" marT="76200" marB="76200" anchor="t">
-                    <a:lnL w="0" cap="flat" cmpd="sng" algn="ctr">
-                      <a:noFill/>
-                    </a:lnL>
-                    <a:lnR w="0" cap="flat" cmpd="sng" algn="ctr">
-                      <a:noFill/>
-                    </a:lnR>
-                    <a:lnT w="0" cap="flat" cmpd="sng" algn="ctr">
-                      <a:noFill/>
-                    </a:lnT>
-                    <a:lnB w="12700" cap="flat" cmpd="sng" algn="ctr">
-                      <a:solidFill>
-                        <a:srgbClr val="DDE1E6"/>
-                      </a:solidFill>
-                      <a:prstDash val="solid"/>
-                      <a:round/>
-                      <a:headEnd type="none" w="med" len="med"/>
-                      <a:tailEnd type="none" w="med" len="med"/>
-                    </a:lnB>
-                  </a:tcPr>
-                </a:tc>
-              </a:tr>
-              <a:tr h="1051560">
-                <a:tc>
-                  <a:txBody>
-                    <a:bodyPr/>
-                    <a:lstStyle/>
-                    <a:p>
-                      <a:pPr indent="0" marL="0">
-                        <a:buNone/>
-                      </a:pPr>
-                      <a:r>
-                        <a:rPr lang="en-US" sz="1500" i="1" dirty="0">
-                          <a:solidFill>
-                            <a:srgbClr val="5A5F66"/>
-                          </a:solidFill>
-                          <a:latin typeface="Arial" pitchFamily="34" charset="0"/>
-                          <a:ea typeface="Arial" pitchFamily="34" charset="-122"/>
-                          <a:cs typeface="Arial" pitchFamily="34" charset="-120"/>
-                        </a:rPr>
-                        <a:t>The agent would quickly beat most humans.</a:t>
-                      </a:r>
-                      <a:endParaRPr lang="en-US" sz="1500" dirty="0">
-                        <a:latin typeface="Arial" charset="0"/>
-                        <a:ea typeface="Arial" charset="0"/>
-                        <a:cs typeface="Arial" charset="0"/>
-                      </a:endParaRPr>
-                    </a:p>
-                  </a:txBody>
-                  <a:tcPr marL="76200" marR="76200" marT="76200" marB="76200" anchor="t">
-                    <a:lnL w="0" cap="flat" cmpd="sng" algn="ctr">
-                      <a:noFill/>
-                    </a:lnL>
-                    <a:lnR w="0" cap="flat" cmpd="sng" algn="ctr">
-                      <a:noFill/>
-                    </a:lnR>
-                    <a:lnT w="0" cap="flat" cmpd="sng" algn="ctr">
-                      <a:noFill/>
-                    </a:lnT>
-                    <a:lnB w="12700" cap="flat" cmpd="sng" algn="ctr">
-                      <a:solidFill>
-                        <a:srgbClr val="DDE1E6"/>
-                      </a:solidFill>
-                      <a:prstDash val="solid"/>
-                      <a:round/>
-                      <a:headEnd type="none" w="med" len="med"/>
-                      <a:tailEnd type="none" w="med" len="med"/>
-                    </a:lnB>
-                  </a:tcPr>
-                </a:tc>
-                <a:tc>
-                  <a:txBody>
-                    <a:bodyPr/>
-                    <a:lstStyle/>
-                    <a:p>
-                      <a:pPr indent="0" marL="0">
-                        <a:buNone/>
-                      </a:pPr>
-                      <a:r>
-                        <a:rPr lang="en-US" sz="1500" dirty="0">
-                          <a:solidFill>
-                            <a:srgbClr val="111111"/>
-                          </a:solidFill>
-                          <a:latin typeface="Arial" pitchFamily="34" charset="0"/>
-                          <a:ea typeface="Arial" pitchFamily="34" charset="-122"/>
-                          <a:cs typeface="Arial" pitchFamily="34" charset="-120"/>
-                        </a:rPr>
-                        <a:t>It leads the standing on all 20 scored lanes, but its wins concentrate where no mature public solution exists.</a:t>
-                      </a:r>
-                      <a:endParaRPr lang="en-US" sz="1500" dirty="0">
-                        <a:latin typeface="Arial" charset="0"/>
-                        <a:ea typeface="Arial" charset="0"/>
-                        <a:cs typeface="Arial" charset="0"/>
-                      </a:endParaRPr>
-                    </a:p>
-                  </a:txBody>
-                  <a:tcPr marL="76200" marR="76200" marT="76200" marB="76200" anchor="t">
-                    <a:lnL w="0" cap="flat" cmpd="sng" algn="ctr">
-                      <a:noFill/>
-                    </a:lnL>
-                    <a:lnR w="0" cap="flat" cmpd="sng" algn="ctr">
-                      <a:noFill/>
-                    </a:lnR>
-                    <a:lnT w="0" cap="flat" cmpd="sng" algn="ctr">
-                      <a:noFill/>
-                    </a:lnT>
-                    <a:lnB w="12700" cap="flat" cmpd="sng" algn="ctr">
-                      <a:solidFill>
-                        <a:srgbClr val="DDE1E6"/>
-                      </a:solidFill>
-                      <a:prstDash val="solid"/>
-                      <a:round/>
-                      <a:headEnd type="none" w="med" len="med"/>
-                      <a:tailEnd type="none" w="med" len="med"/>
-                    </a:lnB>
-                  </a:tcPr>
-                </a:tc>
-              </a:tr>
-              <a:tr h="914400">
-                <a:tc>
-                  <a:txBody>
-                    <a:bodyPr/>
-                    <a:lstStyle/>
-                    <a:p>
-                      <a:pPr indent="0" marL="0">
-                        <a:buNone/>
-                      </a:pPr>
-                      <a:r>
-                        <a:rPr lang="en-US" sz="1500" i="1" dirty="0">
-                          <a:solidFill>
-                            <a:srgbClr val="5A5F66"/>
-                          </a:solidFill>
-                          <a:latin typeface="Arial" pitchFamily="34" charset="0"/>
-                          <a:ea typeface="Arial" pitchFamily="34" charset="-122"/>
-                          <a:cs typeface="Arial" pitchFamily="34" charset="-120"/>
-                        </a:rPr>
-                        <a:t>One run and one score decide a winner.</a:t>
-                      </a:r>
-                      <a:endParaRPr lang="en-US" sz="1500" dirty="0">
-                        <a:latin typeface="Arial" charset="0"/>
-                        <a:ea typeface="Arial" charset="0"/>
-                        <a:cs typeface="Arial" charset="0"/>
-                      </a:endParaRPr>
-                    </a:p>
-                  </a:txBody>
-                  <a:tcPr marL="76200" marR="76200" marT="76200" marB="76200" anchor="t">
-                    <a:lnL w="0" cap="flat" cmpd="sng" algn="ctr">
-                      <a:noFill/>
-                    </a:lnL>
-                    <a:lnR w="0" cap="flat" cmpd="sng" algn="ctr">
-                      <a:noFill/>
-                    </a:lnR>
-                    <a:lnT w="0" cap="flat" cmpd="sng" algn="ctr">
-                      <a:noFill/>
-                    </a:lnT>
-                    <a:lnB w="12700" cap="flat" cmpd="sng" algn="ctr">
-                      <a:solidFill>
-                        <a:srgbClr val="DDE1E6"/>
-                      </a:solidFill>
-                      <a:prstDash val="solid"/>
-                      <a:round/>
-                      <a:headEnd type="none" w="med" len="med"/>
-                      <a:tailEnd type="none" w="med" len="med"/>
-                    </a:lnB>
-                  </a:tcPr>
-                </a:tc>
-                <a:tc>
-                  <a:txBody>
-                    <a:bodyPr/>
-                    <a:lstStyle/>
-                    <a:p>
-                      <a:pPr indent="0" marL="0">
-                        <a:buNone/>
-                      </a:pPr>
-                      <a:r>
-                        <a:rPr lang="en-US" sz="1500" dirty="0">
-                          <a:solidFill>
-                            <a:srgbClr val="111111"/>
-                          </a:solidFill>
-                          <a:latin typeface="Arial" pitchFamily="34" charset="0"/>
-                          <a:ea typeface="Arial" pitchFamily="34" charset="-122"/>
-                          <a:cs typeface="Arial" pitchFamily="34" charset="-120"/>
-                        </a:rPr>
-                        <a:t>Score noise leaves 22 of 60 duels undecidable; an explicit error model became mandatory.</a:t>
-                      </a:r>
-                      <a:endParaRPr lang="en-US" sz="1500" dirty="0">
-                        <a:latin typeface="Arial" charset="0"/>
-                        <a:ea typeface="Arial" charset="0"/>
-                        <a:cs typeface="Arial" charset="0"/>
-                      </a:endParaRPr>
-                    </a:p>
-                  </a:txBody>
-                  <a:tcPr marL="76200" marR="76200" marT="76200" marB="76200" anchor="t">
-                    <a:lnL w="0" cap="flat" cmpd="sng" algn="ctr">
-                      <a:noFill/>
-                    </a:lnL>
-                    <a:lnR w="0" cap="flat" cmpd="sng" algn="ctr">
-                      <a:noFill/>
-                    </a:lnR>
-                    <a:lnT w="0" cap="flat" cmpd="sng" algn="ctr">
-                      <a:noFill/>
-                    </a:lnT>
-                    <a:lnB w="12700" cap="flat" cmpd="sng" algn="ctr">
-                      <a:solidFill>
-                        <a:srgbClr val="DDE1E6"/>
-                      </a:solidFill>
-                      <a:prstDash val="solid"/>
-                      <a:round/>
-                      <a:headEnd type="none" w="med" len="med"/>
-                      <a:tailEnd type="none" w="med" len="med"/>
-                    </a:lnB>
-                  </a:tcPr>
-                </a:tc>
-              </a:tr>
-              <a:tr h="1051560">
-                <a:tc>
-                  <a:txBody>
-                    <a:bodyPr/>
-                    <a:lstStyle/>
-                    <a:p>
-                      <a:pPr indent="0" marL="0">
-                        <a:buNone/>
-                      </a:pPr>
-                      <a:r>
-                        <a:rPr lang="en-US" sz="1500" i="1" dirty="0">
-                          <a:solidFill>
-                            <a:srgbClr val="5A5F66"/>
-                          </a:solidFill>
-                          <a:latin typeface="Arial" pitchFamily="34" charset="0"/>
-                          <a:ea typeface="Arial" pitchFamily="34" charset="-122"/>
-                          <a:cs typeface="Arial" pitchFamily="34" charset="-120"/>
-                        </a:rPr>
-                        <a:t>A shared experience library only ever helps.</a:t>
-                      </a:r>
-                      <a:endParaRPr lang="en-US" sz="1500" dirty="0">
-                        <a:latin typeface="Arial" charset="0"/>
-                        <a:ea typeface="Arial" charset="0"/>
-                        <a:cs typeface="Arial" charset="0"/>
-                      </a:endParaRPr>
-                    </a:p>
-                  </a:txBody>
-                  <a:tcPr marL="76200" marR="76200" marT="76200" marB="76200" anchor="t">
-                    <a:lnL w="0" cap="flat" cmpd="sng" algn="ctr">
-                      <a:noFill/>
-                    </a:lnL>
-                    <a:lnR w="0" cap="flat" cmpd="sng" algn="ctr">
-                      <a:noFill/>
-                    </a:lnR>
-                    <a:lnT w="0" cap="flat" cmpd="sng" algn="ctr">
-                      <a:noFill/>
-                    </a:lnT>
-                    <a:lnB w="12700" cap="flat" cmpd="sng" algn="ctr">
-                      <a:solidFill>
-                        <a:srgbClr val="DDE1E6"/>
-                      </a:solidFill>
-                      <a:prstDash val="solid"/>
-                      <a:round/>
-                      <a:headEnd type="none" w="med" len="med"/>
-                      <a:tailEnd type="none" w="med" len="med"/>
-                    </a:lnB>
-                  </a:tcPr>
-                </a:tc>
-                <a:tc>
-                  <a:txBody>
-                    <a:bodyPr/>
-                    <a:lstStyle/>
-                    <a:p>
-                      <a:pPr indent="0" marL="0">
-                        <a:buNone/>
-                      </a:pPr>
-                      <a:r>
-                        <a:rPr lang="en-US" sz="1500" dirty="0">
-                          <a:solidFill>
-                            <a:srgbClr val="111111"/>
-                          </a:solidFill>
-                          <a:latin typeface="Arial" pitchFamily="34" charset="0"/>
-                          <a:ea typeface="Arial" pitchFamily="34" charset="-122"/>
-                          <a:cs typeface="Arial" pitchFamily="34" charset="-120"/>
-                        </a:rPr>
-                        <a:t>One lane wrote its findings back two minutes before the next lane started; that lane read its neighbour's entries and was re-run clean.</a:t>
-                      </a:r>
-                      <a:endParaRPr lang="en-US" sz="1500" dirty="0">
-                        <a:latin typeface="Arial" charset="0"/>
-                        <a:ea typeface="Arial" charset="0"/>
-                        <a:cs typeface="Arial" charset="0"/>
-                      </a:endParaRPr>
-                    </a:p>
-                  </a:txBody>
-                  <a:tcPr marL="76200" marR="76200" marT="76200" marB="76200" anchor="t">
-                    <a:lnL w="0" cap="flat" cmpd="sng" algn="ctr">
-                      <a:noFill/>
-                    </a:lnL>
-                    <a:lnR w="0" cap="flat" cmpd="sng" algn="ctr">
-                      <a:noFill/>
-                    </a:lnR>
-                    <a:lnT w="0" cap="flat" cmpd="sng" algn="ctr">
-                      <a:noFill/>
-                    </a:lnT>
-                    <a:lnB w="12700" cap="flat" cmpd="sng" algn="ctr">
-                      <a:solidFill>
-                        <a:srgbClr val="DDE1E6"/>
-                      </a:solidFill>
-                      <a:prstDash val="solid"/>
-                      <a:round/>
-                      <a:headEnd type="none" w="med" len="med"/>
-                      <a:tailEnd type="none" w="med" len="med"/>
-                    </a:lnB>
-                  </a:tcPr>
-                </a:tc>
-              </a:tr>
-            </a:tbl>
-          </a:graphicData>
-        </a:graphic>
-      </p:graphicFrame>
+      <p:sp>
+        <p:nvSpPr>
+          <p:cNvPr id="3" name="Text 1"/>
+          <p:cNvSpPr/>
+          <p:nvPr/>
+        </p:nvSpPr>
+        <p:spPr>
+          <a:xfrm>
+            <a:off x="868680" y="1097280"/>
+            <a:ext cx="10607040" cy="777240"/>
+          </a:xfrm>
+          <a:prstGeom prst="rect">
+            <a:avLst/>
+          </a:prstGeom>
+          <a:noFill/>
+          <a:ln/>
+        </p:spPr>
+        <p:txBody>
+          <a:bodyPr wrap="square" lIns="0" tIns="0" rIns="0" bIns="0" rtlCol="0" anchor="ctr"/>
+          <a:lstStyle/>
+          <a:p>
+            <a:pPr indent="0" marL="0">
+              <a:buNone/>
+            </a:pPr>
+            <a:r>
+              <a:rPr lang="en-US" sz="1600" b="1" dirty="0">
+                <a:solidFill>
+                  <a:srgbClr val="111111"/>
+                </a:solidFill>
+                <a:latin typeface="Arial" pitchFamily="34" charset="0"/>
+                <a:ea typeface="Arial" pitchFamily="34" charset="-122"/>
+                <a:cs typeface="Arial" pitchFamily="34" charset="-120"/>
+              </a:rPr>
+              <a:t>·   Put knowledge injection upstream.</a:t>
+            </a:r>
+            <a:pPr indent="0" marL="0">
+              <a:buNone/>
+            </a:pPr>
+            <a:r>
+              <a:rPr lang="en-US" sz="1600" dirty="0">
+                <a:solidFill>
+                  <a:srgbClr val="111111"/>
+                </a:solidFill>
+                <a:latin typeface="Arial" pitchFamily="34" charset="0"/>
+                <a:ea typeface="Arial" pitchFamily="34" charset="-122"/>
+                <a:cs typeface="Arial" pitchFamily="34" charset="-120"/>
+              </a:rPr>
+              <a:t> At the blend stage it measured near-nothing; moved into problem identification it flags exactly the competitions that need external data.</a:t>
+            </a:r>
+            <a:endParaRPr lang="en-US" sz="1600" dirty="0"/>
+          </a:p>
+        </p:txBody>
+      </p:sp>
+      <p:sp>
+        <p:nvSpPr>
+          <p:cNvPr id="4" name="Text 2"/>
+          <p:cNvSpPr/>
+          <p:nvPr/>
+        </p:nvSpPr>
+        <p:spPr>
+          <a:xfrm>
+            <a:off x="868680" y="2011680"/>
+            <a:ext cx="10607040" cy="777240"/>
+          </a:xfrm>
+          <a:prstGeom prst="rect">
+            <a:avLst/>
+          </a:prstGeom>
+          <a:noFill/>
+          <a:ln/>
+        </p:spPr>
+        <p:txBody>
+          <a:bodyPr wrap="square" lIns="0" tIns="0" rIns="0" bIns="0" rtlCol="0" anchor="ctr"/>
+          <a:lstStyle/>
+          <a:p>
+            <a:pPr indent="0" marL="0">
+              <a:buNone/>
+            </a:pPr>
+            <a:r>
+              <a:rPr lang="en-US" sz="1600" b="1" dirty="0">
+                <a:solidFill>
+                  <a:srgbClr val="111111"/>
+                </a:solidFill>
+                <a:latin typeface="Arial" pitchFamily="34" charset="0"/>
+                <a:ea typeface="Arial" pitchFamily="34" charset="-122"/>
+                <a:cs typeface="Arial" pitchFamily="34" charset="-120"/>
+              </a:rPr>
+              <a:t>·   Local CV is the only feedback while you iterate.</a:t>
+            </a:r>
+            <a:pPr indent="0" marL="0">
+              <a:buNone/>
+            </a:pPr>
+            <a:r>
+              <a:rPr lang="en-US" sz="1600" dirty="0">
+                <a:solidFill>
+                  <a:srgbClr val="111111"/>
+                </a:solidFill>
+                <a:latin typeface="Arial" pitchFamily="34" charset="0"/>
+                <a:ea typeface="Arial" pitchFamily="34" charset="-122"/>
+                <a:cs typeface="Arial" pitchFamily="34" charset="-120"/>
+              </a:rPr>
+              <a:t> A competition returns no score until submission, so an error in problem-level judgment leaves CV looking healthy while the leaderboard says otherwise.</a:t>
+            </a:r>
+            <a:endParaRPr lang="en-US" sz="1600" dirty="0"/>
+          </a:p>
+        </p:txBody>
+      </p:sp>
+      <p:sp>
+        <p:nvSpPr>
+          <p:cNvPr id="5" name="Text 3"/>
+          <p:cNvSpPr/>
+          <p:nvPr/>
+        </p:nvSpPr>
+        <p:spPr>
+          <a:xfrm>
+            <a:off x="868680" y="2926080"/>
+            <a:ext cx="10607040" cy="777240"/>
+          </a:xfrm>
+          <a:prstGeom prst="rect">
+            <a:avLst/>
+          </a:prstGeom>
+          <a:noFill/>
+          <a:ln/>
+        </p:spPr>
+        <p:txBody>
+          <a:bodyPr wrap="square" lIns="0" tIns="0" rIns="0" bIns="0" rtlCol="0" anchor="ctr"/>
+          <a:lstStyle/>
+          <a:p>
+            <a:pPr indent="0" marL="0">
+              <a:buNone/>
+            </a:pPr>
+            <a:r>
+              <a:rPr lang="en-US" sz="1600" b="1" dirty="0">
+                <a:solidFill>
+                  <a:srgbClr val="111111"/>
+                </a:solidFill>
+                <a:latin typeface="Arial" pitchFamily="34" charset="0"/>
+                <a:ea typeface="Arial" pitchFamily="34" charset="-122"/>
+                <a:cs typeface="Arial" pitchFamily="34" charset="-120"/>
+              </a:rPr>
+              <a:t>·   Version the agent, not just the code.</a:t>
+            </a:r>
+            <a:pPr indent="0" marL="0">
+              <a:buNone/>
+            </a:pPr>
+            <a:r>
+              <a:rPr lang="en-US" sz="1600" dirty="0">
+                <a:solidFill>
+                  <a:srgbClr val="111111"/>
+                </a:solidFill>
+                <a:latin typeface="Arial" pitchFamily="34" charset="0"/>
+                <a:ea typeface="Arial" pitchFamily="34" charset="-122"/>
+                <a:cs typeface="Arial" pitchFamily="34" charset="-120"/>
+              </a:rPr>
+              <a:t> An architecture change invalidates every competition that ran before it — start the benchmark over rather than mixing versions in one table.</a:t>
+            </a:r>
+            <a:endParaRPr lang="en-US" sz="1600" dirty="0"/>
+          </a:p>
+        </p:txBody>
+      </p:sp>
+      <p:sp>
+        <p:nvSpPr>
+          <p:cNvPr id="6" name="Text 4"/>
+          <p:cNvSpPr/>
+          <p:nvPr/>
+        </p:nvSpPr>
+        <p:spPr>
+          <a:xfrm>
+            <a:off x="868680" y="3840480"/>
+            <a:ext cx="10607040" cy="777240"/>
+          </a:xfrm>
+          <a:prstGeom prst="rect">
+            <a:avLst/>
+          </a:prstGeom>
+          <a:noFill/>
+          <a:ln/>
+        </p:spPr>
+        <p:txBody>
+          <a:bodyPr wrap="square" lIns="0" tIns="0" rIns="0" bIns="0" rtlCol="0" anchor="ctr"/>
+          <a:lstStyle/>
+          <a:p>
+            <a:pPr indent="0" marL="0">
+              <a:buNone/>
+            </a:pPr>
+            <a:r>
+              <a:rPr lang="en-US" sz="1600" b="1" dirty="0">
+                <a:solidFill>
+                  <a:srgbClr val="111111"/>
+                </a:solidFill>
+                <a:latin typeface="Arial" pitchFamily="34" charset="0"/>
+                <a:ea typeface="Arial" pitchFamily="34" charset="-122"/>
+                <a:cs typeface="Arial" pitchFamily="34" charset="-120"/>
+              </a:rPr>
+              <a:t>·   Isolate mechanically, then audit the transcript</a:t>
+            </a:r>
+            <a:pPr indent="0" marL="0">
+              <a:buNone/>
+            </a:pPr>
+            <a:r>
+              <a:rPr lang="en-US" sz="1600" dirty="0">
+                <a:solidFill>
+                  <a:srgbClr val="111111"/>
+                </a:solidFill>
+                <a:latin typeface="Arial" pitchFamily="34" charset="0"/>
+                <a:ea typeface="Arial" pitchFamily="34" charset="-122"/>
+                <a:cs typeface="Arial" pitchFamily="34" charset="-120"/>
+              </a:rPr>
+              <a:t> — and audit the auditor: ours exempted every command starting with uv, so the one command it existed to catch was never examined.</a:t>
+            </a:r>
+            <a:endParaRPr lang="en-US" sz="1600" dirty="0"/>
+          </a:p>
+        </p:txBody>
+      </p:sp>
     </p:spTree>
   </p:cSld>
   <p:clrMapOvr>
@@ -3278,7 +3076,7 @@
                 <a:ea typeface="Arial" pitchFamily="34" charset="-122"/>
                 <a:cs typeface="Arial" pitchFamily="34" charset="-120"/>
               </a:rPr>
-              <a:t>5 · Discussion</a:t>
+              <a:t>5 · Where AI-heavy work still falls short</a:t>
             </a:r>
             <a:endParaRPr lang="en-US" sz="2600" dirty="0"/>
           </a:p>
@@ -3317,7 +3115,7 @@
                 <a:ea typeface="Arial" pitchFamily="34" charset="-122"/>
                 <a:cs typeface="Arial" pitchFamily="34" charset="-120"/>
               </a:rPr>
-              <a:t>·   Put knowledge injection upstream.</a:t>
+              <a:t>·   Engineering judgment is the gap, not technique.</a:t>
             </a:r>
             <a:pPr indent="0" marL="0">
               <a:buNone/>
@@ -3331,7 +3129,7 @@
                 <a:ea typeface="Arial" pitchFamily="34" charset="-122"/>
                 <a:cs typeface="Arial" pitchFamily="34" charset="-120"/>
               </a:rPr>
-              <a:t> At the blend stage it measured near-nothing and was abandoned; moved into problem identification it flags exactly the competitions that need external data.</a:t>
+              <a:t> Nothing in the loop can tell at design time whether an architecture will hold; the flaws surface once it runs, and the debt grows with every competition added.</a:t>
             </a:r>
             <a:endParaRPr lang="en-US" sz="1600" dirty="0"/>
           </a:p>
@@ -3370,7 +3168,7 @@
                 <a:ea typeface="Arial" pitchFamily="34" charset="-122"/>
                 <a:cs typeface="Arial" pitchFamily="34" charset="-120"/>
               </a:rPr>
-              <a:t>·   Local CV is the only feedback while you iterate.</a:t>
+              <a:t>·   A pipeline will log success for work nothing performed.</a:t>
             </a:r>
             <a:pPr indent="0" marL="0">
               <a:buNone/>
@@ -3384,7 +3182,7 @@
                 <a:ea typeface="Arial" pitchFamily="34" charset="-122"/>
                 <a:cs typeface="Arial" pitchFamily="34" charset="-120"/>
               </a:rPr>
-              <a:t> A competition returns no score until submission, so an error in problem-level judgment leaves CV looking healthy while the leaderboard says otherwise.</a:t>
+              <a:t> Our dossier emitted operators the evaluator had never implemented — no warning, and the ledger recorded it as handled.</a:t>
             </a:r>
             <a:endParaRPr lang="en-US" sz="1600" dirty="0"/>
           </a:p>
@@ -3398,7 +3196,7 @@
         </p:nvSpPr>
         <p:spPr>
           <a:xfrm>
-            <a:off x="868680" y="2788920"/>
+            <a:off x="868680" y="2926080"/>
             <a:ext cx="10607040" cy="777240"/>
           </a:xfrm>
           <a:prstGeom prst="rect">
@@ -3423,7 +3221,7 @@
                 <a:ea typeface="Arial" pitchFamily="34" charset="-122"/>
                 <a:cs typeface="Arial" pitchFamily="34" charset="-120"/>
               </a:rPr>
-              <a:t>·   Version the agent, not just the code.</a:t>
+              <a:t>·   Documents can agree with each other and all be wrong.</a:t>
             </a:r>
             <a:pPr indent="0" marL="0">
               <a:buNone/>
@@ -3437,7 +3235,7 @@
                 <a:ea typeface="Arial" pitchFamily="34" charset="-122"/>
                 <a:cs typeface="Arial" pitchFamily="34" charset="-120"/>
               </a:rPr>
-              <a:t> An architecture change invalidates every competition that ran before it — start the benchmark over rather than mixing versions in one table.</a:t>
+              <a:t> One claim was copied into report, poster and slides, and read as verified because it was consistent everywhere. Only the source code disagreed.</a:t>
             </a:r>
             <a:endParaRPr lang="en-US" sz="1600" dirty="0"/>
           </a:p>
@@ -3451,7 +3249,7 @@
         </p:nvSpPr>
         <p:spPr>
           <a:xfrm>
-            <a:off x="868680" y="3703320"/>
+            <a:off x="868680" y="3840480"/>
             <a:ext cx="10607040" cy="777240"/>
           </a:xfrm>
           <a:prstGeom prst="rect">
@@ -3476,7 +3274,7 @@
                 <a:ea typeface="Arial" pitchFamily="34" charset="-122"/>
                 <a:cs typeface="Arial" pitchFamily="34" charset="-120"/>
               </a:rPr>
-              <a:t>·   Isolate mechanically, then audit the transcript</a:t>
+              <a:t>·   AI writing habits survive review</a:t>
             </a:r>
             <a:pPr indent="0" marL="0">
               <a:buNone/>
@@ -3490,7 +3288,7 @@
                 <a:ea typeface="Arial" pitchFamily="34" charset="-122"/>
                 <a:cs typeface="Arial" pitchFamily="34" charset="-120"/>
               </a:rPr>
-              <a:t> — and audit the auditor: ours exempted every command starting with uv, so the one command it existed to catch was never examined.</a:t>
+              <a:t> — redundant suffixes, invented terminology, detail in place of the question the reader came for.</a:t>
             </a:r>
             <a:endParaRPr lang="en-US" sz="1600" dirty="0"/>
           </a:p>

--- a/docs/presentation/slides_4min.pptx
+++ b/docs/presentation/slides_4min.pptx
@@ -2793,7 +2793,7 @@
                 <a:ea typeface="Arial" pitchFamily="34" charset="-122"/>
                 <a:cs typeface="Arial" pitchFamily="34" charset="-120"/>
               </a:rPr>
-              <a:t>4 · Lessons from building it</a:t>
+              <a:t>4 · Lessons from building this AI agent</a:t>
             </a:r>
             <a:endParaRPr lang="en-US" sz="2600" dirty="0"/>
           </a:p>

--- a/docs/presentation/slides_4min.pptx
+++ b/docs/presentation/slides_4min.pptx
@@ -2299,7 +2299,7 @@
                 <a:ea typeface="Arial" pitchFamily="34" charset="-122"/>
                 <a:cs typeface="Arial" pitchFamily="34" charset="-120"/>
               </a:rPr>
-              <a:t>Best private score — head-to-head count (20 competitions)</a:t>
+              <a:t>Head-to-head best private score</a:t>
             </a:r>
             <a:endParaRPr lang="en-US" sz="1700" dirty="0"/>
           </a:p>
@@ -2793,7 +2793,7 @@
                 <a:ea typeface="Arial" pitchFamily="34" charset="-122"/>
                 <a:cs typeface="Arial" pitchFamily="34" charset="-120"/>
               </a:rPr>
-              <a:t>4 · Lessons from building this AI agent</a:t>
+              <a:t>4 · Lessons learned</a:t>
             </a:r>
             <a:endParaRPr lang="en-US" sz="2600" dirty="0"/>
           </a:p>
@@ -2885,7 +2885,7 @@
                 <a:ea typeface="Arial" pitchFamily="34" charset="-122"/>
                 <a:cs typeface="Arial" pitchFamily="34" charset="-120"/>
               </a:rPr>
-              <a:t>·   Local CV is the only feedback while you iterate.</a:t>
+              <a:t>·   Local CV is your only feedback.</a:t>
             </a:r>
             <a:pPr indent="0" marL="0">
               <a:buNone/>
@@ -2938,7 +2938,7 @@
                 <a:ea typeface="Arial" pitchFamily="34" charset="-122"/>
                 <a:cs typeface="Arial" pitchFamily="34" charset="-120"/>
               </a:rPr>
-              <a:t>·   Version the agent, not just the code.</a:t>
+              <a:t>·   Version the agent itself.</a:t>
             </a:r>
             <a:pPr indent="0" marL="0">
               <a:buNone/>
@@ -2991,7 +2991,7 @@
                 <a:ea typeface="Arial" pitchFamily="34" charset="-122"/>
                 <a:cs typeface="Arial" pitchFamily="34" charset="-120"/>
               </a:rPr>
-              <a:t>·   Isolate mechanically, then audit the transcript</a:t>
+              <a:t>·   Isolate mechanically then audit transcripts</a:t>
             </a:r>
             <a:pPr indent="0" marL="0">
               <a:buNone/>
@@ -3076,7 +3076,7 @@
                 <a:ea typeface="Arial" pitchFamily="34" charset="-122"/>
                 <a:cs typeface="Arial" pitchFamily="34" charset="-120"/>
               </a:rPr>
-              <a:t>5 · Where AI-heavy work still falls short</a:t>
+              <a:t>5 · AI's blind spots</a:t>
             </a:r>
             <a:endParaRPr lang="en-US" sz="2600" dirty="0"/>
           </a:p>
@@ -3115,7 +3115,7 @@
                 <a:ea typeface="Arial" pitchFamily="34" charset="-122"/>
                 <a:cs typeface="Arial" pitchFamily="34" charset="-120"/>
               </a:rPr>
-              <a:t>·   Engineering judgment is the gap, not technique.</a:t>
+              <a:t>·   Engineering judgment is the gap.</a:t>
             </a:r>
             <a:pPr indent="0" marL="0">
               <a:buNone/>
@@ -3168,7 +3168,7 @@
                 <a:ea typeface="Arial" pitchFamily="34" charset="-122"/>
                 <a:cs typeface="Arial" pitchFamily="34" charset="-120"/>
               </a:rPr>
-              <a:t>·   A pipeline will log success for work nothing performed.</a:t>
+              <a:t>·   Pipelines log success for missing work.</a:t>
             </a:r>
             <a:pPr indent="0" marL="0">
               <a:buNone/>
@@ -3221,7 +3221,7 @@
                 <a:ea typeface="Arial" pitchFamily="34" charset="-122"/>
                 <a:cs typeface="Arial" pitchFamily="34" charset="-120"/>
               </a:rPr>
-              <a:t>·   Documents can agree with each other and all be wrong.</a:t>
+              <a:t>·   Consistent documents can still be wrong.</a:t>
             </a:r>
             <a:pPr indent="0" marL="0">
               <a:buNone/>

--- a/docs/presentation/slides_4min.pptx
+++ b/docs/presentation/slides_4min.pptx
@@ -947,7 +947,7 @@
           <a:p>
             <a:r>
               <a:rPr lang="en-US" dirty="0"/>
-              <a:t>Where working this way still falls short. Engineering judgment is the gap, not technique: nothing in the loop can tell at design time whether an architecture will hold, and by the time the flaws surface the debt is already there. A pipeline will happily log success for work nothing performed — ours emitted instructions the evaluator had never implemented, and the ledger recorded them as handled. Documents can agree with each other and all be wrong: one claim was consistent across all three of these, and only the source code disagreed. And AI writing habits survive review — redundant suffixes, invented terminology, and detail in place of the question you actually came for. Thank you. (37s)</a:t>
+              <a:t>Where working this way still falls short. Engineering judgment is the gap, not technique: nothing in the loop can tell at design time whether an architecture will hold, and by the time the flaws surface the debt is already there. A pipeline will happily log success for work nothing performed — ours emitted instructions the evaluator had never implemented, and the ledger recorded them as handled. And AI writing habits survive review — redundant suffixes, invented terminology, and detail in place of the question you actually came for. Thank you. (37s)</a:t>
             </a:r>
             <a:endParaRPr lang="en-US" dirty="0"/>
           </a:p>
@@ -3221,7 +3221,7 @@
                 <a:ea typeface="Arial" pitchFamily="34" charset="-122"/>
                 <a:cs typeface="Arial" pitchFamily="34" charset="-120"/>
               </a:rPr>
-              <a:t>·   Consistent documents can still be wrong.</a:t>
+              <a:t>·   AI writing habits survive review</a:t>
             </a:r>
             <a:pPr indent="0" marL="0">
               <a:buNone/>
@@ -3235,7 +3235,7 @@
                 <a:ea typeface="Arial" pitchFamily="34" charset="-122"/>
                 <a:cs typeface="Arial" pitchFamily="34" charset="-120"/>
               </a:rPr>
-              <a:t> One claim was copied into report, poster and slides, and read as verified because it was consistent everywhere. Only the source code disagreed.</a:t>
+              <a:t> — redundant suffixes, invented terminology, detail in place of the question the reader came for.</a:t>
             </a:r>
             <a:endParaRPr lang="en-US" sz="1600" dirty="0"/>
           </a:p>
@@ -3244,59 +3244,6 @@
       <p:sp>
         <p:nvSpPr>
           <p:cNvPr id="6" name="Text 4"/>
-          <p:cNvSpPr/>
-          <p:nvPr/>
-        </p:nvSpPr>
-        <p:spPr>
-          <a:xfrm>
-            <a:off x="868680" y="3840480"/>
-            <a:ext cx="10607040" cy="777240"/>
-          </a:xfrm>
-          <a:prstGeom prst="rect">
-            <a:avLst/>
-          </a:prstGeom>
-          <a:noFill/>
-          <a:ln/>
-        </p:spPr>
-        <p:txBody>
-          <a:bodyPr wrap="square" lIns="0" tIns="0" rIns="0" bIns="0" rtlCol="0" anchor="ctr"/>
-          <a:lstStyle/>
-          <a:p>
-            <a:pPr indent="0" marL="0">
-              <a:buNone/>
-            </a:pPr>
-            <a:r>
-              <a:rPr lang="en-US" sz="1600" b="1" dirty="0">
-                <a:solidFill>
-                  <a:srgbClr val="111111"/>
-                </a:solidFill>
-                <a:latin typeface="Arial" pitchFamily="34" charset="0"/>
-                <a:ea typeface="Arial" pitchFamily="34" charset="-122"/>
-                <a:cs typeface="Arial" pitchFamily="34" charset="-120"/>
-              </a:rPr>
-              <a:t>·   AI writing habits survive review</a:t>
-            </a:r>
-            <a:pPr indent="0" marL="0">
-              <a:buNone/>
-            </a:pPr>
-            <a:r>
-              <a:rPr lang="en-US" sz="1600" dirty="0">
-                <a:solidFill>
-                  <a:srgbClr val="111111"/>
-                </a:solidFill>
-                <a:latin typeface="Arial" pitchFamily="34" charset="0"/>
-                <a:ea typeface="Arial" pitchFamily="34" charset="-122"/>
-                <a:cs typeface="Arial" pitchFamily="34" charset="-120"/>
-              </a:rPr>
-              <a:t> — redundant suffixes, invented terminology, detail in place of the question the reader came for.</a:t>
-            </a:r>
-            <a:endParaRPr lang="en-US" sz="1600" dirty="0"/>
-          </a:p>
-        </p:txBody>
-      </p:sp>
-      <p:sp>
-        <p:nvSpPr>
-          <p:cNvPr id="7" name="Text 5"/>
           <p:cNvSpPr/>
           <p:nvPr/>
         </p:nvSpPr>

--- a/docs/presentation/slides_4min.pptx
+++ b/docs/presentation/slides_4min.pptx
@@ -683,7 +683,7 @@
           <a:p>
             <a:r>
               <a:rPr lang="en-US" dirty="0"/>
-              <a:t>The pipeline reads top to bottom. An LLM reasons and decides at every stage, gradient boosting does the fitting, and a tree search over complete candidate solutions is the optimisation loop. The one design decision that mattered is where outside knowledge enters. My first version put it downstream, at the blend — measured, it was worth ten to the minus five. So it moved upstream, into a dossier stage that classifies the task before any modelling. The lanes hold no Kaggle credentials, so nothing inside a run can touch a leaderboard. (40s)</a:t>
+              <a:t>The pipeline reads top to bottom. An LLM reasons and decides at every stage, gradient boosting does the fitting, and a tree search over complete candidate solutions is the optimization loop. The one design decision that mattered is where outside knowledge enters. My first version put it downstream, at the blend — measured, it was worth ten to the minus five. So it moved upstream, into a dossier stage that classifies the task before any modeling. The lanes hold no Kaggle credentials, so nothing inside a run can touch a leaderboard. (40s)</a:t>
             </a:r>
             <a:endParaRPr lang="en-US" dirty="0"/>
           </a:p>
@@ -771,7 +771,7 @@
           <a:p>
             <a:r>
               <a:rPr lang="en-US" dirty="0"/>
-              <a:t>Here is the reading. All twenty lanes are scored on the real leaderboard, and every one of the sixty duels is judged against the score noise measured on Kaggle's own split of the test set: thirty-eight decide, twenty-two the data refuses to call. My agent leads — sixteen wins to eight of its decided duels, sixty-six point seven percent, against forty-two point three for each yardstick. It takes the best private score on ten of the twenty competitions, and on three harder competitions outside tabular data it takes the best of the three every time. (45s)</a:t>
+              <a:t>Here is the reading. All twenty lanes are scored on the real leaderboard, and every one of the sixty duels is judged against the score noise measured on Kaggle's own split of the test set: thirty-eight decide, twenty-two the data refuses to call. My agent leads — sixteen wins to eight of its decided duels, sixty-six point seven percent, against forty-two point three for each reference agent. It takes the best private score on ten of the twenty competitions, and on three harder competitions outside tabular data it takes the best of the three every time. (45s)</a:t>
             </a:r>
             <a:endParaRPr lang="en-US" dirty="0"/>
           </a:p>
@@ -859,7 +859,7 @@
           <a:p>
             <a:r>
               <a:rPr lang="en-US" dirty="0"/>
-              <a:t>Four things I would tell anyone doing this. Put knowledge injection upstream — at the blend stage it bought nothing. While you iterate, local cross-validation is the only feedback you get, and it can look healthy while the leaderboard says otherwise. Version the agent, not just the code: an architecture change invalidates every run before it. And isolate mechanically, then read the transcripts — including your auditor's: mine was exempting the commands every lane actually issues, so the one command it existed to catch was never examined. (43s)</a:t>
+              <a:t>Four things I would tell anyone doing this. Put knowledge injection upstream — at the blend stage it bought nothing. While you iterate, local cross-validation is the only feedback you get, and it can look healthy while the leaderboard says otherwise. Never mix agent versions in one table: an architecture change invalidates every run before it. And isolate mechanically, then read the transcripts — including your auditor's: mine was exempting the commands every lane actually issues, so the one command it existed to catch was never examined. (43s)</a:t>
             </a:r>
             <a:endParaRPr lang="en-US" dirty="0"/>
           </a:p>
@@ -947,7 +947,7 @@
           <a:p>
             <a:r>
               <a:rPr lang="en-US" dirty="0"/>
-              <a:t>Where working this way still falls short. Engineering judgment is the gap, not technique: nothing in the loop can tell at design time whether an architecture will hold, and by the time the flaws surface the debt is already there. A pipeline will happily log success for work nothing performed — ours emitted instructions the evaluator had never implemented, and the ledger recorded them as handled. And AI writing habits survive review — redundant suffixes, invented terminology, and detail in place of the question you actually came for. Thank you. (37s)</a:t>
+              <a:t>Where working this way still falls short. There is no engineering judgment at design time: nothing in the loop can tell whether an architecture will hold until it runs, and by the time the flaws surface the debt is already there. And AI writing habits survive review — redundant suffixes, invented terminology, and detail in place of the question you actually came for. Thank you. (37s)</a:t>
             </a:r>
             <a:endParaRPr lang="en-US" dirty="0"/>
           </a:p>
@@ -1415,7 +1415,7 @@
                 <a:ea typeface="Arial" pitchFamily="34" charset="-122"/>
                 <a:cs typeface="Arial" pitchFamily="34" charset="-120"/>
               </a:rPr>
-              <a:t>An end-to-end LLM agent benchmarked against two frozen yardsticks on 20 Kaggle competitions</a:t>
+              <a:t>An end-to-end LLM agent benchmarked against two frozen reference agents on 20 Kaggle competitions</a:t>
             </a:r>
             <a:endParaRPr lang="en-US" sz="1800" dirty="0"/>
           </a:p>
@@ -1977,7 +1977,7 @@
                 <a:ea typeface="Arial" pitchFamily="34" charset="-122"/>
                 <a:cs typeface="Arial" pitchFamily="34" charset="-120"/>
               </a:rPr>
-              <a:t>; gradient boosting does the fitting; a tree search over complete candidate solutions is the optimisation loop.</a:t>
+              <a:t>; gradient boosting does the fitting; a tree search over complete candidate solutions is the optimization loop.</a:t>
             </a:r>
             <a:endParaRPr lang="en-US" sz="1600" dirty="0"/>
           </a:p>
@@ -2058,7 +2058,7 @@
                 <a:ea typeface="Arial" pitchFamily="34" charset="-122"/>
                 <a:cs typeface="Arial" pitchFamily="34" charset="-120"/>
               </a:rPr>
-              <a:t>, before any modelling.</a:t>
+              <a:t>, before any modeling.</a:t>
             </a:r>
             <a:endParaRPr lang="en-US" sz="1600" dirty="0"/>
           </a:p>
@@ -2260,7 +2260,7 @@
                 <a:ea typeface="Arial" pitchFamily="34" charset="-122"/>
                 <a:cs typeface="Arial" pitchFamily="34" charset="-120"/>
               </a:rPr>
-              <a:t> against 42.3% for each frozen yardstick.</a:t>
+              <a:t> against 42.3% for each frozen reference agent.</a:t>
             </a:r>
             <a:endParaRPr lang="en-US" sz="1700" dirty="0"/>
           </a:p>
@@ -2885,7 +2885,7 @@
                 <a:ea typeface="Arial" pitchFamily="34" charset="-122"/>
                 <a:cs typeface="Arial" pitchFamily="34" charset="-120"/>
               </a:rPr>
-              <a:t>·   Local CV is your only feedback.</a:t>
+              <a:t>·   No score until you submit.</a:t>
             </a:r>
             <a:pPr indent="0" marL="0">
               <a:buNone/>
@@ -2899,7 +2899,7 @@
                 <a:ea typeface="Arial" pitchFamily="34" charset="-122"/>
                 <a:cs typeface="Arial" pitchFamily="34" charset="-120"/>
               </a:rPr>
-              <a:t> A competition returns no score until submission, so an error in problem-level judgment leaves CV looking healthy while the leaderboard says otherwise.</a:t>
+              <a:t> While you iterate, local CV is all you see, so an error in problem-level judgment leaves CV looking healthy while the leaderboard says otherwise.</a:t>
             </a:r>
             <a:endParaRPr lang="en-US" sz="1600" dirty="0"/>
           </a:p>
@@ -2938,7 +2938,7 @@
                 <a:ea typeface="Arial" pitchFamily="34" charset="-122"/>
                 <a:cs typeface="Arial" pitchFamily="34" charset="-120"/>
               </a:rPr>
-              <a:t>·   Version the agent itself.</a:t>
+              <a:t>·   Never mix agent versions in one table.</a:t>
             </a:r>
             <a:pPr indent="0" marL="0">
               <a:buNone/>
@@ -2952,7 +2952,7 @@
                 <a:ea typeface="Arial" pitchFamily="34" charset="-122"/>
                 <a:cs typeface="Arial" pitchFamily="34" charset="-120"/>
               </a:rPr>
-              <a:t> An architecture change invalidates every competition that ran before it — start the benchmark over rather than mixing versions in one table.</a:t>
+              <a:t> An architecture change invalidates every competition that ran before it — rebuild the run root and start the benchmark over.</a:t>
             </a:r>
             <a:endParaRPr lang="en-US" sz="1600" dirty="0"/>
           </a:p>
@@ -3115,7 +3115,7 @@
                 <a:ea typeface="Arial" pitchFamily="34" charset="-122"/>
                 <a:cs typeface="Arial" pitchFamily="34" charset="-120"/>
               </a:rPr>
-              <a:t>·   Engineering judgment is the gap.</a:t>
+              <a:t>·   No engineering judgment at design time.</a:t>
             </a:r>
             <a:pPr indent="0" marL="0">
               <a:buNone/>
@@ -3129,7 +3129,7 @@
                 <a:ea typeface="Arial" pitchFamily="34" charset="-122"/>
                 <a:cs typeface="Arial" pitchFamily="34" charset="-120"/>
               </a:rPr>
-              <a:t> Nothing in the loop can tell at design time whether an architecture will hold; the flaws surface once it runs, and the debt grows with every competition added.</a:t>
+              <a:t> Nothing in the loop can tell whether an architecture will hold until it runs, and the debt grows with every competition added.</a:t>
             </a:r>
             <a:endParaRPr lang="en-US" sz="1600" dirty="0"/>
           </a:p>
@@ -3143,7 +3143,7 @@
         </p:nvSpPr>
         <p:spPr>
           <a:xfrm>
-            <a:off x="868680" y="2011680"/>
+            <a:off x="868680" y="2926080"/>
             <a:ext cx="10607040" cy="777240"/>
           </a:xfrm>
           <a:prstGeom prst="rect">
@@ -3168,7 +3168,7 @@
                 <a:ea typeface="Arial" pitchFamily="34" charset="-122"/>
                 <a:cs typeface="Arial" pitchFamily="34" charset="-120"/>
               </a:rPr>
-              <a:t>·   Pipelines log success for missing work.</a:t>
+              <a:t>·   AI writing habits survive review</a:t>
             </a:r>
             <a:pPr indent="0" marL="0">
               <a:buNone/>
@@ -3182,7 +3182,7 @@
                 <a:ea typeface="Arial" pitchFamily="34" charset="-122"/>
                 <a:cs typeface="Arial" pitchFamily="34" charset="-120"/>
               </a:rPr>
-              <a:t> Our dossier emitted operators the evaluator had never implemented — no warning, and the ledger recorded it as handled.</a:t>
+              <a:t> — redundant suffixes, invented terminology, detail in place of the question the reader came for.</a:t>
             </a:r>
             <a:endParaRPr lang="en-US" sz="1600" dirty="0"/>
           </a:p>
@@ -3191,59 +3191,6 @@
       <p:sp>
         <p:nvSpPr>
           <p:cNvPr id="5" name="Text 3"/>
-          <p:cNvSpPr/>
-          <p:nvPr/>
-        </p:nvSpPr>
-        <p:spPr>
-          <a:xfrm>
-            <a:off x="868680" y="2926080"/>
-            <a:ext cx="10607040" cy="777240"/>
-          </a:xfrm>
-          <a:prstGeom prst="rect">
-            <a:avLst/>
-          </a:prstGeom>
-          <a:noFill/>
-          <a:ln/>
-        </p:spPr>
-        <p:txBody>
-          <a:bodyPr wrap="square" lIns="0" tIns="0" rIns="0" bIns="0" rtlCol="0" anchor="ctr"/>
-          <a:lstStyle/>
-          <a:p>
-            <a:pPr indent="0" marL="0">
-              <a:buNone/>
-            </a:pPr>
-            <a:r>
-              <a:rPr lang="en-US" sz="1600" b="1" dirty="0">
-                <a:solidFill>
-                  <a:srgbClr val="111111"/>
-                </a:solidFill>
-                <a:latin typeface="Arial" pitchFamily="34" charset="0"/>
-                <a:ea typeface="Arial" pitchFamily="34" charset="-122"/>
-                <a:cs typeface="Arial" pitchFamily="34" charset="-120"/>
-              </a:rPr>
-              <a:t>·   AI writing habits survive review</a:t>
-            </a:r>
-            <a:pPr indent="0" marL="0">
-              <a:buNone/>
-            </a:pPr>
-            <a:r>
-              <a:rPr lang="en-US" sz="1600" dirty="0">
-                <a:solidFill>
-                  <a:srgbClr val="111111"/>
-                </a:solidFill>
-                <a:latin typeface="Arial" pitchFamily="34" charset="0"/>
-                <a:ea typeface="Arial" pitchFamily="34" charset="-122"/>
-                <a:cs typeface="Arial" pitchFamily="34" charset="-120"/>
-              </a:rPr>
-              <a:t> — redundant suffixes, invented terminology, detail in place of the question the reader came for.</a:t>
-            </a:r>
-            <a:endParaRPr lang="en-US" sz="1600" dirty="0"/>
-          </a:p>
-        </p:txBody>
-      </p:sp>
-      <p:sp>
-        <p:nvSpPr>
-          <p:cNvPr id="6" name="Text 4"/>
           <p:cNvSpPr/>
           <p:nvPr/>
         </p:nvSpPr>

--- a/docs/presentation/slides_4min.pptx
+++ b/docs/presentation/slides_4min.pptx
@@ -3076,7 +3076,7 @@
                 <a:ea typeface="Arial" pitchFamily="34" charset="-122"/>
                 <a:cs typeface="Arial" pitchFamily="34" charset="-120"/>
               </a:rPr>
-              <a:t>5 · AI's blind spots</a:t>
+              <a:t>5 · Weaknesses of AI-heavy research</a:t>
             </a:r>
             <a:endParaRPr lang="en-US" sz="2600" dirty="0"/>
           </a:p>

--- a/docs/presentation/slides_4min.pptx
+++ b/docs/presentation/slides_4min.pptx
@@ -507,7 +507,7 @@
           <a:p>
             <a:r>
               <a:rPr lang="en-US" dirty="0"/>
-              <a:t>This is an end-to-end agent for Kaggle competitions: it takes a raw dataset and returns a submission, with no person in the loop. I benchmarked it against two frozen reference agents on twenty competitions, scored on the real leaderboards. (18s)</a:t>
+              <a:t>Sinica is an end-to-end agent for Kaggle competitions: it takes a raw dataset and returns a submission, with no person in the loop. I benchmarked it against two frozen reference agents on twenty competitions, scored on the real leaderboards. (18s)</a:t>
             </a:r>
             <a:endParaRPr lang="en-US" dirty="0"/>
           </a:p>
@@ -771,7 +771,7 @@
           <a:p>
             <a:r>
               <a:rPr lang="en-US" dirty="0"/>
-              <a:t>Here is the reading. All twenty lanes are scored on the real leaderboard, and every one of the sixty duels is judged against the score noise measured on Kaggle's own split of the test set: thirty-eight decide, twenty-two the data refuses to call. My agent leads — sixteen wins to eight of its decided duels, sixty-six point seven percent, against forty-two point three for each reference agent. It takes the best private score on ten of the twenty competitions, and on three harder competitions outside tabular data it takes the best of the three every time. (45s)</a:t>
+              <a:t>Here is the reading. All twenty lanes are scored on the real leaderboard, and every one of the sixty duels is judged against the score noise measured on Kaggle's own split of the test set: thirty-eight decide, twenty-two the data refuses to call. Sinica leads — sixteen wins to eight of its decided duels, sixty-six point seven percent, against forty-two point three for each reference agent. It takes the best private score on ten of the twenty competitions, and on three harder competitions outside tabular data it takes the best of the three every time. (45s)</a:t>
             </a:r>
             <a:endParaRPr lang="en-US" dirty="0"/>
           </a:p>
@@ -1407,6 +1407,20 @@
               <a:buNone/>
             </a:pPr>
             <a:r>
+              <a:rPr lang="en-US" sz="1800" b="1" dirty="0">
+                <a:solidFill>
+                  <a:srgbClr val="CADCFC"/>
+                </a:solidFill>
+                <a:latin typeface="Arial" pitchFamily="34" charset="0"/>
+                <a:ea typeface="Arial" pitchFamily="34" charset="-122"/>
+                <a:cs typeface="Arial" pitchFamily="34" charset="-120"/>
+              </a:rPr>
+              <a:t>Sinica</a:t>
+            </a:r>
+            <a:pPr indent="0" marL="0">
+              <a:buNone/>
+            </a:pPr>
+            <a:r>
               <a:rPr lang="en-US" sz="1800" dirty="0">
                 <a:solidFill>
                   <a:srgbClr val="CADCFC"/>
@@ -1415,7 +1429,7 @@
                 <a:ea typeface="Arial" pitchFamily="34" charset="-122"/>
                 <a:cs typeface="Arial" pitchFamily="34" charset="-120"/>
               </a:rPr>
-              <a:t>An end-to-end LLM agent benchmarked against two frozen reference agents on 20 Kaggle competitions</a:t>
+              <a:t>: an end-to-end LLM agent benchmarked against two frozen reference agents on 20 Kaggle competitions</a:t>
             </a:r>
             <a:endParaRPr lang="en-US" sz="1800" dirty="0"/>
           </a:p>
@@ -2246,7 +2260,7 @@
                 <a:ea typeface="Arial" pitchFamily="34" charset="-122"/>
                 <a:cs typeface="Arial" pitchFamily="34" charset="-120"/>
               </a:rPr>
-              <a:t>my-agent leads: 16 wins / 8 losses (66.7% of its decided duels)</a:t>
+              <a:t>Sinica leads: 16 wins / 8 losses (66.7% of its decided duels)</a:t>
             </a:r>
             <a:pPr indent="0" marL="0">
               <a:buNone/>
@@ -2338,7 +2352,7 @@
                 <a:ea typeface="Arial" pitchFamily="34" charset="-122"/>
                 <a:cs typeface="Arial" pitchFamily="34" charset="-120"/>
               </a:rPr>
-              <a:t>my-agent</a:t>
+              <a:t>Sinica</a:t>
             </a:r>
             <a:endParaRPr lang="en-US" sz="1700" dirty="0"/>
           </a:p>
@@ -2722,7 +2736,7 @@
                 <a:ea typeface="Arial" pitchFamily="34" charset="-122"/>
                 <a:cs typeface="Arial" pitchFamily="34" charset="-120"/>
               </a:rPr>
-              <a:t>Beyond tabular: on three mid-complexity competitions (NLP, physiological time series, medical imaging) my-agent takes the three-way best on all three.</a:t>
+              <a:t>Beyond tabular: on three mid-complexity competitions (NLP, physiological time series, medical imaging) Sinica takes the three-way best on all three.</a:t>
             </a:r>
             <a:endParaRPr lang="en-US" sz="1500" dirty="0"/>
           </a:p>

--- a/docs/presentation/slides_4min.pptx
+++ b/docs/presentation/slides_4min.pptx
@@ -859,7 +859,7 @@
           <a:p>
             <a:r>
               <a:rPr lang="en-US" dirty="0"/>
-              <a:t>Four things I would tell anyone doing this. Put knowledge injection upstream — at the blend stage it bought nothing. While you iterate, local cross-validation is the only feedback you get, and it can look healthy while the leaderboard says otherwise. Never mix agent versions in one table: an architecture change invalidates every run before it. And isolate mechanically, then read the transcripts — including your auditor's: mine was exempting the commands every lane actually issues, so the one command it existed to catch was never examined. (43s)</a:t>
+              <a:t>Four things I would tell anyone doing this. Put knowledge injection upstream — at the blend stage it bought nothing. While you iterate, local cross-validation is the only feedback you get, and it can look healthy while the leaderboard says otherwise. Never mix agent versions in one table, because an architecture change invalidates every run before it and every mid-flight change costs a tail of bugs and then a re-run to earn the score back. And isolate the isolation right: if a lane can reach a leaderboard or another lane's work, every number in the table is worthless, so it has to be enforced by the setup rather than by instruction. (43s)</a:t>
             </a:r>
             <a:endParaRPr lang="en-US" dirty="0"/>
           </a:p>
@@ -947,7 +947,7 @@
           <a:p>
             <a:r>
               <a:rPr lang="en-US" dirty="0"/>
-              <a:t>Where working this way still falls short. There is no engineering judgment at design time: nothing in the loop can tell whether an architecture will hold until it runs, and by the time the flaws surface the debt is already there. And AI writing habits survive review — redundant suffixes, invented terminology, and detail in place of the question you actually came for. Thank you. (37s)</a:t>
+              <a:t>Where working this way still falls short. The loop has strong hands but no design judgment: it solves the problem it is handed, never asks whether the change was worth making, and there is no engineering judgment at design time: nothing in the loop can tell whether an architecture will hold until it runs, and by the time the flaws surface the debt is already there. And AI writing habits survive review — redundant suffixes, invented terminology, and detail in place of the question you actually came for. Thank you. (37s)</a:t>
             </a:r>
             <a:endParaRPr lang="en-US" dirty="0"/>
           </a:p>
@@ -1390,59 +1390,6 @@
         </p:nvSpPr>
         <p:spPr>
           <a:xfrm>
-            <a:off x="822960" y="3337560"/>
-            <a:ext cx="10058400" cy="457200"/>
-          </a:xfrm>
-          <a:prstGeom prst="rect">
-            <a:avLst/>
-          </a:prstGeom>
-          <a:noFill/>
-          <a:ln/>
-        </p:spPr>
-        <p:txBody>
-          <a:bodyPr wrap="square" lIns="0" tIns="0" rIns="0" bIns="0" rtlCol="0" anchor="ctr"/>
-          <a:lstStyle/>
-          <a:p>
-            <a:pPr indent="0" marL="0">
-              <a:buNone/>
-            </a:pPr>
-            <a:r>
-              <a:rPr lang="en-US" sz="1800" b="1" dirty="0">
-                <a:solidFill>
-                  <a:srgbClr val="CADCFC"/>
-                </a:solidFill>
-                <a:latin typeface="Arial" pitchFamily="34" charset="0"/>
-                <a:ea typeface="Arial" pitchFamily="34" charset="-122"/>
-                <a:cs typeface="Arial" pitchFamily="34" charset="-120"/>
-              </a:rPr>
-              <a:t>Sinica</a:t>
-            </a:r>
-            <a:pPr indent="0" marL="0">
-              <a:buNone/>
-            </a:pPr>
-            <a:r>
-              <a:rPr lang="en-US" sz="1800" dirty="0">
-                <a:solidFill>
-                  <a:srgbClr val="CADCFC"/>
-                </a:solidFill>
-                <a:latin typeface="Arial" pitchFamily="34" charset="0"/>
-                <a:ea typeface="Arial" pitchFamily="34" charset="-122"/>
-                <a:cs typeface="Arial" pitchFamily="34" charset="-120"/>
-              </a:rPr>
-              <a:t>: an end-to-end LLM agent benchmarked against two frozen reference agents on 20 Kaggle competitions</a:t>
-            </a:r>
-            <a:endParaRPr lang="en-US" sz="1800" dirty="0"/>
-          </a:p>
-        </p:txBody>
-      </p:sp>
-      <p:sp>
-        <p:nvSpPr>
-          <p:cNvPr id="4" name="Text 2"/>
-          <p:cNvSpPr/>
-          <p:nvPr/>
-        </p:nvSpPr>
-        <p:spPr>
-          <a:xfrm>
             <a:off x="822960" y="5577840"/>
             <a:ext cx="10789920" cy="402336"/>
           </a:xfrm>
@@ -1578,7 +1525,7 @@
                 <a:ea typeface="Arial" pitchFamily="34" charset="-122"/>
                 <a:cs typeface="Arial" pitchFamily="34" charset="-120"/>
               </a:rPr>
-              <a:t>Why these tasks are hard</a:t>
+              <a:t>Challenges of Kaggle competitions</a:t>
             </a:r>
             <a:endParaRPr lang="en-US" sz="1900" dirty="0"/>
           </a:p>
@@ -1617,7 +1564,7 @@
                 <a:ea typeface="Arial" pitchFamily="34" charset="-122"/>
                 <a:cs typeface="Arial" pitchFamily="34" charset="-120"/>
               </a:rPr>
-              <a:t>·   A competition demands the whole expert loop — validation design, features, model selection, ensembling — and the top entries separate at the </a:t>
+              <a:t>·   A competition demands the whole expert loop: validation design, features, model selection, ensembling. The top entries separate by a </a:t>
             </a:r>
             <a:pPr indent="0" marL="0">
               <a:buNone/>
@@ -1631,7 +1578,7 @@
                 <a:ea typeface="Arial" pitchFamily="34" charset="-122"/>
                 <a:cs typeface="Arial" pitchFamily="34" charset="-120"/>
               </a:rPr>
-              <a:t>fourth or fifth decimal.</a:t>
+              <a:t>very small margin.</a:t>
             </a:r>
             <a:endParaRPr lang="en-US" sz="1700" dirty="0"/>
           </a:p>
@@ -1645,8 +1592,8 @@
         </p:nvSpPr>
         <p:spPr>
           <a:xfrm>
-            <a:off x="868680" y="2304288"/>
-            <a:ext cx="10607040" cy="502920"/>
+            <a:off x="658368" y="2514600"/>
+            <a:ext cx="10881360" cy="365760"/>
           </a:xfrm>
           <a:prstGeom prst="rect">
             <a:avLst/>
@@ -1662,45 +1609,17 @@
               <a:buNone/>
             </a:pPr>
             <a:r>
-              <a:rPr lang="en-US" sz="1700" dirty="0">
-                <a:solidFill>
-                  <a:srgbClr val="111111"/>
-                </a:solidFill>
-                <a:latin typeface="Arial" pitchFamily="34" charset="0"/>
-                <a:ea typeface="Arial" pitchFamily="34" charset="-122"/>
-                <a:cs typeface="Arial" pitchFamily="34" charset="-120"/>
-              </a:rPr>
-              <a:t>·   At that scale </a:t>
-            </a:r>
-            <a:pPr indent="0" marL="0">
-              <a:buNone/>
-            </a:pPr>
-            <a:r>
-              <a:rPr lang="en-US" sz="1700" b="1" dirty="0">
-                <a:solidFill>
-                  <a:srgbClr val="111111"/>
-                </a:solidFill>
-                <a:latin typeface="Arial" pitchFamily="34" charset="0"/>
-                <a:ea typeface="Arial" pitchFamily="34" charset="-122"/>
-                <a:cs typeface="Arial" pitchFamily="34" charset="-120"/>
-              </a:rPr>
-              <a:t>local cross-validation is an unreliable compass</a:t>
-            </a:r>
-            <a:pPr indent="0" marL="0">
-              <a:buNone/>
-            </a:pPr>
-            <a:r>
-              <a:rPr lang="en-US" sz="1700" dirty="0">
-                <a:solidFill>
-                  <a:srgbClr val="111111"/>
-                </a:solidFill>
-                <a:latin typeface="Arial" pitchFamily="34" charset="0"/>
-                <a:ea typeface="Arial" pitchFamily="34" charset="-122"/>
-                <a:cs typeface="Arial" pitchFamily="34" charset="-120"/>
-              </a:rPr>
-              <a:t>: a pipeline's own score routinely disagrees with the leaderboard.</a:t>
-            </a:r>
-            <a:endParaRPr lang="en-US" sz="1700" dirty="0"/>
+              <a:rPr lang="en-US" sz="1900" b="1" dirty="0">
+                <a:solidFill>
+                  <a:srgbClr val="111111"/>
+                </a:solidFill>
+                <a:latin typeface="Arial" pitchFamily="34" charset="0"/>
+                <a:ea typeface="Arial" pitchFamily="34" charset="-122"/>
+                <a:cs typeface="Arial" pitchFamily="34" charset="-120"/>
+              </a:rPr>
+              <a:t>Why an AI agent</a:t>
+            </a:r>
+            <a:endParaRPr lang="en-US" sz="1900" dirty="0"/>
           </a:p>
         </p:txBody>
       </p:sp>
@@ -1712,8 +1631,8 @@
         </p:nvSpPr>
         <p:spPr>
           <a:xfrm>
-            <a:off x="658368" y="3154680"/>
-            <a:ext cx="10881360" cy="365760"/>
+            <a:off x="868680" y="2944368"/>
+            <a:ext cx="10607040" cy="502920"/>
           </a:xfrm>
           <a:prstGeom prst="rect">
             <a:avLst/>
@@ -1729,17 +1648,73 @@
               <a:buNone/>
             </a:pPr>
             <a:r>
-              <a:rPr lang="en-US" sz="1900" b="1" dirty="0">
-                <a:solidFill>
-                  <a:srgbClr val="111111"/>
-                </a:solidFill>
-                <a:latin typeface="Arial" pitchFamily="34" charset="0"/>
-                <a:ea typeface="Arial" pitchFamily="34" charset="-122"/>
-                <a:cs typeface="Arial" pitchFamily="34" charset="-120"/>
-              </a:rPr>
-              <a:t>Why an AI agent</a:t>
-            </a:r>
-            <a:endParaRPr lang="en-US" sz="1900" dirty="0"/>
+              <a:rPr lang="en-US" sz="1700" dirty="0">
+                <a:solidFill>
+                  <a:srgbClr val="111111"/>
+                </a:solidFill>
+                <a:latin typeface="Arial" pitchFamily="34" charset="0"/>
+                <a:ea typeface="Arial" pitchFamily="34" charset="-122"/>
+                <a:cs typeface="Arial" pitchFamily="34" charset="-120"/>
+              </a:rPr>
+              <a:t>·   A competition is a </a:t>
+            </a:r>
+            <a:pPr indent="0" marL="0">
+              <a:buNone/>
+            </a:pPr>
+            <a:r>
+              <a:rPr lang="en-US" sz="1700" b="1" dirty="0">
+                <a:solidFill>
+                  <a:srgbClr val="111111"/>
+                </a:solidFill>
+                <a:latin typeface="Arial" pitchFamily="34" charset="0"/>
+                <a:ea typeface="Arial" pitchFamily="34" charset="-122"/>
+                <a:cs typeface="Arial" pitchFamily="34" charset="-120"/>
+              </a:rPr>
+              <a:t>scorable task</a:t>
+            </a:r>
+            <a:pPr indent="0" marL="0">
+              <a:buNone/>
+            </a:pPr>
+            <a:r>
+              <a:rPr lang="en-US" sz="1700" dirty="0">
+                <a:solidFill>
+                  <a:srgbClr val="111111"/>
+                </a:solidFill>
+                <a:latin typeface="Arial" pitchFamily="34" charset="0"/>
+                <a:ea typeface="Arial" pitchFamily="34" charset="-122"/>
+                <a:cs typeface="Arial" pitchFamily="34" charset="-120"/>
+              </a:rPr>
+              <a:t>: every candidate returns a number, so it can be </a:t>
+            </a:r>
+            <a:pPr indent="0" marL="0">
+              <a:buNone/>
+            </a:pPr>
+            <a:r>
+              <a:rPr lang="en-US" sz="1700" b="1" dirty="0">
+                <a:solidFill>
+                  <a:srgbClr val="111111"/>
+                </a:solidFill>
+                <a:latin typeface="Arial" pitchFamily="34" charset="0"/>
+                <a:ea typeface="Arial" pitchFamily="34" charset="-122"/>
+                <a:cs typeface="Arial" pitchFamily="34" charset="-120"/>
+              </a:rPr>
+              <a:t>optimized automatically</a:t>
+            </a:r>
+            <a:pPr indent="0" marL="0">
+              <a:buNone/>
+            </a:pPr>
+            <a:r>
+              <a:rPr lang="en-US" sz="1700" dirty="0">
+                <a:solidFill>
+                  <a:srgbClr val="111111"/>
+                </a:solidFill>
+                <a:latin typeface="Arial" pitchFamily="34" charset="0"/>
+                <a:ea typeface="Arial" pitchFamily="34" charset="-122"/>
+                <a:cs typeface="Arial" pitchFamily="34" charset="-120"/>
+              </a:rPr>
+              <a:t> (propose, score, keep the better, repeat).</a:t>
+            </a:r>
+            <a:endParaRPr lang="en-US" sz="1700" dirty="0"/>
           </a:p>
         </p:txBody>
       </p:sp>
@@ -1751,7 +1726,7 @@
         </p:nvSpPr>
         <p:spPr>
           <a:xfrm>
-            <a:off x="868680" y="3584448"/>
+            <a:off x="868680" y="3602736"/>
             <a:ext cx="10607040" cy="502920"/>
           </a:xfrm>
           <a:prstGeom prst="rect">
@@ -1776,74 +1751,7 @@
                 <a:ea typeface="Arial" pitchFamily="34" charset="-122"/>
                 <a:cs typeface="Arial" pitchFamily="34" charset="-120"/>
               </a:rPr>
-              <a:t>·   Tireless, systematic search: </a:t>
-            </a:r>
-            <a:pPr indent="0" marL="0">
-              <a:buNone/>
-            </a:pPr>
-            <a:r>
-              <a:rPr lang="en-US" sz="1700" b="1" dirty="0">
-                <a:solidFill>
-                  <a:srgbClr val="111111"/>
-                </a:solidFill>
-                <a:latin typeface="Arial" pitchFamily="34" charset="0"/>
-                <a:ea typeface="Arial" pitchFamily="34" charset="-122"/>
-                <a:cs typeface="Arial" pitchFamily="34" charset="-120"/>
-              </a:rPr>
-              <a:t>37–224</a:t>
-            </a:r>
-            <a:pPr indent="0" marL="0">
-              <a:buNone/>
-            </a:pPr>
-            <a:r>
-              <a:rPr lang="en-US" sz="1700" dirty="0">
-                <a:solidFill>
-                  <a:srgbClr val="111111"/>
-                </a:solidFill>
-                <a:latin typeface="Arial" pitchFamily="34" charset="0"/>
-                <a:ea typeface="Arial" pitchFamily="34" charset="-122"/>
-                <a:cs typeface="Arial" pitchFamily="34" charset="-120"/>
-              </a:rPr>
-              <a:t> candidate configurations per competition, every experiment logged.</a:t>
-            </a:r>
-            <a:endParaRPr lang="en-US" sz="1700" dirty="0"/>
-          </a:p>
-        </p:txBody>
-      </p:sp>
-      <p:sp>
-        <p:nvSpPr>
-          <p:cNvPr id="8" name="Text 6"/>
-          <p:cNvSpPr/>
-          <p:nvPr/>
-        </p:nvSpPr>
-        <p:spPr>
-          <a:xfrm>
-            <a:off x="868680" y="4133088"/>
-            <a:ext cx="10607040" cy="502920"/>
-          </a:xfrm>
-          <a:prstGeom prst="rect">
-            <a:avLst/>
-          </a:prstGeom>
-          <a:noFill/>
-          <a:ln/>
-        </p:spPr>
-        <p:txBody>
-          <a:bodyPr wrap="square" lIns="0" tIns="0" rIns="0" bIns="0" rtlCol="0" anchor="ctr"/>
-          <a:lstStyle/>
-          <a:p>
-            <a:pPr indent="0" marL="0">
-              <a:buNone/>
-            </a:pPr>
-            <a:r>
-              <a:rPr lang="en-US" sz="1700" dirty="0">
-                <a:solidFill>
-                  <a:srgbClr val="111111"/>
-                </a:solidFill>
-                <a:latin typeface="Arial" pitchFamily="34" charset="0"/>
-                <a:ea typeface="Arial" pitchFamily="34" charset="-122"/>
-                <a:cs typeface="Arial" pitchFamily="34" charset="-120"/>
-              </a:rPr>
-              <a:t>·   The same disciplined protocol on 20 competitions in a row — a consistency a person cannot hold.</a:t>
+              <a:t>·   Tireless, systematic search over candidate configurations, every experiment logged and reproducible.</a:t>
             </a:r>
             <a:endParaRPr lang="en-US" sz="1700" dirty="0"/>
           </a:p>
@@ -2807,7 +2715,7 @@
                 <a:ea typeface="Arial" pitchFamily="34" charset="-122"/>
                 <a:cs typeface="Arial" pitchFamily="34" charset="-120"/>
               </a:rPr>
-              <a:t>4 · Lessons learned</a:t>
+              <a:t>4 · Reflections</a:t>
             </a:r>
             <a:endParaRPr lang="en-US" sz="2600" dirty="0"/>
           </a:p>
@@ -2860,7 +2768,21 @@
                 <a:ea typeface="Arial" pitchFamily="34" charset="-122"/>
                 <a:cs typeface="Arial" pitchFamily="34" charset="-120"/>
               </a:rPr>
-              <a:t> At the blend stage it measured near-nothing; moved into problem identification it flags exactly the competitions that need external data.</a:t>
+              <a:t> At the blend stage it measured near-nothing; moved into problem identification it </a:t>
+            </a:r>
+            <a:pPr indent="0" marL="0">
+              <a:buNone/>
+            </a:pPr>
+            <a:r>
+              <a:rPr lang="en-US" sz="1600" b="1" dirty="0">
+                <a:solidFill>
+                  <a:srgbClr val="111111"/>
+                </a:solidFill>
+                <a:latin typeface="Arial" pitchFamily="34" charset="0"/>
+                <a:ea typeface="Arial" pitchFamily="34" charset="-122"/>
+                <a:cs typeface="Arial" pitchFamily="34" charset="-120"/>
+              </a:rPr>
+              <a:t>improves scores significantly.</a:t>
             </a:r>
             <a:endParaRPr lang="en-US" sz="1600" dirty="0"/>
           </a:p>
@@ -2952,7 +2874,7 @@
                 <a:ea typeface="Arial" pitchFamily="34" charset="-122"/>
                 <a:cs typeface="Arial" pitchFamily="34" charset="-120"/>
               </a:rPr>
-              <a:t>·   Never mix agent versions in one table.</a:t>
+              <a:t>·   Freeze the architecture before you measure.</a:t>
             </a:r>
             <a:pPr indent="0" marL="0">
               <a:buNone/>
@@ -2966,7 +2888,7 @@
                 <a:ea typeface="Arial" pitchFamily="34" charset="-122"/>
                 <a:cs typeface="Arial" pitchFamily="34" charset="-120"/>
               </a:rPr>
-              <a:t> An architecture change invalidates every competition that ran before it — rebuild the run root and start the benchmark over.</a:t>
+              <a:t> One results table can report only one agent version, so an architectural change invalidates every run before it. That is why such a change costs twice: a tail of bugs to fix, then a full re-run to earn the voided scores back.</a:t>
             </a:r>
             <a:endParaRPr lang="en-US" sz="1600" dirty="0"/>
           </a:p>
@@ -2980,7 +2902,7 @@
         </p:nvSpPr>
         <p:spPr>
           <a:xfrm>
-            <a:off x="868680" y="3840480"/>
+            <a:off x="868680" y="4023360"/>
             <a:ext cx="10607040" cy="777240"/>
           </a:xfrm>
           <a:prstGeom prst="rect">
@@ -3005,7 +2927,7 @@
                 <a:ea typeface="Arial" pitchFamily="34" charset="-122"/>
                 <a:cs typeface="Arial" pitchFamily="34" charset="-120"/>
               </a:rPr>
-              <a:t>·   Isolate mechanically then audit transcripts</a:t>
+              <a:t>·   Get isolation right.</a:t>
             </a:r>
             <a:pPr indent="0" marL="0">
               <a:buNone/>
@@ -3019,7 +2941,7 @@
                 <a:ea typeface="Arial" pitchFamily="34" charset="-122"/>
                 <a:cs typeface="Arial" pitchFamily="34" charset="-120"/>
               </a:rPr>
-              <a:t> — and audit the auditor: ours exempted every command starting with uv, so the one command it existed to catch was never examined.</a:t>
+              <a:t> If a lane can reach a leaderboard or another lane's work, every number in the table is worthless. It has to be enforced by the setup, not by telling the agent what to avoid.</a:t>
             </a:r>
             <a:endParaRPr lang="en-US" sz="1600" dirty="0"/>
           </a:p>
@@ -3129,7 +3051,7 @@
                 <a:ea typeface="Arial" pitchFamily="34" charset="-122"/>
                 <a:cs typeface="Arial" pitchFamily="34" charset="-120"/>
               </a:rPr>
-              <a:t>·   No engineering judgment at design time.</a:t>
+              <a:t>·   Strong hands, no design judgment.</a:t>
             </a:r>
             <a:pPr indent="0" marL="0">
               <a:buNone/>
@@ -3143,7 +3065,7 @@
                 <a:ea typeface="Arial" pitchFamily="34" charset="-122"/>
                 <a:cs typeface="Arial" pitchFamily="34" charset="-120"/>
               </a:rPr>
-              <a:t> Nothing in the loop can tell whether an architecture will hold until it runs, and the debt grows with every competition added.</a:t>
+              <a:t> The loop only solves the problem it is handed. It never asks whether a change is worth making, and nothing in it can tell whether an architecture holds until the runs come back, by which time the debt is already there.</a:t>
             </a:r>
             <a:endParaRPr lang="en-US" sz="1600" dirty="0"/>
           </a:p>
@@ -3157,7 +3079,7 @@
         </p:nvSpPr>
         <p:spPr>
           <a:xfrm>
-            <a:off x="868680" y="2926080"/>
+            <a:off x="868680" y="3657600"/>
             <a:ext cx="10607040" cy="777240"/>
           </a:xfrm>
           <a:prstGeom prst="rect">
@@ -3196,7 +3118,7 @@
                 <a:ea typeface="Arial" pitchFamily="34" charset="-122"/>
                 <a:cs typeface="Arial" pitchFamily="34" charset="-120"/>
               </a:rPr>
-              <a:t> — redundant suffixes, invented terminology, detail in place of the question the reader came for.</a:t>
+              <a:t>: redundant suffixes, invented terminology, detail in place of the question the reader came for.</a:t>
             </a:r>
             <a:endParaRPr lang="en-US" sz="1600" dirty="0"/>
           </a:p>

--- a/docs/presentation/slides_4min.pptx
+++ b/docs/presentation/slides_4min.pptx
@@ -11,9 +11,11 @@
     <p:sldId id="259" r:id="rId5"/>
     <p:sldId id="260" r:id="rId6"/>
     <p:sldId id="261" r:id="rId7"/>
+    <p:sldId id="262" r:id="rId8"/>
+    <p:sldId id="263" r:id="rId9"/>
   </p:sldIdLst>
   <p:notesMasterIdLst>
-    <p:notesMasterId r:id="rId8"/>
+    <p:notesMasterId r:id="rId10"/>
   </p:notesMasterIdLst>
   <p:sldSz cx="12192000" cy="6858000"/>
   <p:notesSz cx="6858000" cy="12192000"/>
@@ -507,7 +509,7 @@
           <a:p>
             <a:r>
               <a:rPr lang="en-US" dirty="0"/>
-              <a:t>Sinica is an end-to-end agent for Kaggle competitions: it takes a raw dataset and returns a submission, with no person in the loop. I benchmarked it against two frozen reference agents on twenty competitions, scored on the real leaderboards. (18s)</a:t>
+              <a:t>Sinica is an end-to-end agent for Kaggle competitions: it takes a raw dataset and returns a submission, with no person in the loop. I benchmarked it against two frozen reference agents on twenty-three competitions. (18s)</a:t>
             </a:r>
             <a:endParaRPr lang="en-US" dirty="0"/>
           </a:p>
@@ -595,7 +597,7 @@
           <a:p>
             <a:r>
               <a:rPr lang="en-US" dirty="0"/>
-              <a:t>Competitions demand the whole expert loop, and the top of the leaderboard separates at the fourth or fifth decimal, so tuning skill distinguishes nobody — and at that scale a pipeline's own cross-validation routinely disagrees with the leaderboard. What an agent brings is tireless, logged search: between thirty-seven and two hundred and twenty-four candidate configurations per competition, and the same protocol run twenty times without drifting. (32s)</a:t>
+              <a:t>Competitions demand the whole expert loop, and the top of the leaderboard separates at the fourth or fifth decimal, so tuning skill distinguishes nobody. Before any of that, every dataset needs the same repetitive preparation. What an agent brings is tireless, logged search: between thirty-seven and two hundred and twenty-four candidate configurations per competition, and the same protocol run twenty times without drifting. (32s)</a:t>
             </a:r>
             <a:endParaRPr lang="en-US" dirty="0"/>
           </a:p>
@@ -683,7 +685,7 @@
           <a:p>
             <a:r>
               <a:rPr lang="en-US" dirty="0"/>
-              <a:t>The pipeline reads top to bottom. An LLM reasons and decides at every stage, gradient boosting does the fitting, and a tree search over complete candidate solutions is the optimization loop. The one design decision that mattered is where outside knowledge enters. My first version put it downstream, at the blend — measured, it was worth ten to the minus five. So it moved upstream, into a dossier stage that classifies the task before any modeling. The lanes hold no Kaggle credentials, so nothing inside a run can touch a leaderboard. (40s)</a:t>
+              <a:t>The pipeline reads top to bottom. An LLM reasons and decides at every stage, gradient boosting does the fitting, and a tree search over complete candidate solutions is the optimization loop. The one design decision that mattered is where outside knowledge enters. My first version put it downstream, at the blend — measured, it was worth ten to the minus five. So it moved upstream, into a dossier stage that classifies the task before any modeling. The lanes hold no Kaggle credentials, so nothing inside a run can touch a leaderboard. If time allows: each run also writes a five-section ML specification report from its logged records — neither reference agent does this. (40s, +8s with the spec-report sentence)</a:t>
             </a:r>
             <a:endParaRPr lang="en-US" dirty="0"/>
           </a:p>
@@ -771,7 +773,7 @@
           <a:p>
             <a:r>
               <a:rPr lang="en-US" dirty="0"/>
-              <a:t>Here is the reading. All twenty lanes are scored on the real leaderboard, and every one of the sixty duels is judged against the score noise measured on Kaggle's own split of the test set: thirty-eight decide, twenty-two the data refuses to call. Sinica leads — sixteen wins to eight of its decided duels, sixty-six point seven percent, against forty-two point three for each reference agent. It takes the best private score on ten of the twenty competitions, and on three harder competitions outside tabular data it takes the best of the three every time. (45s)</a:t>
+              <a:t>All 23 competitions are scored: the 20 ordinary ones on the real private leaderboard, the 3 special ones offline with MLE-bench. Against the two reference agents, Sinica takes the best score on 13 of the 23 and leads the pairwise duels judged against the split noise — sixteen wins to eight of its decided duels, sixty-six point seven percent, against forty-two point three for each reference agent. (45s)</a:t>
             </a:r>
             <a:endParaRPr lang="en-US" dirty="0"/>
           </a:p>
@@ -859,7 +861,7 @@
           <a:p>
             <a:r>
               <a:rPr lang="en-US" dirty="0"/>
-              <a:t>Four things I would tell anyone doing this. Put knowledge injection upstream — at the blend stage it bought nothing. While you iterate, local cross-validation is the only feedback you get, and it can look healthy while the leaderboard says otherwise. Never mix agent versions in one table, because an architecture change invalidates every run before it and every mid-flight change costs a tail of bugs and then a re-run to earn the score back. And isolate the isolation right: if a lane can reach a leaderboard or another lane's work, every number in the table is worthless, so it has to be enforced by the setup rather than by instruction. (43s)</a:t>
+              <a:t>Where the approach falls short. The agent codes efficiently, but it has no design judgment: it never asks whether a change is worth making, so a poor design choice slips in and yields bugs. Its iteration can only target the local validation score, which can look outstanding while the real leaderboard score is mediocre. Heavy AI use also pulls a write-up toward technical detail and away from the question the reader came for. And its writing habits — redundant headings, reinvented terms — come back in every draft; verifying and fixing them by hand is exhausting. (45s)</a:t>
             </a:r>
             <a:endParaRPr lang="en-US" dirty="0"/>
           </a:p>
@@ -947,7 +949,7 @@
           <a:p>
             <a:r>
               <a:rPr lang="en-US" dirty="0"/>
-              <a:t>Where working this way still falls short. The loop has strong hands but no design judgment: it solves the problem it is handed, never asks whether the change was worth making, and there is no engineering judgment at design time: nothing in the loop can tell whether an architecture will hold until it runs, and by the time the flaws surface the debt is already there. And AI writing habits survive review — redundant suffixes, invented terminology, and detail in place of the question you actually came for. Thank you. (37s)</a:t>
+              <a:t>Three pieces of advice for anyone building one of these. Build an isolated environment before running the agent, so a run simply cannot reach the leaderboard or another run's files. Justify the design before building the pipeline — a redesign costs debugging plus a full rerun of earlier competitions. And inject external knowledge before data modeling — at the final blending step it bought almost nothing; before modeling it clearly helped. (38s)</a:t>
             </a:r>
             <a:endParaRPr lang="en-US" dirty="0"/>
           </a:p>
@@ -971,6 +973,182 @@
             <a:fld id="{F7021451-1387-4CA6-816F-3879F97B5CBC}" type="slidenum">
               <a:rPr lang="en-US"/>
               <a:t>6</a:t>
+            </a:fld>
+            <a:endParaRPr lang="en-US"/>
+          </a:p>
+        </p:txBody>
+      </p:sp>
+    </p:spTree>
+    <p:extLst>
+      <p:ext uri="{BB962C8B-B14F-4D97-AF65-F5344CB8AC3E}">
+        <p14:creationId xmlns:p14="http://schemas.microsoft.com/office/powerpoint/2010/main" val="1024086991"/>
+      </p:ext>
+    </p:extLst>
+  </p:cSld>
+  <p:clrMapOvr>
+    <a:masterClrMapping/>
+  </p:clrMapOvr>
+</p:notes>
+</file>
+
+<file path=ppt/notesSlides/notesSlide7.xml><?xml version="1.0" encoding="utf-8"?>
+<p:notes xmlns:a="http://schemas.openxmlformats.org/drawingml/2006/main" xmlns:r="http://schemas.openxmlformats.org/officeDocument/2006/relationships" xmlns:p="http://schemas.openxmlformats.org/presentationml/2006/main">
+  <p:cSld>
+    <p:spTree>
+      <p:nvGrpSpPr>
+        <p:cNvPr id="1" name=""/>
+        <p:cNvGrpSpPr/>
+        <p:nvPr/>
+      </p:nvGrpSpPr>
+      <p:grpSpPr>
+        <a:xfrm>
+          <a:off x="0" y="0"/>
+          <a:ext cx="0" cy="0"/>
+          <a:chOff x="0" y="0"/>
+          <a:chExt cx="0" cy="0"/>
+        </a:xfrm>
+      </p:grpSpPr>
+      <p:sp>
+        <p:nvSpPr>
+          <p:cNvPr id="2" name="Slide Image Placeholder 1"/>
+          <p:cNvSpPr>
+            <a:spLocks noGrp="1" noRot="1" noChangeAspect="1"/>
+          </p:cNvSpPr>
+          <p:nvPr>
+            <p:ph type="sldImg"/>
+          </p:nvPr>
+        </p:nvSpPr>
+        <p:spPr/>
+      </p:sp>
+      <p:sp>
+        <p:nvSpPr>
+          <p:cNvPr id="3" name="Notes Placeholder 2"/>
+          <p:cNvSpPr>
+            <a:spLocks noGrp="1"/>
+          </p:cNvSpPr>
+          <p:nvPr>
+            <p:ph type="body" idx="1"/>
+          </p:nvPr>
+        </p:nvSpPr>
+        <p:spPr/>
+        <p:txBody>
+          <a:bodyPr/>
+          <a:lstStyle/>
+          <a:p>
+            <a:r>
+              <a:rPr lang="en-US" dirty="0"/>
+              <a:t>Four systems this work sits next to: AIDE and the Nature paper for the search-based agents, the NVIDIA plugin as the reproduction baseline, and MLE-bench for how the three harder competitions are graded.</a:t>
+            </a:r>
+            <a:endParaRPr lang="en-US" dirty="0"/>
+          </a:p>
+        </p:txBody>
+      </p:sp>
+      <p:sp>
+        <p:nvSpPr>
+          <p:cNvPr id="4" name="Slide Number Placeholder 3"/>
+          <p:cNvSpPr>
+            <a:spLocks noGrp="1"/>
+          </p:cNvSpPr>
+          <p:nvPr>
+            <p:ph type="sldNum" sz="quarter" idx="10"/>
+          </p:nvPr>
+        </p:nvSpPr>
+        <p:spPr/>
+        <p:txBody>
+          <a:bodyPr/>
+          <a:lstStyle/>
+          <a:p>
+            <a:fld id="{F7021451-1387-4CA6-816F-3879F97B5CBC}" type="slidenum">
+              <a:rPr lang="en-US"/>
+              <a:t>7</a:t>
+            </a:fld>
+            <a:endParaRPr lang="en-US"/>
+          </a:p>
+        </p:txBody>
+      </p:sp>
+    </p:spTree>
+    <p:extLst>
+      <p:ext uri="{BB962C8B-B14F-4D97-AF65-F5344CB8AC3E}">
+        <p14:creationId xmlns:p14="http://schemas.microsoft.com/office/powerpoint/2010/main" val="1024086991"/>
+      </p:ext>
+    </p:extLst>
+  </p:cSld>
+  <p:clrMapOvr>
+    <a:masterClrMapping/>
+  </p:clrMapOvr>
+</p:notes>
+</file>
+
+<file path=ppt/notesSlides/notesSlide8.xml><?xml version="1.0" encoding="utf-8"?>
+<p:notes xmlns:a="http://schemas.openxmlformats.org/drawingml/2006/main" xmlns:r="http://schemas.openxmlformats.org/officeDocument/2006/relationships" xmlns:p="http://schemas.openxmlformats.org/presentationml/2006/main">
+  <p:cSld>
+    <p:spTree>
+      <p:nvGrpSpPr>
+        <p:cNvPr id="1" name=""/>
+        <p:cNvGrpSpPr/>
+        <p:nvPr/>
+      </p:nvGrpSpPr>
+      <p:grpSpPr>
+        <a:xfrm>
+          <a:off x="0" y="0"/>
+          <a:ext cx="0" cy="0"/>
+          <a:chOff x="0" y="0"/>
+          <a:chExt cx="0" cy="0"/>
+        </a:xfrm>
+      </p:grpSpPr>
+      <p:sp>
+        <p:nvSpPr>
+          <p:cNvPr id="2" name="Slide Image Placeholder 1"/>
+          <p:cNvSpPr>
+            <a:spLocks noGrp="1" noRot="1" noChangeAspect="1"/>
+          </p:cNvSpPr>
+          <p:nvPr>
+            <p:ph type="sldImg"/>
+          </p:nvPr>
+        </p:nvSpPr>
+        <p:spPr/>
+      </p:sp>
+      <p:sp>
+        <p:nvSpPr>
+          <p:cNvPr id="3" name="Notes Placeholder 2"/>
+          <p:cNvSpPr>
+            <a:spLocks noGrp="1"/>
+          </p:cNvSpPr>
+          <p:nvPr>
+            <p:ph type="body" idx="1"/>
+          </p:nvPr>
+        </p:nvSpPr>
+        <p:spPr/>
+        <p:txBody>
+          <a:bodyPr/>
+          <a:lstStyle/>
+          <a:p>
+            <a:r>
+              <a:rPr lang="en-US" dirty="0"/>
+              <a:t>Open for questions. The three I expect: how a duel is decided against the noise floor, how the tree search spends its budget, and how the lanes are isolated and audited. (about 60s of questions)</a:t>
+            </a:r>
+            <a:endParaRPr lang="en-US" dirty="0"/>
+          </a:p>
+        </p:txBody>
+      </p:sp>
+      <p:sp>
+        <p:nvSpPr>
+          <p:cNvPr id="4" name="Slide Number Placeholder 3"/>
+          <p:cNvSpPr>
+            <a:spLocks noGrp="1"/>
+          </p:cNvSpPr>
+          <p:nvPr>
+            <p:ph type="sldNum" sz="quarter" idx="10"/>
+          </p:nvPr>
+        </p:nvSpPr>
+        <p:spPr/>
+        <p:txBody>
+          <a:bodyPr/>
+          <a:lstStyle/>
+          <a:p>
+            <a:fld id="{F7021451-1387-4CA6-816F-3879F97B5CBC}" type="slidenum">
+              <a:rPr lang="en-US"/>
+              <a:t>8</a:t>
             </a:fld>
             <a:endParaRPr lang="en-US"/>
           </a:p>
@@ -1302,7 +1480,7 @@
     <p:bg>
       <p:bgPr>
         <a:solidFill>
-          <a:srgbClr val="003C64"/>
+          <a:srgbClr val="FFFFFF"/>
         </a:solidFill>
       </p:bgPr>
     </p:bg>
@@ -1328,7 +1506,7 @@
         </p:nvSpPr>
         <p:spPr>
           <a:xfrm>
-            <a:off x="822960" y="1417320"/>
+            <a:off x="822960" y="2148840"/>
             <a:ext cx="10515600" cy="1737360"/>
           </a:xfrm>
           <a:prstGeom prst="rect">
@@ -1350,33 +1528,13 @@
             <a:r>
               <a:rPr lang="en-US" sz="4000" b="1" dirty="0">
                 <a:solidFill>
-                  <a:srgbClr val="FFFFFF"/>
+                  <a:srgbClr val="111111"/>
                 </a:solidFill>
                 <a:latin typeface="Arial" pitchFamily="34" charset="0"/>
                 <a:ea typeface="Arial" pitchFamily="34" charset="-122"/>
                 <a:cs typeface="Arial" pitchFamily="34" charset="-120"/>
               </a:rPr>
-              <a:t>An End-to-End AI Agent</a:t>
-            </a:r>
-            <a:endParaRPr lang="en-US" sz="4000" dirty="0"/>
-          </a:p>
-          <a:p>
-            <a:pPr indent="0" marL="0">
-              <a:lnSpc>
-                <a:spcPct val="110000"/>
-              </a:lnSpc>
-              <a:buNone/>
-            </a:pPr>
-            <a:r>
-              <a:rPr lang="en-US" sz="4000" b="1" dirty="0">
-                <a:solidFill>
-                  <a:srgbClr val="FFFFFF"/>
-                </a:solidFill>
-                <a:latin typeface="Arial" pitchFamily="34" charset="0"/>
-                <a:ea typeface="Arial" pitchFamily="34" charset="-122"/>
-                <a:cs typeface="Arial" pitchFamily="34" charset="-120"/>
-              </a:rPr>
-              <a:t>for Kaggle Competitions</a:t>
+              <a:t>An End-to-End AI Agent for Kaggle Competitions</a:t>
             </a:r>
             <a:endParaRPr lang="en-US" sz="4000" dirty="0"/>
           </a:p>
@@ -1390,8 +1548,47 @@
         </p:nvSpPr>
         <p:spPr>
           <a:xfrm>
-            <a:off x="822960" y="5577840"/>
-            <a:ext cx="10789920" cy="402336"/>
+            <a:off x="822960" y="5303520"/>
+            <a:ext cx="10789920" cy="365760"/>
+          </a:xfrm>
+          <a:prstGeom prst="rect">
+            <a:avLst/>
+          </a:prstGeom>
+          <a:noFill/>
+          <a:ln/>
+        </p:spPr>
+        <p:txBody>
+          <a:bodyPr wrap="square" lIns="0" tIns="0" rIns="0" bIns="0" rtlCol="0" anchor="ctr"/>
+          <a:lstStyle/>
+          <a:p>
+            <a:pPr indent="0" marL="0">
+              <a:buNone/>
+            </a:pPr>
+            <a:r>
+              <a:rPr lang="en-US" sz="1400" dirty="0">
+                <a:solidFill>
+                  <a:srgbClr val="111111"/>
+                </a:solidFill>
+                <a:latin typeface="Arial" pitchFamily="34" charset="0"/>
+                <a:ea typeface="Arial" pitchFamily="34" charset="-122"/>
+                <a:cs typeface="Arial" pitchFamily="34" charset="-120"/>
+              </a:rPr>
+              <a:t>Wei-Hao Huang, National Chengchi University</a:t>
+            </a:r>
+            <a:endParaRPr lang="en-US" sz="1400" dirty="0"/>
+          </a:p>
+        </p:txBody>
+      </p:sp>
+      <p:sp>
+        <p:nvSpPr>
+          <p:cNvPr id="4" name="Text 2"/>
+          <p:cNvSpPr/>
+          <p:nvPr/>
+        </p:nvSpPr>
+        <p:spPr>
+          <a:xfrm>
+            <a:off x="822960" y="5715000"/>
+            <a:ext cx="10789920" cy="365760"/>
           </a:xfrm>
           <a:prstGeom prst="rect">
             <a:avLst/>
@@ -1409,13 +1606,13 @@
             <a:r>
               <a:rPr lang="en-US" sz="1300" dirty="0">
                 <a:solidFill>
-                  <a:srgbClr val="A8BDD4"/>
+                  <a:srgbClr val="5A5F66"/>
                 </a:solidFill>
                 <a:latin typeface="Arial" pitchFamily="34" charset="0"/>
                 <a:ea typeface="Arial" pitchFamily="34" charset="-122"/>
                 <a:cs typeface="Arial" pitchFamily="34" charset="-120"/>
               </a:rPr>
-              <a:t>Wei-Hao Huang, National Chengchi University   ·   PI: Dr. Tso-Jung Yen, Institute of Statistical Science, Academia Sinica</a:t>
+              <a:t>PI: Dr. Tso-Jung Yen, Institute of Statistical Science, Academia Sinica</a:t>
             </a:r>
             <a:endParaRPr lang="en-US" sz="1300" dirty="0"/>
           </a:p>
@@ -1480,13 +1677,13 @@
             <a:r>
               <a:rPr lang="en-US" sz="2600" b="1" dirty="0">
                 <a:solidFill>
-                  <a:srgbClr val="003C64"/>
+                  <a:srgbClr val="111111"/>
                 </a:solidFill>
                 <a:latin typeface="Arial" pitchFamily="34" charset="0"/>
                 <a:ea typeface="Arial" pitchFamily="34" charset="-122"/>
                 <a:cs typeface="Arial" pitchFamily="34" charset="-120"/>
               </a:rPr>
-              <a:t>1 · Motivation</a:t>
+              <a:t>1.Motivation</a:t>
             </a:r>
             <a:endParaRPr lang="en-US" sz="2600" dirty="0"/>
           </a:p>
@@ -1500,8 +1697,8 @@
         </p:nvSpPr>
         <p:spPr>
           <a:xfrm>
-            <a:off x="658368" y="1051560"/>
-            <a:ext cx="10881360" cy="365760"/>
+            <a:off x="658368" y="960120"/>
+            <a:ext cx="10881360" cy="292608"/>
           </a:xfrm>
           <a:prstGeom prst="rect">
             <a:avLst/>
@@ -1517,7 +1714,7 @@
               <a:buNone/>
             </a:pPr>
             <a:r>
-              <a:rPr lang="en-US" sz="1900" b="1" dirty="0">
+              <a:rPr lang="en-US" sz="1700" b="1" dirty="0">
                 <a:solidFill>
                   <a:srgbClr val="111111"/>
                 </a:solidFill>
@@ -1525,9 +1722,9 @@
                 <a:ea typeface="Arial" pitchFamily="34" charset="-122"/>
                 <a:cs typeface="Arial" pitchFamily="34" charset="-120"/>
               </a:rPr>
-              <a:t>Challenges of Kaggle competitions</a:t>
+              <a:t>•   Challenges of Kaggle competitions</a:t>
             </a:r>
-            <a:endParaRPr lang="en-US" sz="1900" dirty="0"/>
+            <a:endParaRPr lang="en-US" sz="1700" dirty="0"/>
           </a:p>
         </p:txBody>
       </p:sp>
@@ -1539,8 +1736,8 @@
         </p:nvSpPr>
         <p:spPr>
           <a:xfrm>
-            <a:off x="868680" y="1481328"/>
-            <a:ext cx="10607040" cy="777240"/>
+            <a:off x="1234440" y="1353312"/>
+            <a:ext cx="10241280" cy="292608"/>
           </a:xfrm>
           <a:prstGeom prst="rect">
             <a:avLst/>
@@ -1556,7 +1753,7 @@
               <a:buNone/>
             </a:pPr>
             <a:r>
-              <a:rPr lang="en-US" sz="1700" dirty="0">
+              <a:rPr lang="en-US" sz="1600" dirty="0">
                 <a:solidFill>
                   <a:srgbClr val="111111"/>
                 </a:solidFill>
@@ -1564,13 +1761,13 @@
                 <a:ea typeface="Arial" pitchFamily="34" charset="-122"/>
                 <a:cs typeface="Arial" pitchFamily="34" charset="-120"/>
               </a:rPr>
-              <a:t>·   A competition demands the whole expert loop: validation design, features, model selection, ensembling. The top entries separate by a </a:t>
+              <a:t>–   </a:t>
             </a:r>
             <a:pPr indent="0" marL="0">
               <a:buNone/>
             </a:pPr>
             <a:r>
-              <a:rPr lang="en-US" sz="1700" b="1" dirty="0">
+              <a:rPr lang="en-US" sz="1600" b="1" dirty="0">
                 <a:solidFill>
                   <a:srgbClr val="111111"/>
                 </a:solidFill>
@@ -1578,9 +1775,9 @@
                 <a:ea typeface="Arial" pitchFamily="34" charset="-122"/>
                 <a:cs typeface="Arial" pitchFamily="34" charset="-120"/>
               </a:rPr>
-              <a:t>very small margin.</a:t>
+              <a:t>A competition requires the expert loop</a:t>
             </a:r>
-            <a:endParaRPr lang="en-US" sz="1700" dirty="0"/>
+            <a:endParaRPr lang="en-US" sz="1600" dirty="0"/>
           </a:p>
         </p:txBody>
       </p:sp>
@@ -1592,8 +1789,8 @@
         </p:nvSpPr>
         <p:spPr>
           <a:xfrm>
-            <a:off x="658368" y="2514600"/>
-            <a:ext cx="10881360" cy="365760"/>
+            <a:off x="1645920" y="1645920"/>
+            <a:ext cx="9784080" cy="548640"/>
           </a:xfrm>
           <a:prstGeom prst="rect">
             <a:avLst/>
@@ -1609,7 +1806,7 @@
               <a:buNone/>
             </a:pPr>
             <a:r>
-              <a:rPr lang="en-US" sz="1900" b="1" dirty="0">
+              <a:rPr lang="en-US" sz="1600" dirty="0">
                 <a:solidFill>
                   <a:srgbClr val="111111"/>
                 </a:solidFill>
@@ -1617,9 +1814,9 @@
                 <a:ea typeface="Arial" pitchFamily="34" charset="-122"/>
                 <a:cs typeface="Arial" pitchFamily="34" charset="-120"/>
               </a:rPr>
-              <a:t>Why an AI agent</a:t>
+              <a:t>This includes validation design, feature extraction, model selection, and ensemble building. The top entries are separated by a very small margin.</a:t>
             </a:r>
-            <a:endParaRPr lang="en-US" sz="1900" dirty="0"/>
+            <a:endParaRPr lang="en-US" sz="1600" dirty="0"/>
           </a:p>
         </p:txBody>
       </p:sp>
@@ -1631,8 +1828,8 @@
         </p:nvSpPr>
         <p:spPr>
           <a:xfrm>
-            <a:off x="868680" y="2944368"/>
-            <a:ext cx="10607040" cy="502920"/>
+            <a:off x="1234440" y="2176272"/>
+            <a:ext cx="10241280" cy="292608"/>
           </a:xfrm>
           <a:prstGeom prst="rect">
             <a:avLst/>
@@ -1648,7 +1845,7 @@
               <a:buNone/>
             </a:pPr>
             <a:r>
-              <a:rPr lang="en-US" sz="1700" dirty="0">
+              <a:rPr lang="en-US" sz="1600" dirty="0">
                 <a:solidFill>
                   <a:srgbClr val="111111"/>
                 </a:solidFill>
@@ -1656,13 +1853,13 @@
                 <a:ea typeface="Arial" pitchFamily="34" charset="-122"/>
                 <a:cs typeface="Arial" pitchFamily="34" charset="-120"/>
               </a:rPr>
-              <a:t>·   A competition is a </a:t>
+              <a:t>–   </a:t>
             </a:r>
             <a:pPr indent="0" marL="0">
               <a:buNone/>
             </a:pPr>
             <a:r>
-              <a:rPr lang="en-US" sz="1700" b="1" dirty="0">
+              <a:rPr lang="en-US" sz="1600" b="1" dirty="0">
                 <a:solidFill>
                   <a:srgbClr val="111111"/>
                 </a:solidFill>
@@ -1670,51 +1867,9 @@
                 <a:ea typeface="Arial" pitchFamily="34" charset="-122"/>
                 <a:cs typeface="Arial" pitchFamily="34" charset="-120"/>
               </a:rPr>
-              <a:t>scorable task</a:t>
+              <a:t>Data preparation is repetitive</a:t>
             </a:r>
-            <a:pPr indent="0" marL="0">
-              <a:buNone/>
-            </a:pPr>
-            <a:r>
-              <a:rPr lang="en-US" sz="1700" dirty="0">
-                <a:solidFill>
-                  <a:srgbClr val="111111"/>
-                </a:solidFill>
-                <a:latin typeface="Arial" pitchFamily="34" charset="0"/>
-                <a:ea typeface="Arial" pitchFamily="34" charset="-122"/>
-                <a:cs typeface="Arial" pitchFamily="34" charset="-120"/>
-              </a:rPr>
-              <a:t>: every candidate returns a number, so it can be </a:t>
-            </a:r>
-            <a:pPr indent="0" marL="0">
-              <a:buNone/>
-            </a:pPr>
-            <a:r>
-              <a:rPr lang="en-US" sz="1700" b="1" dirty="0">
-                <a:solidFill>
-                  <a:srgbClr val="111111"/>
-                </a:solidFill>
-                <a:latin typeface="Arial" pitchFamily="34" charset="0"/>
-                <a:ea typeface="Arial" pitchFamily="34" charset="-122"/>
-                <a:cs typeface="Arial" pitchFamily="34" charset="-120"/>
-              </a:rPr>
-              <a:t>optimized automatically</a:t>
-            </a:r>
-            <a:pPr indent="0" marL="0">
-              <a:buNone/>
-            </a:pPr>
-            <a:r>
-              <a:rPr lang="en-US" sz="1700" dirty="0">
-                <a:solidFill>
-                  <a:srgbClr val="111111"/>
-                </a:solidFill>
-                <a:latin typeface="Arial" pitchFamily="34" charset="0"/>
-                <a:ea typeface="Arial" pitchFamily="34" charset="-122"/>
-                <a:cs typeface="Arial" pitchFamily="34" charset="-120"/>
-              </a:rPr>
-              <a:t> (propose, score, keep the better, repeat).</a:t>
-            </a:r>
-            <a:endParaRPr lang="en-US" sz="1700" dirty="0"/>
+            <a:endParaRPr lang="en-US" sz="1600" dirty="0"/>
           </a:p>
         </p:txBody>
       </p:sp>
@@ -1726,8 +1881,8 @@
         </p:nvSpPr>
         <p:spPr>
           <a:xfrm>
-            <a:off x="868680" y="3602736"/>
-            <a:ext cx="10607040" cy="502920"/>
+            <a:off x="1645920" y="2468880"/>
+            <a:ext cx="9784080" cy="548640"/>
           </a:xfrm>
           <a:prstGeom prst="rect">
             <a:avLst/>
@@ -1743,7 +1898,7 @@
               <a:buNone/>
             </a:pPr>
             <a:r>
-              <a:rPr lang="en-US" sz="1700" dirty="0">
+              <a:rPr lang="en-US" sz="1600" dirty="0">
                 <a:solidFill>
                   <a:srgbClr val="111111"/>
                 </a:solidFill>
@@ -1751,9 +1906,352 @@
                 <a:ea typeface="Arial" pitchFamily="34" charset="-122"/>
                 <a:cs typeface="Arial" pitchFamily="34" charset="-120"/>
               </a:rPr>
-              <a:t>·   Tireless, systematic search over candidate configurations, every experiment logged and reproducible.</a:t>
+              <a:t>The same cleaning, split design, and drift checks are done on every dataset.</a:t>
+            </a:r>
+            <a:endParaRPr lang="en-US" sz="1600" dirty="0"/>
+          </a:p>
+        </p:txBody>
+      </p:sp>
+      <p:sp>
+        <p:nvSpPr>
+          <p:cNvPr id="8" name="Text 6"/>
+          <p:cNvSpPr/>
+          <p:nvPr/>
+        </p:nvSpPr>
+        <p:spPr>
+          <a:xfrm>
+            <a:off x="658368" y="2926080"/>
+            <a:ext cx="10881360" cy="292608"/>
+          </a:xfrm>
+          <a:prstGeom prst="rect">
+            <a:avLst/>
+          </a:prstGeom>
+          <a:noFill/>
+          <a:ln/>
+        </p:spPr>
+        <p:txBody>
+          <a:bodyPr wrap="square" lIns="0" tIns="0" rIns="0" bIns="0" rtlCol="0" anchor="ctr"/>
+          <a:lstStyle/>
+          <a:p>
+            <a:pPr indent="0" marL="0">
+              <a:buNone/>
+            </a:pPr>
+            <a:r>
+              <a:rPr lang="en-US" sz="1700" b="1" dirty="0">
+                <a:solidFill>
+                  <a:srgbClr val="111111"/>
+                </a:solidFill>
+                <a:latin typeface="Arial" pitchFamily="34" charset="0"/>
+                <a:ea typeface="Arial" pitchFamily="34" charset="-122"/>
+                <a:cs typeface="Arial" pitchFamily="34" charset="-120"/>
+              </a:rPr>
+              <a:t>•   Why an AI agent</a:t>
             </a:r>
             <a:endParaRPr lang="en-US" sz="1700" dirty="0"/>
+          </a:p>
+        </p:txBody>
+      </p:sp>
+      <p:sp>
+        <p:nvSpPr>
+          <p:cNvPr id="9" name="Text 7"/>
+          <p:cNvSpPr/>
+          <p:nvPr/>
+        </p:nvSpPr>
+        <p:spPr>
+          <a:xfrm>
+            <a:off x="1234440" y="3319272"/>
+            <a:ext cx="10241280" cy="292608"/>
+          </a:xfrm>
+          <a:prstGeom prst="rect">
+            <a:avLst/>
+          </a:prstGeom>
+          <a:noFill/>
+          <a:ln/>
+        </p:spPr>
+        <p:txBody>
+          <a:bodyPr wrap="square" lIns="0" tIns="0" rIns="0" bIns="0" rtlCol="0" anchor="ctr"/>
+          <a:lstStyle/>
+          <a:p>
+            <a:pPr indent="0" marL="0">
+              <a:buNone/>
+            </a:pPr>
+            <a:r>
+              <a:rPr lang="en-US" sz="1600" dirty="0">
+                <a:solidFill>
+                  <a:srgbClr val="111111"/>
+                </a:solidFill>
+                <a:latin typeface="Arial" pitchFamily="34" charset="0"/>
+                <a:ea typeface="Arial" pitchFamily="34" charset="-122"/>
+                <a:cs typeface="Arial" pitchFamily="34" charset="-120"/>
+              </a:rPr>
+              <a:t>–   </a:t>
+            </a:r>
+            <a:pPr indent="0" marL="0">
+              <a:buNone/>
+            </a:pPr>
+            <a:r>
+              <a:rPr lang="en-US" sz="1600" b="1" dirty="0">
+                <a:solidFill>
+                  <a:srgbClr val="111111"/>
+                </a:solidFill>
+                <a:latin typeface="Arial" pitchFamily="34" charset="0"/>
+                <a:ea typeface="Arial" pitchFamily="34" charset="-122"/>
+                <a:cs typeface="Arial" pitchFamily="34" charset="-120"/>
+              </a:rPr>
+              <a:t>A competition is a </a:t>
+            </a:r>
+            <a:pPr indent="0" marL="0">
+              <a:buNone/>
+            </a:pPr>
+            <a:r>
+              <a:rPr lang="en-US" sz="1600" b="1" i="1" dirty="0">
+                <a:solidFill>
+                  <a:srgbClr val="111111"/>
+                </a:solidFill>
+                <a:latin typeface="Arial" pitchFamily="34" charset="0"/>
+                <a:ea typeface="Arial" pitchFamily="34" charset="-122"/>
+                <a:cs typeface="Arial" pitchFamily="34" charset="-120"/>
+              </a:rPr>
+              <a:t>scorable</a:t>
+            </a:r>
+            <a:pPr indent="0" marL="0">
+              <a:buNone/>
+            </a:pPr>
+            <a:r>
+              <a:rPr lang="en-US" sz="1600" b="1" dirty="0">
+                <a:solidFill>
+                  <a:srgbClr val="111111"/>
+                </a:solidFill>
+                <a:latin typeface="Arial" pitchFamily="34" charset="0"/>
+                <a:ea typeface="Arial" pitchFamily="34" charset="-122"/>
+                <a:cs typeface="Arial" pitchFamily="34" charset="-120"/>
+              </a:rPr>
+              <a:t> task</a:t>
+            </a:r>
+            <a:endParaRPr lang="en-US" sz="1600" dirty="0"/>
+          </a:p>
+        </p:txBody>
+      </p:sp>
+      <p:sp>
+        <p:nvSpPr>
+          <p:cNvPr id="10" name="Text 8"/>
+          <p:cNvSpPr/>
+          <p:nvPr/>
+        </p:nvSpPr>
+        <p:spPr>
+          <a:xfrm>
+            <a:off x="1645920" y="3611880"/>
+            <a:ext cx="9784080" cy="548640"/>
+          </a:xfrm>
+          <a:prstGeom prst="rect">
+            <a:avLst/>
+          </a:prstGeom>
+          <a:noFill/>
+          <a:ln/>
+        </p:spPr>
+        <p:txBody>
+          <a:bodyPr wrap="square" lIns="0" tIns="0" rIns="0" bIns="0" rtlCol="0" anchor="ctr"/>
+          <a:lstStyle/>
+          <a:p>
+            <a:pPr indent="0" marL="0">
+              <a:buNone/>
+            </a:pPr>
+            <a:r>
+              <a:rPr lang="en-US" sz="1600" dirty="0">
+                <a:solidFill>
+                  <a:srgbClr val="111111"/>
+                </a:solidFill>
+                <a:latin typeface="Arial" pitchFamily="34" charset="0"/>
+                <a:ea typeface="Arial" pitchFamily="34" charset="-122"/>
+                <a:cs typeface="Arial" pitchFamily="34" charset="-120"/>
+              </a:rPr>
+              <a:t>Every competitor delivers a number, so it can be optimized automatically.</a:t>
+            </a:r>
+            <a:endParaRPr lang="en-US" sz="1600" dirty="0"/>
+          </a:p>
+        </p:txBody>
+      </p:sp>
+      <p:sp>
+        <p:nvSpPr>
+          <p:cNvPr id="11" name="Text 9"/>
+          <p:cNvSpPr/>
+          <p:nvPr/>
+        </p:nvSpPr>
+        <p:spPr>
+          <a:xfrm>
+            <a:off x="1234440" y="4142232"/>
+            <a:ext cx="10241280" cy="292608"/>
+          </a:xfrm>
+          <a:prstGeom prst="rect">
+            <a:avLst/>
+          </a:prstGeom>
+          <a:noFill/>
+          <a:ln/>
+        </p:spPr>
+        <p:txBody>
+          <a:bodyPr wrap="square" lIns="0" tIns="0" rIns="0" bIns="0" rtlCol="0" anchor="ctr"/>
+          <a:lstStyle/>
+          <a:p>
+            <a:pPr indent="0" marL="0">
+              <a:buNone/>
+            </a:pPr>
+            <a:r>
+              <a:rPr lang="en-US" sz="1600" dirty="0">
+                <a:solidFill>
+                  <a:srgbClr val="111111"/>
+                </a:solidFill>
+                <a:latin typeface="Arial" pitchFamily="34" charset="0"/>
+                <a:ea typeface="Arial" pitchFamily="34" charset="-122"/>
+                <a:cs typeface="Arial" pitchFamily="34" charset="-120"/>
+              </a:rPr>
+              <a:t>–   </a:t>
+            </a:r>
+            <a:pPr indent="0" marL="0">
+              <a:buNone/>
+            </a:pPr>
+            <a:r>
+              <a:rPr lang="en-US" sz="1600" b="1" dirty="0">
+                <a:solidFill>
+                  <a:srgbClr val="111111"/>
+                </a:solidFill>
+                <a:latin typeface="Arial" pitchFamily="34" charset="0"/>
+                <a:ea typeface="Arial" pitchFamily="34" charset="-122"/>
+                <a:cs typeface="Arial" pitchFamily="34" charset="-120"/>
+              </a:rPr>
+              <a:t>A competition requires tireless, systematic search</a:t>
+            </a:r>
+            <a:endParaRPr lang="en-US" sz="1600" dirty="0"/>
+          </a:p>
+        </p:txBody>
+      </p:sp>
+      <p:sp>
+        <p:nvSpPr>
+          <p:cNvPr id="12" name="Text 10"/>
+          <p:cNvSpPr/>
+          <p:nvPr/>
+        </p:nvSpPr>
+        <p:spPr>
+          <a:xfrm>
+            <a:off x="1645920" y="4434840"/>
+            <a:ext cx="9784080" cy="548640"/>
+          </a:xfrm>
+          <a:prstGeom prst="rect">
+            <a:avLst/>
+          </a:prstGeom>
+          <a:noFill/>
+          <a:ln/>
+        </p:spPr>
+        <p:txBody>
+          <a:bodyPr wrap="square" lIns="0" tIns="0" rIns="0" bIns="0" rtlCol="0" anchor="ctr"/>
+          <a:lstStyle/>
+          <a:p>
+            <a:pPr indent="0" marL="0">
+              <a:buNone/>
+            </a:pPr>
+            <a:r>
+              <a:rPr lang="en-US" sz="1600" dirty="0">
+                <a:solidFill>
+                  <a:srgbClr val="111111"/>
+                </a:solidFill>
+                <a:latin typeface="Arial" pitchFamily="34" charset="0"/>
+                <a:ea typeface="Arial" pitchFamily="34" charset="-122"/>
+                <a:cs typeface="Arial" pitchFamily="34" charset="-120"/>
+              </a:rPr>
+              <a:t>Every experiment is recorded and should be reproducible.</a:t>
+            </a:r>
+            <a:endParaRPr lang="en-US" sz="1600" dirty="0"/>
+          </a:p>
+        </p:txBody>
+      </p:sp>
+      <p:sp>
+        <p:nvSpPr>
+          <p:cNvPr id="13" name="Text 11"/>
+          <p:cNvSpPr/>
+          <p:nvPr/>
+        </p:nvSpPr>
+        <p:spPr>
+          <a:xfrm>
+            <a:off x="1234440" y="4828032"/>
+            <a:ext cx="10241280" cy="292608"/>
+          </a:xfrm>
+          <a:prstGeom prst="rect">
+            <a:avLst/>
+          </a:prstGeom>
+          <a:noFill/>
+          <a:ln/>
+        </p:spPr>
+        <p:txBody>
+          <a:bodyPr wrap="square" lIns="0" tIns="0" rIns="0" bIns="0" rtlCol="0" anchor="ctr"/>
+          <a:lstStyle/>
+          <a:p>
+            <a:pPr indent="0" marL="0">
+              <a:buNone/>
+            </a:pPr>
+            <a:r>
+              <a:rPr lang="en-US" sz="1600" dirty="0">
+                <a:solidFill>
+                  <a:srgbClr val="111111"/>
+                </a:solidFill>
+                <a:latin typeface="Arial" pitchFamily="34" charset="0"/>
+                <a:ea typeface="Arial" pitchFamily="34" charset="-122"/>
+                <a:cs typeface="Arial" pitchFamily="34" charset="-120"/>
+              </a:rPr>
+              <a:t>–   </a:t>
+            </a:r>
+            <a:pPr indent="0" marL="0">
+              <a:buNone/>
+            </a:pPr>
+            <a:r>
+              <a:rPr lang="en-US" sz="1600" b="1" dirty="0">
+                <a:solidFill>
+                  <a:srgbClr val="111111"/>
+                </a:solidFill>
+                <a:latin typeface="Arial" pitchFamily="34" charset="0"/>
+                <a:ea typeface="Arial" pitchFamily="34" charset="-122"/>
+                <a:cs typeface="Arial" pitchFamily="34" charset="-120"/>
+              </a:rPr>
+              <a:t>Recent success of agents for Kaggle competitions</a:t>
+            </a:r>
+            <a:endParaRPr lang="en-US" sz="1600" dirty="0"/>
+          </a:p>
+        </p:txBody>
+      </p:sp>
+      <p:sp>
+        <p:nvSpPr>
+          <p:cNvPr id="14" name="Text 12"/>
+          <p:cNvSpPr/>
+          <p:nvPr/>
+        </p:nvSpPr>
+        <p:spPr>
+          <a:xfrm>
+            <a:off x="1645920" y="5120640"/>
+            <a:ext cx="9784080" cy="548640"/>
+          </a:xfrm>
+          <a:prstGeom prst="rect">
+            <a:avLst/>
+          </a:prstGeom>
+          <a:noFill/>
+          <a:ln/>
+        </p:spPr>
+        <p:txBody>
+          <a:bodyPr wrap="square" lIns="0" tIns="0" rIns="0" bIns="0" rtlCol="0" anchor="ctr"/>
+          <a:lstStyle/>
+          <a:p>
+            <a:pPr indent="0" marL="0">
+              <a:buNone/>
+            </a:pPr>
+            <a:r>
+              <a:rPr lang="en-US" sz="1600" dirty="0">
+                <a:solidFill>
+                  <a:srgbClr val="111111"/>
+                </a:solidFill>
+                <a:latin typeface="Arial" pitchFamily="34" charset="0"/>
+                <a:ea typeface="Arial" pitchFamily="34" charset="-122"/>
+                <a:cs typeface="Arial" pitchFamily="34" charset="-120"/>
+              </a:rPr>
+              <a:t>Notable cases include tree search over code [1], and tree search fed injected research ideas [2].</a:t>
+            </a:r>
+            <a:endParaRPr lang="en-US" sz="1600" dirty="0"/>
           </a:p>
         </p:txBody>
       </p:sp>
@@ -1816,52 +2314,28 @@
             <a:r>
               <a:rPr lang="en-US" sz="2600" b="1" dirty="0">
                 <a:solidFill>
-                  <a:srgbClr val="003C64"/>
+                  <a:srgbClr val="111111"/>
                 </a:solidFill>
                 <a:latin typeface="Arial" pitchFamily="34" charset="0"/>
                 <a:ea typeface="Arial" pitchFamily="34" charset="-122"/>
                 <a:cs typeface="Arial" pitchFamily="34" charset="-120"/>
               </a:rPr>
-              <a:t>2 · Workflow</a:t>
+              <a:t>2.Workflow</a:t>
             </a:r>
             <a:endParaRPr lang="en-US" sz="2600" dirty="0"/>
           </a:p>
         </p:txBody>
       </p:sp>
-      <p:pic>
-        <p:nvPicPr>
-          <p:cNvPr id="3" name="Image 0" descr="fig1_arch_hi-1.png">    </p:cNvPr>
-          <p:cNvPicPr>
-            <a:picLocks noChangeAspect="1"/>
-          </p:cNvPicPr>
-          <p:nvPr/>
-        </p:nvPicPr>
-        <p:blipFill>
-          <a:blip r:embed="rId1"/>
-          <a:stretch>
-            <a:fillRect/>
-          </a:stretch>
-        </p:blipFill>
-        <p:spPr>
-          <a:xfrm>
-            <a:off x="658368" y="960120"/>
-            <a:ext cx="6355080" cy="5660136"/>
-          </a:xfrm>
-          <a:prstGeom prst="rect">
-            <a:avLst/>
-          </a:prstGeom>
-        </p:spPr>
-      </p:pic>
       <p:sp>
         <p:nvSpPr>
-          <p:cNvPr id="4" name="Text 1"/>
+          <p:cNvPr id="3" name="Text 1"/>
           <p:cNvSpPr/>
           <p:nvPr/>
         </p:nvSpPr>
         <p:spPr>
           <a:xfrm>
-            <a:off x="7360920" y="1463040"/>
-            <a:ext cx="4160520" cy="1463040"/>
+            <a:off x="658368" y="960120"/>
+            <a:ext cx="10881360" cy="310896"/>
           </a:xfrm>
           <a:prstGeom prst="rect">
             <a:avLst/>
@@ -1877,7 +2351,7 @@
               <a:buNone/>
             </a:pPr>
             <a:r>
-              <a:rPr lang="en-US" sz="1600" b="1" dirty="0">
+              <a:rPr lang="en-US" sz="1900" b="1" dirty="0">
                 <a:solidFill>
                   <a:srgbClr val="111111"/>
                 </a:solidFill>
@@ -1885,26 +2359,36 @@
                 <a:ea typeface="Arial" pitchFamily="34" charset="-122"/>
                 <a:cs typeface="Arial" pitchFamily="34" charset="-120"/>
               </a:rPr>
-              <a:t>The LLM reasons and decides at every stage</a:t>
+              <a:t>From raw data to a scored submission</a:t>
             </a:r>
-            <a:pPr indent="0" marL="0">
-              <a:buNone/>
-            </a:pPr>
-            <a:r>
-              <a:rPr lang="en-US" sz="1600" dirty="0">
-                <a:solidFill>
-                  <a:srgbClr val="111111"/>
-                </a:solidFill>
-                <a:latin typeface="Arial" pitchFamily="34" charset="0"/>
-                <a:ea typeface="Arial" pitchFamily="34" charset="-122"/>
-                <a:cs typeface="Arial" pitchFamily="34" charset="-120"/>
-              </a:rPr>
-              <a:t>; gradient boosting does the fitting; a tree search over complete candidate solutions is the optimization loop.</a:t>
-            </a:r>
-            <a:endParaRPr lang="en-US" sz="1600" dirty="0"/>
+            <a:endParaRPr lang="en-US" sz="1900" dirty="0"/>
           </a:p>
         </p:txBody>
       </p:sp>
+      <p:pic>
+        <p:nvPicPr>
+          <p:cNvPr id="4" name="Image 0" descr="fig1_arch_slide_hi-1.png">    </p:cNvPr>
+          <p:cNvPicPr>
+            <a:picLocks noChangeAspect="1"/>
+          </p:cNvPicPr>
+          <p:nvPr/>
+        </p:nvPicPr>
+        <p:blipFill>
+          <a:blip r:embed="rId1"/>
+          <a:stretch>
+            <a:fillRect/>
+          </a:stretch>
+        </p:blipFill>
+        <p:spPr>
+          <a:xfrm>
+            <a:off x="580644" y="1417320"/>
+            <a:ext cx="11027664" cy="4855464"/>
+          </a:xfrm>
+          <a:prstGeom prst="rect">
+            <a:avLst/>
+          </a:prstGeom>
+        </p:spPr>
+      </p:pic>
       <p:sp>
         <p:nvSpPr>
           <p:cNvPr id="5" name="Text 2"/>
@@ -1913,8 +2397,8 @@
         </p:nvSpPr>
         <p:spPr>
           <a:xfrm>
-            <a:off x="7360920" y="3063240"/>
-            <a:ext cx="4160520" cy="1097280"/>
+            <a:off x="658368" y="6355080"/>
+            <a:ext cx="10881360" cy="457200"/>
           </a:xfrm>
           <a:prstGeom prst="rect">
             <a:avLst/>
@@ -1930,37 +2414,23 @@
               <a:buNone/>
             </a:pPr>
             <a:r>
-              <a:rPr lang="en-US" sz="1600" b="1" dirty="0">
+              <a:rPr lang="en-US" sz="1300" dirty="0">
                 <a:solidFill>
-                  <a:srgbClr val="111111"/>
+                  <a:srgbClr val="5A5F66"/>
                 </a:solidFill>
                 <a:latin typeface="Arial" pitchFamily="34" charset="0"/>
                 <a:ea typeface="Arial" pitchFamily="34" charset="-122"/>
                 <a:cs typeface="Arial" pitchFamily="34" charset="-120"/>
               </a:rPr>
-              <a:t>The problem dossier</a:t>
+              <a:t>The LLM reasons and decides at every stage; the problem dossier classifies the task and injects external data </a:t>
             </a:r>
             <a:pPr indent="0" marL="0">
               <a:buNone/>
             </a:pPr>
             <a:r>
-              <a:rPr lang="en-US" sz="1600" dirty="0">
+              <a:rPr lang="en-US" sz="1300" i="1" dirty="0">
                 <a:solidFill>
-                  <a:srgbClr val="111111"/>
-                </a:solidFill>
-                <a:latin typeface="Arial" pitchFamily="34" charset="0"/>
-                <a:ea typeface="Arial" pitchFamily="34" charset="-122"/>
-                <a:cs typeface="Arial" pitchFamily="34" charset="-120"/>
-              </a:rPr>
-              <a:t> classifies the task and injects external data </a:t>
-            </a:r>
-            <a:pPr indent="0" marL="0">
-              <a:buNone/>
-            </a:pPr>
-            <a:r>
-              <a:rPr lang="en-US" sz="1600" i="1" dirty="0">
-                <a:solidFill>
-                  <a:srgbClr val="111111"/>
+                  <a:srgbClr val="5A5F66"/>
                 </a:solidFill>
                 <a:latin typeface="Arial" pitchFamily="34" charset="0"/>
                 <a:ea typeface="Arial" pitchFamily="34" charset="-122"/>
@@ -1972,46 +2442,7 @@
               <a:buNone/>
             </a:pPr>
             <a:r>
-              <a:rPr lang="en-US" sz="1600" dirty="0">
-                <a:solidFill>
-                  <a:srgbClr val="111111"/>
-                </a:solidFill>
-                <a:latin typeface="Arial" pitchFamily="34" charset="0"/>
-                <a:ea typeface="Arial" pitchFamily="34" charset="-122"/>
-                <a:cs typeface="Arial" pitchFamily="34" charset="-120"/>
-              </a:rPr>
-              <a:t>, before any modeling.</a:t>
-            </a:r>
-            <a:endParaRPr lang="en-US" sz="1600" dirty="0"/>
-          </a:p>
-        </p:txBody>
-      </p:sp>
-      <p:sp>
-        <p:nvSpPr>
-          <p:cNvPr id="6" name="Text 3"/>
-          <p:cNvSpPr/>
-          <p:nvPr/>
-        </p:nvSpPr>
-        <p:spPr>
-          <a:xfrm>
-            <a:off x="7360920" y="4297680"/>
-            <a:ext cx="4160520" cy="1005840"/>
-          </a:xfrm>
-          <a:prstGeom prst="rect">
-            <a:avLst/>
-          </a:prstGeom>
-          <a:noFill/>
-          <a:ln/>
-        </p:spPr>
-        <p:txBody>
-          <a:bodyPr wrap="square" lIns="0" tIns="0" rIns="0" bIns="0" rtlCol="0" anchor="ctr"/>
-          <a:lstStyle/>
-          <a:p>
-            <a:pPr indent="0" marL="0">
-              <a:buNone/>
-            </a:pPr>
-            <a:r>
-              <a:rPr lang="en-US" sz="1500" dirty="0">
+              <a:rPr lang="en-US" sz="1300" dirty="0">
                 <a:solidFill>
                   <a:srgbClr val="5A5F66"/>
                 </a:solidFill>
@@ -2019,9 +2450,9 @@
                 <a:ea typeface="Arial" pitchFamily="34" charset="-122"/>
                 <a:cs typeface="Arial" pitchFamily="34" charset="-120"/>
               </a:rPr>
-              <a:t>Lanes hold no Kaggle credentials; submissions are scored post-run on the real leaderboard.</a:t>
+              <a:t>, before any modeling. EDA then tests the dossier's hypotheses, feature engineering and modeling follow, and evaluation returns the score the tree search uses to pick the next candidate. Each run also automatically writes a per-competition report.</a:t>
             </a:r>
-            <a:endParaRPr lang="en-US" sz="1500" dirty="0"/>
+            <a:endParaRPr lang="en-US" sz="1300" dirty="0"/>
           </a:p>
         </p:txBody>
       </p:sp>
@@ -2084,13 +2515,13 @@
             <a:r>
               <a:rPr lang="en-US" sz="2600" b="1" dirty="0">
                 <a:solidFill>
-                  <a:srgbClr val="003C64"/>
+                  <a:srgbClr val="111111"/>
                 </a:solidFill>
                 <a:latin typeface="Arial" pitchFamily="34" charset="0"/>
                 <a:ea typeface="Arial" pitchFamily="34" charset="-122"/>
                 <a:cs typeface="Arial" pitchFamily="34" charset="-120"/>
               </a:rPr>
-              <a:t>3 · Results</a:t>
+              <a:t>3.Results</a:t>
             </a:r>
             <a:endParaRPr lang="en-US" sz="2600" dirty="0"/>
           </a:p>
@@ -2104,8 +2535,8 @@
         </p:nvSpPr>
         <p:spPr>
           <a:xfrm>
-            <a:off x="658368" y="1024128"/>
-            <a:ext cx="10881360" cy="731520"/>
+            <a:off x="658368" y="960120"/>
+            <a:ext cx="6766560" cy="292608"/>
           </a:xfrm>
           <a:prstGeom prst="rect">
             <a:avLst/>
@@ -2121,7 +2552,7 @@
               <a:buNone/>
             </a:pPr>
             <a:r>
-              <a:rPr lang="en-US" sz="1700" dirty="0">
+              <a:rPr lang="en-US" sz="1400" b="1" dirty="0">
                 <a:solidFill>
                   <a:srgbClr val="111111"/>
                 </a:solidFill>
@@ -2129,22 +2560,4598 @@
                 <a:ea typeface="Arial" pitchFamily="34" charset="-122"/>
                 <a:cs typeface="Arial" pitchFamily="34" charset="-120"/>
               </a:rPr>
-              <a:t>All 20 lanes scored on the real leaderboard; each of the 60 duels judged against the score noise measured on Kaggle's own public/private split — 38 decided, 22 too close to call.</a:t>
+              <a:t>Table 1: ordinary competitions</a:t>
             </a:r>
-            <a:endParaRPr lang="en-US" sz="1700" dirty="0"/>
+            <a:endParaRPr lang="en-US" sz="1400" dirty="0"/>
           </a:p>
         </p:txBody>
       </p:sp>
+      <p:graphicFrame>
+        <p:nvGraphicFramePr>
+          <p:cNvPr id="5" name="Table 0"/>
+          <p:cNvGraphicFramePr>
+            <a:graphicFrameLocks noGrp="1"/>
+          </p:cNvGraphicFramePr>
+          <p:nvPr>
+            <p:extLst>
+              <p:ext uri="{D42A27DB-BD31-4B8C-83A1-F6EECF244321}">
+                <p14:modId xmlns:p14="http://schemas.microsoft.com/office/powerpoint/2010/main" val="1579011935"/>
+              </p:ext>
+            </p:extLst>
+          </p:nvPr>
+        </p:nvGraphicFramePr>
+        <p:xfrm>
+          <a:off x="658368" y="1280160"/>
+          <a:ext cx="6766560" cy="914400"/>
+        </p:xfrm>
+        <a:graphic>
+          <a:graphicData uri="http://schemas.openxmlformats.org/drawingml/2006/table">
+            <a:tbl>
+              <a:tblPr/>
+              <a:tblGrid>
+                <a:gridCol w="1783080"/>
+                <a:gridCol w="1417320"/>
+                <a:gridCol w="1207008"/>
+                <a:gridCol w="1207008"/>
+                <a:gridCol w="1152144"/>
+              </a:tblGrid>
+              <a:tr h="224028">
+                <a:tc>
+                  <a:txBody>
+                    <a:bodyPr/>
+                    <a:lstStyle/>
+                    <a:p>
+                      <a:pPr indent="0" marL="0">
+                        <a:buNone/>
+                      </a:pPr>
+                      <a:r>
+                        <a:rPr lang="en-US" sz="1100" b="1" dirty="0">
+                          <a:solidFill>
+                            <a:srgbClr val="111111"/>
+                          </a:solidFill>
+                          <a:latin typeface="Arial" pitchFamily="34" charset="0"/>
+                          <a:ea typeface="Arial" pitchFamily="34" charset="-122"/>
+                          <a:cs typeface="Arial" pitchFamily="34" charset="-120"/>
+                        </a:rPr>
+                        <a:t>Competition</a:t>
+                      </a:r>
+                      <a:endParaRPr lang="en-US" sz="1100" dirty="0">
+                        <a:latin typeface="Arial" charset="0"/>
+                        <a:ea typeface="Arial" charset="0"/>
+                        <a:cs typeface="Arial" charset="0"/>
+                      </a:endParaRPr>
+                    </a:p>
+                  </a:txBody>
+                  <a:tcPr marL="38100" marR="38100" marT="12700" marB="12700">
+                    <a:lnL w="0" cap="flat" cmpd="sng" algn="ctr">
+                      <a:noFill/>
+                    </a:lnL>
+                    <a:lnR w="0" cap="flat" cmpd="sng" algn="ctr">
+                      <a:noFill/>
+                    </a:lnR>
+                    <a:lnT w="0" cap="flat" cmpd="sng" algn="ctr">
+                      <a:noFill/>
+                    </a:lnT>
+                    <a:lnB w="0" cap="flat" cmpd="sng" algn="ctr">
+                      <a:noFill/>
+                    </a:lnB>
+                  </a:tcPr>
+                </a:tc>
+                <a:tc>
+                  <a:txBody>
+                    <a:bodyPr/>
+                    <a:lstStyle/>
+                    <a:p>
+                      <a:pPr indent="0" marL="0">
+                        <a:buNone/>
+                      </a:pPr>
+                      <a:r>
+                        <a:rPr lang="en-US" sz="1100" b="1" dirty="0">
+                          <a:solidFill>
+                            <a:srgbClr val="111111"/>
+                          </a:solidFill>
+                          <a:latin typeface="Arial" pitchFamily="34" charset="0"/>
+                          <a:ea typeface="Arial" pitchFamily="34" charset="-122"/>
+                          <a:cs typeface="Arial" pitchFamily="34" charset="-120"/>
+                        </a:rPr>
+                        <a:t>Metric</a:t>
+                      </a:r>
+                      <a:endParaRPr lang="en-US" sz="1100" dirty="0">
+                        <a:latin typeface="Arial" charset="0"/>
+                        <a:ea typeface="Arial" charset="0"/>
+                        <a:cs typeface="Arial" charset="0"/>
+                      </a:endParaRPr>
+                    </a:p>
+                  </a:txBody>
+                  <a:tcPr marL="38100" marR="38100" marT="12700" marB="12700">
+                    <a:lnL w="0" cap="flat" cmpd="sng" algn="ctr">
+                      <a:noFill/>
+                    </a:lnL>
+                    <a:lnR w="0" cap="flat" cmpd="sng" algn="ctr">
+                      <a:noFill/>
+                    </a:lnR>
+                    <a:lnT w="0" cap="flat" cmpd="sng" algn="ctr">
+                      <a:noFill/>
+                    </a:lnT>
+                    <a:lnB w="0" cap="flat" cmpd="sng" algn="ctr">
+                      <a:noFill/>
+                    </a:lnB>
+                  </a:tcPr>
+                </a:tc>
+                <a:tc>
+                  <a:txBody>
+                    <a:bodyPr/>
+                    <a:lstStyle/>
+                    <a:p>
+                      <a:pPr algn="r" indent="0" marL="0">
+                        <a:buNone/>
+                      </a:pPr>
+                      <a:r>
+                        <a:rPr lang="en-US" sz="1100" b="1" dirty="0">
+                          <a:solidFill>
+                            <a:srgbClr val="111111"/>
+                          </a:solidFill>
+                          <a:latin typeface="Arial" pitchFamily="34" charset="0"/>
+                          <a:ea typeface="Arial" pitchFamily="34" charset="-122"/>
+                          <a:cs typeface="Arial" pitchFamily="34" charset="-120"/>
+                        </a:rPr>
+                        <a:t>Sinica</a:t>
+                      </a:r>
+                      <a:endParaRPr lang="en-US" sz="1100" dirty="0">
+                        <a:latin typeface="Arial" charset="0"/>
+                        <a:ea typeface="Arial" charset="0"/>
+                        <a:cs typeface="Arial" charset="0"/>
+                      </a:endParaRPr>
+                    </a:p>
+                  </a:txBody>
+                  <a:tcPr marL="38100" marR="38100" marT="12700" marB="12700">
+                    <a:lnL w="0" cap="flat" cmpd="sng" algn="ctr">
+                      <a:noFill/>
+                    </a:lnL>
+                    <a:lnR w="0" cap="flat" cmpd="sng" algn="ctr">
+                      <a:noFill/>
+                    </a:lnR>
+                    <a:lnT w="0" cap="flat" cmpd="sng" algn="ctr">
+                      <a:noFill/>
+                    </a:lnT>
+                    <a:lnB w="0" cap="flat" cmpd="sng" algn="ctr">
+                      <a:noFill/>
+                    </a:lnB>
+                  </a:tcPr>
+                </a:tc>
+                <a:tc>
+                  <a:txBody>
+                    <a:bodyPr/>
+                    <a:lstStyle/>
+                    <a:p>
+                      <a:pPr algn="r" indent="0" marL="0">
+                        <a:buNone/>
+                      </a:pPr>
+                      <a:r>
+                        <a:rPr lang="en-US" sz="1100" b="1" dirty="0">
+                          <a:solidFill>
+                            <a:srgbClr val="111111"/>
+                          </a:solidFill>
+                          <a:latin typeface="Arial" pitchFamily="34" charset="0"/>
+                          <a:ea typeface="Arial" pitchFamily="34" charset="-122"/>
+                          <a:cs typeface="Arial" pitchFamily="34" charset="-120"/>
+                        </a:rPr>
+                        <a:t>NVIDIA</a:t>
+                      </a:r>
+                      <a:endParaRPr lang="en-US" sz="1100" dirty="0">
+                        <a:latin typeface="Arial" charset="0"/>
+                        <a:ea typeface="Arial" charset="0"/>
+                        <a:cs typeface="Arial" charset="0"/>
+                      </a:endParaRPr>
+                    </a:p>
+                  </a:txBody>
+                  <a:tcPr marL="38100" marR="38100" marT="12700" marB="12700">
+                    <a:lnL w="0" cap="flat" cmpd="sng" algn="ctr">
+                      <a:noFill/>
+                    </a:lnL>
+                    <a:lnR w="0" cap="flat" cmpd="sng" algn="ctr">
+                      <a:noFill/>
+                    </a:lnR>
+                    <a:lnT w="0" cap="flat" cmpd="sng" algn="ctr">
+                      <a:noFill/>
+                    </a:lnT>
+                    <a:lnB w="0" cap="flat" cmpd="sng" algn="ctr">
+                      <a:noFill/>
+                    </a:lnB>
+                  </a:tcPr>
+                </a:tc>
+                <a:tc>
+                  <a:txBody>
+                    <a:bodyPr/>
+                    <a:lstStyle/>
+                    <a:p>
+                      <a:pPr algn="r" indent="0" marL="0">
+                        <a:buNone/>
+                      </a:pPr>
+                      <a:r>
+                        <a:rPr lang="en-US" sz="1100" b="1" dirty="0">
+                          <a:solidFill>
+                            <a:srgbClr val="111111"/>
+                          </a:solidFill>
+                          <a:latin typeface="Arial" pitchFamily="34" charset="0"/>
+                          <a:ea typeface="Arial" pitchFamily="34" charset="-122"/>
+                          <a:cs typeface="Arial" pitchFamily="34" charset="-120"/>
+                        </a:rPr>
+                        <a:t>AIDE</a:t>
+                      </a:r>
+                      <a:endParaRPr lang="en-US" sz="1100" dirty="0">
+                        <a:latin typeface="Arial" charset="0"/>
+                        <a:ea typeface="Arial" charset="0"/>
+                        <a:cs typeface="Arial" charset="0"/>
+                      </a:endParaRPr>
+                    </a:p>
+                  </a:txBody>
+                  <a:tcPr marL="38100" marR="38100" marT="12700" marB="12700">
+                    <a:lnL w="0" cap="flat" cmpd="sng" algn="ctr">
+                      <a:noFill/>
+                    </a:lnL>
+                    <a:lnR w="0" cap="flat" cmpd="sng" algn="ctr">
+                      <a:noFill/>
+                    </a:lnR>
+                    <a:lnT w="0" cap="flat" cmpd="sng" algn="ctr">
+                      <a:noFill/>
+                    </a:lnT>
+                    <a:lnB w="0" cap="flat" cmpd="sng" algn="ctr">
+                      <a:noFill/>
+                    </a:lnB>
+                  </a:tcPr>
+                </a:tc>
+              </a:tr>
+              <a:tr h="224028">
+                <a:tc>
+                  <a:txBody>
+                    <a:bodyPr/>
+                    <a:lstStyle/>
+                    <a:p>
+                      <a:pPr indent="0" marL="0">
+                        <a:buNone/>
+                      </a:pPr>
+                      <a:r>
+                        <a:rPr lang="en-US" sz="1100" dirty="0">
+                          <a:solidFill>
+                            <a:srgbClr val="111111"/>
+                          </a:solidFill>
+                          <a:latin typeface="Arial" pitchFamily="34" charset="0"/>
+                          <a:ea typeface="Arial" pitchFamily="34" charset="-122"/>
+                          <a:cs typeface="Arial" pitchFamily="34" charset="-120"/>
+                        </a:rPr>
+                        <a:t>s3e1</a:t>
+                      </a:r>
+                      <a:endParaRPr lang="en-US" sz="1100" dirty="0">
+                        <a:latin typeface="Arial" charset="0"/>
+                        <a:ea typeface="Arial" charset="0"/>
+                        <a:cs typeface="Arial" charset="0"/>
+                      </a:endParaRPr>
+                    </a:p>
+                  </a:txBody>
+                  <a:tcPr marL="38100" marR="38100" marT="12700" marB="12700">
+                    <a:lnL w="0" cap="flat" cmpd="sng" algn="ctr">
+                      <a:noFill/>
+                    </a:lnL>
+                    <a:lnR w="0" cap="flat" cmpd="sng" algn="ctr">
+                      <a:noFill/>
+                    </a:lnR>
+                    <a:lnT w="0" cap="flat" cmpd="sng" algn="ctr">
+                      <a:noFill/>
+                    </a:lnT>
+                    <a:lnB w="0" cap="flat" cmpd="sng" algn="ctr">
+                      <a:noFill/>
+                    </a:lnB>
+                  </a:tcPr>
+                </a:tc>
+                <a:tc>
+                  <a:txBody>
+                    <a:bodyPr/>
+                    <a:lstStyle/>
+                    <a:p>
+                      <a:pPr indent="0" marL="0">
+                        <a:buNone/>
+                      </a:pPr>
+                      <a:r>
+                        <a:rPr lang="en-US" sz="1100" dirty="0">
+                          <a:solidFill>
+                            <a:srgbClr val="111111"/>
+                          </a:solidFill>
+                          <a:latin typeface="Arial" pitchFamily="34" charset="0"/>
+                          <a:ea typeface="Arial" pitchFamily="34" charset="-122"/>
+                          <a:cs typeface="Arial" pitchFamily="34" charset="-120"/>
+                        </a:rPr>
+                        <a:t>RMSE ↓</a:t>
+                      </a:r>
+                      <a:endParaRPr lang="en-US" sz="1100" dirty="0">
+                        <a:latin typeface="Arial" charset="0"/>
+                        <a:ea typeface="Arial" charset="0"/>
+                        <a:cs typeface="Arial" charset="0"/>
+                      </a:endParaRPr>
+                    </a:p>
+                  </a:txBody>
+                  <a:tcPr marL="38100" marR="38100" marT="12700" marB="12700">
+                    <a:lnL w="0" cap="flat" cmpd="sng" algn="ctr">
+                      <a:noFill/>
+                    </a:lnL>
+                    <a:lnR w="0" cap="flat" cmpd="sng" algn="ctr">
+                      <a:noFill/>
+                    </a:lnR>
+                    <a:lnT w="0" cap="flat" cmpd="sng" algn="ctr">
+                      <a:noFill/>
+                    </a:lnT>
+                    <a:lnB w="0" cap="flat" cmpd="sng" algn="ctr">
+                      <a:noFill/>
+                    </a:lnB>
+                  </a:tcPr>
+                </a:tc>
+                <a:tc>
+                  <a:txBody>
+                    <a:bodyPr/>
+                    <a:lstStyle/>
+                    <a:p>
+                      <a:pPr algn="r" indent="0" marL="0">
+                        <a:buNone/>
+                      </a:pPr>
+                      <a:r>
+                        <a:rPr lang="en-US" sz="1100" b="1" dirty="0">
+                          <a:solidFill>
+                            <a:srgbClr val="111111"/>
+                          </a:solidFill>
+                          <a:latin typeface="Arial" pitchFamily="34" charset="0"/>
+                          <a:ea typeface="Arial" pitchFamily="34" charset="-122"/>
+                          <a:cs typeface="Arial" pitchFamily="34" charset="-120"/>
+                        </a:rPr>
+                        <a:t>0.55275</a:t>
+                      </a:r>
+                      <a:endParaRPr lang="en-US" sz="1100" dirty="0">
+                        <a:latin typeface="Arial" charset="0"/>
+                        <a:ea typeface="Arial" charset="0"/>
+                        <a:cs typeface="Arial" charset="0"/>
+                      </a:endParaRPr>
+                    </a:p>
+                  </a:txBody>
+                  <a:tcPr marL="38100" marR="38100" marT="12700" marB="12700">
+                    <a:lnL w="0" cap="flat" cmpd="sng" algn="ctr">
+                      <a:noFill/>
+                    </a:lnL>
+                    <a:lnR w="0" cap="flat" cmpd="sng" algn="ctr">
+                      <a:noFill/>
+                    </a:lnR>
+                    <a:lnT w="0" cap="flat" cmpd="sng" algn="ctr">
+                      <a:noFill/>
+                    </a:lnT>
+                    <a:lnB w="0" cap="flat" cmpd="sng" algn="ctr">
+                      <a:noFill/>
+                    </a:lnB>
+                  </a:tcPr>
+                </a:tc>
+                <a:tc>
+                  <a:txBody>
+                    <a:bodyPr/>
+                    <a:lstStyle/>
+                    <a:p>
+                      <a:pPr algn="r" indent="0" marL="0">
+                        <a:buNone/>
+                      </a:pPr>
+                      <a:r>
+                        <a:rPr lang="en-US" sz="1100" dirty="0">
+                          <a:solidFill>
+                            <a:srgbClr val="111111"/>
+                          </a:solidFill>
+                          <a:latin typeface="Arial" pitchFamily="34" charset="0"/>
+                          <a:ea typeface="Arial" pitchFamily="34" charset="-122"/>
+                          <a:cs typeface="Arial" pitchFamily="34" charset="-120"/>
+                        </a:rPr>
+                        <a:t>0.55550</a:t>
+                      </a:r>
+                      <a:endParaRPr lang="en-US" sz="1100" dirty="0">
+                        <a:latin typeface="Arial" charset="0"/>
+                        <a:ea typeface="Arial" charset="0"/>
+                        <a:cs typeface="Arial" charset="0"/>
+                      </a:endParaRPr>
+                    </a:p>
+                  </a:txBody>
+                  <a:tcPr marL="38100" marR="38100" marT="12700" marB="12700">
+                    <a:lnL w="0" cap="flat" cmpd="sng" algn="ctr">
+                      <a:noFill/>
+                    </a:lnL>
+                    <a:lnR w="0" cap="flat" cmpd="sng" algn="ctr">
+                      <a:noFill/>
+                    </a:lnR>
+                    <a:lnT w="0" cap="flat" cmpd="sng" algn="ctr">
+                      <a:noFill/>
+                    </a:lnT>
+                    <a:lnB w="0" cap="flat" cmpd="sng" algn="ctr">
+                      <a:noFill/>
+                    </a:lnB>
+                  </a:tcPr>
+                </a:tc>
+                <a:tc>
+                  <a:txBody>
+                    <a:bodyPr/>
+                    <a:lstStyle/>
+                    <a:p>
+                      <a:pPr algn="r" indent="0" marL="0">
+                        <a:buNone/>
+                      </a:pPr>
+                      <a:r>
+                        <a:rPr lang="en-US" sz="1100" dirty="0">
+                          <a:solidFill>
+                            <a:srgbClr val="111111"/>
+                          </a:solidFill>
+                          <a:latin typeface="Arial" pitchFamily="34" charset="0"/>
+                          <a:ea typeface="Arial" pitchFamily="34" charset="-122"/>
+                          <a:cs typeface="Arial" pitchFamily="34" charset="-120"/>
+                        </a:rPr>
+                        <a:t>0.55552</a:t>
+                      </a:r>
+                      <a:endParaRPr lang="en-US" sz="1100" dirty="0">
+                        <a:latin typeface="Arial" charset="0"/>
+                        <a:ea typeface="Arial" charset="0"/>
+                        <a:cs typeface="Arial" charset="0"/>
+                      </a:endParaRPr>
+                    </a:p>
+                  </a:txBody>
+                  <a:tcPr marL="38100" marR="38100" marT="12700" marB="12700">
+                    <a:lnL w="0" cap="flat" cmpd="sng" algn="ctr">
+                      <a:noFill/>
+                    </a:lnL>
+                    <a:lnR w="0" cap="flat" cmpd="sng" algn="ctr">
+                      <a:noFill/>
+                    </a:lnR>
+                    <a:lnT w="0" cap="flat" cmpd="sng" algn="ctr">
+                      <a:noFill/>
+                    </a:lnT>
+                    <a:lnB w="0" cap="flat" cmpd="sng" algn="ctr">
+                      <a:noFill/>
+                    </a:lnB>
+                  </a:tcPr>
+                </a:tc>
+              </a:tr>
+              <a:tr h="224028">
+                <a:tc>
+                  <a:txBody>
+                    <a:bodyPr/>
+                    <a:lstStyle/>
+                    <a:p>
+                      <a:pPr indent="0" marL="0">
+                        <a:buNone/>
+                      </a:pPr>
+                      <a:r>
+                        <a:rPr lang="en-US" sz="1100" dirty="0">
+                          <a:solidFill>
+                            <a:srgbClr val="111111"/>
+                          </a:solidFill>
+                          <a:latin typeface="Arial" pitchFamily="34" charset="0"/>
+                          <a:ea typeface="Arial" pitchFamily="34" charset="-122"/>
+                          <a:cs typeface="Arial" pitchFamily="34" charset="-120"/>
+                        </a:rPr>
+                        <a:t>s3e3</a:t>
+                      </a:r>
+                      <a:endParaRPr lang="en-US" sz="1100" dirty="0">
+                        <a:latin typeface="Arial" charset="0"/>
+                        <a:ea typeface="Arial" charset="0"/>
+                        <a:cs typeface="Arial" charset="0"/>
+                      </a:endParaRPr>
+                    </a:p>
+                  </a:txBody>
+                  <a:tcPr marL="38100" marR="38100" marT="12700" marB="12700">
+                    <a:lnL w="0" cap="flat" cmpd="sng" algn="ctr">
+                      <a:noFill/>
+                    </a:lnL>
+                    <a:lnR w="0" cap="flat" cmpd="sng" algn="ctr">
+                      <a:noFill/>
+                    </a:lnR>
+                    <a:lnT w="0" cap="flat" cmpd="sng" algn="ctr">
+                      <a:noFill/>
+                    </a:lnT>
+                    <a:lnB w="0" cap="flat" cmpd="sng" algn="ctr">
+                      <a:noFill/>
+                    </a:lnB>
+                  </a:tcPr>
+                </a:tc>
+                <a:tc>
+                  <a:txBody>
+                    <a:bodyPr/>
+                    <a:lstStyle/>
+                    <a:p>
+                      <a:pPr indent="0" marL="0">
+                        <a:buNone/>
+                      </a:pPr>
+                      <a:r>
+                        <a:rPr lang="en-US" sz="1100" dirty="0">
+                          <a:solidFill>
+                            <a:srgbClr val="111111"/>
+                          </a:solidFill>
+                          <a:latin typeface="Arial" pitchFamily="34" charset="0"/>
+                          <a:ea typeface="Arial" pitchFamily="34" charset="-122"/>
+                          <a:cs typeface="Arial" pitchFamily="34" charset="-120"/>
+                        </a:rPr>
+                        <a:t>AUC ↑</a:t>
+                      </a:r>
+                      <a:endParaRPr lang="en-US" sz="1100" dirty="0">
+                        <a:latin typeface="Arial" charset="0"/>
+                        <a:ea typeface="Arial" charset="0"/>
+                        <a:cs typeface="Arial" charset="0"/>
+                      </a:endParaRPr>
+                    </a:p>
+                  </a:txBody>
+                  <a:tcPr marL="38100" marR="38100" marT="12700" marB="12700">
+                    <a:lnL w="0" cap="flat" cmpd="sng" algn="ctr">
+                      <a:noFill/>
+                    </a:lnL>
+                    <a:lnR w="0" cap="flat" cmpd="sng" algn="ctr">
+                      <a:noFill/>
+                    </a:lnR>
+                    <a:lnT w="0" cap="flat" cmpd="sng" algn="ctr">
+                      <a:noFill/>
+                    </a:lnT>
+                    <a:lnB w="0" cap="flat" cmpd="sng" algn="ctr">
+                      <a:noFill/>
+                    </a:lnB>
+                  </a:tcPr>
+                </a:tc>
+                <a:tc>
+                  <a:txBody>
+                    <a:bodyPr/>
+                    <a:lstStyle/>
+                    <a:p>
+                      <a:pPr algn="r" indent="0" marL="0">
+                        <a:buNone/>
+                      </a:pPr>
+                      <a:r>
+                        <a:rPr lang="en-US" sz="1100" dirty="0">
+                          <a:solidFill>
+                            <a:srgbClr val="111111"/>
+                          </a:solidFill>
+                          <a:latin typeface="Arial" pitchFamily="34" charset="0"/>
+                          <a:ea typeface="Arial" pitchFamily="34" charset="-122"/>
+                          <a:cs typeface="Arial" pitchFamily="34" charset="-120"/>
+                        </a:rPr>
+                        <a:t>0.87157</a:t>
+                      </a:r>
+                      <a:endParaRPr lang="en-US" sz="1100" dirty="0">
+                        <a:latin typeface="Arial" charset="0"/>
+                        <a:ea typeface="Arial" charset="0"/>
+                        <a:cs typeface="Arial" charset="0"/>
+                      </a:endParaRPr>
+                    </a:p>
+                  </a:txBody>
+                  <a:tcPr marL="38100" marR="38100" marT="12700" marB="12700">
+                    <a:lnL w="0" cap="flat" cmpd="sng" algn="ctr">
+                      <a:noFill/>
+                    </a:lnL>
+                    <a:lnR w="0" cap="flat" cmpd="sng" algn="ctr">
+                      <a:noFill/>
+                    </a:lnR>
+                    <a:lnT w="0" cap="flat" cmpd="sng" algn="ctr">
+                      <a:noFill/>
+                    </a:lnT>
+                    <a:lnB w="0" cap="flat" cmpd="sng" algn="ctr">
+                      <a:noFill/>
+                    </a:lnB>
+                  </a:tcPr>
+                </a:tc>
+                <a:tc>
+                  <a:txBody>
+                    <a:bodyPr/>
+                    <a:lstStyle/>
+                    <a:p>
+                      <a:pPr algn="r" indent="0" marL="0">
+                        <a:buNone/>
+                      </a:pPr>
+                      <a:r>
+                        <a:rPr lang="en-US" sz="1100" b="1" dirty="0">
+                          <a:solidFill>
+                            <a:srgbClr val="111111"/>
+                          </a:solidFill>
+                          <a:latin typeface="Arial" pitchFamily="34" charset="0"/>
+                          <a:ea typeface="Arial" pitchFamily="34" charset="-122"/>
+                          <a:cs typeface="Arial" pitchFamily="34" charset="-120"/>
+                        </a:rPr>
+                        <a:t>0.89537</a:t>
+                      </a:r>
+                      <a:endParaRPr lang="en-US" sz="1100" dirty="0">
+                        <a:latin typeface="Arial" charset="0"/>
+                        <a:ea typeface="Arial" charset="0"/>
+                        <a:cs typeface="Arial" charset="0"/>
+                      </a:endParaRPr>
+                    </a:p>
+                  </a:txBody>
+                  <a:tcPr marL="38100" marR="38100" marT="12700" marB="12700">
+                    <a:lnL w="0" cap="flat" cmpd="sng" algn="ctr">
+                      <a:noFill/>
+                    </a:lnL>
+                    <a:lnR w="0" cap="flat" cmpd="sng" algn="ctr">
+                      <a:noFill/>
+                    </a:lnR>
+                    <a:lnT w="0" cap="flat" cmpd="sng" algn="ctr">
+                      <a:noFill/>
+                    </a:lnT>
+                    <a:lnB w="0" cap="flat" cmpd="sng" algn="ctr">
+                      <a:noFill/>
+                    </a:lnB>
+                  </a:tcPr>
+                </a:tc>
+                <a:tc>
+                  <a:txBody>
+                    <a:bodyPr/>
+                    <a:lstStyle/>
+                    <a:p>
+                      <a:pPr algn="r" indent="0" marL="0">
+                        <a:buNone/>
+                      </a:pPr>
+                      <a:r>
+                        <a:rPr lang="en-US" sz="1100" dirty="0">
+                          <a:solidFill>
+                            <a:srgbClr val="111111"/>
+                          </a:solidFill>
+                          <a:latin typeface="Arial" pitchFamily="34" charset="0"/>
+                          <a:ea typeface="Arial" pitchFamily="34" charset="-122"/>
+                          <a:cs typeface="Arial" pitchFamily="34" charset="-120"/>
+                        </a:rPr>
+                        <a:t>0.86863</a:t>
+                      </a:r>
+                      <a:endParaRPr lang="en-US" sz="1100" dirty="0">
+                        <a:latin typeface="Arial" charset="0"/>
+                        <a:ea typeface="Arial" charset="0"/>
+                        <a:cs typeface="Arial" charset="0"/>
+                      </a:endParaRPr>
+                    </a:p>
+                  </a:txBody>
+                  <a:tcPr marL="38100" marR="38100" marT="12700" marB="12700">
+                    <a:lnL w="0" cap="flat" cmpd="sng" algn="ctr">
+                      <a:noFill/>
+                    </a:lnL>
+                    <a:lnR w="0" cap="flat" cmpd="sng" algn="ctr">
+                      <a:noFill/>
+                    </a:lnR>
+                    <a:lnT w="0" cap="flat" cmpd="sng" algn="ctr">
+                      <a:noFill/>
+                    </a:lnT>
+                    <a:lnB w="0" cap="flat" cmpd="sng" algn="ctr">
+                      <a:noFill/>
+                    </a:lnB>
+                  </a:tcPr>
+                </a:tc>
+              </a:tr>
+              <a:tr h="224028">
+                <a:tc>
+                  <a:txBody>
+                    <a:bodyPr/>
+                    <a:lstStyle/>
+                    <a:p>
+                      <a:pPr indent="0" marL="0">
+                        <a:buNone/>
+                      </a:pPr>
+                      <a:r>
+                        <a:rPr lang="en-US" sz="1100" dirty="0">
+                          <a:solidFill>
+                            <a:srgbClr val="111111"/>
+                          </a:solidFill>
+                          <a:latin typeface="Arial" pitchFamily="34" charset="0"/>
+                          <a:ea typeface="Arial" pitchFamily="34" charset="-122"/>
+                          <a:cs typeface="Arial" pitchFamily="34" charset="-120"/>
+                        </a:rPr>
+                        <a:t>s3e5</a:t>
+                      </a:r>
+                      <a:endParaRPr lang="en-US" sz="1100" dirty="0">
+                        <a:latin typeface="Arial" charset="0"/>
+                        <a:ea typeface="Arial" charset="0"/>
+                        <a:cs typeface="Arial" charset="0"/>
+                      </a:endParaRPr>
+                    </a:p>
+                  </a:txBody>
+                  <a:tcPr marL="38100" marR="38100" marT="12700" marB="12700">
+                    <a:lnL w="0" cap="flat" cmpd="sng" algn="ctr">
+                      <a:noFill/>
+                    </a:lnL>
+                    <a:lnR w="0" cap="flat" cmpd="sng" algn="ctr">
+                      <a:noFill/>
+                    </a:lnR>
+                    <a:lnT w="0" cap="flat" cmpd="sng" algn="ctr">
+                      <a:noFill/>
+                    </a:lnT>
+                    <a:lnB w="0" cap="flat" cmpd="sng" algn="ctr">
+                      <a:noFill/>
+                    </a:lnB>
+                  </a:tcPr>
+                </a:tc>
+                <a:tc>
+                  <a:txBody>
+                    <a:bodyPr/>
+                    <a:lstStyle/>
+                    <a:p>
+                      <a:pPr indent="0" marL="0">
+                        <a:buNone/>
+                      </a:pPr>
+                      <a:r>
+                        <a:rPr lang="en-US" sz="1100" dirty="0">
+                          <a:solidFill>
+                            <a:srgbClr val="111111"/>
+                          </a:solidFill>
+                          <a:latin typeface="Arial" pitchFamily="34" charset="0"/>
+                          <a:ea typeface="Arial" pitchFamily="34" charset="-122"/>
+                          <a:cs typeface="Arial" pitchFamily="34" charset="-120"/>
+                        </a:rPr>
+                        <a:t>QWK ↑</a:t>
+                      </a:r>
+                      <a:endParaRPr lang="en-US" sz="1100" dirty="0">
+                        <a:latin typeface="Arial" charset="0"/>
+                        <a:ea typeface="Arial" charset="0"/>
+                        <a:cs typeface="Arial" charset="0"/>
+                      </a:endParaRPr>
+                    </a:p>
+                  </a:txBody>
+                  <a:tcPr marL="38100" marR="38100" marT="12700" marB="12700">
+                    <a:lnL w="0" cap="flat" cmpd="sng" algn="ctr">
+                      <a:noFill/>
+                    </a:lnL>
+                    <a:lnR w="0" cap="flat" cmpd="sng" algn="ctr">
+                      <a:noFill/>
+                    </a:lnR>
+                    <a:lnT w="0" cap="flat" cmpd="sng" algn="ctr">
+                      <a:noFill/>
+                    </a:lnT>
+                    <a:lnB w="0" cap="flat" cmpd="sng" algn="ctr">
+                      <a:noFill/>
+                    </a:lnB>
+                  </a:tcPr>
+                </a:tc>
+                <a:tc>
+                  <a:txBody>
+                    <a:bodyPr/>
+                    <a:lstStyle/>
+                    <a:p>
+                      <a:pPr algn="r" indent="0" marL="0">
+                        <a:buNone/>
+                      </a:pPr>
+                      <a:r>
+                        <a:rPr lang="en-US" sz="1100" dirty="0">
+                          <a:solidFill>
+                            <a:srgbClr val="111111"/>
+                          </a:solidFill>
+                          <a:latin typeface="Arial" pitchFamily="34" charset="0"/>
+                          <a:ea typeface="Arial" pitchFamily="34" charset="-122"/>
+                          <a:cs typeface="Arial" pitchFamily="34" charset="-120"/>
+                        </a:rPr>
+                        <a:t>0.57223</a:t>
+                      </a:r>
+                      <a:endParaRPr lang="en-US" sz="1100" dirty="0">
+                        <a:latin typeface="Arial" charset="0"/>
+                        <a:ea typeface="Arial" charset="0"/>
+                        <a:cs typeface="Arial" charset="0"/>
+                      </a:endParaRPr>
+                    </a:p>
+                  </a:txBody>
+                  <a:tcPr marL="38100" marR="38100" marT="12700" marB="12700">
+                    <a:lnL w="0" cap="flat" cmpd="sng" algn="ctr">
+                      <a:noFill/>
+                    </a:lnL>
+                    <a:lnR w="0" cap="flat" cmpd="sng" algn="ctr">
+                      <a:noFill/>
+                    </a:lnR>
+                    <a:lnT w="0" cap="flat" cmpd="sng" algn="ctr">
+                      <a:noFill/>
+                    </a:lnT>
+                    <a:lnB w="0" cap="flat" cmpd="sng" algn="ctr">
+                      <a:noFill/>
+                    </a:lnB>
+                  </a:tcPr>
+                </a:tc>
+                <a:tc>
+                  <a:txBody>
+                    <a:bodyPr/>
+                    <a:lstStyle/>
+                    <a:p>
+                      <a:pPr algn="r" indent="0" marL="0">
+                        <a:buNone/>
+                      </a:pPr>
+                      <a:r>
+                        <a:rPr lang="en-US" sz="1100" dirty="0">
+                          <a:solidFill>
+                            <a:srgbClr val="111111"/>
+                          </a:solidFill>
+                          <a:latin typeface="Arial" pitchFamily="34" charset="0"/>
+                          <a:ea typeface="Arial" pitchFamily="34" charset="-122"/>
+                          <a:cs typeface="Arial" pitchFamily="34" charset="-120"/>
+                        </a:rPr>
+                        <a:t>0.56974</a:t>
+                      </a:r>
+                      <a:endParaRPr lang="en-US" sz="1100" dirty="0">
+                        <a:latin typeface="Arial" charset="0"/>
+                        <a:ea typeface="Arial" charset="0"/>
+                        <a:cs typeface="Arial" charset="0"/>
+                      </a:endParaRPr>
+                    </a:p>
+                  </a:txBody>
+                  <a:tcPr marL="38100" marR="38100" marT="12700" marB="12700">
+                    <a:lnL w="0" cap="flat" cmpd="sng" algn="ctr">
+                      <a:noFill/>
+                    </a:lnL>
+                    <a:lnR w="0" cap="flat" cmpd="sng" algn="ctr">
+                      <a:noFill/>
+                    </a:lnR>
+                    <a:lnT w="0" cap="flat" cmpd="sng" algn="ctr">
+                      <a:noFill/>
+                    </a:lnT>
+                    <a:lnB w="0" cap="flat" cmpd="sng" algn="ctr">
+                      <a:noFill/>
+                    </a:lnB>
+                  </a:tcPr>
+                </a:tc>
+                <a:tc>
+                  <a:txBody>
+                    <a:bodyPr/>
+                    <a:lstStyle/>
+                    <a:p>
+                      <a:pPr algn="r" indent="0" marL="0">
+                        <a:buNone/>
+                      </a:pPr>
+                      <a:r>
+                        <a:rPr lang="en-US" sz="1100" b="1" dirty="0">
+                          <a:solidFill>
+                            <a:srgbClr val="111111"/>
+                          </a:solidFill>
+                          <a:latin typeface="Arial" pitchFamily="34" charset="0"/>
+                          <a:ea typeface="Arial" pitchFamily="34" charset="-122"/>
+                          <a:cs typeface="Arial" pitchFamily="34" charset="-120"/>
+                        </a:rPr>
+                        <a:t>0.58138</a:t>
+                      </a:r>
+                      <a:endParaRPr lang="en-US" sz="1100" dirty="0">
+                        <a:latin typeface="Arial" charset="0"/>
+                        <a:ea typeface="Arial" charset="0"/>
+                        <a:cs typeface="Arial" charset="0"/>
+                      </a:endParaRPr>
+                    </a:p>
+                  </a:txBody>
+                  <a:tcPr marL="38100" marR="38100" marT="12700" marB="12700">
+                    <a:lnL w="0" cap="flat" cmpd="sng" algn="ctr">
+                      <a:noFill/>
+                    </a:lnL>
+                    <a:lnR w="0" cap="flat" cmpd="sng" algn="ctr">
+                      <a:noFill/>
+                    </a:lnR>
+                    <a:lnT w="0" cap="flat" cmpd="sng" algn="ctr">
+                      <a:noFill/>
+                    </a:lnT>
+                    <a:lnB w="0" cap="flat" cmpd="sng" algn="ctr">
+                      <a:noFill/>
+                    </a:lnB>
+                  </a:tcPr>
+                </a:tc>
+              </a:tr>
+              <a:tr h="224028">
+                <a:tc>
+                  <a:txBody>
+                    <a:bodyPr/>
+                    <a:lstStyle/>
+                    <a:p>
+                      <a:pPr indent="0" marL="0">
+                        <a:buNone/>
+                      </a:pPr>
+                      <a:r>
+                        <a:rPr lang="en-US" sz="1100" dirty="0">
+                          <a:solidFill>
+                            <a:srgbClr val="111111"/>
+                          </a:solidFill>
+                          <a:latin typeface="Arial" pitchFamily="34" charset="0"/>
+                          <a:ea typeface="Arial" pitchFamily="34" charset="-122"/>
+                          <a:cs typeface="Arial" pitchFamily="34" charset="-120"/>
+                        </a:rPr>
+                        <a:t>s3e7</a:t>
+                      </a:r>
+                      <a:endParaRPr lang="en-US" sz="1100" dirty="0">
+                        <a:latin typeface="Arial" charset="0"/>
+                        <a:ea typeface="Arial" charset="0"/>
+                        <a:cs typeface="Arial" charset="0"/>
+                      </a:endParaRPr>
+                    </a:p>
+                  </a:txBody>
+                  <a:tcPr marL="38100" marR="38100" marT="12700" marB="12700">
+                    <a:lnL w="0" cap="flat" cmpd="sng" algn="ctr">
+                      <a:noFill/>
+                    </a:lnL>
+                    <a:lnR w="0" cap="flat" cmpd="sng" algn="ctr">
+                      <a:noFill/>
+                    </a:lnR>
+                    <a:lnT w="0" cap="flat" cmpd="sng" algn="ctr">
+                      <a:noFill/>
+                    </a:lnT>
+                    <a:lnB w="0" cap="flat" cmpd="sng" algn="ctr">
+                      <a:noFill/>
+                    </a:lnB>
+                  </a:tcPr>
+                </a:tc>
+                <a:tc>
+                  <a:txBody>
+                    <a:bodyPr/>
+                    <a:lstStyle/>
+                    <a:p>
+                      <a:pPr indent="0" marL="0">
+                        <a:buNone/>
+                      </a:pPr>
+                      <a:r>
+                        <a:rPr lang="en-US" sz="1100" dirty="0">
+                          <a:solidFill>
+                            <a:srgbClr val="111111"/>
+                          </a:solidFill>
+                          <a:latin typeface="Arial" pitchFamily="34" charset="0"/>
+                          <a:ea typeface="Arial" pitchFamily="34" charset="-122"/>
+                          <a:cs typeface="Arial" pitchFamily="34" charset="-120"/>
+                        </a:rPr>
+                        <a:t>AUC ↑</a:t>
+                      </a:r>
+                      <a:endParaRPr lang="en-US" sz="1100" dirty="0">
+                        <a:latin typeface="Arial" charset="0"/>
+                        <a:ea typeface="Arial" charset="0"/>
+                        <a:cs typeface="Arial" charset="0"/>
+                      </a:endParaRPr>
+                    </a:p>
+                  </a:txBody>
+                  <a:tcPr marL="38100" marR="38100" marT="12700" marB="12700">
+                    <a:lnL w="0" cap="flat" cmpd="sng" algn="ctr">
+                      <a:noFill/>
+                    </a:lnL>
+                    <a:lnR w="0" cap="flat" cmpd="sng" algn="ctr">
+                      <a:noFill/>
+                    </a:lnR>
+                    <a:lnT w="0" cap="flat" cmpd="sng" algn="ctr">
+                      <a:noFill/>
+                    </a:lnT>
+                    <a:lnB w="0" cap="flat" cmpd="sng" algn="ctr">
+                      <a:noFill/>
+                    </a:lnB>
+                  </a:tcPr>
+                </a:tc>
+                <a:tc>
+                  <a:txBody>
+                    <a:bodyPr/>
+                    <a:lstStyle/>
+                    <a:p>
+                      <a:pPr algn="r" indent="0" marL="0">
+                        <a:buNone/>
+                      </a:pPr>
+                      <a:r>
+                        <a:rPr lang="en-US" sz="1100" dirty="0">
+                          <a:solidFill>
+                            <a:srgbClr val="111111"/>
+                          </a:solidFill>
+                          <a:latin typeface="Arial" pitchFamily="34" charset="0"/>
+                          <a:ea typeface="Arial" pitchFamily="34" charset="-122"/>
+                          <a:cs typeface="Arial" pitchFamily="34" charset="-120"/>
+                        </a:rPr>
+                        <a:t>0.90441</a:t>
+                      </a:r>
+                      <a:endParaRPr lang="en-US" sz="1100" dirty="0">
+                        <a:latin typeface="Arial" charset="0"/>
+                        <a:ea typeface="Arial" charset="0"/>
+                        <a:cs typeface="Arial" charset="0"/>
+                      </a:endParaRPr>
+                    </a:p>
+                  </a:txBody>
+                  <a:tcPr marL="38100" marR="38100" marT="12700" marB="12700">
+                    <a:lnL w="0" cap="flat" cmpd="sng" algn="ctr">
+                      <a:noFill/>
+                    </a:lnL>
+                    <a:lnR w="0" cap="flat" cmpd="sng" algn="ctr">
+                      <a:noFill/>
+                    </a:lnR>
+                    <a:lnT w="0" cap="flat" cmpd="sng" algn="ctr">
+                      <a:noFill/>
+                    </a:lnT>
+                    <a:lnB w="0" cap="flat" cmpd="sng" algn="ctr">
+                      <a:noFill/>
+                    </a:lnB>
+                  </a:tcPr>
+                </a:tc>
+                <a:tc>
+                  <a:txBody>
+                    <a:bodyPr/>
+                    <a:lstStyle/>
+                    <a:p>
+                      <a:pPr algn="r" indent="0" marL="0">
+                        <a:buNone/>
+                      </a:pPr>
+                      <a:r>
+                        <a:rPr lang="en-US" sz="1100" b="1" dirty="0">
+                          <a:solidFill>
+                            <a:srgbClr val="111111"/>
+                          </a:solidFill>
+                          <a:latin typeface="Arial" pitchFamily="34" charset="0"/>
+                          <a:ea typeface="Arial" pitchFamily="34" charset="-122"/>
+                          <a:cs typeface="Arial" pitchFamily="34" charset="-120"/>
+                        </a:rPr>
+                        <a:t>0.90458</a:t>
+                      </a:r>
+                      <a:endParaRPr lang="en-US" sz="1100" dirty="0">
+                        <a:latin typeface="Arial" charset="0"/>
+                        <a:ea typeface="Arial" charset="0"/>
+                        <a:cs typeface="Arial" charset="0"/>
+                      </a:endParaRPr>
+                    </a:p>
+                  </a:txBody>
+                  <a:tcPr marL="38100" marR="38100" marT="12700" marB="12700">
+                    <a:lnL w="0" cap="flat" cmpd="sng" algn="ctr">
+                      <a:noFill/>
+                    </a:lnL>
+                    <a:lnR w="0" cap="flat" cmpd="sng" algn="ctr">
+                      <a:noFill/>
+                    </a:lnR>
+                    <a:lnT w="0" cap="flat" cmpd="sng" algn="ctr">
+                      <a:noFill/>
+                    </a:lnT>
+                    <a:lnB w="0" cap="flat" cmpd="sng" algn="ctr">
+                      <a:noFill/>
+                    </a:lnB>
+                  </a:tcPr>
+                </a:tc>
+                <a:tc>
+                  <a:txBody>
+                    <a:bodyPr/>
+                    <a:lstStyle/>
+                    <a:p>
+                      <a:pPr algn="r" indent="0" marL="0">
+                        <a:buNone/>
+                      </a:pPr>
+                      <a:r>
+                        <a:rPr lang="en-US" sz="1100" dirty="0">
+                          <a:solidFill>
+                            <a:srgbClr val="111111"/>
+                          </a:solidFill>
+                          <a:latin typeface="Arial" pitchFamily="34" charset="0"/>
+                          <a:ea typeface="Arial" pitchFamily="34" charset="-122"/>
+                          <a:cs typeface="Arial" pitchFamily="34" charset="-120"/>
+                        </a:rPr>
+                        <a:t>0.90109</a:t>
+                      </a:r>
+                      <a:endParaRPr lang="en-US" sz="1100" dirty="0">
+                        <a:latin typeface="Arial" charset="0"/>
+                        <a:ea typeface="Arial" charset="0"/>
+                        <a:cs typeface="Arial" charset="0"/>
+                      </a:endParaRPr>
+                    </a:p>
+                  </a:txBody>
+                  <a:tcPr marL="38100" marR="38100" marT="12700" marB="12700">
+                    <a:lnL w="0" cap="flat" cmpd="sng" algn="ctr">
+                      <a:noFill/>
+                    </a:lnL>
+                    <a:lnR w="0" cap="flat" cmpd="sng" algn="ctr">
+                      <a:noFill/>
+                    </a:lnR>
+                    <a:lnT w="0" cap="flat" cmpd="sng" algn="ctr">
+                      <a:noFill/>
+                    </a:lnT>
+                    <a:lnB w="0" cap="flat" cmpd="sng" algn="ctr">
+                      <a:noFill/>
+                    </a:lnB>
+                  </a:tcPr>
+                </a:tc>
+              </a:tr>
+              <a:tr h="224028">
+                <a:tc>
+                  <a:txBody>
+                    <a:bodyPr/>
+                    <a:lstStyle/>
+                    <a:p>
+                      <a:pPr indent="0" marL="0">
+                        <a:buNone/>
+                      </a:pPr>
+                      <a:r>
+                        <a:rPr lang="en-US" sz="1100" dirty="0">
+                          <a:solidFill>
+                            <a:srgbClr val="111111"/>
+                          </a:solidFill>
+                          <a:latin typeface="Arial" pitchFamily="34" charset="0"/>
+                          <a:ea typeface="Arial" pitchFamily="34" charset="-122"/>
+                          <a:cs typeface="Arial" pitchFamily="34" charset="-120"/>
+                        </a:rPr>
+                        <a:t>s3e9</a:t>
+                      </a:r>
+                      <a:endParaRPr lang="en-US" sz="1100" dirty="0">
+                        <a:latin typeface="Arial" charset="0"/>
+                        <a:ea typeface="Arial" charset="0"/>
+                        <a:cs typeface="Arial" charset="0"/>
+                      </a:endParaRPr>
+                    </a:p>
+                  </a:txBody>
+                  <a:tcPr marL="38100" marR="38100" marT="12700" marB="12700">
+                    <a:lnL w="0" cap="flat" cmpd="sng" algn="ctr">
+                      <a:noFill/>
+                    </a:lnL>
+                    <a:lnR w="0" cap="flat" cmpd="sng" algn="ctr">
+                      <a:noFill/>
+                    </a:lnR>
+                    <a:lnT w="0" cap="flat" cmpd="sng" algn="ctr">
+                      <a:noFill/>
+                    </a:lnT>
+                    <a:lnB w="0" cap="flat" cmpd="sng" algn="ctr">
+                      <a:noFill/>
+                    </a:lnB>
+                  </a:tcPr>
+                </a:tc>
+                <a:tc>
+                  <a:txBody>
+                    <a:bodyPr/>
+                    <a:lstStyle/>
+                    <a:p>
+                      <a:pPr indent="0" marL="0">
+                        <a:buNone/>
+                      </a:pPr>
+                      <a:r>
+                        <a:rPr lang="en-US" sz="1100" dirty="0">
+                          <a:solidFill>
+                            <a:srgbClr val="111111"/>
+                          </a:solidFill>
+                          <a:latin typeface="Arial" pitchFamily="34" charset="0"/>
+                          <a:ea typeface="Arial" pitchFamily="34" charset="-122"/>
+                          <a:cs typeface="Arial" pitchFamily="34" charset="-120"/>
+                        </a:rPr>
+                        <a:t>RMSE ↓</a:t>
+                      </a:r>
+                      <a:endParaRPr lang="en-US" sz="1100" dirty="0">
+                        <a:latin typeface="Arial" charset="0"/>
+                        <a:ea typeface="Arial" charset="0"/>
+                        <a:cs typeface="Arial" charset="0"/>
+                      </a:endParaRPr>
+                    </a:p>
+                  </a:txBody>
+                  <a:tcPr marL="38100" marR="38100" marT="12700" marB="12700">
+                    <a:lnL w="0" cap="flat" cmpd="sng" algn="ctr">
+                      <a:noFill/>
+                    </a:lnL>
+                    <a:lnR w="0" cap="flat" cmpd="sng" algn="ctr">
+                      <a:noFill/>
+                    </a:lnR>
+                    <a:lnT w="0" cap="flat" cmpd="sng" algn="ctr">
+                      <a:noFill/>
+                    </a:lnT>
+                    <a:lnB w="0" cap="flat" cmpd="sng" algn="ctr">
+                      <a:noFill/>
+                    </a:lnB>
+                  </a:tcPr>
+                </a:tc>
+                <a:tc>
+                  <a:txBody>
+                    <a:bodyPr/>
+                    <a:lstStyle/>
+                    <a:p>
+                      <a:pPr algn="r" indent="0" marL="0">
+                        <a:buNone/>
+                      </a:pPr>
+                      <a:r>
+                        <a:rPr lang="en-US" sz="1100" dirty="0">
+                          <a:solidFill>
+                            <a:srgbClr val="111111"/>
+                          </a:solidFill>
+                          <a:latin typeface="Arial" pitchFamily="34" charset="0"/>
+                          <a:ea typeface="Arial" pitchFamily="34" charset="-122"/>
+                          <a:cs typeface="Arial" pitchFamily="34" charset="-120"/>
+                        </a:rPr>
+                        <a:t>12.3319</a:t>
+                      </a:r>
+                      <a:endParaRPr lang="en-US" sz="1100" dirty="0">
+                        <a:latin typeface="Arial" charset="0"/>
+                        <a:ea typeface="Arial" charset="0"/>
+                        <a:cs typeface="Arial" charset="0"/>
+                      </a:endParaRPr>
+                    </a:p>
+                  </a:txBody>
+                  <a:tcPr marL="38100" marR="38100" marT="12700" marB="12700">
+                    <a:lnL w="0" cap="flat" cmpd="sng" algn="ctr">
+                      <a:noFill/>
+                    </a:lnL>
+                    <a:lnR w="0" cap="flat" cmpd="sng" algn="ctr">
+                      <a:noFill/>
+                    </a:lnR>
+                    <a:lnT w="0" cap="flat" cmpd="sng" algn="ctr">
+                      <a:noFill/>
+                    </a:lnT>
+                    <a:lnB w="0" cap="flat" cmpd="sng" algn="ctr">
+                      <a:noFill/>
+                    </a:lnB>
+                  </a:tcPr>
+                </a:tc>
+                <a:tc>
+                  <a:txBody>
+                    <a:bodyPr/>
+                    <a:lstStyle/>
+                    <a:p>
+                      <a:pPr algn="r" indent="0" marL="0">
+                        <a:buNone/>
+                      </a:pPr>
+                      <a:r>
+                        <a:rPr lang="en-US" sz="1100" b="1" dirty="0">
+                          <a:solidFill>
+                            <a:srgbClr val="111111"/>
+                          </a:solidFill>
+                          <a:latin typeface="Arial" pitchFamily="34" charset="0"/>
+                          <a:ea typeface="Arial" pitchFamily="34" charset="-122"/>
+                          <a:cs typeface="Arial" pitchFamily="34" charset="-120"/>
+                        </a:rPr>
+                        <a:t>12.2291</a:t>
+                      </a:r>
+                      <a:endParaRPr lang="en-US" sz="1100" dirty="0">
+                        <a:latin typeface="Arial" charset="0"/>
+                        <a:ea typeface="Arial" charset="0"/>
+                        <a:cs typeface="Arial" charset="0"/>
+                      </a:endParaRPr>
+                    </a:p>
+                  </a:txBody>
+                  <a:tcPr marL="38100" marR="38100" marT="12700" marB="12700">
+                    <a:lnL w="0" cap="flat" cmpd="sng" algn="ctr">
+                      <a:noFill/>
+                    </a:lnL>
+                    <a:lnR w="0" cap="flat" cmpd="sng" algn="ctr">
+                      <a:noFill/>
+                    </a:lnR>
+                    <a:lnT w="0" cap="flat" cmpd="sng" algn="ctr">
+                      <a:noFill/>
+                    </a:lnT>
+                    <a:lnB w="0" cap="flat" cmpd="sng" algn="ctr">
+                      <a:noFill/>
+                    </a:lnB>
+                  </a:tcPr>
+                </a:tc>
+                <a:tc>
+                  <a:txBody>
+                    <a:bodyPr/>
+                    <a:lstStyle/>
+                    <a:p>
+                      <a:pPr algn="r" indent="0" marL="0">
+                        <a:buNone/>
+                      </a:pPr>
+                      <a:r>
+                        <a:rPr lang="en-US" sz="1100" dirty="0">
+                          <a:solidFill>
+                            <a:srgbClr val="111111"/>
+                          </a:solidFill>
+                          <a:latin typeface="Arial" pitchFamily="34" charset="0"/>
+                          <a:ea typeface="Arial" pitchFamily="34" charset="-122"/>
+                          <a:cs typeface="Arial" pitchFamily="34" charset="-120"/>
+                        </a:rPr>
+                        <a:t>12.3067</a:t>
+                      </a:r>
+                      <a:endParaRPr lang="en-US" sz="1100" dirty="0">
+                        <a:latin typeface="Arial" charset="0"/>
+                        <a:ea typeface="Arial" charset="0"/>
+                        <a:cs typeface="Arial" charset="0"/>
+                      </a:endParaRPr>
+                    </a:p>
+                  </a:txBody>
+                  <a:tcPr marL="38100" marR="38100" marT="12700" marB="12700">
+                    <a:lnL w="0" cap="flat" cmpd="sng" algn="ctr">
+                      <a:noFill/>
+                    </a:lnL>
+                    <a:lnR w="0" cap="flat" cmpd="sng" algn="ctr">
+                      <a:noFill/>
+                    </a:lnR>
+                    <a:lnT w="0" cap="flat" cmpd="sng" algn="ctr">
+                      <a:noFill/>
+                    </a:lnT>
+                    <a:lnB w="0" cap="flat" cmpd="sng" algn="ctr">
+                      <a:noFill/>
+                    </a:lnB>
+                  </a:tcPr>
+                </a:tc>
+              </a:tr>
+              <a:tr h="224028">
+                <a:tc>
+                  <a:txBody>
+                    <a:bodyPr/>
+                    <a:lstStyle/>
+                    <a:p>
+                      <a:pPr indent="0" marL="0">
+                        <a:buNone/>
+                      </a:pPr>
+                      <a:r>
+                        <a:rPr lang="en-US" sz="1100" dirty="0">
+                          <a:solidFill>
+                            <a:srgbClr val="111111"/>
+                          </a:solidFill>
+                          <a:latin typeface="Arial" pitchFamily="34" charset="0"/>
+                          <a:ea typeface="Arial" pitchFamily="34" charset="-122"/>
+                          <a:cs typeface="Arial" pitchFamily="34" charset="-120"/>
+                        </a:rPr>
+                        <a:t>s3e11</a:t>
+                      </a:r>
+                      <a:endParaRPr lang="en-US" sz="1100" dirty="0">
+                        <a:latin typeface="Arial" charset="0"/>
+                        <a:ea typeface="Arial" charset="0"/>
+                        <a:cs typeface="Arial" charset="0"/>
+                      </a:endParaRPr>
+                    </a:p>
+                  </a:txBody>
+                  <a:tcPr marL="38100" marR="38100" marT="12700" marB="12700">
+                    <a:lnL w="0" cap="flat" cmpd="sng" algn="ctr">
+                      <a:noFill/>
+                    </a:lnL>
+                    <a:lnR w="0" cap="flat" cmpd="sng" algn="ctr">
+                      <a:noFill/>
+                    </a:lnR>
+                    <a:lnT w="0" cap="flat" cmpd="sng" algn="ctr">
+                      <a:noFill/>
+                    </a:lnT>
+                    <a:lnB w="0" cap="flat" cmpd="sng" algn="ctr">
+                      <a:noFill/>
+                    </a:lnB>
+                  </a:tcPr>
+                </a:tc>
+                <a:tc>
+                  <a:txBody>
+                    <a:bodyPr/>
+                    <a:lstStyle/>
+                    <a:p>
+                      <a:pPr indent="0" marL="0">
+                        <a:buNone/>
+                      </a:pPr>
+                      <a:r>
+                        <a:rPr lang="en-US" sz="1100" dirty="0">
+                          <a:solidFill>
+                            <a:srgbClr val="111111"/>
+                          </a:solidFill>
+                          <a:latin typeface="Arial" pitchFamily="34" charset="0"/>
+                          <a:ea typeface="Arial" pitchFamily="34" charset="-122"/>
+                          <a:cs typeface="Arial" pitchFamily="34" charset="-120"/>
+                        </a:rPr>
+                        <a:t>RMSLE ↓</a:t>
+                      </a:r>
+                      <a:endParaRPr lang="en-US" sz="1100" dirty="0">
+                        <a:latin typeface="Arial" charset="0"/>
+                        <a:ea typeface="Arial" charset="0"/>
+                        <a:cs typeface="Arial" charset="0"/>
+                      </a:endParaRPr>
+                    </a:p>
+                  </a:txBody>
+                  <a:tcPr marL="38100" marR="38100" marT="12700" marB="12700">
+                    <a:lnL w="0" cap="flat" cmpd="sng" algn="ctr">
+                      <a:noFill/>
+                    </a:lnL>
+                    <a:lnR w="0" cap="flat" cmpd="sng" algn="ctr">
+                      <a:noFill/>
+                    </a:lnR>
+                    <a:lnT w="0" cap="flat" cmpd="sng" algn="ctr">
+                      <a:noFill/>
+                    </a:lnT>
+                    <a:lnB w="0" cap="flat" cmpd="sng" algn="ctr">
+                      <a:noFill/>
+                    </a:lnB>
+                  </a:tcPr>
+                </a:tc>
+                <a:tc>
+                  <a:txBody>
+                    <a:bodyPr/>
+                    <a:lstStyle/>
+                    <a:p>
+                      <a:pPr algn="r" indent="0" marL="0">
+                        <a:buNone/>
+                      </a:pPr>
+                      <a:r>
+                        <a:rPr lang="en-US" sz="1100" b="1" dirty="0">
+                          <a:solidFill>
+                            <a:srgbClr val="111111"/>
+                          </a:solidFill>
+                          <a:latin typeface="Arial" pitchFamily="34" charset="0"/>
+                          <a:ea typeface="Arial" pitchFamily="34" charset="-122"/>
+                          <a:cs typeface="Arial" pitchFamily="34" charset="-120"/>
+                        </a:rPr>
+                        <a:t>0.29368</a:t>
+                      </a:r>
+                      <a:endParaRPr lang="en-US" sz="1100" dirty="0">
+                        <a:latin typeface="Arial" charset="0"/>
+                        <a:ea typeface="Arial" charset="0"/>
+                        <a:cs typeface="Arial" charset="0"/>
+                      </a:endParaRPr>
+                    </a:p>
+                  </a:txBody>
+                  <a:tcPr marL="38100" marR="38100" marT="12700" marB="12700">
+                    <a:lnL w="0" cap="flat" cmpd="sng" algn="ctr">
+                      <a:noFill/>
+                    </a:lnL>
+                    <a:lnR w="0" cap="flat" cmpd="sng" algn="ctr">
+                      <a:noFill/>
+                    </a:lnR>
+                    <a:lnT w="0" cap="flat" cmpd="sng" algn="ctr">
+                      <a:noFill/>
+                    </a:lnT>
+                    <a:lnB w="0" cap="flat" cmpd="sng" algn="ctr">
+                      <a:noFill/>
+                    </a:lnB>
+                  </a:tcPr>
+                </a:tc>
+                <a:tc>
+                  <a:txBody>
+                    <a:bodyPr/>
+                    <a:lstStyle/>
+                    <a:p>
+                      <a:pPr algn="r" indent="0" marL="0">
+                        <a:buNone/>
+                      </a:pPr>
+                      <a:r>
+                        <a:rPr lang="en-US" sz="1100" dirty="0">
+                          <a:solidFill>
+                            <a:srgbClr val="111111"/>
+                          </a:solidFill>
+                          <a:latin typeface="Arial" pitchFamily="34" charset="0"/>
+                          <a:ea typeface="Arial" pitchFamily="34" charset="-122"/>
+                          <a:cs typeface="Arial" pitchFamily="34" charset="-120"/>
+                        </a:rPr>
+                        <a:t>0.29624</a:t>
+                      </a:r>
+                      <a:endParaRPr lang="en-US" sz="1100" dirty="0">
+                        <a:latin typeface="Arial" charset="0"/>
+                        <a:ea typeface="Arial" charset="0"/>
+                        <a:cs typeface="Arial" charset="0"/>
+                      </a:endParaRPr>
+                    </a:p>
+                  </a:txBody>
+                  <a:tcPr marL="38100" marR="38100" marT="12700" marB="12700">
+                    <a:lnL w="0" cap="flat" cmpd="sng" algn="ctr">
+                      <a:noFill/>
+                    </a:lnL>
+                    <a:lnR w="0" cap="flat" cmpd="sng" algn="ctr">
+                      <a:noFill/>
+                    </a:lnR>
+                    <a:lnT w="0" cap="flat" cmpd="sng" algn="ctr">
+                      <a:noFill/>
+                    </a:lnT>
+                    <a:lnB w="0" cap="flat" cmpd="sng" algn="ctr">
+                      <a:noFill/>
+                    </a:lnB>
+                  </a:tcPr>
+                </a:tc>
+                <a:tc>
+                  <a:txBody>
+                    <a:bodyPr/>
+                    <a:lstStyle/>
+                    <a:p>
+                      <a:pPr algn="r" indent="0" marL="0">
+                        <a:buNone/>
+                      </a:pPr>
+                      <a:r>
+                        <a:rPr lang="en-US" sz="1100" dirty="0">
+                          <a:solidFill>
+                            <a:srgbClr val="111111"/>
+                          </a:solidFill>
+                          <a:latin typeface="Arial" pitchFamily="34" charset="0"/>
+                          <a:ea typeface="Arial" pitchFamily="34" charset="-122"/>
+                          <a:cs typeface="Arial" pitchFamily="34" charset="-120"/>
+                        </a:rPr>
+                        <a:t>0.29445</a:t>
+                      </a:r>
+                      <a:endParaRPr lang="en-US" sz="1100" dirty="0">
+                        <a:latin typeface="Arial" charset="0"/>
+                        <a:ea typeface="Arial" charset="0"/>
+                        <a:cs typeface="Arial" charset="0"/>
+                      </a:endParaRPr>
+                    </a:p>
+                  </a:txBody>
+                  <a:tcPr marL="38100" marR="38100" marT="12700" marB="12700">
+                    <a:lnL w="0" cap="flat" cmpd="sng" algn="ctr">
+                      <a:noFill/>
+                    </a:lnL>
+                    <a:lnR w="0" cap="flat" cmpd="sng" algn="ctr">
+                      <a:noFill/>
+                    </a:lnR>
+                    <a:lnT w="0" cap="flat" cmpd="sng" algn="ctr">
+                      <a:noFill/>
+                    </a:lnT>
+                    <a:lnB w="0" cap="flat" cmpd="sng" algn="ctr">
+                      <a:noFill/>
+                    </a:lnB>
+                  </a:tcPr>
+                </a:tc>
+              </a:tr>
+              <a:tr h="224028">
+                <a:tc>
+                  <a:txBody>
+                    <a:bodyPr/>
+                    <a:lstStyle/>
+                    <a:p>
+                      <a:pPr indent="0" marL="0">
+                        <a:buNone/>
+                      </a:pPr>
+                      <a:r>
+                        <a:rPr lang="en-US" sz="1100" dirty="0">
+                          <a:solidFill>
+                            <a:srgbClr val="111111"/>
+                          </a:solidFill>
+                          <a:latin typeface="Arial" pitchFamily="34" charset="0"/>
+                          <a:ea typeface="Arial" pitchFamily="34" charset="-122"/>
+                          <a:cs typeface="Arial" pitchFamily="34" charset="-120"/>
+                        </a:rPr>
+                        <a:t>s3e14</a:t>
+                      </a:r>
+                      <a:endParaRPr lang="en-US" sz="1100" dirty="0">
+                        <a:latin typeface="Arial" charset="0"/>
+                        <a:ea typeface="Arial" charset="0"/>
+                        <a:cs typeface="Arial" charset="0"/>
+                      </a:endParaRPr>
+                    </a:p>
+                  </a:txBody>
+                  <a:tcPr marL="38100" marR="38100" marT="12700" marB="12700">
+                    <a:lnL w="0" cap="flat" cmpd="sng" algn="ctr">
+                      <a:noFill/>
+                    </a:lnL>
+                    <a:lnR w="0" cap="flat" cmpd="sng" algn="ctr">
+                      <a:noFill/>
+                    </a:lnR>
+                    <a:lnT w="0" cap="flat" cmpd="sng" algn="ctr">
+                      <a:noFill/>
+                    </a:lnT>
+                    <a:lnB w="0" cap="flat" cmpd="sng" algn="ctr">
+                      <a:noFill/>
+                    </a:lnB>
+                  </a:tcPr>
+                </a:tc>
+                <a:tc>
+                  <a:txBody>
+                    <a:bodyPr/>
+                    <a:lstStyle/>
+                    <a:p>
+                      <a:pPr indent="0" marL="0">
+                        <a:buNone/>
+                      </a:pPr>
+                      <a:r>
+                        <a:rPr lang="en-US" sz="1100" dirty="0">
+                          <a:solidFill>
+                            <a:srgbClr val="111111"/>
+                          </a:solidFill>
+                          <a:latin typeface="Arial" pitchFamily="34" charset="0"/>
+                          <a:ea typeface="Arial" pitchFamily="34" charset="-122"/>
+                          <a:cs typeface="Arial" pitchFamily="34" charset="-120"/>
+                        </a:rPr>
+                        <a:t>MAE ↓</a:t>
+                      </a:r>
+                      <a:endParaRPr lang="en-US" sz="1100" dirty="0">
+                        <a:latin typeface="Arial" charset="0"/>
+                        <a:ea typeface="Arial" charset="0"/>
+                        <a:cs typeface="Arial" charset="0"/>
+                      </a:endParaRPr>
+                    </a:p>
+                  </a:txBody>
+                  <a:tcPr marL="38100" marR="38100" marT="12700" marB="12700">
+                    <a:lnL w="0" cap="flat" cmpd="sng" algn="ctr">
+                      <a:noFill/>
+                    </a:lnL>
+                    <a:lnR w="0" cap="flat" cmpd="sng" algn="ctr">
+                      <a:noFill/>
+                    </a:lnR>
+                    <a:lnT w="0" cap="flat" cmpd="sng" algn="ctr">
+                      <a:noFill/>
+                    </a:lnT>
+                    <a:lnB w="0" cap="flat" cmpd="sng" algn="ctr">
+                      <a:noFill/>
+                    </a:lnB>
+                  </a:tcPr>
+                </a:tc>
+                <a:tc>
+                  <a:txBody>
+                    <a:bodyPr/>
+                    <a:lstStyle/>
+                    <a:p>
+                      <a:pPr algn="r" indent="0" marL="0">
+                        <a:buNone/>
+                      </a:pPr>
+                      <a:r>
+                        <a:rPr lang="en-US" sz="1100" dirty="0">
+                          <a:solidFill>
+                            <a:srgbClr val="111111"/>
+                          </a:solidFill>
+                          <a:latin typeface="Arial" pitchFamily="34" charset="0"/>
+                          <a:ea typeface="Arial" pitchFamily="34" charset="-122"/>
+                          <a:cs typeface="Arial" pitchFamily="34" charset="-120"/>
+                        </a:rPr>
+                        <a:t>333.186</a:t>
+                      </a:r>
+                      <a:endParaRPr lang="en-US" sz="1100" dirty="0">
+                        <a:latin typeface="Arial" charset="0"/>
+                        <a:ea typeface="Arial" charset="0"/>
+                        <a:cs typeface="Arial" charset="0"/>
+                      </a:endParaRPr>
+                    </a:p>
+                  </a:txBody>
+                  <a:tcPr marL="38100" marR="38100" marT="12700" marB="12700">
+                    <a:lnL w="0" cap="flat" cmpd="sng" algn="ctr">
+                      <a:noFill/>
+                    </a:lnL>
+                    <a:lnR w="0" cap="flat" cmpd="sng" algn="ctr">
+                      <a:noFill/>
+                    </a:lnR>
+                    <a:lnT w="0" cap="flat" cmpd="sng" algn="ctr">
+                      <a:noFill/>
+                    </a:lnT>
+                    <a:lnB w="0" cap="flat" cmpd="sng" algn="ctr">
+                      <a:noFill/>
+                    </a:lnB>
+                  </a:tcPr>
+                </a:tc>
+                <a:tc>
+                  <a:txBody>
+                    <a:bodyPr/>
+                    <a:lstStyle/>
+                    <a:p>
+                      <a:pPr algn="r" indent="0" marL="0">
+                        <a:buNone/>
+                      </a:pPr>
+                      <a:r>
+                        <a:rPr lang="en-US" sz="1100" b="1" dirty="0">
+                          <a:solidFill>
+                            <a:srgbClr val="111111"/>
+                          </a:solidFill>
+                          <a:latin typeface="Arial" pitchFamily="34" charset="0"/>
+                          <a:ea typeface="Arial" pitchFamily="34" charset="-122"/>
+                          <a:cs typeface="Arial" pitchFamily="34" charset="-120"/>
+                        </a:rPr>
+                        <a:t>330.716</a:t>
+                      </a:r>
+                      <a:endParaRPr lang="en-US" sz="1100" dirty="0">
+                        <a:latin typeface="Arial" charset="0"/>
+                        <a:ea typeface="Arial" charset="0"/>
+                        <a:cs typeface="Arial" charset="0"/>
+                      </a:endParaRPr>
+                    </a:p>
+                  </a:txBody>
+                  <a:tcPr marL="38100" marR="38100" marT="12700" marB="12700">
+                    <a:lnL w="0" cap="flat" cmpd="sng" algn="ctr">
+                      <a:noFill/>
+                    </a:lnL>
+                    <a:lnR w="0" cap="flat" cmpd="sng" algn="ctr">
+                      <a:noFill/>
+                    </a:lnR>
+                    <a:lnT w="0" cap="flat" cmpd="sng" algn="ctr">
+                      <a:noFill/>
+                    </a:lnT>
+                    <a:lnB w="0" cap="flat" cmpd="sng" algn="ctr">
+                      <a:noFill/>
+                    </a:lnB>
+                  </a:tcPr>
+                </a:tc>
+                <a:tc>
+                  <a:txBody>
+                    <a:bodyPr/>
+                    <a:lstStyle/>
+                    <a:p>
+                      <a:pPr algn="r" indent="0" marL="0">
+                        <a:buNone/>
+                      </a:pPr>
+                      <a:r>
+                        <a:rPr lang="en-US" sz="1100" dirty="0">
+                          <a:solidFill>
+                            <a:srgbClr val="111111"/>
+                          </a:solidFill>
+                          <a:latin typeface="Arial" pitchFamily="34" charset="0"/>
+                          <a:ea typeface="Arial" pitchFamily="34" charset="-122"/>
+                          <a:cs typeface="Arial" pitchFamily="34" charset="-120"/>
+                        </a:rPr>
+                        <a:t>332.316</a:t>
+                      </a:r>
+                      <a:endParaRPr lang="en-US" sz="1100" dirty="0">
+                        <a:latin typeface="Arial" charset="0"/>
+                        <a:ea typeface="Arial" charset="0"/>
+                        <a:cs typeface="Arial" charset="0"/>
+                      </a:endParaRPr>
+                    </a:p>
+                  </a:txBody>
+                  <a:tcPr marL="38100" marR="38100" marT="12700" marB="12700">
+                    <a:lnL w="0" cap="flat" cmpd="sng" algn="ctr">
+                      <a:noFill/>
+                    </a:lnL>
+                    <a:lnR w="0" cap="flat" cmpd="sng" algn="ctr">
+                      <a:noFill/>
+                    </a:lnR>
+                    <a:lnT w="0" cap="flat" cmpd="sng" algn="ctr">
+                      <a:noFill/>
+                    </a:lnT>
+                    <a:lnB w="0" cap="flat" cmpd="sng" algn="ctr">
+                      <a:noFill/>
+                    </a:lnB>
+                  </a:tcPr>
+                </a:tc>
+              </a:tr>
+              <a:tr h="224028">
+                <a:tc>
+                  <a:txBody>
+                    <a:bodyPr/>
+                    <a:lstStyle/>
+                    <a:p>
+                      <a:pPr indent="0" marL="0">
+                        <a:buNone/>
+                      </a:pPr>
+                      <a:r>
+                        <a:rPr lang="en-US" sz="1100" dirty="0">
+                          <a:solidFill>
+                            <a:srgbClr val="111111"/>
+                          </a:solidFill>
+                          <a:latin typeface="Arial" pitchFamily="34" charset="0"/>
+                          <a:ea typeface="Arial" pitchFamily="34" charset="-122"/>
+                          <a:cs typeface="Arial" pitchFamily="34" charset="-120"/>
+                        </a:rPr>
+                        <a:t>s3e16</a:t>
+                      </a:r>
+                      <a:endParaRPr lang="en-US" sz="1100" dirty="0">
+                        <a:latin typeface="Arial" charset="0"/>
+                        <a:ea typeface="Arial" charset="0"/>
+                        <a:cs typeface="Arial" charset="0"/>
+                      </a:endParaRPr>
+                    </a:p>
+                  </a:txBody>
+                  <a:tcPr marL="38100" marR="38100" marT="12700" marB="12700">
+                    <a:lnL w="0" cap="flat" cmpd="sng" algn="ctr">
+                      <a:noFill/>
+                    </a:lnL>
+                    <a:lnR w="0" cap="flat" cmpd="sng" algn="ctr">
+                      <a:noFill/>
+                    </a:lnR>
+                    <a:lnT w="0" cap="flat" cmpd="sng" algn="ctr">
+                      <a:noFill/>
+                    </a:lnT>
+                    <a:lnB w="0" cap="flat" cmpd="sng" algn="ctr">
+                      <a:noFill/>
+                    </a:lnB>
+                  </a:tcPr>
+                </a:tc>
+                <a:tc>
+                  <a:txBody>
+                    <a:bodyPr/>
+                    <a:lstStyle/>
+                    <a:p>
+                      <a:pPr indent="0" marL="0">
+                        <a:buNone/>
+                      </a:pPr>
+                      <a:r>
+                        <a:rPr lang="en-US" sz="1100" dirty="0">
+                          <a:solidFill>
+                            <a:srgbClr val="111111"/>
+                          </a:solidFill>
+                          <a:latin typeface="Arial" pitchFamily="34" charset="0"/>
+                          <a:ea typeface="Arial" pitchFamily="34" charset="-122"/>
+                          <a:cs typeface="Arial" pitchFamily="34" charset="-120"/>
+                        </a:rPr>
+                        <a:t>MAE ↓</a:t>
+                      </a:r>
+                      <a:endParaRPr lang="en-US" sz="1100" dirty="0">
+                        <a:latin typeface="Arial" charset="0"/>
+                        <a:ea typeface="Arial" charset="0"/>
+                        <a:cs typeface="Arial" charset="0"/>
+                      </a:endParaRPr>
+                    </a:p>
+                  </a:txBody>
+                  <a:tcPr marL="38100" marR="38100" marT="12700" marB="12700">
+                    <a:lnL w="0" cap="flat" cmpd="sng" algn="ctr">
+                      <a:noFill/>
+                    </a:lnL>
+                    <a:lnR w="0" cap="flat" cmpd="sng" algn="ctr">
+                      <a:noFill/>
+                    </a:lnR>
+                    <a:lnT w="0" cap="flat" cmpd="sng" algn="ctr">
+                      <a:noFill/>
+                    </a:lnT>
+                    <a:lnB w="0" cap="flat" cmpd="sng" algn="ctr">
+                      <a:noFill/>
+                    </a:lnB>
+                  </a:tcPr>
+                </a:tc>
+                <a:tc>
+                  <a:txBody>
+                    <a:bodyPr/>
+                    <a:lstStyle/>
+                    <a:p>
+                      <a:pPr algn="r" indent="0" marL="0">
+                        <a:buNone/>
+                      </a:pPr>
+                      <a:r>
+                        <a:rPr lang="en-US" sz="1100" b="1" dirty="0">
+                          <a:solidFill>
+                            <a:srgbClr val="111111"/>
+                          </a:solidFill>
+                          <a:latin typeface="Arial" pitchFamily="34" charset="0"/>
+                          <a:ea typeface="Arial" pitchFamily="34" charset="-122"/>
+                          <a:cs typeface="Arial" pitchFamily="34" charset="-120"/>
+                        </a:rPr>
+                        <a:t>1.33822</a:t>
+                      </a:r>
+                      <a:endParaRPr lang="en-US" sz="1100" dirty="0">
+                        <a:latin typeface="Arial" charset="0"/>
+                        <a:ea typeface="Arial" charset="0"/>
+                        <a:cs typeface="Arial" charset="0"/>
+                      </a:endParaRPr>
+                    </a:p>
+                  </a:txBody>
+                  <a:tcPr marL="38100" marR="38100" marT="12700" marB="12700">
+                    <a:lnL w="0" cap="flat" cmpd="sng" algn="ctr">
+                      <a:noFill/>
+                    </a:lnL>
+                    <a:lnR w="0" cap="flat" cmpd="sng" algn="ctr">
+                      <a:noFill/>
+                    </a:lnR>
+                    <a:lnT w="0" cap="flat" cmpd="sng" algn="ctr">
+                      <a:noFill/>
+                    </a:lnT>
+                    <a:lnB w="0" cap="flat" cmpd="sng" algn="ctr">
+                      <a:noFill/>
+                    </a:lnB>
+                  </a:tcPr>
+                </a:tc>
+                <a:tc>
+                  <a:txBody>
+                    <a:bodyPr/>
+                    <a:lstStyle/>
+                    <a:p>
+                      <a:pPr algn="r" indent="0" marL="0">
+                        <a:buNone/>
+                      </a:pPr>
+                      <a:r>
+                        <a:rPr lang="en-US" sz="1100" dirty="0">
+                          <a:solidFill>
+                            <a:srgbClr val="111111"/>
+                          </a:solidFill>
+                          <a:latin typeface="Arial" pitchFamily="34" charset="0"/>
+                          <a:ea typeface="Arial" pitchFamily="34" charset="-122"/>
+                          <a:cs typeface="Arial" pitchFamily="34" charset="-120"/>
+                        </a:rPr>
+                        <a:t>1.34001</a:t>
+                      </a:r>
+                      <a:endParaRPr lang="en-US" sz="1100" dirty="0">
+                        <a:latin typeface="Arial" charset="0"/>
+                        <a:ea typeface="Arial" charset="0"/>
+                        <a:cs typeface="Arial" charset="0"/>
+                      </a:endParaRPr>
+                    </a:p>
+                  </a:txBody>
+                  <a:tcPr marL="38100" marR="38100" marT="12700" marB="12700">
+                    <a:lnL w="0" cap="flat" cmpd="sng" algn="ctr">
+                      <a:noFill/>
+                    </a:lnL>
+                    <a:lnR w="0" cap="flat" cmpd="sng" algn="ctr">
+                      <a:noFill/>
+                    </a:lnR>
+                    <a:lnT w="0" cap="flat" cmpd="sng" algn="ctr">
+                      <a:noFill/>
+                    </a:lnT>
+                    <a:lnB w="0" cap="flat" cmpd="sng" algn="ctr">
+                      <a:noFill/>
+                    </a:lnB>
+                  </a:tcPr>
+                </a:tc>
+                <a:tc>
+                  <a:txBody>
+                    <a:bodyPr/>
+                    <a:lstStyle/>
+                    <a:p>
+                      <a:pPr algn="r" indent="0" marL="0">
+                        <a:buNone/>
+                      </a:pPr>
+                      <a:r>
+                        <a:rPr lang="en-US" sz="1100" dirty="0">
+                          <a:solidFill>
+                            <a:srgbClr val="111111"/>
+                          </a:solidFill>
+                          <a:latin typeface="Arial" pitchFamily="34" charset="0"/>
+                          <a:ea typeface="Arial" pitchFamily="34" charset="-122"/>
+                          <a:cs typeface="Arial" pitchFamily="34" charset="-120"/>
+                        </a:rPr>
+                        <a:t>1.34224</a:t>
+                      </a:r>
+                      <a:endParaRPr lang="en-US" sz="1100" dirty="0">
+                        <a:latin typeface="Arial" charset="0"/>
+                        <a:ea typeface="Arial" charset="0"/>
+                        <a:cs typeface="Arial" charset="0"/>
+                      </a:endParaRPr>
+                    </a:p>
+                  </a:txBody>
+                  <a:tcPr marL="38100" marR="38100" marT="12700" marB="12700">
+                    <a:lnL w="0" cap="flat" cmpd="sng" algn="ctr">
+                      <a:noFill/>
+                    </a:lnL>
+                    <a:lnR w="0" cap="flat" cmpd="sng" algn="ctr">
+                      <a:noFill/>
+                    </a:lnR>
+                    <a:lnT w="0" cap="flat" cmpd="sng" algn="ctr">
+                      <a:noFill/>
+                    </a:lnT>
+                    <a:lnB w="0" cap="flat" cmpd="sng" algn="ctr">
+                      <a:noFill/>
+                    </a:lnB>
+                  </a:tcPr>
+                </a:tc>
+              </a:tr>
+              <a:tr h="224028">
+                <a:tc>
+                  <a:txBody>
+                    <a:bodyPr/>
+                    <a:lstStyle/>
+                    <a:p>
+                      <a:pPr indent="0" marL="0">
+                        <a:buNone/>
+                      </a:pPr>
+                      <a:r>
+                        <a:rPr lang="en-US" sz="1100" dirty="0">
+                          <a:solidFill>
+                            <a:srgbClr val="111111"/>
+                          </a:solidFill>
+                          <a:latin typeface="Arial" pitchFamily="34" charset="0"/>
+                          <a:ea typeface="Arial" pitchFamily="34" charset="-122"/>
+                          <a:cs typeface="Arial" pitchFamily="34" charset="-120"/>
+                        </a:rPr>
+                        <a:t>s3e19</a:t>
+                      </a:r>
+                      <a:endParaRPr lang="en-US" sz="1100" dirty="0">
+                        <a:latin typeface="Arial" charset="0"/>
+                        <a:ea typeface="Arial" charset="0"/>
+                        <a:cs typeface="Arial" charset="0"/>
+                      </a:endParaRPr>
+                    </a:p>
+                  </a:txBody>
+                  <a:tcPr marL="38100" marR="38100" marT="12700" marB="12700">
+                    <a:lnL w="0" cap="flat" cmpd="sng" algn="ctr">
+                      <a:noFill/>
+                    </a:lnL>
+                    <a:lnR w="0" cap="flat" cmpd="sng" algn="ctr">
+                      <a:noFill/>
+                    </a:lnR>
+                    <a:lnT w="0" cap="flat" cmpd="sng" algn="ctr">
+                      <a:noFill/>
+                    </a:lnT>
+                    <a:lnB w="0" cap="flat" cmpd="sng" algn="ctr">
+                      <a:noFill/>
+                    </a:lnB>
+                  </a:tcPr>
+                </a:tc>
+                <a:tc>
+                  <a:txBody>
+                    <a:bodyPr/>
+                    <a:lstStyle/>
+                    <a:p>
+                      <a:pPr indent="0" marL="0">
+                        <a:buNone/>
+                      </a:pPr>
+                      <a:r>
+                        <a:rPr lang="en-US" sz="1100" dirty="0">
+                          <a:solidFill>
+                            <a:srgbClr val="111111"/>
+                          </a:solidFill>
+                          <a:latin typeface="Arial" pitchFamily="34" charset="0"/>
+                          <a:ea typeface="Arial" pitchFamily="34" charset="-122"/>
+                          <a:cs typeface="Arial" pitchFamily="34" charset="-120"/>
+                        </a:rPr>
+                        <a:t>SMAPE ↓</a:t>
+                      </a:r>
+                      <a:endParaRPr lang="en-US" sz="1100" dirty="0">
+                        <a:latin typeface="Arial" charset="0"/>
+                        <a:ea typeface="Arial" charset="0"/>
+                        <a:cs typeface="Arial" charset="0"/>
+                      </a:endParaRPr>
+                    </a:p>
+                  </a:txBody>
+                  <a:tcPr marL="38100" marR="38100" marT="12700" marB="12700">
+                    <a:lnL w="0" cap="flat" cmpd="sng" algn="ctr">
+                      <a:noFill/>
+                    </a:lnL>
+                    <a:lnR w="0" cap="flat" cmpd="sng" algn="ctr">
+                      <a:noFill/>
+                    </a:lnR>
+                    <a:lnT w="0" cap="flat" cmpd="sng" algn="ctr">
+                      <a:noFill/>
+                    </a:lnT>
+                    <a:lnB w="0" cap="flat" cmpd="sng" algn="ctr">
+                      <a:noFill/>
+                    </a:lnB>
+                  </a:tcPr>
+                </a:tc>
+                <a:tc>
+                  <a:txBody>
+                    <a:bodyPr/>
+                    <a:lstStyle/>
+                    <a:p>
+                      <a:pPr algn="r" indent="0" marL="0">
+                        <a:buNone/>
+                      </a:pPr>
+                      <a:r>
+                        <a:rPr lang="en-US" sz="1100" dirty="0">
+                          <a:solidFill>
+                            <a:srgbClr val="111111"/>
+                          </a:solidFill>
+                          <a:latin typeface="Arial" pitchFamily="34" charset="0"/>
+                          <a:ea typeface="Arial" pitchFamily="34" charset="-122"/>
+                          <a:cs typeface="Arial" pitchFamily="34" charset="-120"/>
+                        </a:rPr>
+                        <a:t>49.4088</a:t>
+                      </a:r>
+                      <a:endParaRPr lang="en-US" sz="1100" dirty="0">
+                        <a:latin typeface="Arial" charset="0"/>
+                        <a:ea typeface="Arial" charset="0"/>
+                        <a:cs typeface="Arial" charset="0"/>
+                      </a:endParaRPr>
+                    </a:p>
+                  </a:txBody>
+                  <a:tcPr marL="38100" marR="38100" marT="12700" marB="12700">
+                    <a:lnL w="0" cap="flat" cmpd="sng" algn="ctr">
+                      <a:noFill/>
+                    </a:lnL>
+                    <a:lnR w="0" cap="flat" cmpd="sng" algn="ctr">
+                      <a:noFill/>
+                    </a:lnR>
+                    <a:lnT w="0" cap="flat" cmpd="sng" algn="ctr">
+                      <a:noFill/>
+                    </a:lnT>
+                    <a:lnB w="0" cap="flat" cmpd="sng" algn="ctr">
+                      <a:noFill/>
+                    </a:lnB>
+                  </a:tcPr>
+                </a:tc>
+                <a:tc>
+                  <a:txBody>
+                    <a:bodyPr/>
+                    <a:lstStyle/>
+                    <a:p>
+                      <a:pPr algn="r" indent="0" marL="0">
+                        <a:buNone/>
+                      </a:pPr>
+                      <a:r>
+                        <a:rPr lang="en-US" sz="1100" b="1" dirty="0">
+                          <a:solidFill>
+                            <a:srgbClr val="111111"/>
+                          </a:solidFill>
+                          <a:latin typeface="Arial" pitchFamily="34" charset="0"/>
+                          <a:ea typeface="Arial" pitchFamily="34" charset="-122"/>
+                          <a:cs typeface="Arial" pitchFamily="34" charset="-120"/>
+                        </a:rPr>
+                        <a:t>48.2656</a:t>
+                      </a:r>
+                      <a:endParaRPr lang="en-US" sz="1100" dirty="0">
+                        <a:latin typeface="Arial" charset="0"/>
+                        <a:ea typeface="Arial" charset="0"/>
+                        <a:cs typeface="Arial" charset="0"/>
+                      </a:endParaRPr>
+                    </a:p>
+                  </a:txBody>
+                  <a:tcPr marL="38100" marR="38100" marT="12700" marB="12700">
+                    <a:lnL w="0" cap="flat" cmpd="sng" algn="ctr">
+                      <a:noFill/>
+                    </a:lnL>
+                    <a:lnR w="0" cap="flat" cmpd="sng" algn="ctr">
+                      <a:noFill/>
+                    </a:lnR>
+                    <a:lnT w="0" cap="flat" cmpd="sng" algn="ctr">
+                      <a:noFill/>
+                    </a:lnT>
+                    <a:lnB w="0" cap="flat" cmpd="sng" algn="ctr">
+                      <a:noFill/>
+                    </a:lnB>
+                  </a:tcPr>
+                </a:tc>
+                <a:tc>
+                  <a:txBody>
+                    <a:bodyPr/>
+                    <a:lstStyle/>
+                    <a:p>
+                      <a:pPr algn="r" indent="0" marL="0">
+                        <a:buNone/>
+                      </a:pPr>
+                      <a:r>
+                        <a:rPr lang="en-US" sz="1100" dirty="0">
+                          <a:solidFill>
+                            <a:srgbClr val="111111"/>
+                          </a:solidFill>
+                          <a:latin typeface="Arial" pitchFamily="34" charset="0"/>
+                          <a:ea typeface="Arial" pitchFamily="34" charset="-122"/>
+                          <a:cs typeface="Arial" pitchFamily="34" charset="-120"/>
+                        </a:rPr>
+                        <a:t>48.3413</a:t>
+                      </a:r>
+                      <a:endParaRPr lang="en-US" sz="1100" dirty="0">
+                        <a:latin typeface="Arial" charset="0"/>
+                        <a:ea typeface="Arial" charset="0"/>
+                        <a:cs typeface="Arial" charset="0"/>
+                      </a:endParaRPr>
+                    </a:p>
+                  </a:txBody>
+                  <a:tcPr marL="38100" marR="38100" marT="12700" marB="12700">
+                    <a:lnL w="0" cap="flat" cmpd="sng" algn="ctr">
+                      <a:noFill/>
+                    </a:lnL>
+                    <a:lnR w="0" cap="flat" cmpd="sng" algn="ctr">
+                      <a:noFill/>
+                    </a:lnR>
+                    <a:lnT w="0" cap="flat" cmpd="sng" algn="ctr">
+                      <a:noFill/>
+                    </a:lnT>
+                    <a:lnB w="0" cap="flat" cmpd="sng" algn="ctr">
+                      <a:noFill/>
+                    </a:lnB>
+                  </a:tcPr>
+                </a:tc>
+              </a:tr>
+              <a:tr h="224028">
+                <a:tc>
+                  <a:txBody>
+                    <a:bodyPr/>
+                    <a:lstStyle/>
+                    <a:p>
+                      <a:pPr indent="0" marL="0">
+                        <a:buNone/>
+                      </a:pPr>
+                      <a:r>
+                        <a:rPr lang="en-US" sz="1100" dirty="0">
+                          <a:solidFill>
+                            <a:srgbClr val="111111"/>
+                          </a:solidFill>
+                          <a:latin typeface="Arial" pitchFamily="34" charset="0"/>
+                          <a:ea typeface="Arial" pitchFamily="34" charset="-122"/>
+                          <a:cs typeface="Arial" pitchFamily="34" charset="-120"/>
+                        </a:rPr>
+                        <a:t>s4e11</a:t>
+                      </a:r>
+                      <a:endParaRPr lang="en-US" sz="1100" dirty="0">
+                        <a:latin typeface="Arial" charset="0"/>
+                        <a:ea typeface="Arial" charset="0"/>
+                        <a:cs typeface="Arial" charset="0"/>
+                      </a:endParaRPr>
+                    </a:p>
+                  </a:txBody>
+                  <a:tcPr marL="38100" marR="38100" marT="12700" marB="12700">
+                    <a:lnL w="0" cap="flat" cmpd="sng" algn="ctr">
+                      <a:noFill/>
+                    </a:lnL>
+                    <a:lnR w="0" cap="flat" cmpd="sng" algn="ctr">
+                      <a:noFill/>
+                    </a:lnR>
+                    <a:lnT w="0" cap="flat" cmpd="sng" algn="ctr">
+                      <a:noFill/>
+                    </a:lnT>
+                    <a:lnB w="0" cap="flat" cmpd="sng" algn="ctr">
+                      <a:noFill/>
+                    </a:lnB>
+                  </a:tcPr>
+                </a:tc>
+                <a:tc>
+                  <a:txBody>
+                    <a:bodyPr/>
+                    <a:lstStyle/>
+                    <a:p>
+                      <a:pPr indent="0" marL="0">
+                        <a:buNone/>
+                      </a:pPr>
+                      <a:r>
+                        <a:rPr lang="en-US" sz="1100" dirty="0">
+                          <a:solidFill>
+                            <a:srgbClr val="111111"/>
+                          </a:solidFill>
+                          <a:latin typeface="Arial" pitchFamily="34" charset="0"/>
+                          <a:ea typeface="Arial" pitchFamily="34" charset="-122"/>
+                          <a:cs typeface="Arial" pitchFamily="34" charset="-120"/>
+                        </a:rPr>
+                        <a:t>Acc. ↑</a:t>
+                      </a:r>
+                      <a:endParaRPr lang="en-US" sz="1100" dirty="0">
+                        <a:latin typeface="Arial" charset="0"/>
+                        <a:ea typeface="Arial" charset="0"/>
+                        <a:cs typeface="Arial" charset="0"/>
+                      </a:endParaRPr>
+                    </a:p>
+                  </a:txBody>
+                  <a:tcPr marL="38100" marR="38100" marT="12700" marB="12700">
+                    <a:lnL w="0" cap="flat" cmpd="sng" algn="ctr">
+                      <a:noFill/>
+                    </a:lnL>
+                    <a:lnR w="0" cap="flat" cmpd="sng" algn="ctr">
+                      <a:noFill/>
+                    </a:lnR>
+                    <a:lnT w="0" cap="flat" cmpd="sng" algn="ctr">
+                      <a:noFill/>
+                    </a:lnT>
+                    <a:lnB w="0" cap="flat" cmpd="sng" algn="ctr">
+                      <a:noFill/>
+                    </a:lnB>
+                  </a:tcPr>
+                </a:tc>
+                <a:tc>
+                  <a:txBody>
+                    <a:bodyPr/>
+                    <a:lstStyle/>
+                    <a:p>
+                      <a:pPr algn="r" indent="0" marL="0">
+                        <a:buNone/>
+                      </a:pPr>
+                      <a:r>
+                        <a:rPr lang="en-US" sz="1100" b="1" dirty="0">
+                          <a:solidFill>
+                            <a:srgbClr val="111111"/>
+                          </a:solidFill>
+                          <a:latin typeface="Arial" pitchFamily="34" charset="0"/>
+                          <a:ea typeface="Arial" pitchFamily="34" charset="-122"/>
+                          <a:cs typeface="Arial" pitchFamily="34" charset="-120"/>
+                        </a:rPr>
+                        <a:t>0.94107</a:t>
+                      </a:r>
+                      <a:endParaRPr lang="en-US" sz="1100" dirty="0">
+                        <a:latin typeface="Arial" charset="0"/>
+                        <a:ea typeface="Arial" charset="0"/>
+                        <a:cs typeface="Arial" charset="0"/>
+                      </a:endParaRPr>
+                    </a:p>
+                  </a:txBody>
+                  <a:tcPr marL="38100" marR="38100" marT="12700" marB="12700">
+                    <a:lnL w="0" cap="flat" cmpd="sng" algn="ctr">
+                      <a:noFill/>
+                    </a:lnL>
+                    <a:lnR w="0" cap="flat" cmpd="sng" algn="ctr">
+                      <a:noFill/>
+                    </a:lnR>
+                    <a:lnT w="0" cap="flat" cmpd="sng" algn="ctr">
+                      <a:noFill/>
+                    </a:lnT>
+                    <a:lnB w="0" cap="flat" cmpd="sng" algn="ctr">
+                      <a:noFill/>
+                    </a:lnB>
+                  </a:tcPr>
+                </a:tc>
+                <a:tc>
+                  <a:txBody>
+                    <a:bodyPr/>
+                    <a:lstStyle/>
+                    <a:p>
+                      <a:pPr algn="r" indent="0" marL="0">
+                        <a:buNone/>
+                      </a:pPr>
+                      <a:r>
+                        <a:rPr lang="en-US" sz="1100" dirty="0">
+                          <a:solidFill>
+                            <a:srgbClr val="111111"/>
+                          </a:solidFill>
+                          <a:latin typeface="Arial" pitchFamily="34" charset="0"/>
+                          <a:ea typeface="Arial" pitchFamily="34" charset="-122"/>
+                          <a:cs typeface="Arial" pitchFamily="34" charset="-120"/>
+                        </a:rPr>
+                        <a:t>0.94076</a:t>
+                      </a:r>
+                      <a:endParaRPr lang="en-US" sz="1100" dirty="0">
+                        <a:latin typeface="Arial" charset="0"/>
+                        <a:ea typeface="Arial" charset="0"/>
+                        <a:cs typeface="Arial" charset="0"/>
+                      </a:endParaRPr>
+                    </a:p>
+                  </a:txBody>
+                  <a:tcPr marL="38100" marR="38100" marT="12700" marB="12700">
+                    <a:lnL w="0" cap="flat" cmpd="sng" algn="ctr">
+                      <a:noFill/>
+                    </a:lnL>
+                    <a:lnR w="0" cap="flat" cmpd="sng" algn="ctr">
+                      <a:noFill/>
+                    </a:lnR>
+                    <a:lnT w="0" cap="flat" cmpd="sng" algn="ctr">
+                      <a:noFill/>
+                    </a:lnT>
+                    <a:lnB w="0" cap="flat" cmpd="sng" algn="ctr">
+                      <a:noFill/>
+                    </a:lnB>
+                  </a:tcPr>
+                </a:tc>
+                <a:tc>
+                  <a:txBody>
+                    <a:bodyPr/>
+                    <a:lstStyle/>
+                    <a:p>
+                      <a:pPr algn="r" indent="0" marL="0">
+                        <a:buNone/>
+                      </a:pPr>
+                      <a:r>
+                        <a:rPr lang="en-US" sz="1100" dirty="0">
+                          <a:solidFill>
+                            <a:srgbClr val="111111"/>
+                          </a:solidFill>
+                          <a:latin typeface="Arial" pitchFamily="34" charset="0"/>
+                          <a:ea typeface="Arial" pitchFamily="34" charset="-122"/>
+                          <a:cs typeface="Arial" pitchFamily="34" charset="-120"/>
+                        </a:rPr>
+                        <a:t>0.94056</a:t>
+                      </a:r>
+                      <a:endParaRPr lang="en-US" sz="1100" dirty="0">
+                        <a:latin typeface="Arial" charset="0"/>
+                        <a:ea typeface="Arial" charset="0"/>
+                        <a:cs typeface="Arial" charset="0"/>
+                      </a:endParaRPr>
+                    </a:p>
+                  </a:txBody>
+                  <a:tcPr marL="38100" marR="38100" marT="12700" marB="12700">
+                    <a:lnL w="0" cap="flat" cmpd="sng" algn="ctr">
+                      <a:noFill/>
+                    </a:lnL>
+                    <a:lnR w="0" cap="flat" cmpd="sng" algn="ctr">
+                      <a:noFill/>
+                    </a:lnR>
+                    <a:lnT w="0" cap="flat" cmpd="sng" algn="ctr">
+                      <a:noFill/>
+                    </a:lnT>
+                    <a:lnB w="0" cap="flat" cmpd="sng" algn="ctr">
+                      <a:noFill/>
+                    </a:lnB>
+                  </a:tcPr>
+                </a:tc>
+              </a:tr>
+              <a:tr h="224028">
+                <a:tc>
+                  <a:txBody>
+                    <a:bodyPr/>
+                    <a:lstStyle/>
+                    <a:p>
+                      <a:pPr indent="0" marL="0">
+                        <a:buNone/>
+                      </a:pPr>
+                      <a:r>
+                        <a:rPr lang="en-US" sz="1100" dirty="0">
+                          <a:solidFill>
+                            <a:srgbClr val="111111"/>
+                          </a:solidFill>
+                          <a:latin typeface="Arial" pitchFamily="34" charset="0"/>
+                          <a:ea typeface="Arial" pitchFamily="34" charset="-122"/>
+                          <a:cs typeface="Arial" pitchFamily="34" charset="-120"/>
+                        </a:rPr>
+                        <a:t>s5e1</a:t>
+                      </a:r>
+                      <a:endParaRPr lang="en-US" sz="1100" dirty="0">
+                        <a:latin typeface="Arial" charset="0"/>
+                        <a:ea typeface="Arial" charset="0"/>
+                        <a:cs typeface="Arial" charset="0"/>
+                      </a:endParaRPr>
+                    </a:p>
+                  </a:txBody>
+                  <a:tcPr marL="38100" marR="38100" marT="12700" marB="12700">
+                    <a:lnL w="0" cap="flat" cmpd="sng" algn="ctr">
+                      <a:noFill/>
+                    </a:lnL>
+                    <a:lnR w="0" cap="flat" cmpd="sng" algn="ctr">
+                      <a:noFill/>
+                    </a:lnR>
+                    <a:lnT w="0" cap="flat" cmpd="sng" algn="ctr">
+                      <a:noFill/>
+                    </a:lnT>
+                    <a:lnB w="0" cap="flat" cmpd="sng" algn="ctr">
+                      <a:noFill/>
+                    </a:lnB>
+                  </a:tcPr>
+                </a:tc>
+                <a:tc>
+                  <a:txBody>
+                    <a:bodyPr/>
+                    <a:lstStyle/>
+                    <a:p>
+                      <a:pPr indent="0" marL="0">
+                        <a:buNone/>
+                      </a:pPr>
+                      <a:r>
+                        <a:rPr lang="en-US" sz="1100" dirty="0">
+                          <a:solidFill>
+                            <a:srgbClr val="111111"/>
+                          </a:solidFill>
+                          <a:latin typeface="Arial" pitchFamily="34" charset="0"/>
+                          <a:ea typeface="Arial" pitchFamily="34" charset="-122"/>
+                          <a:cs typeface="Arial" pitchFamily="34" charset="-120"/>
+                        </a:rPr>
+                        <a:t>MAPE ↓</a:t>
+                      </a:r>
+                      <a:endParaRPr lang="en-US" sz="1100" dirty="0">
+                        <a:latin typeface="Arial" charset="0"/>
+                        <a:ea typeface="Arial" charset="0"/>
+                        <a:cs typeface="Arial" charset="0"/>
+                      </a:endParaRPr>
+                    </a:p>
+                  </a:txBody>
+                  <a:tcPr marL="38100" marR="38100" marT="12700" marB="12700">
+                    <a:lnL w="0" cap="flat" cmpd="sng" algn="ctr">
+                      <a:noFill/>
+                    </a:lnL>
+                    <a:lnR w="0" cap="flat" cmpd="sng" algn="ctr">
+                      <a:noFill/>
+                    </a:lnR>
+                    <a:lnT w="0" cap="flat" cmpd="sng" algn="ctr">
+                      <a:noFill/>
+                    </a:lnT>
+                    <a:lnB w="0" cap="flat" cmpd="sng" algn="ctr">
+                      <a:noFill/>
+                    </a:lnB>
+                  </a:tcPr>
+                </a:tc>
+                <a:tc>
+                  <a:txBody>
+                    <a:bodyPr/>
+                    <a:lstStyle/>
+                    <a:p>
+                      <a:pPr algn="r" indent="0" marL="0">
+                        <a:buNone/>
+                      </a:pPr>
+                      <a:r>
+                        <a:rPr lang="en-US" sz="1100" b="1" dirty="0">
+                          <a:solidFill>
+                            <a:srgbClr val="111111"/>
+                          </a:solidFill>
+                          <a:latin typeface="Arial" pitchFamily="34" charset="0"/>
+                          <a:ea typeface="Arial" pitchFamily="34" charset="-122"/>
+                          <a:cs typeface="Arial" pitchFamily="34" charset="-120"/>
+                        </a:rPr>
+                        <a:t>0.08401</a:t>
+                      </a:r>
+                      <a:endParaRPr lang="en-US" sz="1100" dirty="0">
+                        <a:latin typeface="Arial" charset="0"/>
+                        <a:ea typeface="Arial" charset="0"/>
+                        <a:cs typeface="Arial" charset="0"/>
+                      </a:endParaRPr>
+                    </a:p>
+                  </a:txBody>
+                  <a:tcPr marL="38100" marR="38100" marT="12700" marB="12700">
+                    <a:lnL w="0" cap="flat" cmpd="sng" algn="ctr">
+                      <a:noFill/>
+                    </a:lnL>
+                    <a:lnR w="0" cap="flat" cmpd="sng" algn="ctr">
+                      <a:noFill/>
+                    </a:lnR>
+                    <a:lnT w="0" cap="flat" cmpd="sng" algn="ctr">
+                      <a:noFill/>
+                    </a:lnT>
+                    <a:lnB w="0" cap="flat" cmpd="sng" algn="ctr">
+                      <a:noFill/>
+                    </a:lnB>
+                  </a:tcPr>
+                </a:tc>
+                <a:tc>
+                  <a:txBody>
+                    <a:bodyPr/>
+                    <a:lstStyle/>
+                    <a:p>
+                      <a:pPr algn="r" indent="0" marL="0">
+                        <a:buNone/>
+                      </a:pPr>
+                      <a:r>
+                        <a:rPr lang="en-US" sz="1100" dirty="0">
+                          <a:solidFill>
+                            <a:srgbClr val="111111"/>
+                          </a:solidFill>
+                          <a:latin typeface="Arial" pitchFamily="34" charset="0"/>
+                          <a:ea typeface="Arial" pitchFamily="34" charset="-122"/>
+                          <a:cs typeface="Arial" pitchFamily="34" charset="-120"/>
+                        </a:rPr>
+                        <a:t>0.14594</a:t>
+                      </a:r>
+                      <a:endParaRPr lang="en-US" sz="1100" dirty="0">
+                        <a:latin typeface="Arial" charset="0"/>
+                        <a:ea typeface="Arial" charset="0"/>
+                        <a:cs typeface="Arial" charset="0"/>
+                      </a:endParaRPr>
+                    </a:p>
+                  </a:txBody>
+                  <a:tcPr marL="38100" marR="38100" marT="12700" marB="12700">
+                    <a:lnL w="0" cap="flat" cmpd="sng" algn="ctr">
+                      <a:noFill/>
+                    </a:lnL>
+                    <a:lnR w="0" cap="flat" cmpd="sng" algn="ctr">
+                      <a:noFill/>
+                    </a:lnR>
+                    <a:lnT w="0" cap="flat" cmpd="sng" algn="ctr">
+                      <a:noFill/>
+                    </a:lnT>
+                    <a:lnB w="0" cap="flat" cmpd="sng" algn="ctr">
+                      <a:noFill/>
+                    </a:lnB>
+                  </a:tcPr>
+                </a:tc>
+                <a:tc>
+                  <a:txBody>
+                    <a:bodyPr/>
+                    <a:lstStyle/>
+                    <a:p>
+                      <a:pPr algn="r" indent="0" marL="0">
+                        <a:buNone/>
+                      </a:pPr>
+                      <a:r>
+                        <a:rPr lang="en-US" sz="1100" dirty="0">
+                          <a:solidFill>
+                            <a:srgbClr val="111111"/>
+                          </a:solidFill>
+                          <a:latin typeface="Arial" pitchFamily="34" charset="0"/>
+                          <a:ea typeface="Arial" pitchFamily="34" charset="-122"/>
+                          <a:cs typeface="Arial" pitchFamily="34" charset="-120"/>
+                        </a:rPr>
+                        <a:t>0.17917</a:t>
+                      </a:r>
+                      <a:endParaRPr lang="en-US" sz="1100" dirty="0">
+                        <a:latin typeface="Arial" charset="0"/>
+                        <a:ea typeface="Arial" charset="0"/>
+                        <a:cs typeface="Arial" charset="0"/>
+                      </a:endParaRPr>
+                    </a:p>
+                  </a:txBody>
+                  <a:tcPr marL="38100" marR="38100" marT="12700" marB="12700">
+                    <a:lnL w="0" cap="flat" cmpd="sng" algn="ctr">
+                      <a:noFill/>
+                    </a:lnL>
+                    <a:lnR w="0" cap="flat" cmpd="sng" algn="ctr">
+                      <a:noFill/>
+                    </a:lnR>
+                    <a:lnT w="0" cap="flat" cmpd="sng" algn="ctr">
+                      <a:noFill/>
+                    </a:lnT>
+                    <a:lnB w="0" cap="flat" cmpd="sng" algn="ctr">
+                      <a:noFill/>
+                    </a:lnB>
+                  </a:tcPr>
+                </a:tc>
+              </a:tr>
+              <a:tr h="224028">
+                <a:tc>
+                  <a:txBody>
+                    <a:bodyPr/>
+                    <a:lstStyle/>
+                    <a:p>
+                      <a:pPr indent="0" marL="0">
+                        <a:buNone/>
+                      </a:pPr>
+                      <a:r>
+                        <a:rPr lang="en-US" sz="1100" dirty="0">
+                          <a:solidFill>
+                            <a:srgbClr val="111111"/>
+                          </a:solidFill>
+                          <a:latin typeface="Arial" pitchFamily="34" charset="0"/>
+                          <a:ea typeface="Arial" pitchFamily="34" charset="-122"/>
+                          <a:cs typeface="Arial" pitchFamily="34" charset="-120"/>
+                        </a:rPr>
+                        <a:t>s5e10</a:t>
+                      </a:r>
+                      <a:endParaRPr lang="en-US" sz="1100" dirty="0">
+                        <a:latin typeface="Arial" charset="0"/>
+                        <a:ea typeface="Arial" charset="0"/>
+                        <a:cs typeface="Arial" charset="0"/>
+                      </a:endParaRPr>
+                    </a:p>
+                  </a:txBody>
+                  <a:tcPr marL="38100" marR="38100" marT="12700" marB="12700">
+                    <a:lnL w="0" cap="flat" cmpd="sng" algn="ctr">
+                      <a:noFill/>
+                    </a:lnL>
+                    <a:lnR w="0" cap="flat" cmpd="sng" algn="ctr">
+                      <a:noFill/>
+                    </a:lnR>
+                    <a:lnT w="0" cap="flat" cmpd="sng" algn="ctr">
+                      <a:noFill/>
+                    </a:lnT>
+                    <a:lnB w="0" cap="flat" cmpd="sng" algn="ctr">
+                      <a:noFill/>
+                    </a:lnB>
+                  </a:tcPr>
+                </a:tc>
+                <a:tc>
+                  <a:txBody>
+                    <a:bodyPr/>
+                    <a:lstStyle/>
+                    <a:p>
+                      <a:pPr indent="0" marL="0">
+                        <a:buNone/>
+                      </a:pPr>
+                      <a:r>
+                        <a:rPr lang="en-US" sz="1100" dirty="0">
+                          <a:solidFill>
+                            <a:srgbClr val="111111"/>
+                          </a:solidFill>
+                          <a:latin typeface="Arial" pitchFamily="34" charset="0"/>
+                          <a:ea typeface="Arial" pitchFamily="34" charset="-122"/>
+                          <a:cs typeface="Arial" pitchFamily="34" charset="-120"/>
+                        </a:rPr>
+                        <a:t>RMSE ↓</a:t>
+                      </a:r>
+                      <a:endParaRPr lang="en-US" sz="1100" dirty="0">
+                        <a:latin typeface="Arial" charset="0"/>
+                        <a:ea typeface="Arial" charset="0"/>
+                        <a:cs typeface="Arial" charset="0"/>
+                      </a:endParaRPr>
+                    </a:p>
+                  </a:txBody>
+                  <a:tcPr marL="38100" marR="38100" marT="12700" marB="12700">
+                    <a:lnL w="0" cap="flat" cmpd="sng" algn="ctr">
+                      <a:noFill/>
+                    </a:lnL>
+                    <a:lnR w="0" cap="flat" cmpd="sng" algn="ctr">
+                      <a:noFill/>
+                    </a:lnR>
+                    <a:lnT w="0" cap="flat" cmpd="sng" algn="ctr">
+                      <a:noFill/>
+                    </a:lnT>
+                    <a:lnB w="0" cap="flat" cmpd="sng" algn="ctr">
+                      <a:noFill/>
+                    </a:lnB>
+                  </a:tcPr>
+                </a:tc>
+                <a:tc>
+                  <a:txBody>
+                    <a:bodyPr/>
+                    <a:lstStyle/>
+                    <a:p>
+                      <a:pPr algn="r" indent="0" marL="0">
+                        <a:buNone/>
+                      </a:pPr>
+                      <a:r>
+                        <a:rPr lang="en-US" sz="1100" b="1" dirty="0">
+                          <a:solidFill>
+                            <a:srgbClr val="111111"/>
+                          </a:solidFill>
+                          <a:latin typeface="Arial" pitchFamily="34" charset="0"/>
+                          <a:ea typeface="Arial" pitchFamily="34" charset="-122"/>
+                          <a:cs typeface="Arial" pitchFamily="34" charset="-120"/>
+                        </a:rPr>
+                        <a:t>0.05576</a:t>
+                      </a:r>
+                      <a:endParaRPr lang="en-US" sz="1100" dirty="0">
+                        <a:latin typeface="Arial" charset="0"/>
+                        <a:ea typeface="Arial" charset="0"/>
+                        <a:cs typeface="Arial" charset="0"/>
+                      </a:endParaRPr>
+                    </a:p>
+                  </a:txBody>
+                  <a:tcPr marL="38100" marR="38100" marT="12700" marB="12700">
+                    <a:lnL w="0" cap="flat" cmpd="sng" algn="ctr">
+                      <a:noFill/>
+                    </a:lnL>
+                    <a:lnR w="0" cap="flat" cmpd="sng" algn="ctr">
+                      <a:noFill/>
+                    </a:lnR>
+                    <a:lnT w="0" cap="flat" cmpd="sng" algn="ctr">
+                      <a:noFill/>
+                    </a:lnT>
+                    <a:lnB w="0" cap="flat" cmpd="sng" algn="ctr">
+                      <a:noFill/>
+                    </a:lnB>
+                  </a:tcPr>
+                </a:tc>
+                <a:tc>
+                  <a:txBody>
+                    <a:bodyPr/>
+                    <a:lstStyle/>
+                    <a:p>
+                      <a:pPr algn="r" indent="0" marL="0">
+                        <a:buNone/>
+                      </a:pPr>
+                      <a:r>
+                        <a:rPr lang="en-US" sz="1100" dirty="0">
+                          <a:solidFill>
+                            <a:srgbClr val="111111"/>
+                          </a:solidFill>
+                          <a:latin typeface="Arial" pitchFamily="34" charset="0"/>
+                          <a:ea typeface="Arial" pitchFamily="34" charset="-122"/>
+                          <a:cs typeface="Arial" pitchFamily="34" charset="-120"/>
+                        </a:rPr>
+                        <a:t>0.05588</a:t>
+                      </a:r>
+                      <a:endParaRPr lang="en-US" sz="1100" dirty="0">
+                        <a:latin typeface="Arial" charset="0"/>
+                        <a:ea typeface="Arial" charset="0"/>
+                        <a:cs typeface="Arial" charset="0"/>
+                      </a:endParaRPr>
+                    </a:p>
+                  </a:txBody>
+                  <a:tcPr marL="38100" marR="38100" marT="12700" marB="12700">
+                    <a:lnL w="0" cap="flat" cmpd="sng" algn="ctr">
+                      <a:noFill/>
+                    </a:lnL>
+                    <a:lnR w="0" cap="flat" cmpd="sng" algn="ctr">
+                      <a:noFill/>
+                    </a:lnR>
+                    <a:lnT w="0" cap="flat" cmpd="sng" algn="ctr">
+                      <a:noFill/>
+                    </a:lnT>
+                    <a:lnB w="0" cap="flat" cmpd="sng" algn="ctr">
+                      <a:noFill/>
+                    </a:lnB>
+                  </a:tcPr>
+                </a:tc>
+                <a:tc>
+                  <a:txBody>
+                    <a:bodyPr/>
+                    <a:lstStyle/>
+                    <a:p>
+                      <a:pPr algn="r" indent="0" marL="0">
+                        <a:buNone/>
+                      </a:pPr>
+                      <a:r>
+                        <a:rPr lang="en-US" sz="1100" dirty="0">
+                          <a:solidFill>
+                            <a:srgbClr val="111111"/>
+                          </a:solidFill>
+                          <a:latin typeface="Arial" pitchFamily="34" charset="0"/>
+                          <a:ea typeface="Arial" pitchFamily="34" charset="-122"/>
+                          <a:cs typeface="Arial" pitchFamily="34" charset="-120"/>
+                        </a:rPr>
+                        <a:t>0.05579</a:t>
+                      </a:r>
+                      <a:endParaRPr lang="en-US" sz="1100" dirty="0">
+                        <a:latin typeface="Arial" charset="0"/>
+                        <a:ea typeface="Arial" charset="0"/>
+                        <a:cs typeface="Arial" charset="0"/>
+                      </a:endParaRPr>
+                    </a:p>
+                  </a:txBody>
+                  <a:tcPr marL="38100" marR="38100" marT="12700" marB="12700">
+                    <a:lnL w="0" cap="flat" cmpd="sng" algn="ctr">
+                      <a:noFill/>
+                    </a:lnL>
+                    <a:lnR w="0" cap="flat" cmpd="sng" algn="ctr">
+                      <a:noFill/>
+                    </a:lnR>
+                    <a:lnT w="0" cap="flat" cmpd="sng" algn="ctr">
+                      <a:noFill/>
+                    </a:lnT>
+                    <a:lnB w="0" cap="flat" cmpd="sng" algn="ctr">
+                      <a:noFill/>
+                    </a:lnB>
+                  </a:tcPr>
+                </a:tc>
+              </a:tr>
+              <a:tr h="224028">
+                <a:tc>
+                  <a:txBody>
+                    <a:bodyPr/>
+                    <a:lstStyle/>
+                    <a:p>
+                      <a:pPr indent="0" marL="0">
+                        <a:buNone/>
+                      </a:pPr>
+                      <a:r>
+                        <a:rPr lang="en-US" sz="1100" dirty="0">
+                          <a:solidFill>
+                            <a:srgbClr val="111111"/>
+                          </a:solidFill>
+                          <a:latin typeface="Arial" pitchFamily="34" charset="0"/>
+                          <a:ea typeface="Arial" pitchFamily="34" charset="-122"/>
+                          <a:cs typeface="Arial" pitchFamily="34" charset="-120"/>
+                        </a:rPr>
+                        <a:t>s6e1</a:t>
+                      </a:r>
+                      <a:endParaRPr lang="en-US" sz="1100" dirty="0">
+                        <a:latin typeface="Arial" charset="0"/>
+                        <a:ea typeface="Arial" charset="0"/>
+                        <a:cs typeface="Arial" charset="0"/>
+                      </a:endParaRPr>
+                    </a:p>
+                  </a:txBody>
+                  <a:tcPr marL="38100" marR="38100" marT="12700" marB="12700">
+                    <a:lnL w="0" cap="flat" cmpd="sng" algn="ctr">
+                      <a:noFill/>
+                    </a:lnL>
+                    <a:lnR w="0" cap="flat" cmpd="sng" algn="ctr">
+                      <a:noFill/>
+                    </a:lnR>
+                    <a:lnT w="0" cap="flat" cmpd="sng" algn="ctr">
+                      <a:noFill/>
+                    </a:lnT>
+                    <a:lnB w="0" cap="flat" cmpd="sng" algn="ctr">
+                      <a:noFill/>
+                    </a:lnB>
+                  </a:tcPr>
+                </a:tc>
+                <a:tc>
+                  <a:txBody>
+                    <a:bodyPr/>
+                    <a:lstStyle/>
+                    <a:p>
+                      <a:pPr indent="0" marL="0">
+                        <a:buNone/>
+                      </a:pPr>
+                      <a:r>
+                        <a:rPr lang="en-US" sz="1100" dirty="0">
+                          <a:solidFill>
+                            <a:srgbClr val="111111"/>
+                          </a:solidFill>
+                          <a:latin typeface="Arial" pitchFamily="34" charset="0"/>
+                          <a:ea typeface="Arial" pitchFamily="34" charset="-122"/>
+                          <a:cs typeface="Arial" pitchFamily="34" charset="-120"/>
+                        </a:rPr>
+                        <a:t>Error ↓</a:t>
+                      </a:r>
+                      <a:endParaRPr lang="en-US" sz="1100" dirty="0">
+                        <a:latin typeface="Arial" charset="0"/>
+                        <a:ea typeface="Arial" charset="0"/>
+                        <a:cs typeface="Arial" charset="0"/>
+                      </a:endParaRPr>
+                    </a:p>
+                  </a:txBody>
+                  <a:tcPr marL="38100" marR="38100" marT="12700" marB="12700">
+                    <a:lnL w="0" cap="flat" cmpd="sng" algn="ctr">
+                      <a:noFill/>
+                    </a:lnL>
+                    <a:lnR w="0" cap="flat" cmpd="sng" algn="ctr">
+                      <a:noFill/>
+                    </a:lnR>
+                    <a:lnT w="0" cap="flat" cmpd="sng" algn="ctr">
+                      <a:noFill/>
+                    </a:lnT>
+                    <a:lnB w="0" cap="flat" cmpd="sng" algn="ctr">
+                      <a:noFill/>
+                    </a:lnB>
+                  </a:tcPr>
+                </a:tc>
+                <a:tc>
+                  <a:txBody>
+                    <a:bodyPr/>
+                    <a:lstStyle/>
+                    <a:p>
+                      <a:pPr algn="r" indent="0" marL="0">
+                        <a:buNone/>
+                      </a:pPr>
+                      <a:r>
+                        <a:rPr lang="en-US" sz="1100" b="1" dirty="0">
+                          <a:solidFill>
+                            <a:srgbClr val="111111"/>
+                          </a:solidFill>
+                          <a:latin typeface="Arial" pitchFamily="34" charset="0"/>
+                          <a:ea typeface="Arial" pitchFamily="34" charset="-122"/>
+                          <a:cs typeface="Arial" pitchFamily="34" charset="-120"/>
+                        </a:rPr>
+                        <a:t>8.71516</a:t>
+                      </a:r>
+                      <a:endParaRPr lang="en-US" sz="1100" dirty="0">
+                        <a:latin typeface="Arial" charset="0"/>
+                        <a:ea typeface="Arial" charset="0"/>
+                        <a:cs typeface="Arial" charset="0"/>
+                      </a:endParaRPr>
+                    </a:p>
+                  </a:txBody>
+                  <a:tcPr marL="38100" marR="38100" marT="12700" marB="12700">
+                    <a:lnL w="0" cap="flat" cmpd="sng" algn="ctr">
+                      <a:noFill/>
+                    </a:lnL>
+                    <a:lnR w="0" cap="flat" cmpd="sng" algn="ctr">
+                      <a:noFill/>
+                    </a:lnR>
+                    <a:lnT w="0" cap="flat" cmpd="sng" algn="ctr">
+                      <a:noFill/>
+                    </a:lnT>
+                    <a:lnB w="0" cap="flat" cmpd="sng" algn="ctr">
+                      <a:noFill/>
+                    </a:lnB>
+                  </a:tcPr>
+                </a:tc>
+                <a:tc>
+                  <a:txBody>
+                    <a:bodyPr/>
+                    <a:lstStyle/>
+                    <a:p>
+                      <a:pPr algn="r" indent="0" marL="0">
+                        <a:buNone/>
+                      </a:pPr>
+                      <a:r>
+                        <a:rPr lang="en-US" sz="1100" dirty="0">
+                          <a:solidFill>
+                            <a:srgbClr val="111111"/>
+                          </a:solidFill>
+                          <a:latin typeface="Arial" pitchFamily="34" charset="0"/>
+                          <a:ea typeface="Arial" pitchFamily="34" charset="-122"/>
+                          <a:cs typeface="Arial" pitchFamily="34" charset="-120"/>
+                        </a:rPr>
+                        <a:t>8.73239</a:t>
+                      </a:r>
+                      <a:endParaRPr lang="en-US" sz="1100" dirty="0">
+                        <a:latin typeface="Arial" charset="0"/>
+                        <a:ea typeface="Arial" charset="0"/>
+                        <a:cs typeface="Arial" charset="0"/>
+                      </a:endParaRPr>
+                    </a:p>
+                  </a:txBody>
+                  <a:tcPr marL="38100" marR="38100" marT="12700" marB="12700">
+                    <a:lnL w="0" cap="flat" cmpd="sng" algn="ctr">
+                      <a:noFill/>
+                    </a:lnL>
+                    <a:lnR w="0" cap="flat" cmpd="sng" algn="ctr">
+                      <a:noFill/>
+                    </a:lnR>
+                    <a:lnT w="0" cap="flat" cmpd="sng" algn="ctr">
+                      <a:noFill/>
+                    </a:lnT>
+                    <a:lnB w="0" cap="flat" cmpd="sng" algn="ctr">
+                      <a:noFill/>
+                    </a:lnB>
+                  </a:tcPr>
+                </a:tc>
+                <a:tc>
+                  <a:txBody>
+                    <a:bodyPr/>
+                    <a:lstStyle/>
+                    <a:p>
+                      <a:pPr algn="r" indent="0" marL="0">
+                        <a:buNone/>
+                      </a:pPr>
+                      <a:r>
+                        <a:rPr lang="en-US" sz="1100" dirty="0">
+                          <a:solidFill>
+                            <a:srgbClr val="111111"/>
+                          </a:solidFill>
+                          <a:latin typeface="Arial" pitchFamily="34" charset="0"/>
+                          <a:ea typeface="Arial" pitchFamily="34" charset="-122"/>
+                          <a:cs typeface="Arial" pitchFamily="34" charset="-120"/>
+                        </a:rPr>
+                        <a:t>8.72191</a:t>
+                      </a:r>
+                      <a:endParaRPr lang="en-US" sz="1100" dirty="0">
+                        <a:latin typeface="Arial" charset="0"/>
+                        <a:ea typeface="Arial" charset="0"/>
+                        <a:cs typeface="Arial" charset="0"/>
+                      </a:endParaRPr>
+                    </a:p>
+                  </a:txBody>
+                  <a:tcPr marL="38100" marR="38100" marT="12700" marB="12700">
+                    <a:lnL w="0" cap="flat" cmpd="sng" algn="ctr">
+                      <a:noFill/>
+                    </a:lnL>
+                    <a:lnR w="0" cap="flat" cmpd="sng" algn="ctr">
+                      <a:noFill/>
+                    </a:lnR>
+                    <a:lnT w="0" cap="flat" cmpd="sng" algn="ctr">
+                      <a:noFill/>
+                    </a:lnT>
+                    <a:lnB w="0" cap="flat" cmpd="sng" algn="ctr">
+                      <a:noFill/>
+                    </a:lnB>
+                  </a:tcPr>
+                </a:tc>
+              </a:tr>
+              <a:tr h="224028">
+                <a:tc>
+                  <a:txBody>
+                    <a:bodyPr/>
+                    <a:lstStyle/>
+                    <a:p>
+                      <a:pPr indent="0" marL="0">
+                        <a:buNone/>
+                      </a:pPr>
+                      <a:r>
+                        <a:rPr lang="en-US" sz="1100" dirty="0">
+                          <a:solidFill>
+                            <a:srgbClr val="111111"/>
+                          </a:solidFill>
+                          <a:latin typeface="Arial" pitchFamily="34" charset="0"/>
+                          <a:ea typeface="Arial" pitchFamily="34" charset="-122"/>
+                          <a:cs typeface="Arial" pitchFamily="34" charset="-120"/>
+                        </a:rPr>
+                        <a:t>s6e2</a:t>
+                      </a:r>
+                      <a:endParaRPr lang="en-US" sz="1100" dirty="0">
+                        <a:latin typeface="Arial" charset="0"/>
+                        <a:ea typeface="Arial" charset="0"/>
+                        <a:cs typeface="Arial" charset="0"/>
+                      </a:endParaRPr>
+                    </a:p>
+                  </a:txBody>
+                  <a:tcPr marL="38100" marR="38100" marT="12700" marB="12700">
+                    <a:lnL w="0" cap="flat" cmpd="sng" algn="ctr">
+                      <a:noFill/>
+                    </a:lnL>
+                    <a:lnR w="0" cap="flat" cmpd="sng" algn="ctr">
+                      <a:noFill/>
+                    </a:lnR>
+                    <a:lnT w="0" cap="flat" cmpd="sng" algn="ctr">
+                      <a:noFill/>
+                    </a:lnT>
+                    <a:lnB w="0" cap="flat" cmpd="sng" algn="ctr">
+                      <a:noFill/>
+                    </a:lnB>
+                  </a:tcPr>
+                </a:tc>
+                <a:tc>
+                  <a:txBody>
+                    <a:bodyPr/>
+                    <a:lstStyle/>
+                    <a:p>
+                      <a:pPr indent="0" marL="0">
+                        <a:buNone/>
+                      </a:pPr>
+                      <a:r>
+                        <a:rPr lang="en-US" sz="1100" dirty="0">
+                          <a:solidFill>
+                            <a:srgbClr val="111111"/>
+                          </a:solidFill>
+                          <a:latin typeface="Arial" pitchFamily="34" charset="0"/>
+                          <a:ea typeface="Arial" pitchFamily="34" charset="-122"/>
+                          <a:cs typeface="Arial" pitchFamily="34" charset="-120"/>
+                        </a:rPr>
+                        <a:t>AUC ↑</a:t>
+                      </a:r>
+                      <a:endParaRPr lang="en-US" sz="1100" dirty="0">
+                        <a:latin typeface="Arial" charset="0"/>
+                        <a:ea typeface="Arial" charset="0"/>
+                        <a:cs typeface="Arial" charset="0"/>
+                      </a:endParaRPr>
+                    </a:p>
+                  </a:txBody>
+                  <a:tcPr marL="38100" marR="38100" marT="12700" marB="12700">
+                    <a:lnL w="0" cap="flat" cmpd="sng" algn="ctr">
+                      <a:noFill/>
+                    </a:lnL>
+                    <a:lnR w="0" cap="flat" cmpd="sng" algn="ctr">
+                      <a:noFill/>
+                    </a:lnR>
+                    <a:lnT w="0" cap="flat" cmpd="sng" algn="ctr">
+                      <a:noFill/>
+                    </a:lnT>
+                    <a:lnB w="0" cap="flat" cmpd="sng" algn="ctr">
+                      <a:noFill/>
+                    </a:lnB>
+                  </a:tcPr>
+                </a:tc>
+                <a:tc>
+                  <a:txBody>
+                    <a:bodyPr/>
+                    <a:lstStyle/>
+                    <a:p>
+                      <a:pPr algn="r" indent="0" marL="0">
+                        <a:buNone/>
+                      </a:pPr>
+                      <a:r>
+                        <a:rPr lang="en-US" sz="1100" dirty="0">
+                          <a:solidFill>
+                            <a:srgbClr val="111111"/>
+                          </a:solidFill>
+                          <a:latin typeface="Arial" pitchFamily="34" charset="0"/>
+                          <a:ea typeface="Arial" pitchFamily="34" charset="-122"/>
+                          <a:cs typeface="Arial" pitchFamily="34" charset="-120"/>
+                        </a:rPr>
+                        <a:t>0.95505</a:t>
+                      </a:r>
+                      <a:endParaRPr lang="en-US" sz="1100" dirty="0">
+                        <a:latin typeface="Arial" charset="0"/>
+                        <a:ea typeface="Arial" charset="0"/>
+                        <a:cs typeface="Arial" charset="0"/>
+                      </a:endParaRPr>
+                    </a:p>
+                  </a:txBody>
+                  <a:tcPr marL="38100" marR="38100" marT="12700" marB="12700">
+                    <a:lnL w="0" cap="flat" cmpd="sng" algn="ctr">
+                      <a:noFill/>
+                    </a:lnL>
+                    <a:lnR w="0" cap="flat" cmpd="sng" algn="ctr">
+                      <a:noFill/>
+                    </a:lnR>
+                    <a:lnT w="0" cap="flat" cmpd="sng" algn="ctr">
+                      <a:noFill/>
+                    </a:lnT>
+                    <a:lnB w="0" cap="flat" cmpd="sng" algn="ctr">
+                      <a:noFill/>
+                    </a:lnB>
+                  </a:tcPr>
+                </a:tc>
+                <a:tc>
+                  <a:txBody>
+                    <a:bodyPr/>
+                    <a:lstStyle/>
+                    <a:p>
+                      <a:pPr algn="r" indent="0" marL="0">
+                        <a:buNone/>
+                      </a:pPr>
+                      <a:r>
+                        <a:rPr lang="en-US" sz="1100" dirty="0">
+                          <a:solidFill>
+                            <a:srgbClr val="111111"/>
+                          </a:solidFill>
+                          <a:latin typeface="Arial" pitchFamily="34" charset="0"/>
+                          <a:ea typeface="Arial" pitchFamily="34" charset="-122"/>
+                          <a:cs typeface="Arial" pitchFamily="34" charset="-120"/>
+                        </a:rPr>
+                        <a:t>0.95508</a:t>
+                      </a:r>
+                      <a:endParaRPr lang="en-US" sz="1100" dirty="0">
+                        <a:latin typeface="Arial" charset="0"/>
+                        <a:ea typeface="Arial" charset="0"/>
+                        <a:cs typeface="Arial" charset="0"/>
+                      </a:endParaRPr>
+                    </a:p>
+                  </a:txBody>
+                  <a:tcPr marL="38100" marR="38100" marT="12700" marB="12700">
+                    <a:lnL w="0" cap="flat" cmpd="sng" algn="ctr">
+                      <a:noFill/>
+                    </a:lnL>
+                    <a:lnR w="0" cap="flat" cmpd="sng" algn="ctr">
+                      <a:noFill/>
+                    </a:lnR>
+                    <a:lnT w="0" cap="flat" cmpd="sng" algn="ctr">
+                      <a:noFill/>
+                    </a:lnT>
+                    <a:lnB w="0" cap="flat" cmpd="sng" algn="ctr">
+                      <a:noFill/>
+                    </a:lnB>
+                  </a:tcPr>
+                </a:tc>
+                <a:tc>
+                  <a:txBody>
+                    <a:bodyPr/>
+                    <a:lstStyle/>
+                    <a:p>
+                      <a:pPr algn="r" indent="0" marL="0">
+                        <a:buNone/>
+                      </a:pPr>
+                      <a:r>
+                        <a:rPr lang="en-US" sz="1100" b="1" dirty="0">
+                          <a:solidFill>
+                            <a:srgbClr val="111111"/>
+                          </a:solidFill>
+                          <a:latin typeface="Arial" pitchFamily="34" charset="0"/>
+                          <a:ea typeface="Arial" pitchFamily="34" charset="-122"/>
+                          <a:cs typeface="Arial" pitchFamily="34" charset="-120"/>
+                        </a:rPr>
+                        <a:t>0.95516</a:t>
+                      </a:r>
+                      <a:endParaRPr lang="en-US" sz="1100" dirty="0">
+                        <a:latin typeface="Arial" charset="0"/>
+                        <a:ea typeface="Arial" charset="0"/>
+                        <a:cs typeface="Arial" charset="0"/>
+                      </a:endParaRPr>
+                    </a:p>
+                  </a:txBody>
+                  <a:tcPr marL="38100" marR="38100" marT="12700" marB="12700">
+                    <a:lnL w="0" cap="flat" cmpd="sng" algn="ctr">
+                      <a:noFill/>
+                    </a:lnL>
+                    <a:lnR w="0" cap="flat" cmpd="sng" algn="ctr">
+                      <a:noFill/>
+                    </a:lnR>
+                    <a:lnT w="0" cap="flat" cmpd="sng" algn="ctr">
+                      <a:noFill/>
+                    </a:lnT>
+                    <a:lnB w="0" cap="flat" cmpd="sng" algn="ctr">
+                      <a:noFill/>
+                    </a:lnB>
+                  </a:tcPr>
+                </a:tc>
+              </a:tr>
+              <a:tr h="224028">
+                <a:tc>
+                  <a:txBody>
+                    <a:bodyPr/>
+                    <a:lstStyle/>
+                    <a:p>
+                      <a:pPr indent="0" marL="0">
+                        <a:buNone/>
+                      </a:pPr>
+                      <a:r>
+                        <a:rPr lang="en-US" sz="1100" dirty="0">
+                          <a:solidFill>
+                            <a:srgbClr val="111111"/>
+                          </a:solidFill>
+                          <a:latin typeface="Arial" pitchFamily="34" charset="0"/>
+                          <a:ea typeface="Arial" pitchFamily="34" charset="-122"/>
+                          <a:cs typeface="Arial" pitchFamily="34" charset="-120"/>
+                        </a:rPr>
+                        <a:t>afsis</a:t>
+                      </a:r>
+                      <a:endParaRPr lang="en-US" sz="1100" dirty="0">
+                        <a:latin typeface="Arial" charset="0"/>
+                        <a:ea typeface="Arial" charset="0"/>
+                        <a:cs typeface="Arial" charset="0"/>
+                      </a:endParaRPr>
+                    </a:p>
+                  </a:txBody>
+                  <a:tcPr marL="38100" marR="38100" marT="12700" marB="12700">
+                    <a:lnL w="0" cap="flat" cmpd="sng" algn="ctr">
+                      <a:noFill/>
+                    </a:lnL>
+                    <a:lnR w="0" cap="flat" cmpd="sng" algn="ctr">
+                      <a:noFill/>
+                    </a:lnR>
+                    <a:lnT w="0" cap="flat" cmpd="sng" algn="ctr">
+                      <a:noFill/>
+                    </a:lnT>
+                    <a:lnB w="0" cap="flat" cmpd="sng" algn="ctr">
+                      <a:noFill/>
+                    </a:lnB>
+                  </a:tcPr>
+                </a:tc>
+                <a:tc>
+                  <a:txBody>
+                    <a:bodyPr/>
+                    <a:lstStyle/>
+                    <a:p>
+                      <a:pPr indent="0" marL="0">
+                        <a:buNone/>
+                      </a:pPr>
+                      <a:r>
+                        <a:rPr lang="en-US" sz="1100" dirty="0">
+                          <a:solidFill>
+                            <a:srgbClr val="111111"/>
+                          </a:solidFill>
+                          <a:latin typeface="Arial" pitchFamily="34" charset="0"/>
+                          <a:ea typeface="Arial" pitchFamily="34" charset="-122"/>
+                          <a:cs typeface="Arial" pitchFamily="34" charset="-120"/>
+                        </a:rPr>
+                        <a:t>MCRMSE ↓</a:t>
+                      </a:r>
+                      <a:endParaRPr lang="en-US" sz="1100" dirty="0">
+                        <a:latin typeface="Arial" charset="0"/>
+                        <a:ea typeface="Arial" charset="0"/>
+                        <a:cs typeface="Arial" charset="0"/>
+                      </a:endParaRPr>
+                    </a:p>
+                  </a:txBody>
+                  <a:tcPr marL="38100" marR="38100" marT="12700" marB="12700">
+                    <a:lnL w="0" cap="flat" cmpd="sng" algn="ctr">
+                      <a:noFill/>
+                    </a:lnL>
+                    <a:lnR w="0" cap="flat" cmpd="sng" algn="ctr">
+                      <a:noFill/>
+                    </a:lnR>
+                    <a:lnT w="0" cap="flat" cmpd="sng" algn="ctr">
+                      <a:noFill/>
+                    </a:lnT>
+                    <a:lnB w="0" cap="flat" cmpd="sng" algn="ctr">
+                      <a:noFill/>
+                    </a:lnB>
+                  </a:tcPr>
+                </a:tc>
+                <a:tc>
+                  <a:txBody>
+                    <a:bodyPr/>
+                    <a:lstStyle/>
+                    <a:p>
+                      <a:pPr algn="r" indent="0" marL="0">
+                        <a:buNone/>
+                      </a:pPr>
+                      <a:r>
+                        <a:rPr lang="en-US" sz="1100" b="1" dirty="0">
+                          <a:solidFill>
+                            <a:srgbClr val="111111"/>
+                          </a:solidFill>
+                          <a:latin typeface="Arial" pitchFamily="34" charset="0"/>
+                          <a:ea typeface="Arial" pitchFamily="34" charset="-122"/>
+                          <a:cs typeface="Arial" pitchFamily="34" charset="-120"/>
+                        </a:rPr>
+                        <a:t>0.48917</a:t>
+                      </a:r>
+                      <a:endParaRPr lang="en-US" sz="1100" dirty="0">
+                        <a:latin typeface="Arial" charset="0"/>
+                        <a:ea typeface="Arial" charset="0"/>
+                        <a:cs typeface="Arial" charset="0"/>
+                      </a:endParaRPr>
+                    </a:p>
+                  </a:txBody>
+                  <a:tcPr marL="38100" marR="38100" marT="12700" marB="12700">
+                    <a:lnL w="0" cap="flat" cmpd="sng" algn="ctr">
+                      <a:noFill/>
+                    </a:lnL>
+                    <a:lnR w="0" cap="flat" cmpd="sng" algn="ctr">
+                      <a:noFill/>
+                    </a:lnR>
+                    <a:lnT w="0" cap="flat" cmpd="sng" algn="ctr">
+                      <a:noFill/>
+                    </a:lnT>
+                    <a:lnB w="0" cap="flat" cmpd="sng" algn="ctr">
+                      <a:noFill/>
+                    </a:lnB>
+                  </a:tcPr>
+                </a:tc>
+                <a:tc>
+                  <a:txBody>
+                    <a:bodyPr/>
+                    <a:lstStyle/>
+                    <a:p>
+                      <a:pPr algn="r" indent="0" marL="0">
+                        <a:buNone/>
+                      </a:pPr>
+                      <a:r>
+                        <a:rPr lang="en-US" sz="1100" dirty="0">
+                          <a:solidFill>
+                            <a:srgbClr val="111111"/>
+                          </a:solidFill>
+                          <a:latin typeface="Arial" pitchFamily="34" charset="0"/>
+                          <a:ea typeface="Arial" pitchFamily="34" charset="-122"/>
+                          <a:cs typeface="Arial" pitchFamily="34" charset="-120"/>
+                        </a:rPr>
+                        <a:t>0.69855</a:t>
+                      </a:r>
+                      <a:endParaRPr lang="en-US" sz="1100" dirty="0">
+                        <a:latin typeface="Arial" charset="0"/>
+                        <a:ea typeface="Arial" charset="0"/>
+                        <a:cs typeface="Arial" charset="0"/>
+                      </a:endParaRPr>
+                    </a:p>
+                  </a:txBody>
+                  <a:tcPr marL="38100" marR="38100" marT="12700" marB="12700">
+                    <a:lnL w="0" cap="flat" cmpd="sng" algn="ctr">
+                      <a:noFill/>
+                    </a:lnL>
+                    <a:lnR w="0" cap="flat" cmpd="sng" algn="ctr">
+                      <a:noFill/>
+                    </a:lnR>
+                    <a:lnT w="0" cap="flat" cmpd="sng" algn="ctr">
+                      <a:noFill/>
+                    </a:lnT>
+                    <a:lnB w="0" cap="flat" cmpd="sng" algn="ctr">
+                      <a:noFill/>
+                    </a:lnB>
+                  </a:tcPr>
+                </a:tc>
+                <a:tc>
+                  <a:txBody>
+                    <a:bodyPr/>
+                    <a:lstStyle/>
+                    <a:p>
+                      <a:pPr algn="r" indent="0" marL="0">
+                        <a:buNone/>
+                      </a:pPr>
+                      <a:r>
+                        <a:rPr lang="en-US" sz="1100" dirty="0">
+                          <a:solidFill>
+                            <a:srgbClr val="111111"/>
+                          </a:solidFill>
+                          <a:latin typeface="Arial" pitchFamily="34" charset="0"/>
+                          <a:ea typeface="Arial" pitchFamily="34" charset="-122"/>
+                          <a:cs typeface="Arial" pitchFamily="34" charset="-120"/>
+                        </a:rPr>
+                        <a:t>0.49861</a:t>
+                      </a:r>
+                      <a:endParaRPr lang="en-US" sz="1100" dirty="0">
+                        <a:latin typeface="Arial" charset="0"/>
+                        <a:ea typeface="Arial" charset="0"/>
+                        <a:cs typeface="Arial" charset="0"/>
+                      </a:endParaRPr>
+                    </a:p>
+                  </a:txBody>
+                  <a:tcPr marL="38100" marR="38100" marT="12700" marB="12700">
+                    <a:lnL w="0" cap="flat" cmpd="sng" algn="ctr">
+                      <a:noFill/>
+                    </a:lnL>
+                    <a:lnR w="0" cap="flat" cmpd="sng" algn="ctr">
+                      <a:noFill/>
+                    </a:lnR>
+                    <a:lnT w="0" cap="flat" cmpd="sng" algn="ctr">
+                      <a:noFill/>
+                    </a:lnT>
+                    <a:lnB w="0" cap="flat" cmpd="sng" algn="ctr">
+                      <a:noFill/>
+                    </a:lnB>
+                  </a:tcPr>
+                </a:tc>
+              </a:tr>
+              <a:tr h="224028">
+                <a:tc>
+                  <a:txBody>
+                    <a:bodyPr/>
+                    <a:lstStyle/>
+                    <a:p>
+                      <a:pPr indent="0" marL="0">
+                        <a:buNone/>
+                      </a:pPr>
+                      <a:r>
+                        <a:rPr lang="en-US" sz="1100" dirty="0">
+                          <a:solidFill>
+                            <a:srgbClr val="111111"/>
+                          </a:solidFill>
+                          <a:latin typeface="Arial" pitchFamily="34" charset="0"/>
+                          <a:ea typeface="Arial" pitchFamily="34" charset="-122"/>
+                          <a:cs typeface="Arial" pitchFamily="34" charset="-120"/>
+                        </a:rPr>
+                        <a:t>cat-in-the-dat</a:t>
+                      </a:r>
+                      <a:endParaRPr lang="en-US" sz="1100" dirty="0">
+                        <a:latin typeface="Arial" charset="0"/>
+                        <a:ea typeface="Arial" charset="0"/>
+                        <a:cs typeface="Arial" charset="0"/>
+                      </a:endParaRPr>
+                    </a:p>
+                  </a:txBody>
+                  <a:tcPr marL="38100" marR="38100" marT="12700" marB="12700">
+                    <a:lnL w="0" cap="flat" cmpd="sng" algn="ctr">
+                      <a:noFill/>
+                    </a:lnL>
+                    <a:lnR w="0" cap="flat" cmpd="sng" algn="ctr">
+                      <a:noFill/>
+                    </a:lnR>
+                    <a:lnT w="0" cap="flat" cmpd="sng" algn="ctr">
+                      <a:noFill/>
+                    </a:lnT>
+                    <a:lnB w="0" cap="flat" cmpd="sng" algn="ctr">
+                      <a:noFill/>
+                    </a:lnB>
+                  </a:tcPr>
+                </a:tc>
+                <a:tc>
+                  <a:txBody>
+                    <a:bodyPr/>
+                    <a:lstStyle/>
+                    <a:p>
+                      <a:pPr indent="0" marL="0">
+                        <a:buNone/>
+                      </a:pPr>
+                      <a:r>
+                        <a:rPr lang="en-US" sz="1100" dirty="0">
+                          <a:solidFill>
+                            <a:srgbClr val="111111"/>
+                          </a:solidFill>
+                          <a:latin typeface="Arial" pitchFamily="34" charset="0"/>
+                          <a:ea typeface="Arial" pitchFamily="34" charset="-122"/>
+                          <a:cs typeface="Arial" pitchFamily="34" charset="-120"/>
+                        </a:rPr>
+                        <a:t>AUC ↑</a:t>
+                      </a:r>
+                      <a:endParaRPr lang="en-US" sz="1100" dirty="0">
+                        <a:latin typeface="Arial" charset="0"/>
+                        <a:ea typeface="Arial" charset="0"/>
+                        <a:cs typeface="Arial" charset="0"/>
+                      </a:endParaRPr>
+                    </a:p>
+                  </a:txBody>
+                  <a:tcPr marL="38100" marR="38100" marT="12700" marB="12700">
+                    <a:lnL w="0" cap="flat" cmpd="sng" algn="ctr">
+                      <a:noFill/>
+                    </a:lnL>
+                    <a:lnR w="0" cap="flat" cmpd="sng" algn="ctr">
+                      <a:noFill/>
+                    </a:lnR>
+                    <a:lnT w="0" cap="flat" cmpd="sng" algn="ctr">
+                      <a:noFill/>
+                    </a:lnT>
+                    <a:lnB w="0" cap="flat" cmpd="sng" algn="ctr">
+                      <a:noFill/>
+                    </a:lnB>
+                  </a:tcPr>
+                </a:tc>
+                <a:tc>
+                  <a:txBody>
+                    <a:bodyPr/>
+                    <a:lstStyle/>
+                    <a:p>
+                      <a:pPr algn="r" indent="0" marL="0">
+                        <a:buNone/>
+                      </a:pPr>
+                      <a:r>
+                        <a:rPr lang="en-US" sz="1100" b="1" dirty="0">
+                          <a:solidFill>
+                            <a:srgbClr val="111111"/>
+                          </a:solidFill>
+                          <a:latin typeface="Arial" pitchFamily="34" charset="0"/>
+                          <a:ea typeface="Arial" pitchFamily="34" charset="-122"/>
+                          <a:cs typeface="Arial" pitchFamily="34" charset="-120"/>
+                        </a:rPr>
+                        <a:t>0.80243</a:t>
+                      </a:r>
+                      <a:endParaRPr lang="en-US" sz="1100" dirty="0">
+                        <a:latin typeface="Arial" charset="0"/>
+                        <a:ea typeface="Arial" charset="0"/>
+                        <a:cs typeface="Arial" charset="0"/>
+                      </a:endParaRPr>
+                    </a:p>
+                  </a:txBody>
+                  <a:tcPr marL="38100" marR="38100" marT="12700" marB="12700">
+                    <a:lnL w="0" cap="flat" cmpd="sng" algn="ctr">
+                      <a:noFill/>
+                    </a:lnL>
+                    <a:lnR w="0" cap="flat" cmpd="sng" algn="ctr">
+                      <a:noFill/>
+                    </a:lnR>
+                    <a:lnT w="0" cap="flat" cmpd="sng" algn="ctr">
+                      <a:noFill/>
+                    </a:lnT>
+                    <a:lnB w="0" cap="flat" cmpd="sng" algn="ctr">
+                      <a:noFill/>
+                    </a:lnB>
+                  </a:tcPr>
+                </a:tc>
+                <a:tc>
+                  <a:txBody>
+                    <a:bodyPr/>
+                    <a:lstStyle/>
+                    <a:p>
+                      <a:pPr algn="r" indent="0" marL="0">
+                        <a:buNone/>
+                      </a:pPr>
+                      <a:r>
+                        <a:rPr lang="en-US" sz="1100" dirty="0">
+                          <a:solidFill>
+                            <a:srgbClr val="111111"/>
+                          </a:solidFill>
+                          <a:latin typeface="Arial" pitchFamily="34" charset="0"/>
+                          <a:ea typeface="Arial" pitchFamily="34" charset="-122"/>
+                          <a:cs typeface="Arial" pitchFamily="34" charset="-120"/>
+                        </a:rPr>
+                        <a:t>0.77084</a:t>
+                      </a:r>
+                      <a:endParaRPr lang="en-US" sz="1100" dirty="0">
+                        <a:latin typeface="Arial" charset="0"/>
+                        <a:ea typeface="Arial" charset="0"/>
+                        <a:cs typeface="Arial" charset="0"/>
+                      </a:endParaRPr>
+                    </a:p>
+                  </a:txBody>
+                  <a:tcPr marL="38100" marR="38100" marT="12700" marB="12700">
+                    <a:lnL w="0" cap="flat" cmpd="sng" algn="ctr">
+                      <a:noFill/>
+                    </a:lnL>
+                    <a:lnR w="0" cap="flat" cmpd="sng" algn="ctr">
+                      <a:noFill/>
+                    </a:lnR>
+                    <a:lnT w="0" cap="flat" cmpd="sng" algn="ctr">
+                      <a:noFill/>
+                    </a:lnT>
+                    <a:lnB w="0" cap="flat" cmpd="sng" algn="ctr">
+                      <a:noFill/>
+                    </a:lnB>
+                  </a:tcPr>
+                </a:tc>
+                <a:tc>
+                  <a:txBody>
+                    <a:bodyPr/>
+                    <a:lstStyle/>
+                    <a:p>
+                      <a:pPr algn="r" indent="0" marL="0">
+                        <a:buNone/>
+                      </a:pPr>
+                      <a:r>
+                        <a:rPr lang="en-US" sz="1100" dirty="0">
+                          <a:solidFill>
+                            <a:srgbClr val="111111"/>
+                          </a:solidFill>
+                          <a:latin typeface="Arial" pitchFamily="34" charset="0"/>
+                          <a:ea typeface="Arial" pitchFamily="34" charset="-122"/>
+                          <a:cs typeface="Arial" pitchFamily="34" charset="-120"/>
+                        </a:rPr>
+                        <a:t>0.80217</a:t>
+                      </a:r>
+                      <a:endParaRPr lang="en-US" sz="1100" dirty="0">
+                        <a:latin typeface="Arial" charset="0"/>
+                        <a:ea typeface="Arial" charset="0"/>
+                        <a:cs typeface="Arial" charset="0"/>
+                      </a:endParaRPr>
+                    </a:p>
+                  </a:txBody>
+                  <a:tcPr marL="38100" marR="38100" marT="12700" marB="12700">
+                    <a:lnL w="0" cap="flat" cmpd="sng" algn="ctr">
+                      <a:noFill/>
+                    </a:lnL>
+                    <a:lnR w="0" cap="flat" cmpd="sng" algn="ctr">
+                      <a:noFill/>
+                    </a:lnR>
+                    <a:lnT w="0" cap="flat" cmpd="sng" algn="ctr">
+                      <a:noFill/>
+                    </a:lnT>
+                    <a:lnB w="0" cap="flat" cmpd="sng" algn="ctr">
+                      <a:noFill/>
+                    </a:lnB>
+                  </a:tcPr>
+                </a:tc>
+              </a:tr>
+              <a:tr h="224028">
+                <a:tc>
+                  <a:txBody>
+                    <a:bodyPr/>
+                    <a:lstStyle/>
+                    <a:p>
+                      <a:pPr indent="0" marL="0">
+                        <a:buNone/>
+                      </a:pPr>
+                      <a:r>
+                        <a:rPr lang="en-US" sz="1100" dirty="0">
+                          <a:solidFill>
+                            <a:srgbClr val="111111"/>
+                          </a:solidFill>
+                          <a:latin typeface="Arial" pitchFamily="34" charset="0"/>
+                          <a:ea typeface="Arial" pitchFamily="34" charset="-122"/>
+                          <a:cs typeface="Arial" pitchFamily="34" charset="-120"/>
+                        </a:rPr>
+                        <a:t>conway</a:t>
+                      </a:r>
+                      <a:endParaRPr lang="en-US" sz="1100" dirty="0">
+                        <a:latin typeface="Arial" charset="0"/>
+                        <a:ea typeface="Arial" charset="0"/>
+                        <a:cs typeface="Arial" charset="0"/>
+                      </a:endParaRPr>
+                    </a:p>
+                  </a:txBody>
+                  <a:tcPr marL="38100" marR="38100" marT="12700" marB="12700">
+                    <a:lnL w="0" cap="flat" cmpd="sng" algn="ctr">
+                      <a:noFill/>
+                    </a:lnL>
+                    <a:lnR w="0" cap="flat" cmpd="sng" algn="ctr">
+                      <a:noFill/>
+                    </a:lnR>
+                    <a:lnT w="0" cap="flat" cmpd="sng" algn="ctr">
+                      <a:noFill/>
+                    </a:lnT>
+                    <a:lnB w="0" cap="flat" cmpd="sng" algn="ctr">
+                      <a:noFill/>
+                    </a:lnB>
+                  </a:tcPr>
+                </a:tc>
+                <a:tc>
+                  <a:txBody>
+                    <a:bodyPr/>
+                    <a:lstStyle/>
+                    <a:p>
+                      <a:pPr indent="0" marL="0">
+                        <a:buNone/>
+                      </a:pPr>
+                      <a:r>
+                        <a:rPr lang="en-US" sz="1100" dirty="0">
+                          <a:solidFill>
+                            <a:srgbClr val="111111"/>
+                          </a:solidFill>
+                          <a:latin typeface="Arial" pitchFamily="34" charset="0"/>
+                          <a:ea typeface="Arial" pitchFamily="34" charset="-122"/>
+                          <a:cs typeface="Arial" pitchFamily="34" charset="-120"/>
+                        </a:rPr>
+                        <a:t>MAE ↓</a:t>
+                      </a:r>
+                      <a:endParaRPr lang="en-US" sz="1100" dirty="0">
+                        <a:latin typeface="Arial" charset="0"/>
+                        <a:ea typeface="Arial" charset="0"/>
+                        <a:cs typeface="Arial" charset="0"/>
+                      </a:endParaRPr>
+                    </a:p>
+                  </a:txBody>
+                  <a:tcPr marL="38100" marR="38100" marT="12700" marB="12700">
+                    <a:lnL w="0" cap="flat" cmpd="sng" algn="ctr">
+                      <a:noFill/>
+                    </a:lnL>
+                    <a:lnR w="0" cap="flat" cmpd="sng" algn="ctr">
+                      <a:noFill/>
+                    </a:lnR>
+                    <a:lnT w="0" cap="flat" cmpd="sng" algn="ctr">
+                      <a:noFill/>
+                    </a:lnT>
+                    <a:lnB w="0" cap="flat" cmpd="sng" algn="ctr">
+                      <a:noFill/>
+                    </a:lnB>
+                  </a:tcPr>
+                </a:tc>
+                <a:tc>
+                  <a:txBody>
+                    <a:bodyPr/>
+                    <a:lstStyle/>
+                    <a:p>
+                      <a:pPr algn="r" indent="0" marL="0">
+                        <a:buNone/>
+                      </a:pPr>
+                      <a:r>
+                        <a:rPr lang="en-US" sz="1100" b="1" dirty="0">
+                          <a:solidFill>
+                            <a:srgbClr val="111111"/>
+                          </a:solidFill>
+                          <a:latin typeface="Arial" pitchFamily="34" charset="0"/>
+                          <a:ea typeface="Arial" pitchFamily="34" charset="-122"/>
+                          <a:cs typeface="Arial" pitchFamily="34" charset="-120"/>
+                        </a:rPr>
+                        <a:t>0.10414</a:t>
+                      </a:r>
+                      <a:endParaRPr lang="en-US" sz="1100" dirty="0">
+                        <a:latin typeface="Arial" charset="0"/>
+                        <a:ea typeface="Arial" charset="0"/>
+                        <a:cs typeface="Arial" charset="0"/>
+                      </a:endParaRPr>
+                    </a:p>
+                  </a:txBody>
+                  <a:tcPr marL="38100" marR="38100" marT="12700" marB="12700">
+                    <a:lnL w="0" cap="flat" cmpd="sng" algn="ctr">
+                      <a:noFill/>
+                    </a:lnL>
+                    <a:lnR w="0" cap="flat" cmpd="sng" algn="ctr">
+                      <a:noFill/>
+                    </a:lnR>
+                    <a:lnT w="0" cap="flat" cmpd="sng" algn="ctr">
+                      <a:noFill/>
+                    </a:lnT>
+                    <a:lnB w="0" cap="flat" cmpd="sng" algn="ctr">
+                      <a:noFill/>
+                    </a:lnB>
+                  </a:tcPr>
+                </a:tc>
+                <a:tc>
+                  <a:txBody>
+                    <a:bodyPr/>
+                    <a:lstStyle/>
+                    <a:p>
+                      <a:pPr algn="r" indent="0" marL="0">
+                        <a:buNone/>
+                      </a:pPr>
+                      <a:r>
+                        <a:rPr lang="en-US" sz="1100" dirty="0">
+                          <a:solidFill>
+                            <a:srgbClr val="111111"/>
+                          </a:solidFill>
+                          <a:latin typeface="Arial" pitchFamily="34" charset="0"/>
+                          <a:ea typeface="Arial" pitchFamily="34" charset="-122"/>
+                          <a:cs typeface="Arial" pitchFamily="34" charset="-120"/>
+                        </a:rPr>
+                        <a:t>0.11189</a:t>
+                      </a:r>
+                      <a:endParaRPr lang="en-US" sz="1100" dirty="0">
+                        <a:latin typeface="Arial" charset="0"/>
+                        <a:ea typeface="Arial" charset="0"/>
+                        <a:cs typeface="Arial" charset="0"/>
+                      </a:endParaRPr>
+                    </a:p>
+                  </a:txBody>
+                  <a:tcPr marL="38100" marR="38100" marT="12700" marB="12700">
+                    <a:lnL w="0" cap="flat" cmpd="sng" algn="ctr">
+                      <a:noFill/>
+                    </a:lnL>
+                    <a:lnR w="0" cap="flat" cmpd="sng" algn="ctr">
+                      <a:noFill/>
+                    </a:lnR>
+                    <a:lnT w="0" cap="flat" cmpd="sng" algn="ctr">
+                      <a:noFill/>
+                    </a:lnT>
+                    <a:lnB w="0" cap="flat" cmpd="sng" algn="ctr">
+                      <a:noFill/>
+                    </a:lnB>
+                  </a:tcPr>
+                </a:tc>
+                <a:tc>
+                  <a:txBody>
+                    <a:bodyPr/>
+                    <a:lstStyle/>
+                    <a:p>
+                      <a:pPr algn="r" indent="0" marL="0">
+                        <a:buNone/>
+                      </a:pPr>
+                      <a:r>
+                        <a:rPr lang="en-US" sz="1100" dirty="0">
+                          <a:solidFill>
+                            <a:srgbClr val="111111"/>
+                          </a:solidFill>
+                          <a:latin typeface="Arial" pitchFamily="34" charset="0"/>
+                          <a:ea typeface="Arial" pitchFamily="34" charset="-122"/>
+                          <a:cs typeface="Arial" pitchFamily="34" charset="-120"/>
+                        </a:rPr>
+                        <a:t>0.11065</a:t>
+                      </a:r>
+                      <a:endParaRPr lang="en-US" sz="1100" dirty="0">
+                        <a:latin typeface="Arial" charset="0"/>
+                        <a:ea typeface="Arial" charset="0"/>
+                        <a:cs typeface="Arial" charset="0"/>
+                      </a:endParaRPr>
+                    </a:p>
+                  </a:txBody>
+                  <a:tcPr marL="38100" marR="38100" marT="12700" marB="12700">
+                    <a:lnL w="0" cap="flat" cmpd="sng" algn="ctr">
+                      <a:noFill/>
+                    </a:lnL>
+                    <a:lnR w="0" cap="flat" cmpd="sng" algn="ctr">
+                      <a:noFill/>
+                    </a:lnR>
+                    <a:lnT w="0" cap="flat" cmpd="sng" algn="ctr">
+                      <a:noFill/>
+                    </a:lnT>
+                    <a:lnB w="0" cap="flat" cmpd="sng" algn="ctr">
+                      <a:noFill/>
+                    </a:lnB>
+                  </a:tcPr>
+                </a:tc>
+              </a:tr>
+              <a:tr h="224028">
+                <a:tc>
+                  <a:txBody>
+                    <a:bodyPr/>
+                    <a:lstStyle/>
+                    <a:p>
+                      <a:pPr indent="0" marL="0">
+                        <a:buNone/>
+                      </a:pPr>
+                      <a:r>
+                        <a:rPr lang="en-US" sz="1100" dirty="0">
+                          <a:solidFill>
+                            <a:srgbClr val="111111"/>
+                          </a:solidFill>
+                          <a:latin typeface="Arial" pitchFamily="34" charset="0"/>
+                          <a:ea typeface="Arial" pitchFamily="34" charset="-122"/>
+                          <a:cs typeface="Arial" pitchFamily="34" charset="-120"/>
+                        </a:rPr>
+                        <a:t>tps-aug-2022</a:t>
+                      </a:r>
+                      <a:endParaRPr lang="en-US" sz="1100" dirty="0">
+                        <a:latin typeface="Arial" charset="0"/>
+                        <a:ea typeface="Arial" charset="0"/>
+                        <a:cs typeface="Arial" charset="0"/>
+                      </a:endParaRPr>
+                    </a:p>
+                  </a:txBody>
+                  <a:tcPr marL="38100" marR="38100" marT="12700" marB="12700">
+                    <a:lnL w="0" cap="flat" cmpd="sng" algn="ctr">
+                      <a:noFill/>
+                    </a:lnL>
+                    <a:lnR w="0" cap="flat" cmpd="sng" algn="ctr">
+                      <a:noFill/>
+                    </a:lnR>
+                    <a:lnT w="0" cap="flat" cmpd="sng" algn="ctr">
+                      <a:noFill/>
+                    </a:lnT>
+                    <a:lnB w="0" cap="flat" cmpd="sng" algn="ctr">
+                      <a:noFill/>
+                    </a:lnB>
+                  </a:tcPr>
+                </a:tc>
+                <a:tc>
+                  <a:txBody>
+                    <a:bodyPr/>
+                    <a:lstStyle/>
+                    <a:p>
+                      <a:pPr indent="0" marL="0">
+                        <a:buNone/>
+                      </a:pPr>
+                      <a:r>
+                        <a:rPr lang="en-US" sz="1100" dirty="0">
+                          <a:solidFill>
+                            <a:srgbClr val="111111"/>
+                          </a:solidFill>
+                          <a:latin typeface="Arial" pitchFamily="34" charset="0"/>
+                          <a:ea typeface="Arial" pitchFamily="34" charset="-122"/>
+                          <a:cs typeface="Arial" pitchFamily="34" charset="-120"/>
+                        </a:rPr>
+                        <a:t>AUC ↑</a:t>
+                      </a:r>
+                      <a:endParaRPr lang="en-US" sz="1100" dirty="0">
+                        <a:latin typeface="Arial" charset="0"/>
+                        <a:ea typeface="Arial" charset="0"/>
+                        <a:cs typeface="Arial" charset="0"/>
+                      </a:endParaRPr>
+                    </a:p>
+                  </a:txBody>
+                  <a:tcPr marL="38100" marR="38100" marT="12700" marB="12700">
+                    <a:lnL w="0" cap="flat" cmpd="sng" algn="ctr">
+                      <a:noFill/>
+                    </a:lnL>
+                    <a:lnR w="0" cap="flat" cmpd="sng" algn="ctr">
+                      <a:noFill/>
+                    </a:lnR>
+                    <a:lnT w="0" cap="flat" cmpd="sng" algn="ctr">
+                      <a:noFill/>
+                    </a:lnT>
+                    <a:lnB w="0" cap="flat" cmpd="sng" algn="ctr">
+                      <a:noFill/>
+                    </a:lnB>
+                  </a:tcPr>
+                </a:tc>
+                <a:tc>
+                  <a:txBody>
+                    <a:bodyPr/>
+                    <a:lstStyle/>
+                    <a:p>
+                      <a:pPr algn="r" indent="0" marL="0">
+                        <a:buNone/>
+                      </a:pPr>
+                      <a:r>
+                        <a:rPr lang="en-US" sz="1100" dirty="0">
+                          <a:solidFill>
+                            <a:srgbClr val="111111"/>
+                          </a:solidFill>
+                          <a:latin typeface="Arial" pitchFamily="34" charset="0"/>
+                          <a:ea typeface="Arial" pitchFamily="34" charset="-122"/>
+                          <a:cs typeface="Arial" pitchFamily="34" charset="-120"/>
+                        </a:rPr>
+                        <a:t>0.58930</a:t>
+                      </a:r>
+                      <a:endParaRPr lang="en-US" sz="1100" dirty="0">
+                        <a:latin typeface="Arial" charset="0"/>
+                        <a:ea typeface="Arial" charset="0"/>
+                        <a:cs typeface="Arial" charset="0"/>
+                      </a:endParaRPr>
+                    </a:p>
+                  </a:txBody>
+                  <a:tcPr marL="38100" marR="38100" marT="12700" marB="12700">
+                    <a:lnL w="0" cap="flat" cmpd="sng" algn="ctr">
+                      <a:noFill/>
+                    </a:lnL>
+                    <a:lnR w="0" cap="flat" cmpd="sng" algn="ctr">
+                      <a:noFill/>
+                    </a:lnR>
+                    <a:lnT w="0" cap="flat" cmpd="sng" algn="ctr">
+                      <a:noFill/>
+                    </a:lnT>
+                    <a:lnB w="0" cap="flat" cmpd="sng" algn="ctr">
+                      <a:noFill/>
+                    </a:lnB>
+                  </a:tcPr>
+                </a:tc>
+                <a:tc>
+                  <a:txBody>
+                    <a:bodyPr/>
+                    <a:lstStyle/>
+                    <a:p>
+                      <a:pPr algn="r" indent="0" marL="0">
+                        <a:buNone/>
+                      </a:pPr>
+                      <a:r>
+                        <a:rPr lang="en-US" sz="1100" dirty="0">
+                          <a:solidFill>
+                            <a:srgbClr val="111111"/>
+                          </a:solidFill>
+                          <a:latin typeface="Arial" pitchFamily="34" charset="0"/>
+                          <a:ea typeface="Arial" pitchFamily="34" charset="-122"/>
+                          <a:cs typeface="Arial" pitchFamily="34" charset="-120"/>
+                        </a:rPr>
+                        <a:t>0.58730</a:t>
+                      </a:r>
+                      <a:endParaRPr lang="en-US" sz="1100" dirty="0">
+                        <a:latin typeface="Arial" charset="0"/>
+                        <a:ea typeface="Arial" charset="0"/>
+                        <a:cs typeface="Arial" charset="0"/>
+                      </a:endParaRPr>
+                    </a:p>
+                  </a:txBody>
+                  <a:tcPr marL="38100" marR="38100" marT="12700" marB="12700">
+                    <a:lnL w="0" cap="flat" cmpd="sng" algn="ctr">
+                      <a:noFill/>
+                    </a:lnL>
+                    <a:lnR w="0" cap="flat" cmpd="sng" algn="ctr">
+                      <a:noFill/>
+                    </a:lnR>
+                    <a:lnT w="0" cap="flat" cmpd="sng" algn="ctr">
+                      <a:noFill/>
+                    </a:lnT>
+                    <a:lnB w="0" cap="flat" cmpd="sng" algn="ctr">
+                      <a:noFill/>
+                    </a:lnB>
+                  </a:tcPr>
+                </a:tc>
+                <a:tc>
+                  <a:txBody>
+                    <a:bodyPr/>
+                    <a:lstStyle/>
+                    <a:p>
+                      <a:pPr algn="r" indent="0" marL="0">
+                        <a:buNone/>
+                      </a:pPr>
+                      <a:r>
+                        <a:rPr lang="en-US" sz="1100" b="1" dirty="0">
+                          <a:solidFill>
+                            <a:srgbClr val="111111"/>
+                          </a:solidFill>
+                          <a:latin typeface="Arial" pitchFamily="34" charset="0"/>
+                          <a:ea typeface="Arial" pitchFamily="34" charset="-122"/>
+                          <a:cs typeface="Arial" pitchFamily="34" charset="-120"/>
+                        </a:rPr>
+                        <a:t>0.59106</a:t>
+                      </a:r>
+                      <a:endParaRPr lang="en-US" sz="1100" dirty="0">
+                        <a:latin typeface="Arial" charset="0"/>
+                        <a:ea typeface="Arial" charset="0"/>
+                        <a:cs typeface="Arial" charset="0"/>
+                      </a:endParaRPr>
+                    </a:p>
+                  </a:txBody>
+                  <a:tcPr marL="38100" marR="38100" marT="12700" marB="12700">
+                    <a:lnL w="0" cap="flat" cmpd="sng" algn="ctr">
+                      <a:noFill/>
+                    </a:lnL>
+                    <a:lnR w="0" cap="flat" cmpd="sng" algn="ctr">
+                      <a:noFill/>
+                    </a:lnR>
+                    <a:lnT w="0" cap="flat" cmpd="sng" algn="ctr">
+                      <a:noFill/>
+                    </a:lnT>
+                    <a:lnB w="0" cap="flat" cmpd="sng" algn="ctr">
+                      <a:noFill/>
+                    </a:lnB>
+                  </a:tcPr>
+                </a:tc>
+              </a:tr>
+              <a:tr h="224028">
+                <a:tc>
+                  <a:txBody>
+                    <a:bodyPr/>
+                    <a:lstStyle/>
+                    <a:p>
+                      <a:pPr indent="0" marL="0">
+                        <a:buNone/>
+                      </a:pPr>
+                      <a:r>
+                        <a:rPr lang="en-US" sz="1100" dirty="0">
+                          <a:solidFill>
+                            <a:srgbClr val="111111"/>
+                          </a:solidFill>
+                          <a:latin typeface="Arial" pitchFamily="34" charset="0"/>
+                          <a:ea typeface="Arial" pitchFamily="34" charset="-122"/>
+                          <a:cs typeface="Arial" pitchFamily="34" charset="-120"/>
+                        </a:rPr>
+                        <a:t>tps-jan-2022</a:t>
+                      </a:r>
+                      <a:endParaRPr lang="en-US" sz="1100" dirty="0">
+                        <a:latin typeface="Arial" charset="0"/>
+                        <a:ea typeface="Arial" charset="0"/>
+                        <a:cs typeface="Arial" charset="0"/>
+                      </a:endParaRPr>
+                    </a:p>
+                  </a:txBody>
+                  <a:tcPr marL="38100" marR="38100" marT="12700" marB="12700">
+                    <a:lnL w="0" cap="flat" cmpd="sng" algn="ctr">
+                      <a:noFill/>
+                    </a:lnL>
+                    <a:lnR w="0" cap="flat" cmpd="sng" algn="ctr">
+                      <a:noFill/>
+                    </a:lnR>
+                    <a:lnT w="0" cap="flat" cmpd="sng" algn="ctr">
+                      <a:noFill/>
+                    </a:lnT>
+                    <a:lnB w="0" cap="flat" cmpd="sng" algn="ctr">
+                      <a:noFill/>
+                    </a:lnB>
+                  </a:tcPr>
+                </a:tc>
+                <a:tc>
+                  <a:txBody>
+                    <a:bodyPr/>
+                    <a:lstStyle/>
+                    <a:p>
+                      <a:pPr indent="0" marL="0">
+                        <a:buNone/>
+                      </a:pPr>
+                      <a:r>
+                        <a:rPr lang="en-US" sz="1100" dirty="0">
+                          <a:solidFill>
+                            <a:srgbClr val="111111"/>
+                          </a:solidFill>
+                          <a:latin typeface="Arial" pitchFamily="34" charset="0"/>
+                          <a:ea typeface="Arial" pitchFamily="34" charset="-122"/>
+                          <a:cs typeface="Arial" pitchFamily="34" charset="-120"/>
+                        </a:rPr>
+                        <a:t>SMAPE ↓</a:t>
+                      </a:r>
+                      <a:endParaRPr lang="en-US" sz="1100" dirty="0">
+                        <a:latin typeface="Arial" charset="0"/>
+                        <a:ea typeface="Arial" charset="0"/>
+                        <a:cs typeface="Arial" charset="0"/>
+                      </a:endParaRPr>
+                    </a:p>
+                  </a:txBody>
+                  <a:tcPr marL="38100" marR="38100" marT="12700" marB="12700">
+                    <a:lnL w="0" cap="flat" cmpd="sng" algn="ctr">
+                      <a:noFill/>
+                    </a:lnL>
+                    <a:lnR w="0" cap="flat" cmpd="sng" algn="ctr">
+                      <a:noFill/>
+                    </a:lnR>
+                    <a:lnT w="0" cap="flat" cmpd="sng" algn="ctr">
+                      <a:noFill/>
+                    </a:lnT>
+                    <a:lnB w="0" cap="flat" cmpd="sng" algn="ctr">
+                      <a:noFill/>
+                    </a:lnB>
+                  </a:tcPr>
+                </a:tc>
+                <a:tc>
+                  <a:txBody>
+                    <a:bodyPr/>
+                    <a:lstStyle/>
+                    <a:p>
+                      <a:pPr algn="r" indent="0" marL="0">
+                        <a:buNone/>
+                      </a:pPr>
+                      <a:r>
+                        <a:rPr lang="en-US" sz="1100" dirty="0">
+                          <a:solidFill>
+                            <a:srgbClr val="111111"/>
+                          </a:solidFill>
+                          <a:latin typeface="Arial" pitchFamily="34" charset="0"/>
+                          <a:ea typeface="Arial" pitchFamily="34" charset="-122"/>
+                          <a:cs typeface="Arial" pitchFamily="34" charset="-120"/>
+                        </a:rPr>
+                        <a:t>6.29895</a:t>
+                      </a:r>
+                      <a:endParaRPr lang="en-US" sz="1100" dirty="0">
+                        <a:latin typeface="Arial" charset="0"/>
+                        <a:ea typeface="Arial" charset="0"/>
+                        <a:cs typeface="Arial" charset="0"/>
+                      </a:endParaRPr>
+                    </a:p>
+                  </a:txBody>
+                  <a:tcPr marL="38100" marR="38100" marT="12700" marB="12700">
+                    <a:lnL w="0" cap="flat" cmpd="sng" algn="ctr">
+                      <a:noFill/>
+                    </a:lnL>
+                    <a:lnR w="0" cap="flat" cmpd="sng" algn="ctr">
+                      <a:noFill/>
+                    </a:lnR>
+                    <a:lnT w="0" cap="flat" cmpd="sng" algn="ctr">
+                      <a:noFill/>
+                    </a:lnT>
+                    <a:lnB w="0" cap="flat" cmpd="sng" algn="ctr">
+                      <a:noFill/>
+                    </a:lnB>
+                  </a:tcPr>
+                </a:tc>
+                <a:tc>
+                  <a:txBody>
+                    <a:bodyPr/>
+                    <a:lstStyle/>
+                    <a:p>
+                      <a:pPr algn="r" indent="0" marL="0">
+                        <a:buNone/>
+                      </a:pPr>
+                      <a:r>
+                        <a:rPr lang="en-US" sz="1100" b="1" dirty="0">
+                          <a:solidFill>
+                            <a:srgbClr val="111111"/>
+                          </a:solidFill>
+                          <a:latin typeface="Arial" pitchFamily="34" charset="0"/>
+                          <a:ea typeface="Arial" pitchFamily="34" charset="-122"/>
+                          <a:cs typeface="Arial" pitchFamily="34" charset="-120"/>
+                        </a:rPr>
+                        <a:t>4.63651</a:t>
+                      </a:r>
+                      <a:endParaRPr lang="en-US" sz="1100" dirty="0">
+                        <a:latin typeface="Arial" charset="0"/>
+                        <a:ea typeface="Arial" charset="0"/>
+                        <a:cs typeface="Arial" charset="0"/>
+                      </a:endParaRPr>
+                    </a:p>
+                  </a:txBody>
+                  <a:tcPr marL="38100" marR="38100" marT="12700" marB="12700">
+                    <a:lnL w="0" cap="flat" cmpd="sng" algn="ctr">
+                      <a:noFill/>
+                    </a:lnL>
+                    <a:lnR w="0" cap="flat" cmpd="sng" algn="ctr">
+                      <a:noFill/>
+                    </a:lnR>
+                    <a:lnT w="0" cap="flat" cmpd="sng" algn="ctr">
+                      <a:noFill/>
+                    </a:lnT>
+                    <a:lnB w="0" cap="flat" cmpd="sng" algn="ctr">
+                      <a:noFill/>
+                    </a:lnB>
+                  </a:tcPr>
+                </a:tc>
+                <a:tc>
+                  <a:txBody>
+                    <a:bodyPr/>
+                    <a:lstStyle/>
+                    <a:p>
+                      <a:pPr algn="r" indent="0" marL="0">
+                        <a:buNone/>
+                      </a:pPr>
+                      <a:r>
+                        <a:rPr lang="en-US" sz="1100" dirty="0">
+                          <a:solidFill>
+                            <a:srgbClr val="111111"/>
+                          </a:solidFill>
+                          <a:latin typeface="Arial" pitchFamily="34" charset="0"/>
+                          <a:ea typeface="Arial" pitchFamily="34" charset="-122"/>
+                          <a:cs typeface="Arial" pitchFamily="34" charset="-120"/>
+                        </a:rPr>
+                        <a:t>10.6664</a:t>
+                      </a:r>
+                      <a:endParaRPr lang="en-US" sz="1100" dirty="0">
+                        <a:latin typeface="Arial" charset="0"/>
+                        <a:ea typeface="Arial" charset="0"/>
+                        <a:cs typeface="Arial" charset="0"/>
+                      </a:endParaRPr>
+                    </a:p>
+                  </a:txBody>
+                  <a:tcPr marL="38100" marR="38100" marT="12700" marB="12700">
+                    <a:lnL w="0" cap="flat" cmpd="sng" algn="ctr">
+                      <a:noFill/>
+                    </a:lnL>
+                    <a:lnR w="0" cap="flat" cmpd="sng" algn="ctr">
+                      <a:noFill/>
+                    </a:lnR>
+                    <a:lnT w="0" cap="flat" cmpd="sng" algn="ctr">
+                      <a:noFill/>
+                    </a:lnT>
+                    <a:lnB w="0" cap="flat" cmpd="sng" algn="ctr">
+                      <a:noFill/>
+                    </a:lnB>
+                  </a:tcPr>
+                </a:tc>
+              </a:tr>
+              <a:tr h="224028">
+                <a:tc>
+                  <a:txBody>
+                    <a:bodyPr/>
+                    <a:lstStyle/>
+                    <a:p>
+                      <a:pPr indent="0" marL="0">
+                        <a:buNone/>
+                      </a:pPr>
+                      <a:r>
+                        <a:rPr lang="en-US" sz="1100" dirty="0">
+                          <a:solidFill>
+                            <a:srgbClr val="111111"/>
+                          </a:solidFill>
+                          <a:latin typeface="Arial" pitchFamily="34" charset="0"/>
+                          <a:ea typeface="Arial" pitchFamily="34" charset="-122"/>
+                          <a:cs typeface="Arial" pitchFamily="34" charset="-120"/>
+                        </a:rPr>
+                        <a:t>tps-sep-2022</a:t>
+                      </a:r>
+                      <a:endParaRPr lang="en-US" sz="1100" dirty="0">
+                        <a:latin typeface="Arial" charset="0"/>
+                        <a:ea typeface="Arial" charset="0"/>
+                        <a:cs typeface="Arial" charset="0"/>
+                      </a:endParaRPr>
+                    </a:p>
+                  </a:txBody>
+                  <a:tcPr marL="38100" marR="38100" marT="12700" marB="12700">
+                    <a:lnL w="0" cap="flat" cmpd="sng" algn="ctr">
+                      <a:noFill/>
+                    </a:lnL>
+                    <a:lnR w="0" cap="flat" cmpd="sng" algn="ctr">
+                      <a:noFill/>
+                    </a:lnR>
+                    <a:lnT w="0" cap="flat" cmpd="sng" algn="ctr">
+                      <a:noFill/>
+                    </a:lnT>
+                    <a:lnB w="0" cap="flat" cmpd="sng" algn="ctr">
+                      <a:noFill/>
+                    </a:lnB>
+                  </a:tcPr>
+                </a:tc>
+                <a:tc>
+                  <a:txBody>
+                    <a:bodyPr/>
+                    <a:lstStyle/>
+                    <a:p>
+                      <a:pPr indent="0" marL="0">
+                        <a:buNone/>
+                      </a:pPr>
+                      <a:r>
+                        <a:rPr lang="en-US" sz="1100" dirty="0">
+                          <a:solidFill>
+                            <a:srgbClr val="111111"/>
+                          </a:solidFill>
+                          <a:latin typeface="Arial" pitchFamily="34" charset="0"/>
+                          <a:ea typeface="Arial" pitchFamily="34" charset="-122"/>
+                          <a:cs typeface="Arial" pitchFamily="34" charset="-120"/>
+                        </a:rPr>
+                        <a:t>SMAPE ↓</a:t>
+                      </a:r>
+                      <a:endParaRPr lang="en-US" sz="1100" dirty="0">
+                        <a:latin typeface="Arial" charset="0"/>
+                        <a:ea typeface="Arial" charset="0"/>
+                        <a:cs typeface="Arial" charset="0"/>
+                      </a:endParaRPr>
+                    </a:p>
+                  </a:txBody>
+                  <a:tcPr marL="38100" marR="38100" marT="12700" marB="12700">
+                    <a:lnL w="0" cap="flat" cmpd="sng" algn="ctr">
+                      <a:noFill/>
+                    </a:lnL>
+                    <a:lnR w="0" cap="flat" cmpd="sng" algn="ctr">
+                      <a:noFill/>
+                    </a:lnR>
+                    <a:lnT w="0" cap="flat" cmpd="sng" algn="ctr">
+                      <a:noFill/>
+                    </a:lnT>
+                    <a:lnB w="0" cap="flat" cmpd="sng" algn="ctr">
+                      <a:noFill/>
+                    </a:lnB>
+                  </a:tcPr>
+                </a:tc>
+                <a:tc>
+                  <a:txBody>
+                    <a:bodyPr/>
+                    <a:lstStyle/>
+                    <a:p>
+                      <a:pPr algn="r" indent="0" marL="0">
+                        <a:buNone/>
+                      </a:pPr>
+                      <a:r>
+                        <a:rPr lang="en-US" sz="1100" dirty="0">
+                          <a:solidFill>
+                            <a:srgbClr val="111111"/>
+                          </a:solidFill>
+                          <a:latin typeface="Arial" pitchFamily="34" charset="0"/>
+                          <a:ea typeface="Arial" pitchFamily="34" charset="-122"/>
+                          <a:cs typeface="Arial" pitchFamily="34" charset="-120"/>
+                        </a:rPr>
+                        <a:t>28.4961</a:t>
+                      </a:r>
+                      <a:endParaRPr lang="en-US" sz="1100" dirty="0">
+                        <a:latin typeface="Arial" charset="0"/>
+                        <a:ea typeface="Arial" charset="0"/>
+                        <a:cs typeface="Arial" charset="0"/>
+                      </a:endParaRPr>
+                    </a:p>
+                  </a:txBody>
+                  <a:tcPr marL="38100" marR="38100" marT="12700" marB="12700">
+                    <a:lnL w="0" cap="flat" cmpd="sng" algn="ctr">
+                      <a:noFill/>
+                    </a:lnL>
+                    <a:lnR w="0" cap="flat" cmpd="sng" algn="ctr">
+                      <a:noFill/>
+                    </a:lnR>
+                    <a:lnT w="0" cap="flat" cmpd="sng" algn="ctr">
+                      <a:noFill/>
+                    </a:lnT>
+                    <a:lnB w="0" cap="flat" cmpd="sng" algn="ctr">
+                      <a:noFill/>
+                    </a:lnB>
+                  </a:tcPr>
+                </a:tc>
+                <a:tc>
+                  <a:txBody>
+                    <a:bodyPr/>
+                    <a:lstStyle/>
+                    <a:p>
+                      <a:pPr algn="r" indent="0" marL="0">
+                        <a:buNone/>
+                      </a:pPr>
+                      <a:r>
+                        <a:rPr lang="en-US" sz="1100" b="1" dirty="0">
+                          <a:solidFill>
+                            <a:srgbClr val="111111"/>
+                          </a:solidFill>
+                          <a:latin typeface="Arial" pitchFamily="34" charset="0"/>
+                          <a:ea typeface="Arial" pitchFamily="34" charset="-122"/>
+                          <a:cs typeface="Arial" pitchFamily="34" charset="-120"/>
+                        </a:rPr>
+                        <a:t>5.48351</a:t>
+                      </a:r>
+                      <a:endParaRPr lang="en-US" sz="1100" dirty="0">
+                        <a:latin typeface="Arial" charset="0"/>
+                        <a:ea typeface="Arial" charset="0"/>
+                        <a:cs typeface="Arial" charset="0"/>
+                      </a:endParaRPr>
+                    </a:p>
+                  </a:txBody>
+                  <a:tcPr marL="38100" marR="38100" marT="12700" marB="12700">
+                    <a:lnL w="0" cap="flat" cmpd="sng" algn="ctr">
+                      <a:noFill/>
+                    </a:lnL>
+                    <a:lnR w="0" cap="flat" cmpd="sng" algn="ctr">
+                      <a:noFill/>
+                    </a:lnR>
+                    <a:lnT w="0" cap="flat" cmpd="sng" algn="ctr">
+                      <a:noFill/>
+                    </a:lnT>
+                    <a:lnB w="0" cap="flat" cmpd="sng" algn="ctr">
+                      <a:noFill/>
+                    </a:lnB>
+                  </a:tcPr>
+                </a:tc>
+                <a:tc>
+                  <a:txBody>
+                    <a:bodyPr/>
+                    <a:lstStyle/>
+                    <a:p>
+                      <a:pPr algn="r" indent="0" marL="0">
+                        <a:buNone/>
+                      </a:pPr>
+                      <a:r>
+                        <a:rPr lang="en-US" sz="1100" dirty="0">
+                          <a:solidFill>
+                            <a:srgbClr val="111111"/>
+                          </a:solidFill>
+                          <a:latin typeface="Arial" pitchFamily="34" charset="0"/>
+                          <a:ea typeface="Arial" pitchFamily="34" charset="-122"/>
+                          <a:cs typeface="Arial" pitchFamily="34" charset="-120"/>
+                        </a:rPr>
+                        <a:t>9.72095</a:t>
+                      </a:r>
+                      <a:endParaRPr lang="en-US" sz="1100" dirty="0">
+                        <a:latin typeface="Arial" charset="0"/>
+                        <a:ea typeface="Arial" charset="0"/>
+                        <a:cs typeface="Arial" charset="0"/>
+                      </a:endParaRPr>
+                    </a:p>
+                  </a:txBody>
+                  <a:tcPr marL="38100" marR="38100" marT="12700" marB="12700">
+                    <a:lnL w="0" cap="flat" cmpd="sng" algn="ctr">
+                      <a:noFill/>
+                    </a:lnL>
+                    <a:lnR w="0" cap="flat" cmpd="sng" algn="ctr">
+                      <a:noFill/>
+                    </a:lnR>
+                    <a:lnT w="0" cap="flat" cmpd="sng" algn="ctr">
+                      <a:noFill/>
+                    </a:lnT>
+                    <a:lnB w="0" cap="flat" cmpd="sng" algn="ctr">
+                      <a:noFill/>
+                    </a:lnB>
+                  </a:tcPr>
+                </a:tc>
+              </a:tr>
+              <a:tr h="224028">
+                <a:tc>
+                  <a:txBody>
+                    <a:bodyPr/>
+                    <a:lstStyle/>
+                    <a:p>
+                      <a:pPr indent="0" marL="0">
+                        <a:buNone/>
+                      </a:pPr>
+                      <a:r>
+                        <a:rPr lang="en-US" sz="1100" b="1" dirty="0">
+                          <a:solidFill>
+                            <a:srgbClr val="111111"/>
+                          </a:solidFill>
+                          <a:latin typeface="Arial" pitchFamily="34" charset="0"/>
+                          <a:ea typeface="Arial" pitchFamily="34" charset="-122"/>
+                          <a:cs typeface="Arial" pitchFamily="34" charset="-120"/>
+                        </a:rPr>
+                        <a:t>Best private score</a:t>
+                      </a:r>
+                      <a:endParaRPr lang="en-US" sz="1100" dirty="0">
+                        <a:latin typeface="Arial" charset="0"/>
+                        <a:ea typeface="Arial" charset="0"/>
+                        <a:cs typeface="Arial" charset="0"/>
+                      </a:endParaRPr>
+                    </a:p>
+                  </a:txBody>
+                  <a:tcPr marL="38100" marR="38100" marT="12700" marB="12700">
+                    <a:lnL w="0" cap="flat" cmpd="sng" algn="ctr">
+                      <a:noFill/>
+                    </a:lnL>
+                    <a:lnR w="0" cap="flat" cmpd="sng" algn="ctr">
+                      <a:noFill/>
+                    </a:lnR>
+                    <a:lnT w="0" cap="flat" cmpd="sng" algn="ctr">
+                      <a:noFill/>
+                    </a:lnT>
+                    <a:lnB w="0" cap="flat" cmpd="sng" algn="ctr">
+                      <a:noFill/>
+                    </a:lnB>
+                  </a:tcPr>
+                </a:tc>
+                <a:tc>
+                  <a:txBody>
+                    <a:bodyPr/>
+                    <a:lstStyle/>
+                    <a:p>
+                      <a:pPr indent="0" marL="0">
+                        <a:buNone/>
+                      </a:pPr>
+                      <a:endParaRPr lang="en-US" sz="1100" dirty="0">
+                        <a:latin typeface="Arial" charset="0"/>
+                        <a:ea typeface="Arial" charset="0"/>
+                        <a:cs typeface="Arial" charset="0"/>
+                      </a:endParaRPr>
+                    </a:p>
+                  </a:txBody>
+                  <a:tcPr marL="38100" marR="38100" marT="12700" marB="12700">
+                    <a:lnL w="0" cap="flat" cmpd="sng" algn="ctr">
+                      <a:noFill/>
+                    </a:lnL>
+                    <a:lnR w="0" cap="flat" cmpd="sng" algn="ctr">
+                      <a:noFill/>
+                    </a:lnR>
+                    <a:lnT w="0" cap="flat" cmpd="sng" algn="ctr">
+                      <a:noFill/>
+                    </a:lnT>
+                    <a:lnB w="0" cap="flat" cmpd="sng" algn="ctr">
+                      <a:noFill/>
+                    </a:lnB>
+                  </a:tcPr>
+                </a:tc>
+                <a:tc>
+                  <a:txBody>
+                    <a:bodyPr/>
+                    <a:lstStyle/>
+                    <a:p>
+                      <a:pPr algn="r" indent="0" marL="0">
+                        <a:buNone/>
+                      </a:pPr>
+                      <a:r>
+                        <a:rPr lang="en-US" sz="1100" b="1" dirty="0">
+                          <a:solidFill>
+                            <a:srgbClr val="111111"/>
+                          </a:solidFill>
+                          <a:latin typeface="Arial" pitchFamily="34" charset="0"/>
+                          <a:ea typeface="Arial" pitchFamily="34" charset="-122"/>
+                          <a:cs typeface="Arial" pitchFamily="34" charset="-120"/>
+                        </a:rPr>
+                        <a:t>10 / 20</a:t>
+                      </a:r>
+                      <a:endParaRPr lang="en-US" sz="1100" dirty="0">
+                        <a:latin typeface="Arial" charset="0"/>
+                        <a:ea typeface="Arial" charset="0"/>
+                        <a:cs typeface="Arial" charset="0"/>
+                      </a:endParaRPr>
+                    </a:p>
+                  </a:txBody>
+                  <a:tcPr marL="38100" marR="38100" marT="12700" marB="12700">
+                    <a:lnL w="0" cap="flat" cmpd="sng" algn="ctr">
+                      <a:noFill/>
+                    </a:lnL>
+                    <a:lnR w="0" cap="flat" cmpd="sng" algn="ctr">
+                      <a:noFill/>
+                    </a:lnR>
+                    <a:lnT w="0" cap="flat" cmpd="sng" algn="ctr">
+                      <a:noFill/>
+                    </a:lnT>
+                    <a:lnB w="0" cap="flat" cmpd="sng" algn="ctr">
+                      <a:noFill/>
+                    </a:lnB>
+                  </a:tcPr>
+                </a:tc>
+                <a:tc>
+                  <a:txBody>
+                    <a:bodyPr/>
+                    <a:lstStyle/>
+                    <a:p>
+                      <a:pPr algn="r" indent="0" marL="0">
+                        <a:buNone/>
+                      </a:pPr>
+                      <a:r>
+                        <a:rPr lang="en-US" sz="1100" dirty="0">
+                          <a:solidFill>
+                            <a:srgbClr val="111111"/>
+                          </a:solidFill>
+                          <a:latin typeface="Arial" pitchFamily="34" charset="0"/>
+                          <a:ea typeface="Arial" pitchFamily="34" charset="-122"/>
+                          <a:cs typeface="Arial" pitchFamily="34" charset="-120"/>
+                        </a:rPr>
+                        <a:t>7 / 20</a:t>
+                      </a:r>
+                      <a:endParaRPr lang="en-US" sz="1100" dirty="0">
+                        <a:latin typeface="Arial" charset="0"/>
+                        <a:ea typeface="Arial" charset="0"/>
+                        <a:cs typeface="Arial" charset="0"/>
+                      </a:endParaRPr>
+                    </a:p>
+                  </a:txBody>
+                  <a:tcPr marL="38100" marR="38100" marT="12700" marB="12700">
+                    <a:lnL w="0" cap="flat" cmpd="sng" algn="ctr">
+                      <a:noFill/>
+                    </a:lnL>
+                    <a:lnR w="0" cap="flat" cmpd="sng" algn="ctr">
+                      <a:noFill/>
+                    </a:lnR>
+                    <a:lnT w="0" cap="flat" cmpd="sng" algn="ctr">
+                      <a:noFill/>
+                    </a:lnT>
+                    <a:lnB w="0" cap="flat" cmpd="sng" algn="ctr">
+                      <a:noFill/>
+                    </a:lnB>
+                  </a:tcPr>
+                </a:tc>
+                <a:tc>
+                  <a:txBody>
+                    <a:bodyPr/>
+                    <a:lstStyle/>
+                    <a:p>
+                      <a:pPr algn="r" indent="0" marL="0">
+                        <a:buNone/>
+                      </a:pPr>
+                      <a:r>
+                        <a:rPr lang="en-US" sz="1100" dirty="0">
+                          <a:solidFill>
+                            <a:srgbClr val="111111"/>
+                          </a:solidFill>
+                          <a:latin typeface="Arial" pitchFamily="34" charset="0"/>
+                          <a:ea typeface="Arial" pitchFamily="34" charset="-122"/>
+                          <a:cs typeface="Arial" pitchFamily="34" charset="-120"/>
+                        </a:rPr>
+                        <a:t>3 / 20</a:t>
+                      </a:r>
+                      <a:endParaRPr lang="en-US" sz="1100" dirty="0">
+                        <a:latin typeface="Arial" charset="0"/>
+                        <a:ea typeface="Arial" charset="0"/>
+                        <a:cs typeface="Arial" charset="0"/>
+                      </a:endParaRPr>
+                    </a:p>
+                  </a:txBody>
+                  <a:tcPr marL="38100" marR="38100" marT="12700" marB="12700">
+                    <a:lnL w="0" cap="flat" cmpd="sng" algn="ctr">
+                      <a:noFill/>
+                    </a:lnL>
+                    <a:lnR w="0" cap="flat" cmpd="sng" algn="ctr">
+                      <a:noFill/>
+                    </a:lnR>
+                    <a:lnT w="0" cap="flat" cmpd="sng" algn="ctr">
+                      <a:noFill/>
+                    </a:lnT>
+                    <a:lnB w="0" cap="flat" cmpd="sng" algn="ctr">
+                      <a:noFill/>
+                    </a:lnB>
+                  </a:tcPr>
+                </a:tc>
+              </a:tr>
+            </a:tbl>
+          </a:graphicData>
+        </a:graphic>
+      </p:graphicFrame>
       <p:sp>
         <p:nvSpPr>
-          <p:cNvPr id="4" name="Text 2"/>
+          <p:cNvPr id="5" name="Text 2"/>
           <p:cNvSpPr/>
           <p:nvPr/>
         </p:nvSpPr>
         <p:spPr>
           <a:xfrm>
-            <a:off x="658368" y="1874520"/>
-            <a:ext cx="10881360" cy="502920"/>
+            <a:off x="658368" y="6428232"/>
+            <a:ext cx="6766560" cy="274320"/>
           </a:xfrm>
           <a:prstGeom prst="rect">
             <a:avLst/>
@@ -2160,44 +7167,44 @@
               <a:buNone/>
             </a:pPr>
             <a:r>
-              <a:rPr lang="en-US" sz="1700" b="1" dirty="0">
+              <a:rPr lang="en-US" sz="1100" b="1" dirty="0">
                 <a:solidFill>
-                  <a:srgbClr val="111111"/>
+                  <a:srgbClr val="5A5F66"/>
                 </a:solidFill>
                 <a:latin typeface="Arial" pitchFamily="34" charset="0"/>
                 <a:ea typeface="Arial" pitchFamily="34" charset="-122"/>
                 <a:cs typeface="Arial" pitchFamily="34" charset="-120"/>
               </a:rPr>
-              <a:t>Sinica leads: 16 wins / 8 losses (66.7% of its decided duels)</a:t>
+              <a:t>Bold</a:t>
             </a:r>
             <a:pPr indent="0" marL="0">
               <a:buNone/>
             </a:pPr>
             <a:r>
-              <a:rPr lang="en-US" sz="1700" dirty="0">
+              <a:rPr lang="en-US" sz="1100" dirty="0">
                 <a:solidFill>
-                  <a:srgbClr val="111111"/>
+                  <a:srgbClr val="5A5F66"/>
                 </a:solidFill>
                 <a:latin typeface="Arial" pitchFamily="34" charset="0"/>
                 <a:ea typeface="Arial" pitchFamily="34" charset="-122"/>
                 <a:cs typeface="Arial" pitchFamily="34" charset="-120"/>
               </a:rPr>
-              <a:t> against 42.3% for each frozen reference agent.</a:t>
+              <a:t> = best of the three; reference agents AIDE [1], NVIDIA [3].</a:t>
             </a:r>
-            <a:endParaRPr lang="en-US" sz="1700" dirty="0"/>
+            <a:endParaRPr lang="en-US" sz="1100" dirty="0"/>
           </a:p>
         </p:txBody>
       </p:sp>
       <p:sp>
         <p:nvSpPr>
-          <p:cNvPr id="5" name="Text 3"/>
+          <p:cNvPr id="6" name="Text 3"/>
           <p:cNvSpPr/>
           <p:nvPr/>
         </p:nvSpPr>
         <p:spPr>
           <a:xfrm>
-            <a:off x="658368" y="2606040"/>
-            <a:ext cx="10881360" cy="365760"/>
+            <a:off x="7635240" y="960120"/>
+            <a:ext cx="4160520" cy="292608"/>
           </a:xfrm>
           <a:prstGeom prst="rect">
             <a:avLst/>
@@ -2213,7 +7220,7 @@
               <a:buNone/>
             </a:pPr>
             <a:r>
-              <a:rPr lang="en-US" sz="1700" b="1" dirty="0">
+              <a:rPr lang="en-US" sz="1400" b="1" dirty="0">
                 <a:solidFill>
                   <a:srgbClr val="111111"/>
                 </a:solidFill>
@@ -2221,22 +7228,883 @@
                 <a:ea typeface="Arial" pitchFamily="34" charset="-122"/>
                 <a:cs typeface="Arial" pitchFamily="34" charset="-120"/>
               </a:rPr>
-              <a:t>Head-to-head best private score</a:t>
+              <a:t>Table 2: special competitions</a:t>
             </a:r>
-            <a:endParaRPr lang="en-US" sz="1700" dirty="0"/>
+            <a:endParaRPr lang="en-US" sz="1400" dirty="0"/>
           </a:p>
         </p:txBody>
       </p:sp>
+      <p:graphicFrame>
+        <p:nvGraphicFramePr>
+          <p:cNvPr id="9" name="Table 1"/>
+          <p:cNvGraphicFramePr>
+            <a:graphicFrameLocks noGrp="1"/>
+          </p:cNvGraphicFramePr>
+          <p:nvPr>
+            <p:extLst>
+              <p:ext uri="{D42A27DB-BD31-4B8C-83A1-F6EECF244321}">
+                <p14:modId xmlns:p14="http://schemas.microsoft.com/office/powerpoint/2010/main" val="1579011935"/>
+              </p:ext>
+            </p:extLst>
+          </p:nvPr>
+        </p:nvGraphicFramePr>
+        <p:xfrm>
+          <a:off x="7635240" y="1280160"/>
+          <a:ext cx="4160520" cy="914400"/>
+        </p:xfrm>
+        <a:graphic>
+          <a:graphicData uri="http://schemas.openxmlformats.org/drawingml/2006/table">
+            <a:tbl>
+              <a:tblPr/>
+              <a:tblGrid>
+                <a:gridCol w="1188720"/>
+                <a:gridCol w="932688"/>
+                <a:gridCol w="713232"/>
+                <a:gridCol w="713232"/>
+                <a:gridCol w="612648"/>
+              </a:tblGrid>
+              <a:tr h="237744">
+                <a:tc>
+                  <a:txBody>
+                    <a:bodyPr/>
+                    <a:lstStyle/>
+                    <a:p>
+                      <a:pPr indent="0" marL="0">
+                        <a:buNone/>
+                      </a:pPr>
+                      <a:r>
+                        <a:rPr lang="en-US" sz="1000" b="1" dirty="0">
+                          <a:solidFill>
+                            <a:srgbClr val="111111"/>
+                          </a:solidFill>
+                          <a:latin typeface="Arial" pitchFamily="34" charset="0"/>
+                          <a:ea typeface="Arial" pitchFamily="34" charset="-122"/>
+                          <a:cs typeface="Arial" pitchFamily="34" charset="-120"/>
+                        </a:rPr>
+                        <a:t>Competition</a:t>
+                      </a:r>
+                      <a:endParaRPr lang="en-US" sz="1000" dirty="0">
+                        <a:latin typeface="Arial" charset="0"/>
+                        <a:ea typeface="Arial" charset="0"/>
+                        <a:cs typeface="Arial" charset="0"/>
+                      </a:endParaRPr>
+                    </a:p>
+                  </a:txBody>
+                  <a:tcPr marL="38100" marR="38100" marT="12700" marB="12700">
+                    <a:lnL w="0" cap="flat" cmpd="sng" algn="ctr">
+                      <a:noFill/>
+                    </a:lnL>
+                    <a:lnR w="0" cap="flat" cmpd="sng" algn="ctr">
+                      <a:noFill/>
+                    </a:lnR>
+                    <a:lnT w="0" cap="flat" cmpd="sng" algn="ctr">
+                      <a:noFill/>
+                    </a:lnT>
+                    <a:lnB w="0" cap="flat" cmpd="sng" algn="ctr">
+                      <a:noFill/>
+                    </a:lnB>
+                  </a:tcPr>
+                </a:tc>
+                <a:tc>
+                  <a:txBody>
+                    <a:bodyPr/>
+                    <a:lstStyle/>
+                    <a:p>
+                      <a:pPr indent="0" marL="0">
+                        <a:buNone/>
+                      </a:pPr>
+                      <a:r>
+                        <a:rPr lang="en-US" sz="1000" b="1" dirty="0">
+                          <a:solidFill>
+                            <a:srgbClr val="111111"/>
+                          </a:solidFill>
+                          <a:latin typeface="Arial" pitchFamily="34" charset="0"/>
+                          <a:ea typeface="Arial" pitchFamily="34" charset="-122"/>
+                          <a:cs typeface="Arial" pitchFamily="34" charset="-120"/>
+                        </a:rPr>
+                        <a:t>Metric</a:t>
+                      </a:r>
+                      <a:endParaRPr lang="en-US" sz="1000" dirty="0">
+                        <a:latin typeface="Arial" charset="0"/>
+                        <a:ea typeface="Arial" charset="0"/>
+                        <a:cs typeface="Arial" charset="0"/>
+                      </a:endParaRPr>
+                    </a:p>
+                  </a:txBody>
+                  <a:tcPr marL="38100" marR="38100" marT="12700" marB="12700">
+                    <a:lnL w="0" cap="flat" cmpd="sng" algn="ctr">
+                      <a:noFill/>
+                    </a:lnL>
+                    <a:lnR w="0" cap="flat" cmpd="sng" algn="ctr">
+                      <a:noFill/>
+                    </a:lnR>
+                    <a:lnT w="0" cap="flat" cmpd="sng" algn="ctr">
+                      <a:noFill/>
+                    </a:lnT>
+                    <a:lnB w="0" cap="flat" cmpd="sng" algn="ctr">
+                      <a:noFill/>
+                    </a:lnB>
+                  </a:tcPr>
+                </a:tc>
+                <a:tc>
+                  <a:txBody>
+                    <a:bodyPr/>
+                    <a:lstStyle/>
+                    <a:p>
+                      <a:pPr algn="r" indent="0" marL="0">
+                        <a:buNone/>
+                      </a:pPr>
+                      <a:r>
+                        <a:rPr lang="en-US" sz="1000" b="1" dirty="0">
+                          <a:solidFill>
+                            <a:srgbClr val="111111"/>
+                          </a:solidFill>
+                          <a:latin typeface="Arial" pitchFamily="34" charset="0"/>
+                          <a:ea typeface="Arial" pitchFamily="34" charset="-122"/>
+                          <a:cs typeface="Arial" pitchFamily="34" charset="-120"/>
+                        </a:rPr>
+                        <a:t>Sinica</a:t>
+                      </a:r>
+                      <a:endParaRPr lang="en-US" sz="1000" dirty="0">
+                        <a:latin typeface="Arial" charset="0"/>
+                        <a:ea typeface="Arial" charset="0"/>
+                        <a:cs typeface="Arial" charset="0"/>
+                      </a:endParaRPr>
+                    </a:p>
+                  </a:txBody>
+                  <a:tcPr marL="38100" marR="38100" marT="12700" marB="12700">
+                    <a:lnL w="0" cap="flat" cmpd="sng" algn="ctr">
+                      <a:noFill/>
+                    </a:lnL>
+                    <a:lnR w="0" cap="flat" cmpd="sng" algn="ctr">
+                      <a:noFill/>
+                    </a:lnR>
+                    <a:lnT w="0" cap="flat" cmpd="sng" algn="ctr">
+                      <a:noFill/>
+                    </a:lnT>
+                    <a:lnB w="0" cap="flat" cmpd="sng" algn="ctr">
+                      <a:noFill/>
+                    </a:lnB>
+                  </a:tcPr>
+                </a:tc>
+                <a:tc>
+                  <a:txBody>
+                    <a:bodyPr/>
+                    <a:lstStyle/>
+                    <a:p>
+                      <a:pPr algn="r" indent="0" marL="0">
+                        <a:buNone/>
+                      </a:pPr>
+                      <a:r>
+                        <a:rPr lang="en-US" sz="1000" b="1" dirty="0">
+                          <a:solidFill>
+                            <a:srgbClr val="111111"/>
+                          </a:solidFill>
+                          <a:latin typeface="Arial" pitchFamily="34" charset="0"/>
+                          <a:ea typeface="Arial" pitchFamily="34" charset="-122"/>
+                          <a:cs typeface="Arial" pitchFamily="34" charset="-120"/>
+                        </a:rPr>
+                        <a:t>NVIDIA</a:t>
+                      </a:r>
+                      <a:endParaRPr lang="en-US" sz="1000" dirty="0">
+                        <a:latin typeface="Arial" charset="0"/>
+                        <a:ea typeface="Arial" charset="0"/>
+                        <a:cs typeface="Arial" charset="0"/>
+                      </a:endParaRPr>
+                    </a:p>
+                  </a:txBody>
+                  <a:tcPr marL="38100" marR="38100" marT="12700" marB="12700">
+                    <a:lnL w="0" cap="flat" cmpd="sng" algn="ctr">
+                      <a:noFill/>
+                    </a:lnL>
+                    <a:lnR w="0" cap="flat" cmpd="sng" algn="ctr">
+                      <a:noFill/>
+                    </a:lnR>
+                    <a:lnT w="0" cap="flat" cmpd="sng" algn="ctr">
+                      <a:noFill/>
+                    </a:lnT>
+                    <a:lnB w="0" cap="flat" cmpd="sng" algn="ctr">
+                      <a:noFill/>
+                    </a:lnB>
+                  </a:tcPr>
+                </a:tc>
+                <a:tc>
+                  <a:txBody>
+                    <a:bodyPr/>
+                    <a:lstStyle/>
+                    <a:p>
+                      <a:pPr algn="r" indent="0" marL="0">
+                        <a:buNone/>
+                      </a:pPr>
+                      <a:r>
+                        <a:rPr lang="en-US" sz="1000" b="1" dirty="0">
+                          <a:solidFill>
+                            <a:srgbClr val="111111"/>
+                          </a:solidFill>
+                          <a:latin typeface="Arial" pitchFamily="34" charset="0"/>
+                          <a:ea typeface="Arial" pitchFamily="34" charset="-122"/>
+                          <a:cs typeface="Arial" pitchFamily="34" charset="-120"/>
+                        </a:rPr>
+                        <a:t>AIDE</a:t>
+                      </a:r>
+                      <a:endParaRPr lang="en-US" sz="1000" dirty="0">
+                        <a:latin typeface="Arial" charset="0"/>
+                        <a:ea typeface="Arial" charset="0"/>
+                        <a:cs typeface="Arial" charset="0"/>
+                      </a:endParaRPr>
+                    </a:p>
+                  </a:txBody>
+                  <a:tcPr marL="38100" marR="38100" marT="12700" marB="12700">
+                    <a:lnL w="0" cap="flat" cmpd="sng" algn="ctr">
+                      <a:noFill/>
+                    </a:lnL>
+                    <a:lnR w="0" cap="flat" cmpd="sng" algn="ctr">
+                      <a:noFill/>
+                    </a:lnR>
+                    <a:lnT w="0" cap="flat" cmpd="sng" algn="ctr">
+                      <a:noFill/>
+                    </a:lnT>
+                    <a:lnB w="0" cap="flat" cmpd="sng" algn="ctr">
+                      <a:noFill/>
+                    </a:lnB>
+                  </a:tcPr>
+                </a:tc>
+              </a:tr>
+              <a:tr h="237744">
+                <a:tc>
+                  <a:txBody>
+                    <a:bodyPr/>
+                    <a:lstStyle/>
+                    <a:p>
+                      <a:pPr indent="0" marL="0">
+                        <a:buNone/>
+                      </a:pPr>
+                      <a:r>
+                        <a:rPr lang="en-US" sz="1000" dirty="0">
+                          <a:solidFill>
+                            <a:srgbClr val="111111"/>
+                          </a:solidFill>
+                          <a:latin typeface="Arial" pitchFamily="34" charset="0"/>
+                          <a:ea typeface="Arial" pitchFamily="34" charset="-122"/>
+                          <a:cs typeface="Arial" pitchFamily="34" charset="-120"/>
+                        </a:rPr>
+                        <a:t>us-patent</a:t>
+                      </a:r>
+                      <a:endParaRPr lang="en-US" sz="1000" dirty="0">
+                        <a:latin typeface="Arial" charset="0"/>
+                        <a:ea typeface="Arial" charset="0"/>
+                        <a:cs typeface="Arial" charset="0"/>
+                      </a:endParaRPr>
+                    </a:p>
+                  </a:txBody>
+                  <a:tcPr marL="38100" marR="38100" marT="12700" marB="12700">
+                    <a:lnL w="0" cap="flat" cmpd="sng" algn="ctr">
+                      <a:noFill/>
+                    </a:lnL>
+                    <a:lnR w="0" cap="flat" cmpd="sng" algn="ctr">
+                      <a:noFill/>
+                    </a:lnR>
+                    <a:lnT w="0" cap="flat" cmpd="sng" algn="ctr">
+                      <a:noFill/>
+                    </a:lnT>
+                    <a:lnB w="0" cap="flat" cmpd="sng" algn="ctr">
+                      <a:noFill/>
+                    </a:lnB>
+                  </a:tcPr>
+                </a:tc>
+                <a:tc>
+                  <a:txBody>
+                    <a:bodyPr/>
+                    <a:lstStyle/>
+                    <a:p>
+                      <a:pPr indent="0" marL="0">
+                        <a:buNone/>
+                      </a:pPr>
+                      <a:r>
+                        <a:rPr lang="en-US" sz="1000" dirty="0">
+                          <a:solidFill>
+                            <a:srgbClr val="111111"/>
+                          </a:solidFill>
+                          <a:latin typeface="Arial" pitchFamily="34" charset="0"/>
+                          <a:ea typeface="Arial" pitchFamily="34" charset="-122"/>
+                          <a:cs typeface="Arial" pitchFamily="34" charset="-120"/>
+                        </a:rPr>
+                        <a:t>Pearson r ↑</a:t>
+                      </a:r>
+                      <a:endParaRPr lang="en-US" sz="1000" dirty="0">
+                        <a:latin typeface="Arial" charset="0"/>
+                        <a:ea typeface="Arial" charset="0"/>
+                        <a:cs typeface="Arial" charset="0"/>
+                      </a:endParaRPr>
+                    </a:p>
+                  </a:txBody>
+                  <a:tcPr marL="38100" marR="38100" marT="12700" marB="12700">
+                    <a:lnL w="0" cap="flat" cmpd="sng" algn="ctr">
+                      <a:noFill/>
+                    </a:lnL>
+                    <a:lnR w="0" cap="flat" cmpd="sng" algn="ctr">
+                      <a:noFill/>
+                    </a:lnR>
+                    <a:lnT w="0" cap="flat" cmpd="sng" algn="ctr">
+                      <a:noFill/>
+                    </a:lnT>
+                    <a:lnB w="0" cap="flat" cmpd="sng" algn="ctr">
+                      <a:noFill/>
+                    </a:lnB>
+                  </a:tcPr>
+                </a:tc>
+                <a:tc>
+                  <a:txBody>
+                    <a:bodyPr/>
+                    <a:lstStyle/>
+                    <a:p>
+                      <a:pPr algn="r" indent="0" marL="0">
+                        <a:buNone/>
+                      </a:pPr>
+                      <a:r>
+                        <a:rPr lang="en-US" sz="1000" b="1" dirty="0">
+                          <a:solidFill>
+                            <a:srgbClr val="111111"/>
+                          </a:solidFill>
+                          <a:latin typeface="Arial" pitchFamily="34" charset="0"/>
+                          <a:ea typeface="Arial" pitchFamily="34" charset="-122"/>
+                          <a:cs typeface="Arial" pitchFamily="34" charset="-120"/>
+                        </a:rPr>
+                        <a:t>0.86658</a:t>
+                      </a:r>
+                      <a:endParaRPr lang="en-US" sz="1000" dirty="0">
+                        <a:latin typeface="Arial" charset="0"/>
+                        <a:ea typeface="Arial" charset="0"/>
+                        <a:cs typeface="Arial" charset="0"/>
+                      </a:endParaRPr>
+                    </a:p>
+                  </a:txBody>
+                  <a:tcPr marL="38100" marR="38100" marT="12700" marB="12700">
+                    <a:lnL w="0" cap="flat" cmpd="sng" algn="ctr">
+                      <a:noFill/>
+                    </a:lnL>
+                    <a:lnR w="0" cap="flat" cmpd="sng" algn="ctr">
+                      <a:noFill/>
+                    </a:lnR>
+                    <a:lnT w="0" cap="flat" cmpd="sng" algn="ctr">
+                      <a:noFill/>
+                    </a:lnT>
+                    <a:lnB w="0" cap="flat" cmpd="sng" algn="ctr">
+                      <a:noFill/>
+                    </a:lnB>
+                  </a:tcPr>
+                </a:tc>
+                <a:tc>
+                  <a:txBody>
+                    <a:bodyPr/>
+                    <a:lstStyle/>
+                    <a:p>
+                      <a:pPr algn="r" indent="0" marL="0">
+                        <a:buNone/>
+                      </a:pPr>
+                      <a:r>
+                        <a:rPr lang="en-US" sz="1000" dirty="0">
+                          <a:solidFill>
+                            <a:srgbClr val="111111"/>
+                          </a:solidFill>
+                          <a:latin typeface="Arial" pitchFamily="34" charset="0"/>
+                          <a:ea typeface="Arial" pitchFamily="34" charset="-122"/>
+                          <a:cs typeface="Arial" pitchFamily="34" charset="-120"/>
+                        </a:rPr>
+                        <a:t>0.86160</a:t>
+                      </a:r>
+                      <a:endParaRPr lang="en-US" sz="1000" dirty="0">
+                        <a:latin typeface="Arial" charset="0"/>
+                        <a:ea typeface="Arial" charset="0"/>
+                        <a:cs typeface="Arial" charset="0"/>
+                      </a:endParaRPr>
+                    </a:p>
+                  </a:txBody>
+                  <a:tcPr marL="38100" marR="38100" marT="12700" marB="12700">
+                    <a:lnL w="0" cap="flat" cmpd="sng" algn="ctr">
+                      <a:noFill/>
+                    </a:lnL>
+                    <a:lnR w="0" cap="flat" cmpd="sng" algn="ctr">
+                      <a:noFill/>
+                    </a:lnR>
+                    <a:lnT w="0" cap="flat" cmpd="sng" algn="ctr">
+                      <a:noFill/>
+                    </a:lnT>
+                    <a:lnB w="0" cap="flat" cmpd="sng" algn="ctr">
+                      <a:noFill/>
+                    </a:lnB>
+                  </a:tcPr>
+                </a:tc>
+                <a:tc>
+                  <a:txBody>
+                    <a:bodyPr/>
+                    <a:lstStyle/>
+                    <a:p>
+                      <a:pPr algn="r" indent="0" marL="0">
+                        <a:buNone/>
+                      </a:pPr>
+                      <a:r>
+                        <a:rPr lang="en-US" sz="1000" dirty="0">
+                          <a:solidFill>
+                            <a:srgbClr val="111111"/>
+                          </a:solidFill>
+                          <a:latin typeface="Arial" pitchFamily="34" charset="0"/>
+                          <a:ea typeface="Arial" pitchFamily="34" charset="-122"/>
+                          <a:cs typeface="Arial" pitchFamily="34" charset="-120"/>
+                        </a:rPr>
+                        <a:t>0.65821</a:t>
+                      </a:r>
+                      <a:endParaRPr lang="en-US" sz="1000" dirty="0">
+                        <a:latin typeface="Arial" charset="0"/>
+                        <a:ea typeface="Arial" charset="0"/>
+                        <a:cs typeface="Arial" charset="0"/>
+                      </a:endParaRPr>
+                    </a:p>
+                  </a:txBody>
+                  <a:tcPr marL="38100" marR="38100" marT="12700" marB="12700">
+                    <a:lnL w="0" cap="flat" cmpd="sng" algn="ctr">
+                      <a:noFill/>
+                    </a:lnL>
+                    <a:lnR w="0" cap="flat" cmpd="sng" algn="ctr">
+                      <a:noFill/>
+                    </a:lnR>
+                    <a:lnT w="0" cap="flat" cmpd="sng" algn="ctr">
+                      <a:noFill/>
+                    </a:lnT>
+                    <a:lnB w="0" cap="flat" cmpd="sng" algn="ctr">
+                      <a:noFill/>
+                    </a:lnB>
+                  </a:tcPr>
+                </a:tc>
+              </a:tr>
+              <a:tr h="237744">
+                <a:tc>
+                  <a:txBody>
+                    <a:bodyPr/>
+                    <a:lstStyle/>
+                    <a:p>
+                      <a:pPr indent="0" marL="0">
+                        <a:buNone/>
+                      </a:pPr>
+                      <a:r>
+                        <a:rPr lang="en-US" sz="1000" dirty="0">
+                          <a:solidFill>
+                            <a:srgbClr val="111111"/>
+                          </a:solidFill>
+                          <a:latin typeface="Arial" pitchFamily="34" charset="0"/>
+                          <a:ea typeface="Arial" pitchFamily="34" charset="-122"/>
+                          <a:cs typeface="Arial" pitchFamily="34" charset="-120"/>
+                        </a:rPr>
+                        <a:t>ventilator</a:t>
+                      </a:r>
+                      <a:endParaRPr lang="en-US" sz="1000" dirty="0">
+                        <a:latin typeface="Arial" charset="0"/>
+                        <a:ea typeface="Arial" charset="0"/>
+                        <a:cs typeface="Arial" charset="0"/>
+                      </a:endParaRPr>
+                    </a:p>
+                  </a:txBody>
+                  <a:tcPr marL="38100" marR="38100" marT="12700" marB="12700">
+                    <a:lnL w="0" cap="flat" cmpd="sng" algn="ctr">
+                      <a:noFill/>
+                    </a:lnL>
+                    <a:lnR w="0" cap="flat" cmpd="sng" algn="ctr">
+                      <a:noFill/>
+                    </a:lnR>
+                    <a:lnT w="0" cap="flat" cmpd="sng" algn="ctr">
+                      <a:noFill/>
+                    </a:lnT>
+                    <a:lnB w="0" cap="flat" cmpd="sng" algn="ctr">
+                      <a:noFill/>
+                    </a:lnB>
+                  </a:tcPr>
+                </a:tc>
+                <a:tc>
+                  <a:txBody>
+                    <a:bodyPr/>
+                    <a:lstStyle/>
+                    <a:p>
+                      <a:pPr indent="0" marL="0">
+                        <a:buNone/>
+                      </a:pPr>
+                      <a:r>
+                        <a:rPr lang="en-US" sz="1000" dirty="0">
+                          <a:solidFill>
+                            <a:srgbClr val="111111"/>
+                          </a:solidFill>
+                          <a:latin typeface="Arial" pitchFamily="34" charset="0"/>
+                          <a:ea typeface="Arial" pitchFamily="34" charset="-122"/>
+                          <a:cs typeface="Arial" pitchFamily="34" charset="-120"/>
+                        </a:rPr>
+                        <a:t>MAE ↓</a:t>
+                      </a:r>
+                      <a:endParaRPr lang="en-US" sz="1000" dirty="0">
+                        <a:latin typeface="Arial" charset="0"/>
+                        <a:ea typeface="Arial" charset="0"/>
+                        <a:cs typeface="Arial" charset="0"/>
+                      </a:endParaRPr>
+                    </a:p>
+                  </a:txBody>
+                  <a:tcPr marL="38100" marR="38100" marT="12700" marB="12700">
+                    <a:lnL w="0" cap="flat" cmpd="sng" algn="ctr">
+                      <a:noFill/>
+                    </a:lnL>
+                    <a:lnR w="0" cap="flat" cmpd="sng" algn="ctr">
+                      <a:noFill/>
+                    </a:lnR>
+                    <a:lnT w="0" cap="flat" cmpd="sng" algn="ctr">
+                      <a:noFill/>
+                    </a:lnT>
+                    <a:lnB w="0" cap="flat" cmpd="sng" algn="ctr">
+                      <a:noFill/>
+                    </a:lnB>
+                  </a:tcPr>
+                </a:tc>
+                <a:tc>
+                  <a:txBody>
+                    <a:bodyPr/>
+                    <a:lstStyle/>
+                    <a:p>
+                      <a:pPr algn="r" indent="0" marL="0">
+                        <a:buNone/>
+                      </a:pPr>
+                      <a:r>
+                        <a:rPr lang="en-US" sz="1000" b="1" dirty="0">
+                          <a:solidFill>
+                            <a:srgbClr val="111111"/>
+                          </a:solidFill>
+                          <a:latin typeface="Arial" pitchFamily="34" charset="0"/>
+                          <a:ea typeface="Arial" pitchFamily="34" charset="-122"/>
+                          <a:cs typeface="Arial" pitchFamily="34" charset="-120"/>
+                        </a:rPr>
+                        <a:t>0.16525</a:t>
+                      </a:r>
+                      <a:endParaRPr lang="en-US" sz="1000" dirty="0">
+                        <a:latin typeface="Arial" charset="0"/>
+                        <a:ea typeface="Arial" charset="0"/>
+                        <a:cs typeface="Arial" charset="0"/>
+                      </a:endParaRPr>
+                    </a:p>
+                  </a:txBody>
+                  <a:tcPr marL="38100" marR="38100" marT="12700" marB="12700">
+                    <a:lnL w="0" cap="flat" cmpd="sng" algn="ctr">
+                      <a:noFill/>
+                    </a:lnL>
+                    <a:lnR w="0" cap="flat" cmpd="sng" algn="ctr">
+                      <a:noFill/>
+                    </a:lnR>
+                    <a:lnT w="0" cap="flat" cmpd="sng" algn="ctr">
+                      <a:noFill/>
+                    </a:lnT>
+                    <a:lnB w="0" cap="flat" cmpd="sng" algn="ctr">
+                      <a:noFill/>
+                    </a:lnB>
+                  </a:tcPr>
+                </a:tc>
+                <a:tc>
+                  <a:txBody>
+                    <a:bodyPr/>
+                    <a:lstStyle/>
+                    <a:p>
+                      <a:pPr algn="r" indent="0" marL="0">
+                        <a:buNone/>
+                      </a:pPr>
+                      <a:r>
+                        <a:rPr lang="en-US" sz="1000" dirty="0">
+                          <a:solidFill>
+                            <a:srgbClr val="111111"/>
+                          </a:solidFill>
+                          <a:latin typeface="Arial" pitchFamily="34" charset="0"/>
+                          <a:ea typeface="Arial" pitchFamily="34" charset="-122"/>
+                          <a:cs typeface="Arial" pitchFamily="34" charset="-120"/>
+                        </a:rPr>
+                        <a:t>0.40093</a:t>
+                      </a:r>
+                      <a:endParaRPr lang="en-US" sz="1000" dirty="0">
+                        <a:latin typeface="Arial" charset="0"/>
+                        <a:ea typeface="Arial" charset="0"/>
+                        <a:cs typeface="Arial" charset="0"/>
+                      </a:endParaRPr>
+                    </a:p>
+                  </a:txBody>
+                  <a:tcPr marL="38100" marR="38100" marT="12700" marB="12700">
+                    <a:lnL w="0" cap="flat" cmpd="sng" algn="ctr">
+                      <a:noFill/>
+                    </a:lnL>
+                    <a:lnR w="0" cap="flat" cmpd="sng" algn="ctr">
+                      <a:noFill/>
+                    </a:lnR>
+                    <a:lnT w="0" cap="flat" cmpd="sng" algn="ctr">
+                      <a:noFill/>
+                    </a:lnT>
+                    <a:lnB w="0" cap="flat" cmpd="sng" algn="ctr">
+                      <a:noFill/>
+                    </a:lnB>
+                  </a:tcPr>
+                </a:tc>
+                <a:tc>
+                  <a:txBody>
+                    <a:bodyPr/>
+                    <a:lstStyle/>
+                    <a:p>
+                      <a:pPr algn="r" indent="0" marL="0">
+                        <a:buNone/>
+                      </a:pPr>
+                      <a:r>
+                        <a:rPr lang="en-US" sz="1000" dirty="0">
+                          <a:solidFill>
+                            <a:srgbClr val="111111"/>
+                          </a:solidFill>
+                          <a:latin typeface="Arial" pitchFamily="34" charset="0"/>
+                          <a:ea typeface="Arial" pitchFamily="34" charset="-122"/>
+                          <a:cs typeface="Arial" pitchFamily="34" charset="-120"/>
+                        </a:rPr>
+                        <a:t>0.34591</a:t>
+                      </a:r>
+                      <a:endParaRPr lang="en-US" sz="1000" dirty="0">
+                        <a:latin typeface="Arial" charset="0"/>
+                        <a:ea typeface="Arial" charset="0"/>
+                        <a:cs typeface="Arial" charset="0"/>
+                      </a:endParaRPr>
+                    </a:p>
+                  </a:txBody>
+                  <a:tcPr marL="38100" marR="38100" marT="12700" marB="12700">
+                    <a:lnL w="0" cap="flat" cmpd="sng" algn="ctr">
+                      <a:noFill/>
+                    </a:lnL>
+                    <a:lnR w="0" cap="flat" cmpd="sng" algn="ctr">
+                      <a:noFill/>
+                    </a:lnR>
+                    <a:lnT w="0" cap="flat" cmpd="sng" algn="ctr">
+                      <a:noFill/>
+                    </a:lnT>
+                    <a:lnB w="0" cap="flat" cmpd="sng" algn="ctr">
+                      <a:noFill/>
+                    </a:lnB>
+                  </a:tcPr>
+                </a:tc>
+              </a:tr>
+              <a:tr h="237744">
+                <a:tc>
+                  <a:txBody>
+                    <a:bodyPr/>
+                    <a:lstStyle/>
+                    <a:p>
+                      <a:pPr indent="0" marL="0">
+                        <a:buNone/>
+                      </a:pPr>
+                      <a:r>
+                        <a:rPr lang="en-US" sz="1000" dirty="0">
+                          <a:solidFill>
+                            <a:srgbClr val="111111"/>
+                          </a:solidFill>
+                          <a:latin typeface="Arial" pitchFamily="34" charset="0"/>
+                          <a:ea typeface="Arial" pitchFamily="34" charset="-122"/>
+                          <a:cs typeface="Arial" pitchFamily="34" charset="-120"/>
+                        </a:rPr>
+                        <a:t>SIIM-ISIC</a:t>
+                      </a:r>
+                      <a:endParaRPr lang="en-US" sz="1000" dirty="0">
+                        <a:latin typeface="Arial" charset="0"/>
+                        <a:ea typeface="Arial" charset="0"/>
+                        <a:cs typeface="Arial" charset="0"/>
+                      </a:endParaRPr>
+                    </a:p>
+                  </a:txBody>
+                  <a:tcPr marL="38100" marR="38100" marT="12700" marB="12700">
+                    <a:lnL w="0" cap="flat" cmpd="sng" algn="ctr">
+                      <a:noFill/>
+                    </a:lnL>
+                    <a:lnR w="0" cap="flat" cmpd="sng" algn="ctr">
+                      <a:noFill/>
+                    </a:lnR>
+                    <a:lnT w="0" cap="flat" cmpd="sng" algn="ctr">
+                      <a:noFill/>
+                    </a:lnT>
+                    <a:lnB w="0" cap="flat" cmpd="sng" algn="ctr">
+                      <a:noFill/>
+                    </a:lnB>
+                  </a:tcPr>
+                </a:tc>
+                <a:tc>
+                  <a:txBody>
+                    <a:bodyPr/>
+                    <a:lstStyle/>
+                    <a:p>
+                      <a:pPr indent="0" marL="0">
+                        <a:buNone/>
+                      </a:pPr>
+                      <a:r>
+                        <a:rPr lang="en-US" sz="1000" dirty="0">
+                          <a:solidFill>
+                            <a:srgbClr val="111111"/>
+                          </a:solidFill>
+                          <a:latin typeface="Arial" pitchFamily="34" charset="0"/>
+                          <a:ea typeface="Arial" pitchFamily="34" charset="-122"/>
+                          <a:cs typeface="Arial" pitchFamily="34" charset="-120"/>
+                        </a:rPr>
+                        <a:t>AUC ↑</a:t>
+                      </a:r>
+                      <a:endParaRPr lang="en-US" sz="1000" dirty="0">
+                        <a:latin typeface="Arial" charset="0"/>
+                        <a:ea typeface="Arial" charset="0"/>
+                        <a:cs typeface="Arial" charset="0"/>
+                      </a:endParaRPr>
+                    </a:p>
+                  </a:txBody>
+                  <a:tcPr marL="38100" marR="38100" marT="12700" marB="12700">
+                    <a:lnL w="0" cap="flat" cmpd="sng" algn="ctr">
+                      <a:noFill/>
+                    </a:lnL>
+                    <a:lnR w="0" cap="flat" cmpd="sng" algn="ctr">
+                      <a:noFill/>
+                    </a:lnR>
+                    <a:lnT w="0" cap="flat" cmpd="sng" algn="ctr">
+                      <a:noFill/>
+                    </a:lnT>
+                    <a:lnB w="0" cap="flat" cmpd="sng" algn="ctr">
+                      <a:noFill/>
+                    </a:lnB>
+                  </a:tcPr>
+                </a:tc>
+                <a:tc>
+                  <a:txBody>
+                    <a:bodyPr/>
+                    <a:lstStyle/>
+                    <a:p>
+                      <a:pPr algn="r" indent="0" marL="0">
+                        <a:buNone/>
+                      </a:pPr>
+                      <a:r>
+                        <a:rPr lang="en-US" sz="1000" b="1" dirty="0">
+                          <a:solidFill>
+                            <a:srgbClr val="111111"/>
+                          </a:solidFill>
+                          <a:latin typeface="Arial" pitchFamily="34" charset="0"/>
+                          <a:ea typeface="Arial" pitchFamily="34" charset="-122"/>
+                          <a:cs typeface="Arial" pitchFamily="34" charset="-120"/>
+                        </a:rPr>
+                        <a:t>0.93529</a:t>
+                      </a:r>
+                      <a:endParaRPr lang="en-US" sz="1000" dirty="0">
+                        <a:latin typeface="Arial" charset="0"/>
+                        <a:ea typeface="Arial" charset="0"/>
+                        <a:cs typeface="Arial" charset="0"/>
+                      </a:endParaRPr>
+                    </a:p>
+                  </a:txBody>
+                  <a:tcPr marL="38100" marR="38100" marT="12700" marB="12700">
+                    <a:lnL w="0" cap="flat" cmpd="sng" algn="ctr">
+                      <a:noFill/>
+                    </a:lnL>
+                    <a:lnR w="0" cap="flat" cmpd="sng" algn="ctr">
+                      <a:noFill/>
+                    </a:lnR>
+                    <a:lnT w="0" cap="flat" cmpd="sng" algn="ctr">
+                      <a:noFill/>
+                    </a:lnT>
+                    <a:lnB w="0" cap="flat" cmpd="sng" algn="ctr">
+                      <a:noFill/>
+                    </a:lnB>
+                  </a:tcPr>
+                </a:tc>
+                <a:tc>
+                  <a:txBody>
+                    <a:bodyPr/>
+                    <a:lstStyle/>
+                    <a:p>
+                      <a:pPr algn="r" indent="0" marL="0">
+                        <a:buNone/>
+                      </a:pPr>
+                      <a:r>
+                        <a:rPr lang="en-US" sz="1000" dirty="0">
+                          <a:solidFill>
+                            <a:srgbClr val="111111"/>
+                          </a:solidFill>
+                          <a:latin typeface="Arial" pitchFamily="34" charset="0"/>
+                          <a:ea typeface="Arial" pitchFamily="34" charset="-122"/>
+                          <a:cs typeface="Arial" pitchFamily="34" charset="-120"/>
+                        </a:rPr>
+                        <a:t>0.89822</a:t>
+                      </a:r>
+                      <a:endParaRPr lang="en-US" sz="1000" dirty="0">
+                        <a:latin typeface="Arial" charset="0"/>
+                        <a:ea typeface="Arial" charset="0"/>
+                        <a:cs typeface="Arial" charset="0"/>
+                      </a:endParaRPr>
+                    </a:p>
+                  </a:txBody>
+                  <a:tcPr marL="38100" marR="38100" marT="12700" marB="12700">
+                    <a:lnL w="0" cap="flat" cmpd="sng" algn="ctr">
+                      <a:noFill/>
+                    </a:lnL>
+                    <a:lnR w="0" cap="flat" cmpd="sng" algn="ctr">
+                      <a:noFill/>
+                    </a:lnR>
+                    <a:lnT w="0" cap="flat" cmpd="sng" algn="ctr">
+                      <a:noFill/>
+                    </a:lnT>
+                    <a:lnB w="0" cap="flat" cmpd="sng" algn="ctr">
+                      <a:noFill/>
+                    </a:lnB>
+                  </a:tcPr>
+                </a:tc>
+                <a:tc>
+                  <a:txBody>
+                    <a:bodyPr/>
+                    <a:lstStyle/>
+                    <a:p>
+                      <a:pPr algn="r" indent="0" marL="0">
+                        <a:buNone/>
+                      </a:pPr>
+                      <a:r>
+                        <a:rPr lang="en-US" sz="1000" dirty="0">
+                          <a:solidFill>
+                            <a:srgbClr val="111111"/>
+                          </a:solidFill>
+                          <a:latin typeface="Arial" pitchFamily="34" charset="0"/>
+                          <a:ea typeface="Arial" pitchFamily="34" charset="-122"/>
+                          <a:cs typeface="Arial" pitchFamily="34" charset="-120"/>
+                        </a:rPr>
+                        <a:t>0.88579</a:t>
+                      </a:r>
+                      <a:endParaRPr lang="en-US" sz="1000" dirty="0">
+                        <a:latin typeface="Arial" charset="0"/>
+                        <a:ea typeface="Arial" charset="0"/>
+                        <a:cs typeface="Arial" charset="0"/>
+                      </a:endParaRPr>
+                    </a:p>
+                  </a:txBody>
+                  <a:tcPr marL="38100" marR="38100" marT="12700" marB="12700">
+                    <a:lnL w="0" cap="flat" cmpd="sng" algn="ctr">
+                      <a:noFill/>
+                    </a:lnL>
+                    <a:lnR w="0" cap="flat" cmpd="sng" algn="ctr">
+                      <a:noFill/>
+                    </a:lnR>
+                    <a:lnT w="0" cap="flat" cmpd="sng" algn="ctr">
+                      <a:noFill/>
+                    </a:lnT>
+                    <a:lnB w="0" cap="flat" cmpd="sng" algn="ctr">
+                      <a:noFill/>
+                    </a:lnB>
+                  </a:tcPr>
+                </a:tc>
+              </a:tr>
+            </a:tbl>
+          </a:graphicData>
+        </a:graphic>
+      </p:graphicFrame>
       <p:sp>
         <p:nvSpPr>
-          <p:cNvPr id="6" name="Text 4"/>
+          <p:cNvPr id="8" name="Text 4"/>
           <p:cNvSpPr/>
           <p:nvPr/>
         </p:nvSpPr>
         <p:spPr>
           <a:xfrm>
-            <a:off x="658368" y="3108960"/>
-            <a:ext cx="1828800" cy="420624"/>
+            <a:off x="7635240" y="2395728"/>
+            <a:ext cx="4160520" cy="274320"/>
           </a:xfrm>
           <a:prstGeom prst="rect">
             <a:avLst/>
@@ -2252,391 +8120,7 @@
               <a:buNone/>
             </a:pPr>
             <a:r>
-              <a:rPr lang="en-US" sz="1700" b="1" dirty="0">
-                <a:solidFill>
-                  <a:srgbClr val="111111"/>
-                </a:solidFill>
-                <a:latin typeface="Arial" pitchFamily="34" charset="0"/>
-                <a:ea typeface="Arial" pitchFamily="34" charset="-122"/>
-                <a:cs typeface="Arial" pitchFamily="34" charset="-120"/>
-              </a:rPr>
-              <a:t>Sinica</a:t>
-            </a:r>
-            <a:endParaRPr lang="en-US" sz="1700" dirty="0"/>
-          </a:p>
-        </p:txBody>
-      </p:sp>
-      <p:sp>
-        <p:nvSpPr>
-          <p:cNvPr id="7" name="Shape 5"/>
-          <p:cNvSpPr/>
-          <p:nvPr/>
-        </p:nvSpPr>
-        <p:spPr>
-          <a:xfrm>
-            <a:off x="2606040" y="3154680"/>
-            <a:ext cx="5120640" cy="329184"/>
-          </a:xfrm>
-          <a:prstGeom prst="rect">
-            <a:avLst/>
-          </a:prstGeom>
-          <a:solidFill>
-            <a:srgbClr val="EEF0F3"/>
-          </a:solidFill>
-          <a:ln w="12700">
-            <a:solidFill>
-              <a:srgbClr val="EEF0F3"/>
-            </a:solidFill>
-            <a:prstDash val="solid"/>
-          </a:ln>
-        </p:spPr>
-      </p:sp>
-      <p:sp>
-        <p:nvSpPr>
-          <p:cNvPr id="8" name="Shape 6"/>
-          <p:cNvSpPr/>
-          <p:nvPr/>
-        </p:nvSpPr>
-        <p:spPr>
-          <a:xfrm>
-            <a:off x="2606040" y="3154680"/>
-            <a:ext cx="2560320" cy="329184"/>
-          </a:xfrm>
-          <a:prstGeom prst="rect">
-            <a:avLst/>
-          </a:prstGeom>
-          <a:solidFill>
-            <a:srgbClr val="003C64"/>
-          </a:solidFill>
-          <a:ln w="12700">
-            <a:solidFill>
-              <a:srgbClr val="003C64"/>
-            </a:solidFill>
-            <a:prstDash val="solid"/>
-          </a:ln>
-        </p:spPr>
-      </p:sp>
-      <p:sp>
-        <p:nvSpPr>
-          <p:cNvPr id="9" name="Text 7"/>
-          <p:cNvSpPr/>
-          <p:nvPr/>
-        </p:nvSpPr>
-        <p:spPr>
-          <a:xfrm>
-            <a:off x="7909560" y="3108960"/>
-            <a:ext cx="1463040" cy="420624"/>
-          </a:xfrm>
-          <a:prstGeom prst="rect">
-            <a:avLst/>
-          </a:prstGeom>
-          <a:noFill/>
-          <a:ln/>
-        </p:spPr>
-        <p:txBody>
-          <a:bodyPr wrap="square" lIns="0" tIns="0" rIns="0" bIns="0" rtlCol="0" anchor="ctr"/>
-          <a:lstStyle/>
-          <a:p>
-            <a:pPr indent="0" marL="0">
-              <a:buNone/>
-            </a:pPr>
-            <a:r>
-              <a:rPr lang="en-US" sz="1700" dirty="0">
-                <a:solidFill>
-                  <a:srgbClr val="111111"/>
-                </a:solidFill>
-                <a:latin typeface="Arial" pitchFamily="34" charset="0"/>
-                <a:ea typeface="Arial" pitchFamily="34" charset="-122"/>
-                <a:cs typeface="Arial" pitchFamily="34" charset="-120"/>
-              </a:rPr>
-              <a:t>10 / 20</a:t>
-            </a:r>
-            <a:endParaRPr lang="en-US" sz="1700" dirty="0"/>
-          </a:p>
-        </p:txBody>
-      </p:sp>
-      <p:sp>
-        <p:nvSpPr>
-          <p:cNvPr id="10" name="Text 8"/>
-          <p:cNvSpPr/>
-          <p:nvPr/>
-        </p:nvSpPr>
-        <p:spPr>
-          <a:xfrm>
-            <a:off x="658368" y="3657600"/>
-            <a:ext cx="1828800" cy="420624"/>
-          </a:xfrm>
-          <a:prstGeom prst="rect">
-            <a:avLst/>
-          </a:prstGeom>
-          <a:noFill/>
-          <a:ln/>
-        </p:spPr>
-        <p:txBody>
-          <a:bodyPr wrap="square" lIns="0" tIns="0" rIns="0" bIns="0" rtlCol="0" anchor="ctr"/>
-          <a:lstStyle/>
-          <a:p>
-            <a:pPr indent="0" marL="0">
-              <a:buNone/>
-            </a:pPr>
-            <a:r>
-              <a:rPr lang="en-US" sz="1700" dirty="0">
-                <a:solidFill>
-                  <a:srgbClr val="111111"/>
-                </a:solidFill>
-                <a:latin typeface="Arial" pitchFamily="34" charset="0"/>
-                <a:ea typeface="Arial" pitchFamily="34" charset="-122"/>
-                <a:cs typeface="Arial" pitchFamily="34" charset="-120"/>
-              </a:rPr>
-              <a:t>NVIDIA</a:t>
-            </a:r>
-            <a:endParaRPr lang="en-US" sz="1700" dirty="0"/>
-          </a:p>
-        </p:txBody>
-      </p:sp>
-      <p:sp>
-        <p:nvSpPr>
-          <p:cNvPr id="11" name="Shape 9"/>
-          <p:cNvSpPr/>
-          <p:nvPr/>
-        </p:nvSpPr>
-        <p:spPr>
-          <a:xfrm>
-            <a:off x="2606040" y="3703320"/>
-            <a:ext cx="5120640" cy="329184"/>
-          </a:xfrm>
-          <a:prstGeom prst="rect">
-            <a:avLst/>
-          </a:prstGeom>
-          <a:solidFill>
-            <a:srgbClr val="EEF0F3"/>
-          </a:solidFill>
-          <a:ln w="12700">
-            <a:solidFill>
-              <a:srgbClr val="EEF0F3"/>
-            </a:solidFill>
-            <a:prstDash val="solid"/>
-          </a:ln>
-        </p:spPr>
-      </p:sp>
-      <p:sp>
-        <p:nvSpPr>
-          <p:cNvPr id="12" name="Shape 10"/>
-          <p:cNvSpPr/>
-          <p:nvPr/>
-        </p:nvSpPr>
-        <p:spPr>
-          <a:xfrm>
-            <a:off x="2606040" y="3703320"/>
-            <a:ext cx="1792224" cy="329184"/>
-          </a:xfrm>
-          <a:prstGeom prst="rect">
-            <a:avLst/>
-          </a:prstGeom>
-          <a:solidFill>
-            <a:srgbClr val="B0BAC4"/>
-          </a:solidFill>
-          <a:ln w="12700">
-            <a:solidFill>
-              <a:srgbClr val="B0BAC4"/>
-            </a:solidFill>
-            <a:prstDash val="solid"/>
-          </a:ln>
-        </p:spPr>
-      </p:sp>
-      <p:sp>
-        <p:nvSpPr>
-          <p:cNvPr id="13" name="Text 11"/>
-          <p:cNvSpPr/>
-          <p:nvPr/>
-        </p:nvSpPr>
-        <p:spPr>
-          <a:xfrm>
-            <a:off x="7909560" y="3657600"/>
-            <a:ext cx="1463040" cy="420624"/>
-          </a:xfrm>
-          <a:prstGeom prst="rect">
-            <a:avLst/>
-          </a:prstGeom>
-          <a:noFill/>
-          <a:ln/>
-        </p:spPr>
-        <p:txBody>
-          <a:bodyPr wrap="square" lIns="0" tIns="0" rIns="0" bIns="0" rtlCol="0" anchor="ctr"/>
-          <a:lstStyle/>
-          <a:p>
-            <a:pPr indent="0" marL="0">
-              <a:buNone/>
-            </a:pPr>
-            <a:r>
-              <a:rPr lang="en-US" sz="1700" dirty="0">
-                <a:solidFill>
-                  <a:srgbClr val="111111"/>
-                </a:solidFill>
-                <a:latin typeface="Arial" pitchFamily="34" charset="0"/>
-                <a:ea typeface="Arial" pitchFamily="34" charset="-122"/>
-                <a:cs typeface="Arial" pitchFamily="34" charset="-120"/>
-              </a:rPr>
-              <a:t>7 / 20</a:t>
-            </a:r>
-            <a:endParaRPr lang="en-US" sz="1700" dirty="0"/>
-          </a:p>
-        </p:txBody>
-      </p:sp>
-      <p:sp>
-        <p:nvSpPr>
-          <p:cNvPr id="14" name="Text 12"/>
-          <p:cNvSpPr/>
-          <p:nvPr/>
-        </p:nvSpPr>
-        <p:spPr>
-          <a:xfrm>
-            <a:off x="658368" y="4206240"/>
-            <a:ext cx="1828800" cy="420624"/>
-          </a:xfrm>
-          <a:prstGeom prst="rect">
-            <a:avLst/>
-          </a:prstGeom>
-          <a:noFill/>
-          <a:ln/>
-        </p:spPr>
-        <p:txBody>
-          <a:bodyPr wrap="square" lIns="0" tIns="0" rIns="0" bIns="0" rtlCol="0" anchor="ctr"/>
-          <a:lstStyle/>
-          <a:p>
-            <a:pPr indent="0" marL="0">
-              <a:buNone/>
-            </a:pPr>
-            <a:r>
-              <a:rPr lang="en-US" sz="1700" dirty="0">
-                <a:solidFill>
-                  <a:srgbClr val="111111"/>
-                </a:solidFill>
-                <a:latin typeface="Arial" pitchFamily="34" charset="0"/>
-                <a:ea typeface="Arial" pitchFamily="34" charset="-122"/>
-                <a:cs typeface="Arial" pitchFamily="34" charset="-120"/>
-              </a:rPr>
-              <a:t>AIDE</a:t>
-            </a:r>
-            <a:endParaRPr lang="en-US" sz="1700" dirty="0"/>
-          </a:p>
-        </p:txBody>
-      </p:sp>
-      <p:sp>
-        <p:nvSpPr>
-          <p:cNvPr id="15" name="Shape 13"/>
-          <p:cNvSpPr/>
-          <p:nvPr/>
-        </p:nvSpPr>
-        <p:spPr>
-          <a:xfrm>
-            <a:off x="2606040" y="4251960"/>
-            <a:ext cx="5120640" cy="329184"/>
-          </a:xfrm>
-          <a:prstGeom prst="rect">
-            <a:avLst/>
-          </a:prstGeom>
-          <a:solidFill>
-            <a:srgbClr val="EEF0F3"/>
-          </a:solidFill>
-          <a:ln w="12700">
-            <a:solidFill>
-              <a:srgbClr val="EEF0F3"/>
-            </a:solidFill>
-            <a:prstDash val="solid"/>
-          </a:ln>
-        </p:spPr>
-      </p:sp>
-      <p:sp>
-        <p:nvSpPr>
-          <p:cNvPr id="16" name="Shape 14"/>
-          <p:cNvSpPr/>
-          <p:nvPr/>
-        </p:nvSpPr>
-        <p:spPr>
-          <a:xfrm>
-            <a:off x="2606040" y="4251960"/>
-            <a:ext cx="768096" cy="329184"/>
-          </a:xfrm>
-          <a:prstGeom prst="rect">
-            <a:avLst/>
-          </a:prstGeom>
-          <a:solidFill>
-            <a:srgbClr val="B0BAC4"/>
-          </a:solidFill>
-          <a:ln w="12700">
-            <a:solidFill>
-              <a:srgbClr val="B0BAC4"/>
-            </a:solidFill>
-            <a:prstDash val="solid"/>
-          </a:ln>
-        </p:spPr>
-      </p:sp>
-      <p:sp>
-        <p:nvSpPr>
-          <p:cNvPr id="17" name="Text 15"/>
-          <p:cNvSpPr/>
-          <p:nvPr/>
-        </p:nvSpPr>
-        <p:spPr>
-          <a:xfrm>
-            <a:off x="7909560" y="4206240"/>
-            <a:ext cx="1463040" cy="420624"/>
-          </a:xfrm>
-          <a:prstGeom prst="rect">
-            <a:avLst/>
-          </a:prstGeom>
-          <a:noFill/>
-          <a:ln/>
-        </p:spPr>
-        <p:txBody>
-          <a:bodyPr wrap="square" lIns="0" tIns="0" rIns="0" bIns="0" rtlCol="0" anchor="ctr"/>
-          <a:lstStyle/>
-          <a:p>
-            <a:pPr indent="0" marL="0">
-              <a:buNone/>
-            </a:pPr>
-            <a:r>
-              <a:rPr lang="en-US" sz="1700" dirty="0">
-                <a:solidFill>
-                  <a:srgbClr val="111111"/>
-                </a:solidFill>
-                <a:latin typeface="Arial" pitchFamily="34" charset="0"/>
-                <a:ea typeface="Arial" pitchFamily="34" charset="-122"/>
-                <a:cs typeface="Arial" pitchFamily="34" charset="-120"/>
-              </a:rPr>
-              <a:t>3 / 20</a:t>
-            </a:r>
-            <a:endParaRPr lang="en-US" sz="1700" dirty="0"/>
-          </a:p>
-        </p:txBody>
-      </p:sp>
-      <p:sp>
-        <p:nvSpPr>
-          <p:cNvPr id="18" name="Text 16"/>
-          <p:cNvSpPr/>
-          <p:nvPr/>
-        </p:nvSpPr>
-        <p:spPr>
-          <a:xfrm>
-            <a:off x="658368" y="4983480"/>
-            <a:ext cx="10881360" cy="640080"/>
-          </a:xfrm>
-          <a:prstGeom prst="rect">
-            <a:avLst/>
-          </a:prstGeom>
-          <a:noFill/>
-          <a:ln/>
-        </p:spPr>
-        <p:txBody>
-          <a:bodyPr wrap="square" lIns="0" tIns="0" rIns="0" bIns="0" rtlCol="0" anchor="ctr"/>
-          <a:lstStyle/>
-          <a:p>
-            <a:pPr indent="0" marL="0">
-              <a:buNone/>
-            </a:pPr>
-            <a:r>
-              <a:rPr lang="en-US" sz="1500" dirty="0">
+              <a:rPr lang="en-US" sz="1100" dirty="0">
                 <a:solidFill>
                   <a:srgbClr val="5A5F66"/>
                 </a:solidFill>
@@ -2644,9 +8128,9 @@
                 <a:ea typeface="Arial" pitchFamily="34" charset="-122"/>
                 <a:cs typeface="Arial" pitchFamily="34" charset="-120"/>
               </a:rPr>
-              <a:t>Beyond tabular: on three mid-complexity competitions (NLP, physiological time series, medical imaging) Sinica takes the three-way best on all three.</a:t>
+              <a:t>Graded by MLE-bench [4].</a:t>
             </a:r>
-            <a:endParaRPr lang="en-US" sz="1500" dirty="0"/>
+            <a:endParaRPr lang="en-US" sz="1100" dirty="0"/>
           </a:p>
         </p:txBody>
       </p:sp>
@@ -2709,13 +8193,13 @@
             <a:r>
               <a:rPr lang="en-US" sz="2600" b="1" dirty="0">
                 <a:solidFill>
-                  <a:srgbClr val="003C64"/>
+                  <a:srgbClr val="111111"/>
                 </a:solidFill>
                 <a:latin typeface="Arial" pitchFamily="34" charset="0"/>
                 <a:ea typeface="Arial" pitchFamily="34" charset="-122"/>
                 <a:cs typeface="Arial" pitchFamily="34" charset="-120"/>
               </a:rPr>
-              <a:t>4 · Reflections</a:t>
+              <a:t>4.Disadvantages of the agent-based approach</a:t>
             </a:r>
             <a:endParaRPr lang="en-US" sz="2600" dirty="0"/>
           </a:p>
@@ -2723,14 +8207,14 @@
       </p:sp>
       <p:sp>
         <p:nvSpPr>
-          <p:cNvPr id="3" name="Text 1"/>
+          <p:cNvPr id="100" name="Text 1"/>
           <p:cNvSpPr/>
           <p:nvPr/>
         </p:nvSpPr>
         <p:spPr>
           <a:xfrm>
-            <a:off x="868680" y="1097280"/>
-            <a:ext cx="10607040" cy="777240"/>
+            <a:off x="868680" y="1005840"/>
+            <a:ext cx="10607040" cy="292608"/>
           </a:xfrm>
           <a:prstGeom prst="rect">
             <a:avLst/>
@@ -2754,21 +8238,7 @@
                 <a:ea typeface="Arial" pitchFamily="34" charset="-122"/>
                 <a:cs typeface="Arial" pitchFamily="34" charset="-120"/>
               </a:rPr>
-              <a:t>·   Put knowledge injection upstream.</a:t>
-            </a:r>
-            <a:pPr indent="0" marL="0">
-              <a:buNone/>
-            </a:pPr>
-            <a:r>
-              <a:rPr lang="en-US" sz="1600" dirty="0">
-                <a:solidFill>
-                  <a:srgbClr val="111111"/>
-                </a:solidFill>
-                <a:latin typeface="Arial" pitchFamily="34" charset="0"/>
-                <a:ea typeface="Arial" pitchFamily="34" charset="-122"/>
-                <a:cs typeface="Arial" pitchFamily="34" charset="-120"/>
-              </a:rPr>
-              <a:t> At the blend stage it measured near-nothing; moved into problem identification it </a:t>
+              <a:t>•   </a:t>
             </a:r>
             <a:pPr indent="0" marL="0">
               <a:buNone/>
@@ -2782,7 +8252,7 @@
                 <a:ea typeface="Arial" pitchFamily="34" charset="-122"/>
                 <a:cs typeface="Arial" pitchFamily="34" charset="-120"/>
               </a:rPr>
-              <a:t>improves scores significantly.</a:t>
+              <a:t>The agent is strong at coding, weak at judging</a:t>
             </a:r>
             <a:endParaRPr lang="en-US" sz="1600" dirty="0"/>
           </a:p>
@@ -2790,14 +8260,53 @@
       </p:sp>
       <p:sp>
         <p:nvSpPr>
-          <p:cNvPr id="4" name="Text 2"/>
+          <p:cNvPr id="101" name="Text 2"/>
           <p:cNvSpPr/>
           <p:nvPr/>
         </p:nvSpPr>
         <p:spPr>
           <a:xfrm>
-            <a:off x="868680" y="2011680"/>
-            <a:ext cx="10607040" cy="777240"/>
+            <a:off x="1234440" y="1316736"/>
+            <a:ext cx="10241280" cy="731520"/>
+          </a:xfrm>
+          <a:prstGeom prst="rect">
+            <a:avLst/>
+          </a:prstGeom>
+          <a:noFill/>
+          <a:ln/>
+        </p:spPr>
+        <p:txBody>
+          <a:bodyPr wrap="square" lIns="0" tIns="0" rIns="0" bIns="0" rtlCol="0" anchor="ctr"/>
+          <a:lstStyle/>
+          <a:p>
+            <a:pPr indent="0" marL="0">
+              <a:buNone/>
+            </a:pPr>
+            <a:r>
+              <a:rPr lang="en-US" sz="1600" dirty="0">
+                <a:solidFill>
+                  <a:srgbClr val="111111"/>
+                </a:solidFill>
+                <a:latin typeface="Arial" pitchFamily="34" charset="0"/>
+                <a:ea typeface="Arial" pitchFamily="34" charset="-122"/>
+                <a:cs typeface="Arial" pitchFamily="34" charset="-120"/>
+              </a:rPr>
+              <a:t>The agent efficiently works through whatever problem it is given. However, it does not ask whether a change is worth making. This often leads to a poor design choice that yields bugs.</a:t>
+            </a:r>
+            <a:endParaRPr lang="en-US" sz="1600" dirty="0"/>
+          </a:p>
+        </p:txBody>
+      </p:sp>
+      <p:sp>
+        <p:nvSpPr>
+          <p:cNvPr id="102" name="Text 1"/>
+          <p:cNvSpPr/>
+          <p:nvPr/>
+        </p:nvSpPr>
+        <p:spPr>
+          <a:xfrm>
+            <a:off x="868680" y="2194560"/>
+            <a:ext cx="10607040" cy="292608"/>
           </a:xfrm>
           <a:prstGeom prst="rect">
             <a:avLst/>
@@ -2821,8 +8330,47 @@
                 <a:ea typeface="Arial" pitchFamily="34" charset="-122"/>
                 <a:cs typeface="Arial" pitchFamily="34" charset="-120"/>
               </a:rPr>
-              <a:t>·   No score until you submit.</a:t>
+              <a:t>•   </a:t>
             </a:r>
+            <a:pPr indent="0" marL="0">
+              <a:buNone/>
+            </a:pPr>
+            <a:r>
+              <a:rPr lang="en-US" sz="1600" b="1" dirty="0">
+                <a:solidFill>
+                  <a:srgbClr val="111111"/>
+                </a:solidFill>
+                <a:latin typeface="Arial" pitchFamily="34" charset="0"/>
+                <a:ea typeface="Arial" pitchFamily="34" charset="-122"/>
+                <a:cs typeface="Arial" pitchFamily="34" charset="-120"/>
+              </a:rPr>
+              <a:t>The agent can only target the local validation score</a:t>
+            </a:r>
+            <a:endParaRPr lang="en-US" sz="1600" dirty="0"/>
+          </a:p>
+        </p:txBody>
+      </p:sp>
+      <p:sp>
+        <p:nvSpPr>
+          <p:cNvPr id="103" name="Text 2"/>
+          <p:cNvSpPr/>
+          <p:nvPr/>
+        </p:nvSpPr>
+        <p:spPr>
+          <a:xfrm>
+            <a:off x="1234440" y="2505456"/>
+            <a:ext cx="10241280" cy="731520"/>
+          </a:xfrm>
+          <a:prstGeom prst="rect">
+            <a:avLst/>
+          </a:prstGeom>
+          <a:noFill/>
+          <a:ln/>
+        </p:spPr>
+        <p:txBody>
+          <a:bodyPr wrap="square" lIns="0" tIns="0" rIns="0" bIns="0" rtlCol="0" anchor="ctr"/>
+          <a:lstStyle/>
+          <a:p>
             <a:pPr indent="0" marL="0">
               <a:buNone/>
             </a:pPr>
@@ -2835,7 +8383,7 @@
                 <a:ea typeface="Arial" pitchFamily="34" charset="-122"/>
                 <a:cs typeface="Arial" pitchFamily="34" charset="-120"/>
               </a:rPr>
-              <a:t> While you iterate, local CV is all you see, so an error in problem-level judgment leaves CV looking healthy while the leaderboard says otherwise.</a:t>
+              <a:t>As a result, the local validation score can look outstanding while the real leaderboard score is mediocre.</a:t>
             </a:r>
             <a:endParaRPr lang="en-US" sz="1600" dirty="0"/>
           </a:p>
@@ -2843,14 +8391,14 @@
       </p:sp>
       <p:sp>
         <p:nvSpPr>
-          <p:cNvPr id="5" name="Text 3"/>
+          <p:cNvPr id="104" name="Text 1"/>
           <p:cNvSpPr/>
           <p:nvPr/>
         </p:nvSpPr>
         <p:spPr>
           <a:xfrm>
-            <a:off x="868680" y="2926080"/>
-            <a:ext cx="10607040" cy="777240"/>
+            <a:off x="868680" y="3383280"/>
+            <a:ext cx="10607040" cy="292608"/>
           </a:xfrm>
           <a:prstGeom prst="rect">
             <a:avLst/>
@@ -2874,8 +8422,47 @@
                 <a:ea typeface="Arial" pitchFamily="34" charset="-122"/>
                 <a:cs typeface="Arial" pitchFamily="34" charset="-120"/>
               </a:rPr>
-              <a:t>·   Freeze the architecture before you measure.</a:t>
+              <a:t>•   </a:t>
             </a:r>
+            <a:pPr indent="0" marL="0">
+              <a:buNone/>
+            </a:pPr>
+            <a:r>
+              <a:rPr lang="en-US" sz="1600" b="1" dirty="0">
+                <a:solidFill>
+                  <a:srgbClr val="111111"/>
+                </a:solidFill>
+                <a:latin typeface="Arial" pitchFamily="34" charset="0"/>
+                <a:ea typeface="Arial" pitchFamily="34" charset="-122"/>
+                <a:cs typeface="Arial" pitchFamily="34" charset="-120"/>
+              </a:rPr>
+              <a:t>The agent often buries the main question in detail</a:t>
+            </a:r>
+            <a:endParaRPr lang="en-US" sz="1600" dirty="0"/>
+          </a:p>
+        </p:txBody>
+      </p:sp>
+      <p:sp>
+        <p:nvSpPr>
+          <p:cNvPr id="105" name="Text 2"/>
+          <p:cNvSpPr/>
+          <p:nvPr/>
+        </p:nvSpPr>
+        <p:spPr>
+          <a:xfrm>
+            <a:off x="1234440" y="3694176"/>
+            <a:ext cx="10241280" cy="731520"/>
+          </a:xfrm>
+          <a:prstGeom prst="rect">
+            <a:avLst/>
+          </a:prstGeom>
+          <a:noFill/>
+          <a:ln/>
+        </p:spPr>
+        <p:txBody>
+          <a:bodyPr wrap="square" lIns="0" tIns="0" rIns="0" bIns="0" rtlCol="0" anchor="ctr"/>
+          <a:lstStyle/>
+          <a:p>
             <a:pPr indent="0" marL="0">
               <a:buNone/>
             </a:pPr>
@@ -2888,7 +8475,7 @@
                 <a:ea typeface="Arial" pitchFamily="34" charset="-122"/>
                 <a:cs typeface="Arial" pitchFamily="34" charset="-120"/>
               </a:rPr>
-              <a:t> One results table can report only one agent version, so an architectural change invalidates every run before it. That is why such a change costs twice: a tail of bugs to fix, then a full re-run to earn the voided scores back.</a:t>
+              <a:t>AI-written reports put too much focus on technical details, drifting away from what the reader wants to know.</a:t>
             </a:r>
             <a:endParaRPr lang="en-US" sz="1600" dirty="0"/>
           </a:p>
@@ -2896,14 +8483,14 @@
       </p:sp>
       <p:sp>
         <p:nvSpPr>
-          <p:cNvPr id="6" name="Text 4"/>
+          <p:cNvPr id="106" name="Text 1"/>
           <p:cNvSpPr/>
           <p:nvPr/>
         </p:nvSpPr>
         <p:spPr>
           <a:xfrm>
-            <a:off x="868680" y="4023360"/>
-            <a:ext cx="10607040" cy="777240"/>
+            <a:off x="868680" y="4572000"/>
+            <a:ext cx="10607040" cy="292608"/>
           </a:xfrm>
           <a:prstGeom prst="rect">
             <a:avLst/>
@@ -2927,8 +8514,47 @@
                 <a:ea typeface="Arial" pitchFamily="34" charset="-122"/>
                 <a:cs typeface="Arial" pitchFamily="34" charset="-120"/>
               </a:rPr>
-              <a:t>·   Get isolation right.</a:t>
+              <a:t>•   </a:t>
             </a:r>
+            <a:pPr indent="0" marL="0">
+              <a:buNone/>
+            </a:pPr>
+            <a:r>
+              <a:rPr lang="en-US" sz="1600" b="1" dirty="0">
+                <a:solidFill>
+                  <a:srgbClr val="111111"/>
+                </a:solidFill>
+                <a:latin typeface="Arial" pitchFamily="34" charset="0"/>
+                <a:ea typeface="Arial" pitchFamily="34" charset="-122"/>
+                <a:cs typeface="Arial" pitchFamily="34" charset="-120"/>
+              </a:rPr>
+              <a:t>The agent has bad writing habits</a:t>
+            </a:r>
+            <a:endParaRPr lang="en-US" sz="1600" dirty="0"/>
+          </a:p>
+        </p:txBody>
+      </p:sp>
+      <p:sp>
+        <p:nvSpPr>
+          <p:cNvPr id="107" name="Text 2"/>
+          <p:cNvSpPr/>
+          <p:nvPr/>
+        </p:nvSpPr>
+        <p:spPr>
+          <a:xfrm>
+            <a:off x="1234440" y="4882896"/>
+            <a:ext cx="10241280" cy="731520"/>
+          </a:xfrm>
+          <a:prstGeom prst="rect">
+            <a:avLst/>
+          </a:prstGeom>
+          <a:noFill/>
+          <a:ln/>
+        </p:spPr>
+        <p:txBody>
+          <a:bodyPr wrap="square" lIns="0" tIns="0" rIns="0" bIns="0" rtlCol="0" anchor="ctr"/>
+          <a:lstStyle/>
+          <a:p>
             <a:pPr indent="0" marL="0">
               <a:buNone/>
             </a:pPr>
@@ -2941,7 +8567,7 @@
                 <a:ea typeface="Arial" pitchFamily="34" charset="-122"/>
                 <a:cs typeface="Arial" pitchFamily="34" charset="-120"/>
               </a:rPr>
-              <a:t> If a lane can reach a leaderboard or another lane's work, every number in the table is worthless. It has to be enforced by the setup, not by telling the agent what to avoid.</a:t>
+              <a:t>Redundant headings and reinvented terms often come back in every draft. Verifying and modifying them by hand is exhausting.</a:t>
             </a:r>
             <a:endParaRPr lang="en-US" sz="1600" dirty="0"/>
           </a:p>
@@ -3006,13 +8632,13 @@
             <a:r>
               <a:rPr lang="en-US" sz="2600" b="1" dirty="0">
                 <a:solidFill>
-                  <a:srgbClr val="003C64"/>
+                  <a:srgbClr val="111111"/>
                 </a:solidFill>
                 <a:latin typeface="Arial" pitchFamily="34" charset="0"/>
                 <a:ea typeface="Arial" pitchFamily="34" charset="-122"/>
                 <a:cs typeface="Arial" pitchFamily="34" charset="-120"/>
               </a:rPr>
-              <a:t>5 · Weaknesses of AI-heavy research</a:t>
+              <a:t>5.Practical advice for building AI agents for data science</a:t>
             </a:r>
             <a:endParaRPr lang="en-US" sz="2600" dirty="0"/>
           </a:p>
@@ -3020,14 +8646,14 @@
       </p:sp>
       <p:sp>
         <p:nvSpPr>
-          <p:cNvPr id="3" name="Text 1"/>
+          <p:cNvPr id="100" name="Text 1"/>
           <p:cNvSpPr/>
           <p:nvPr/>
         </p:nvSpPr>
         <p:spPr>
           <a:xfrm>
-            <a:off x="868680" y="1097280"/>
-            <a:ext cx="10607040" cy="777240"/>
+            <a:off x="868680" y="987552"/>
+            <a:ext cx="10607040" cy="292608"/>
           </a:xfrm>
           <a:prstGeom prst="rect">
             <a:avLst/>
@@ -3051,8 +8677,47 @@
                 <a:ea typeface="Arial" pitchFamily="34" charset="-122"/>
                 <a:cs typeface="Arial" pitchFamily="34" charset="-120"/>
               </a:rPr>
-              <a:t>·   Strong hands, no design judgment.</a:t>
+              <a:t>•   </a:t>
             </a:r>
+            <a:pPr indent="0" marL="0">
+              <a:buNone/>
+            </a:pPr>
+            <a:r>
+              <a:rPr lang="en-US" sz="1600" b="1" dirty="0">
+                <a:solidFill>
+                  <a:srgbClr val="111111"/>
+                </a:solidFill>
+                <a:latin typeface="Arial" pitchFamily="34" charset="0"/>
+                <a:ea typeface="Arial" pitchFamily="34" charset="-122"/>
+                <a:cs typeface="Arial" pitchFamily="34" charset="-120"/>
+              </a:rPr>
+              <a:t>Build an isolated environment before running the agent</a:t>
+            </a:r>
+            <a:endParaRPr lang="en-US" sz="1600" dirty="0"/>
+          </a:p>
+        </p:txBody>
+      </p:sp>
+      <p:sp>
+        <p:nvSpPr>
+          <p:cNvPr id="101" name="Text 2"/>
+          <p:cNvSpPr/>
+          <p:nvPr/>
+        </p:nvSpPr>
+        <p:spPr>
+          <a:xfrm>
+            <a:off x="1234440" y="1298448"/>
+            <a:ext cx="10241280" cy="731520"/>
+          </a:xfrm>
+          <a:prstGeom prst="rect">
+            <a:avLst/>
+          </a:prstGeom>
+          <a:noFill/>
+          <a:ln/>
+        </p:spPr>
+        <p:txBody>
+          <a:bodyPr wrap="square" lIns="0" tIns="0" rIns="0" bIns="0" rtlCol="0" anchor="ctr"/>
+          <a:lstStyle/>
+          <a:p>
             <a:pPr indent="0" marL="0">
               <a:buNone/>
             </a:pPr>
@@ -3065,7 +8730,7 @@
                 <a:ea typeface="Arial" pitchFamily="34" charset="-122"/>
                 <a:cs typeface="Arial" pitchFamily="34" charset="-120"/>
               </a:rPr>
-              <a:t> The loop only solves the problem it is handed. It never asks whether a change is worth making, and nothing in it can tell whether an architecture holds until the runs come back, by which time the debt is already there.</a:t>
+              <a:t>This prevents any access to the leaderboard or another run's files.</a:t>
             </a:r>
             <a:endParaRPr lang="en-US" sz="1600" dirty="0"/>
           </a:p>
@@ -3073,14 +8738,14 @@
       </p:sp>
       <p:sp>
         <p:nvSpPr>
-          <p:cNvPr id="4" name="Text 2"/>
+          <p:cNvPr id="102" name="Text 1"/>
           <p:cNvSpPr/>
           <p:nvPr/>
         </p:nvSpPr>
         <p:spPr>
           <a:xfrm>
-            <a:off x="868680" y="3657600"/>
-            <a:ext cx="10607040" cy="777240"/>
+            <a:off x="868680" y="2270760"/>
+            <a:ext cx="10607040" cy="292608"/>
           </a:xfrm>
           <a:prstGeom prst="rect">
             <a:avLst/>
@@ -3104,13 +8769,13 @@
                 <a:ea typeface="Arial" pitchFamily="34" charset="-122"/>
                 <a:cs typeface="Arial" pitchFamily="34" charset="-120"/>
               </a:rPr>
-              <a:t>·   AI writing habits survive review</a:t>
+              <a:t>•   </a:t>
             </a:r>
             <a:pPr indent="0" marL="0">
               <a:buNone/>
             </a:pPr>
             <a:r>
-              <a:rPr lang="en-US" sz="1600" dirty="0">
+              <a:rPr lang="en-US" sz="1600" b="1" dirty="0">
                 <a:solidFill>
                   <a:srgbClr val="111111"/>
                 </a:solidFill>
@@ -3118,7 +8783,7 @@
                 <a:ea typeface="Arial" pitchFamily="34" charset="-122"/>
                 <a:cs typeface="Arial" pitchFamily="34" charset="-120"/>
               </a:rPr>
-              <a:t>: redundant suffixes, invented terminology, detail in place of the question the reader came for.</a:t>
+              <a:t>Justify the design before building the pipeline</a:t>
             </a:r>
             <a:endParaRPr lang="en-US" sz="1600" dirty="0"/>
           </a:p>
@@ -3126,14 +8791,14 @@
       </p:sp>
       <p:sp>
         <p:nvSpPr>
-          <p:cNvPr id="5" name="Text 3"/>
+          <p:cNvPr id="103" name="Text 2"/>
           <p:cNvSpPr/>
           <p:nvPr/>
         </p:nvSpPr>
         <p:spPr>
           <a:xfrm>
-            <a:off x="868680" y="5852160"/>
-            <a:ext cx="10607040" cy="365760"/>
+            <a:off x="1234440" y="2581656"/>
+            <a:ext cx="10241280" cy="731520"/>
           </a:xfrm>
           <a:prstGeom prst="rect">
             <a:avLst/>
@@ -3149,17 +8814,551 @@
               <a:buNone/>
             </a:pPr>
             <a:r>
-              <a:rPr lang="en-US" sz="1300" dirty="0">
+              <a:rPr lang="en-US" sz="1600" dirty="0">
                 <a:solidFill>
-                  <a:srgbClr val="5A5F66"/>
+                  <a:srgbClr val="111111"/>
                 </a:solidFill>
                 <a:latin typeface="Arial" pitchFamily="34" charset="0"/>
                 <a:ea typeface="Arial" pitchFamily="34" charset="-122"/>
                 <a:cs typeface="Arial" pitchFamily="34" charset="-120"/>
               </a:rPr>
-              <a:t>github.com/930731haohao-afk/kaggle-agent</a:t>
+              <a:t>This mitigates redesign cost, debugging time, and a full rerun of earlier competitions.</a:t>
+            </a:r>
+            <a:endParaRPr lang="en-US" sz="1600" dirty="0"/>
+          </a:p>
+        </p:txBody>
+      </p:sp>
+      <p:sp>
+        <p:nvSpPr>
+          <p:cNvPr id="104" name="Text 1"/>
+          <p:cNvSpPr/>
+          <p:nvPr/>
+        </p:nvSpPr>
+        <p:spPr>
+          <a:xfrm>
+            <a:off x="868680" y="3553968"/>
+            <a:ext cx="10607040" cy="292608"/>
+          </a:xfrm>
+          <a:prstGeom prst="rect">
+            <a:avLst/>
+          </a:prstGeom>
+          <a:noFill/>
+          <a:ln/>
+        </p:spPr>
+        <p:txBody>
+          <a:bodyPr wrap="square" lIns="0" tIns="0" rIns="0" bIns="0" rtlCol="0" anchor="ctr"/>
+          <a:lstStyle/>
+          <a:p>
+            <a:pPr indent="0" marL="0">
+              <a:buNone/>
+            </a:pPr>
+            <a:r>
+              <a:rPr lang="en-US" sz="1600" b="1" dirty="0">
+                <a:solidFill>
+                  <a:srgbClr val="111111"/>
+                </a:solidFill>
+                <a:latin typeface="Arial" pitchFamily="34" charset="0"/>
+                <a:ea typeface="Arial" pitchFamily="34" charset="-122"/>
+                <a:cs typeface="Arial" pitchFamily="34" charset="-120"/>
+              </a:rPr>
+              <a:t>•   </a:t>
+            </a:r>
+            <a:pPr indent="0" marL="0">
+              <a:buNone/>
+            </a:pPr>
+            <a:r>
+              <a:rPr lang="en-US" sz="1600" b="1" dirty="0">
+                <a:solidFill>
+                  <a:srgbClr val="111111"/>
+                </a:solidFill>
+                <a:latin typeface="Arial" pitchFamily="34" charset="0"/>
+                <a:ea typeface="Arial" pitchFamily="34" charset="-122"/>
+                <a:cs typeface="Arial" pitchFamily="34" charset="-120"/>
+              </a:rPr>
+              <a:t>Inject external knowledge before data modeling</a:t>
+            </a:r>
+            <a:endParaRPr lang="en-US" sz="1600" dirty="0"/>
+          </a:p>
+        </p:txBody>
+      </p:sp>
+      <p:sp>
+        <p:nvSpPr>
+          <p:cNvPr id="105" name="Text 2"/>
+          <p:cNvSpPr/>
+          <p:nvPr/>
+        </p:nvSpPr>
+        <p:spPr>
+          <a:xfrm>
+            <a:off x="1234440" y="3864864"/>
+            <a:ext cx="10241280" cy="731520"/>
+          </a:xfrm>
+          <a:prstGeom prst="rect">
+            <a:avLst/>
+          </a:prstGeom>
+          <a:noFill/>
+          <a:ln/>
+        </p:spPr>
+        <p:txBody>
+          <a:bodyPr wrap="square" lIns="0" tIns="0" rIns="0" bIns="0" rtlCol="0" anchor="ctr"/>
+          <a:lstStyle/>
+          <a:p>
+            <a:pPr indent="0" marL="0">
+              <a:buNone/>
+            </a:pPr>
+            <a:r>
+              <a:rPr lang="en-US" sz="1600" dirty="0">
+                <a:solidFill>
+                  <a:srgbClr val="111111"/>
+                </a:solidFill>
+                <a:latin typeface="Arial" pitchFamily="34" charset="0"/>
+                <a:ea typeface="Arial" pitchFamily="34" charset="-122"/>
+                <a:cs typeface="Arial" pitchFamily="34" charset="-120"/>
+              </a:rPr>
+              <a:t>This often improves the score. However, if those external data are injected at the final step, the score shows almost no improvement.</a:t>
+            </a:r>
+            <a:endParaRPr lang="en-US" sz="1600" dirty="0"/>
+          </a:p>
+        </p:txBody>
+      </p:sp>
+    </p:spTree>
+  </p:cSld>
+  <p:clrMapOvr>
+    <a:masterClrMapping/>
+  </p:clrMapOvr>
+</p:sld>
+</file>
+
+<file path=ppt/slides/slide7.xml><?xml version="1.0" encoding="utf-8"?>
+<p:sld xmlns:a="http://schemas.openxmlformats.org/drawingml/2006/main" xmlns:r="http://schemas.openxmlformats.org/officeDocument/2006/relationships" xmlns:p="http://schemas.openxmlformats.org/presentationml/2006/main">
+  <p:cSld name="Slide 7">
+    <p:bg>
+      <p:bgPr>
+        <a:solidFill>
+          <a:srgbClr val="FFFFFF"/>
+        </a:solidFill>
+      </p:bgPr>
+    </p:bg>
+    <p:spTree>
+      <p:nvGrpSpPr>
+        <p:cNvPr id="1" name=""/>
+        <p:cNvGrpSpPr/>
+        <p:nvPr/>
+      </p:nvGrpSpPr>
+      <p:grpSpPr>
+        <a:xfrm>
+          <a:off x="0" y="0"/>
+          <a:ext cx="0" cy="0"/>
+          <a:chOff x="0" y="0"/>
+          <a:chExt cx="0" cy="0"/>
+        </a:xfrm>
+      </p:grpSpPr>
+      <p:sp>
+        <p:nvSpPr>
+          <p:cNvPr id="2" name="Text 0"/>
+          <p:cNvSpPr/>
+          <p:nvPr/>
+        </p:nvSpPr>
+        <p:spPr>
+          <a:xfrm>
+            <a:off x="658368" y="256032"/>
+            <a:ext cx="10972800" cy="548640"/>
+          </a:xfrm>
+          <a:prstGeom prst="rect">
+            <a:avLst/>
+          </a:prstGeom>
+          <a:noFill/>
+          <a:ln/>
+        </p:spPr>
+        <p:txBody>
+          <a:bodyPr wrap="square" lIns="0" tIns="0" rIns="0" bIns="0" rtlCol="0" anchor="ctr"/>
+          <a:lstStyle/>
+          <a:p>
+            <a:pPr indent="0" marL="0">
+              <a:buNone/>
+            </a:pPr>
+            <a:r>
+              <a:rPr lang="en-US" sz="2600" b="1" dirty="0">
+                <a:solidFill>
+                  <a:srgbClr val="111111"/>
+                </a:solidFill>
+                <a:latin typeface="Arial" pitchFamily="34" charset="0"/>
+                <a:ea typeface="Arial" pitchFamily="34" charset="-122"/>
+                <a:cs typeface="Arial" pitchFamily="34" charset="-120"/>
+              </a:rPr>
+              <a:t>6.References</a:t>
+            </a:r>
+            <a:endParaRPr lang="en-US" sz="2600" dirty="0"/>
+          </a:p>
+        </p:txBody>
+      </p:sp>
+      <p:sp>
+        <p:nvSpPr>
+          <p:cNvPr id="3" name="Text 1"/>
+          <p:cNvSpPr/>
+          <p:nvPr/>
+        </p:nvSpPr>
+        <p:spPr>
+          <a:xfrm>
+            <a:off x="658368" y="1188720"/>
+            <a:ext cx="10881360" cy="2926080"/>
+          </a:xfrm>
+          <a:prstGeom prst="rect">
+            <a:avLst/>
+          </a:prstGeom>
+          <a:noFill/>
+          <a:ln/>
+        </p:spPr>
+        <p:txBody>
+          <a:bodyPr wrap="square" lIns="0" tIns="0" rIns="0" bIns="0" rtlCol="0" anchor="t"/>
+          <a:lstStyle/>
+          <a:p>
+            <a:pPr indent="0" marL="0">
+              <a:lnSpc>
+                <a:spcPct val="135000"/>
+              </a:lnSpc>
+              <a:buNone/>
+            </a:pPr>
+            <a:r>
+              <a:rPr lang="en-US" sz="1300" dirty="0">
+                <a:solidFill>
+                  <a:srgbClr val="111111"/>
+                </a:solidFill>
+                <a:latin typeface="Arial" pitchFamily="34" charset="0"/>
+                <a:ea typeface="Arial" pitchFamily="34" charset="-122"/>
+                <a:cs typeface="Arial" pitchFamily="34" charset="-120"/>
+              </a:rPr>
+              <a:t>[1]  Z. Jiang et al., AIDE: AI-driven exploration in the space of code, </a:t>
+            </a:r>
+            <a:pPr indent="0" marL="0">
+              <a:lnSpc>
+                <a:spcPct val="135000"/>
+              </a:lnSpc>
+              <a:buNone/>
+            </a:pPr>
+            <a:r>
+              <a:rPr lang="en-US" sz="1300" i="1" dirty="0">
+                <a:solidFill>
+                  <a:srgbClr val="111111"/>
+                </a:solidFill>
+                <a:latin typeface="Arial" pitchFamily="34" charset="0"/>
+                <a:ea typeface="Arial" pitchFamily="34" charset="-122"/>
+                <a:cs typeface="Arial" pitchFamily="34" charset="-120"/>
+              </a:rPr>
+              <a:t>arXiv:2502.13138</a:t>
+            </a:r>
+            <a:pPr indent="0" marL="0">
+              <a:lnSpc>
+                <a:spcPct val="135000"/>
+              </a:lnSpc>
+              <a:buNone/>
+            </a:pPr>
+            <a:r>
+              <a:rPr lang="en-US" sz="1300" dirty="0">
+                <a:solidFill>
+                  <a:srgbClr val="111111"/>
+                </a:solidFill>
+                <a:latin typeface="Arial" pitchFamily="34" charset="0"/>
+                <a:ea typeface="Arial" pitchFamily="34" charset="-122"/>
+                <a:cs typeface="Arial" pitchFamily="34" charset="-120"/>
+              </a:rPr>
+              <a:t>.
+</a:t>
+            </a:r>
+            <a:pPr indent="0" marL="0">
+              <a:lnSpc>
+                <a:spcPct val="135000"/>
+              </a:lnSpc>
+              <a:buNone/>
+            </a:pPr>
+            <a:r>
+              <a:rPr lang="en-US" sz="1300" dirty="0">
+                <a:solidFill>
+                  <a:srgbClr val="111111"/>
+                </a:solidFill>
+                <a:latin typeface="Arial" pitchFamily="34" charset="0"/>
+                <a:ea typeface="Arial" pitchFamily="34" charset="-122"/>
+                <a:cs typeface="Arial" pitchFamily="34" charset="-120"/>
+              </a:rPr>
+              <a:t>[2]  E. Aygün </a:t>
+            </a:r>
+            <a:pPr indent="0" marL="0">
+              <a:lnSpc>
+                <a:spcPct val="135000"/>
+              </a:lnSpc>
+              <a:buNone/>
+            </a:pPr>
+            <a:r>
+              <a:rPr lang="en-US" sz="1300" i="1" dirty="0">
+                <a:solidFill>
+                  <a:srgbClr val="111111"/>
+                </a:solidFill>
+                <a:latin typeface="Arial" pitchFamily="34" charset="0"/>
+                <a:ea typeface="Arial" pitchFamily="34" charset="-122"/>
+                <a:cs typeface="Arial" pitchFamily="34" charset="-120"/>
+              </a:rPr>
+              <a:t>et al</a:t>
+            </a:r>
+            <a:pPr indent="0" marL="0">
+              <a:lnSpc>
+                <a:spcPct val="135000"/>
+              </a:lnSpc>
+              <a:buNone/>
+            </a:pPr>
+            <a:r>
+              <a:rPr lang="en-US" sz="1300" dirty="0">
+                <a:solidFill>
+                  <a:srgbClr val="111111"/>
+                </a:solidFill>
+                <a:latin typeface="Arial" pitchFamily="34" charset="0"/>
+                <a:ea typeface="Arial" pitchFamily="34" charset="-122"/>
+                <a:cs typeface="Arial" pitchFamily="34" charset="-120"/>
+              </a:rPr>
+              <a:t>., An AI system to help scientists write expert-level empirical software, </a:t>
+            </a:r>
+            <a:pPr indent="0" marL="0">
+              <a:lnSpc>
+                <a:spcPct val="135000"/>
+              </a:lnSpc>
+              <a:buNone/>
+            </a:pPr>
+            <a:r>
+              <a:rPr lang="en-US" sz="1300" i="1" dirty="0">
+                <a:solidFill>
+                  <a:srgbClr val="111111"/>
+                </a:solidFill>
+                <a:latin typeface="Arial" pitchFamily="34" charset="0"/>
+                <a:ea typeface="Arial" pitchFamily="34" charset="-122"/>
+                <a:cs typeface="Arial" pitchFamily="34" charset="-120"/>
+              </a:rPr>
+              <a:t>Nature</a:t>
+            </a:r>
+            <a:pPr indent="0" marL="0">
+              <a:lnSpc>
+                <a:spcPct val="135000"/>
+              </a:lnSpc>
+              <a:buNone/>
+            </a:pPr>
+            <a:r>
+              <a:rPr lang="en-US" sz="1300" dirty="0">
+                <a:solidFill>
+                  <a:srgbClr val="111111"/>
+                </a:solidFill>
+                <a:latin typeface="Arial" pitchFamily="34" charset="0"/>
+                <a:ea typeface="Arial" pitchFamily="34" charset="-122"/>
+                <a:cs typeface="Arial" pitchFamily="34" charset="-120"/>
+              </a:rPr>
+              <a:t> </a:t>
+            </a:r>
+            <a:pPr indent="0" marL="0">
+              <a:lnSpc>
+                <a:spcPct val="135000"/>
+              </a:lnSpc>
+              <a:buNone/>
+            </a:pPr>
+            <a:r>
+              <a:rPr lang="en-US" sz="1300" b="1" dirty="0">
+                <a:solidFill>
+                  <a:srgbClr val="111111"/>
+                </a:solidFill>
+                <a:latin typeface="Arial" pitchFamily="34" charset="0"/>
+                <a:ea typeface="Arial" pitchFamily="34" charset="-122"/>
+                <a:cs typeface="Arial" pitchFamily="34" charset="-120"/>
+              </a:rPr>
+              <a:t>654</a:t>
+            </a:r>
+            <a:pPr indent="0" marL="0">
+              <a:lnSpc>
+                <a:spcPct val="135000"/>
+              </a:lnSpc>
+              <a:buNone/>
+            </a:pPr>
+            <a:r>
+              <a:rPr lang="en-US" sz="1300" dirty="0">
+                <a:solidFill>
+                  <a:srgbClr val="111111"/>
+                </a:solidFill>
+                <a:latin typeface="Arial" pitchFamily="34" charset="0"/>
+                <a:ea typeface="Arial" pitchFamily="34" charset="-122"/>
+                <a:cs typeface="Arial" pitchFamily="34" charset="-120"/>
+              </a:rPr>
+              <a:t>, 909 (2026).
+</a:t>
+            </a:r>
+            <a:pPr indent="0" marL="0">
+              <a:lnSpc>
+                <a:spcPct val="135000"/>
+              </a:lnSpc>
+              <a:buNone/>
+            </a:pPr>
+            <a:r>
+              <a:rPr lang="en-US" sz="1300" dirty="0">
+                <a:solidFill>
+                  <a:srgbClr val="111111"/>
+                </a:solidFill>
+                <a:latin typeface="Arial" pitchFamily="34" charset="0"/>
+                <a:ea typeface="Arial" pitchFamily="34" charset="-122"/>
+                <a:cs typeface="Arial" pitchFamily="34" charset="-120"/>
+              </a:rPr>
+              <a:t>[3]  NVIDIA Corporation, computer code NVIDIA Kaggle Plugin, Santa Clara, CA, 2026, https://github.com/NVIDIA/nvidia-kaggle.
+</a:t>
+            </a:r>
+            <a:pPr indent="0" marL="0">
+              <a:lnSpc>
+                <a:spcPct val="135000"/>
+              </a:lnSpc>
+              <a:buNone/>
+            </a:pPr>
+            <a:r>
+              <a:rPr lang="en-US" sz="1300" dirty="0">
+                <a:solidFill>
+                  <a:srgbClr val="111111"/>
+                </a:solidFill>
+                <a:latin typeface="Arial" pitchFamily="34" charset="0"/>
+                <a:ea typeface="Arial" pitchFamily="34" charset="-122"/>
+                <a:cs typeface="Arial" pitchFamily="34" charset="-120"/>
+              </a:rPr>
+              <a:t>[4]  J. S. Chan </a:t>
+            </a:r>
+            <a:pPr indent="0" marL="0">
+              <a:lnSpc>
+                <a:spcPct val="135000"/>
+              </a:lnSpc>
+              <a:buNone/>
+            </a:pPr>
+            <a:r>
+              <a:rPr lang="en-US" sz="1300" i="1" dirty="0">
+                <a:solidFill>
+                  <a:srgbClr val="111111"/>
+                </a:solidFill>
+                <a:latin typeface="Arial" pitchFamily="34" charset="0"/>
+                <a:ea typeface="Arial" pitchFamily="34" charset="-122"/>
+                <a:cs typeface="Arial" pitchFamily="34" charset="-120"/>
+              </a:rPr>
+              <a:t>et al</a:t>
+            </a:r>
+            <a:pPr indent="0" marL="0">
+              <a:lnSpc>
+                <a:spcPct val="135000"/>
+              </a:lnSpc>
+              <a:buNone/>
+            </a:pPr>
+            <a:r>
+              <a:rPr lang="en-US" sz="1300" dirty="0">
+                <a:solidFill>
+                  <a:srgbClr val="111111"/>
+                </a:solidFill>
+                <a:latin typeface="Arial" pitchFamily="34" charset="0"/>
+                <a:ea typeface="Arial" pitchFamily="34" charset="-122"/>
+                <a:cs typeface="Arial" pitchFamily="34" charset="-120"/>
+              </a:rPr>
+              <a:t>., MLE-bench: Evaluating machine learning agents on machine learning engineering, in </a:t>
+            </a:r>
+            <a:pPr indent="0" marL="0">
+              <a:lnSpc>
+                <a:spcPct val="135000"/>
+              </a:lnSpc>
+              <a:buNone/>
+            </a:pPr>
+            <a:r>
+              <a:rPr lang="en-US" sz="1300" i="1" dirty="0">
+                <a:solidFill>
+                  <a:srgbClr val="111111"/>
+                </a:solidFill>
+                <a:latin typeface="Arial" pitchFamily="34" charset="0"/>
+                <a:ea typeface="Arial" pitchFamily="34" charset="-122"/>
+                <a:cs typeface="Arial" pitchFamily="34" charset="-120"/>
+              </a:rPr>
+              <a:t>Proceedings of the 13th International Conference on Learning Representations</a:t>
+            </a:r>
+            <a:pPr indent="0" marL="0">
+              <a:lnSpc>
+                <a:spcPct val="135000"/>
+              </a:lnSpc>
+              <a:buNone/>
+            </a:pPr>
+            <a:r>
+              <a:rPr lang="en-US" sz="1300" dirty="0">
+                <a:solidFill>
+                  <a:srgbClr val="111111"/>
+                </a:solidFill>
+                <a:latin typeface="Arial" pitchFamily="34" charset="0"/>
+                <a:ea typeface="Arial" pitchFamily="34" charset="-122"/>
+                <a:cs typeface="Arial" pitchFamily="34" charset="-120"/>
+              </a:rPr>
+              <a:t>, 2025, https://openreview.net/forum?id=6s5uXNWGIh.</a:t>
             </a:r>
             <a:endParaRPr lang="en-US" sz="1300" dirty="0"/>
+          </a:p>
+        </p:txBody>
+      </p:sp>
+    </p:spTree>
+  </p:cSld>
+  <p:clrMapOvr>
+    <a:masterClrMapping/>
+  </p:clrMapOvr>
+</p:sld>
+</file>
+
+<file path=ppt/slides/slide8.xml><?xml version="1.0" encoding="utf-8"?>
+<p:sld xmlns:a="http://schemas.openxmlformats.org/drawingml/2006/main" xmlns:r="http://schemas.openxmlformats.org/officeDocument/2006/relationships" xmlns:p="http://schemas.openxmlformats.org/presentationml/2006/main">
+  <p:cSld name="Slide 8">
+    <p:bg>
+      <p:bgPr>
+        <a:solidFill>
+          <a:srgbClr val="FFFFFF"/>
+        </a:solidFill>
+      </p:bgPr>
+    </p:bg>
+    <p:spTree>
+      <p:nvGrpSpPr>
+        <p:cNvPr id="1" name=""/>
+        <p:cNvGrpSpPr/>
+        <p:nvPr/>
+      </p:nvGrpSpPr>
+      <p:grpSpPr>
+        <a:xfrm>
+          <a:off x="0" y="0"/>
+          <a:ext cx="0" cy="0"/>
+          <a:chOff x="0" y="0"/>
+          <a:chExt cx="0" cy="0"/>
+        </a:xfrm>
+      </p:grpSpPr>
+      <p:sp>
+        <p:nvSpPr>
+          <p:cNvPr id="2" name="Text 0"/>
+          <p:cNvSpPr/>
+          <p:nvPr/>
+        </p:nvSpPr>
+        <p:spPr>
+          <a:xfrm>
+            <a:off x="822960" y="2834640"/>
+            <a:ext cx="10515600" cy="914400"/>
+          </a:xfrm>
+          <a:prstGeom prst="rect">
+            <a:avLst/>
+          </a:prstGeom>
+          <a:noFill/>
+          <a:ln/>
+        </p:spPr>
+        <p:txBody>
+          <a:bodyPr wrap="square" lIns="0" tIns="0" rIns="0" bIns="0" rtlCol="0" anchor="ctr"/>
+          <a:lstStyle/>
+          <a:p>
+            <a:pPr algn="ctr" indent="0" marL="0">
+              <a:buNone/>
+            </a:pPr>
+            <a:r>
+              <a:rPr lang="en-US" sz="4000" b="1" dirty="0">
+                <a:solidFill>
+                  <a:srgbClr val="111111"/>
+                </a:solidFill>
+                <a:latin typeface="Arial" pitchFamily="34" charset="0"/>
+                <a:ea typeface="Arial" pitchFamily="34" charset="-122"/>
+                <a:cs typeface="Arial" pitchFamily="34" charset="-120"/>
+              </a:rPr>
+              <a:t>Questions</a:t>
+            </a:r>
+            <a:endParaRPr lang="en-US" sz="4000" dirty="0"/>
           </a:p>
         </p:txBody>
       </p:sp>
